--- a/納品レポート/ホテル別レポート/comfort_suites_tokyobay_口コミ分析レポート.pptx
+++ b/納品レポート/ホテル別レポート/comfort_suites_tokyobay_口コミ分析レポート.pptx
@@ -208,22 +208,22 @@
                 <c:formatCode>General</c:formatCode>
                 <c:ptCount val="6"/>
                 <c:pt idx="0">
-                  <c:v>9.35</c:v>
+                  <c:v>9.38</c:v>
                 </c:pt>
                 <c:pt idx="1">
-                  <c:v>9.33</c:v>
+                  <c:v>9.36</c:v>
                 </c:pt>
                 <c:pt idx="2">
-                  <c:v>9.33</c:v>
+                  <c:v>9.31</c:v>
                 </c:pt>
                 <c:pt idx="3">
                   <c:v>9.27</c:v>
                 </c:pt>
                 <c:pt idx="4">
-                  <c:v>8.89</c:v>
+                  <c:v>8.83</c:v>
                 </c:pt>
                 <c:pt idx="5">
-                  <c:v>8.77</c:v>
+                  <c:v>8.71</c:v>
                 </c:pt>
               </c:numCache>
             </c:numRef>
@@ -566,7 +566,7 @@
               <c:numCache>
                 <c:ptCount val="3"/>
                 <c:pt idx="0">
-                  <c:v>124</c:v>
+                  <c:v>125</c:v>
                 </c:pt>
                 <c:pt idx="1">
                   <c:v>9</c:v>
@@ -784,10 +784,10 @@
                   <c:v>83</c:v>
                 </c:pt>
                 <c:pt idx="1">
-                  <c:v>12</c:v>
+                  <c:v>11</c:v>
                 </c:pt>
                 <c:pt idx="2">
-                  <c:v>29</c:v>
+                  <c:v>31</c:v>
                 </c:pt>
                 <c:pt idx="3">
                   <c:v>4</c:v>
@@ -2747,7 +2747,7 @@
                 <a:ea typeface="Arial" pitchFamily="34" charset="-122"/>
                 <a:cs typeface="Arial" pitchFamily="34" charset="-120"/>
               </a:rPr>
-              <a:t>レビュー総数：134件（6サイト）</a:t>
+              <a:t>レビュー総数：135件（6サイト）</a:t>
             </a:r>
             <a:endParaRPr lang="en-US" sz="1000" dirty="0"/>
           </a:p>
@@ -2767,7 +2767,7 @@
                 <a:ea typeface="Arial" pitchFamily="34" charset="-122"/>
                 <a:cs typeface="Arial" pitchFamily="34" charset="-120"/>
               </a:rPr>
-              <a:t>作成日：2026年3月17日</a:t>
+              <a:t>作成日：2026年3月18日</a:t>
             </a:r>
             <a:endParaRPr lang="en-US" sz="1000" dirty="0"/>
           </a:p>
@@ -3313,7 +3313,7 @@
                           <a:ea typeface="Arial" pitchFamily="34" charset="-122"/>
                           <a:cs typeface="Arial" pitchFamily="34" charset="-120"/>
                         </a:rPr>
-                        <a:t>9.19点</a:t>
+                        <a:t>9.18点</a:t>
                       </a:r>
                       <a:endParaRPr lang="en-US" sz="1000" dirty="0">
                         <a:latin typeface="Arial" charset="0"/>
@@ -3587,7 +3587,7 @@
                           <a:ea typeface="Arial" pitchFamily="34" charset="-122"/>
                           <a:cs typeface="Arial" pitchFamily="34" charset="-120"/>
                         </a:rPr>
-                        <a:t>92.5%</a:t>
+                        <a:t>92.6%</a:t>
                       </a:r>
                       <a:endParaRPr lang="en-US" sz="1000" dirty="0">
                         <a:latin typeface="Arial" charset="0"/>
@@ -5048,7 +5048,7 @@
                 <a:ea typeface="Arial" pitchFamily="34" charset="-122"/>
                 <a:cs typeface="Arial" pitchFamily="34" charset="-120"/>
               </a:rPr>
-              <a:t>9.19</a:t>
+              <a:t>9.18</a:t>
             </a:r>
             <a:endParaRPr lang="en-US" sz="3200" dirty="0"/>
           </a:p>
@@ -5173,7 +5173,7 @@
                 <a:ea typeface="Arial" pitchFamily="34" charset="-122"/>
                 <a:cs typeface="Arial" pitchFamily="34" charset="-120"/>
               </a:rPr>
-              <a:t>92.5%</a:t>
+              <a:t>92.6%</a:t>
             </a:r>
             <a:endParaRPr lang="en-US" sz="3200" dirty="0"/>
           </a:p>
@@ -5423,7 +5423,7 @@
                 <a:ea typeface="Arial" pitchFamily="34" charset="-122"/>
                 <a:cs typeface="Arial" pitchFamily="34" charset="-120"/>
               </a:rPr>
-              <a:t>134件</a:t>
+              <a:t>135件</a:t>
             </a:r>
             <a:endParaRPr lang="en-US" sz="3200" dirty="0"/>
           </a:p>
@@ -5571,7 +5571,7 @@
                 <a:ea typeface="Arial" pitchFamily="34" charset="-122"/>
                 <a:cs typeface="Arial" pitchFamily="34" charset="-120"/>
               </a:rPr>
-              <a:t>  部屋も清潔で、スタッフの感じもよくてよかったです</a:t>
+              <a:t>  お部屋も綺麗で親切な対応をしていただいたのでとても良かったです</a:t>
             </a:r>
             <a:endParaRPr lang="en-US" sz="1100" dirty="0"/>
           </a:p>
@@ -5611,7 +5611,7 @@
                 <a:ea typeface="Arial" pitchFamily="34" charset="-122"/>
                 <a:cs typeface="Arial" pitchFamily="34" charset="-120"/>
               </a:rPr>
-              <a:t>  朝食はそれなりの品数で美味しかったし</a:t>
+              <a:t>  朝食も必要ないし、寝るだけなので、安く泊まれて良かったです</a:t>
             </a:r>
             <a:endParaRPr lang="en-US" sz="1100" dirty="0"/>
           </a:p>
@@ -5651,7 +5651,7 @@
                 <a:ea typeface="Arial" pitchFamily="34" charset="-122"/>
                 <a:cs typeface="Arial" pitchFamily="34" charset="-120"/>
               </a:rPr>
-              <a:t>  ホテルスタッフさんの対応が親切で部屋も快適で大満足です</a:t>
+              <a:t>  』と声が出てしまう程広く、ベッドもとても大きくて広い</a:t>
             </a:r>
             <a:endParaRPr lang="en-US" sz="1100" dirty="0"/>
           </a:p>
@@ -5799,7 +5799,7 @@
                 <a:ea typeface="Arial" pitchFamily="34" charset="-122"/>
                 <a:cs typeface="Arial" pitchFamily="34" charset="-120"/>
               </a:rPr>
-              <a:t>  ディズニーランドにいきましたが、無料シャトルバスがでてたので助かりました</a:t>
+              <a:t>  バストイレ別で、浴槽もとても大きくて大満足でした</a:t>
             </a:r>
             <a:endParaRPr lang="en-US" sz="1100" dirty="0"/>
           </a:p>
@@ -5839,7 +5839,7 @@
                 <a:ea typeface="Arial" pitchFamily="34" charset="-122"/>
                 <a:cs typeface="Arial" pitchFamily="34" charset="-120"/>
               </a:rPr>
-              <a:t>  個人的な意見ですが、バスタオルなどの場所が分かりづらかったので部屋に入ってすぐにお風呂に入りたい我が家にとっては（...</a:t>
+              <a:t>  ディズニーまでのバスの本数が少ないのと、最終時間が早いのが残念</a:t>
             </a:r>
             <a:endParaRPr lang="en-US" sz="1100" dirty="0"/>
           </a:p>
@@ -6232,7 +6232,7 @@
                 <a:ea typeface="Arial" pitchFamily="34" charset="-122"/>
                 <a:cs typeface="Arial" pitchFamily="34" charset="-120"/>
               </a:rPr>
-              <a:t>9.19</a:t>
+              <a:t>9.18</a:t>
             </a:r>
             <a:endParaRPr lang="en-US" sz="3200" dirty="0"/>
           </a:p>
@@ -6357,7 +6357,7 @@
                 <a:ea typeface="Arial" pitchFamily="34" charset="-122"/>
                 <a:cs typeface="Arial" pitchFamily="34" charset="-120"/>
               </a:rPr>
-              <a:t>92.5%</a:t>
+              <a:t>92.6%</a:t>
             </a:r>
             <a:endParaRPr lang="en-US" sz="3200" dirty="0"/>
           </a:p>
@@ -6607,7 +6607,7 @@
                 <a:ea typeface="Arial" pitchFamily="34" charset="-122"/>
                 <a:cs typeface="Arial" pitchFamily="34" charset="-120"/>
               </a:rPr>
-              <a:t>134件</a:t>
+              <a:t>135件</a:t>
             </a:r>
             <a:endParaRPr lang="en-US" sz="3200" dirty="0"/>
           </a:p>
@@ -7028,7 +7028,7 @@
                 <a:ea typeface="Arial" pitchFamily="34" charset="-122"/>
                 <a:cs typeface="Arial" pitchFamily="34" charset="-120"/>
               </a:rPr>
-              <a:t>Agoda(9.35)が最高スコア。</a:t>
+              <a:t>Agoda(9.38)が最高スコア。</a:t>
             </a:r>
             <a:endParaRPr lang="en-US" sz="1100" dirty="0"/>
           </a:p>
@@ -7537,7 +7537,7 @@
                           <a:ea typeface="Arial" pitchFamily="34" charset="-122"/>
                           <a:cs typeface="Arial" pitchFamily="34" charset="-120"/>
                         </a:rPr>
-                        <a:t>20</a:t>
+                        <a:t>21</a:t>
                       </a:r>
                       <a:endParaRPr lang="en-US" sz="900" dirty="0">
                         <a:latin typeface="Arial" charset="0"/>
@@ -7605,7 +7605,7 @@
                           <a:ea typeface="Arial" pitchFamily="34" charset="-122"/>
                           <a:cs typeface="Arial" pitchFamily="34" charset="-120"/>
                         </a:rPr>
-                        <a:t>9.35</a:t>
+                        <a:t>9.38</a:t>
                       </a:r>
                       <a:endParaRPr lang="en-US" sz="900" dirty="0">
                         <a:latin typeface="Arial" charset="0"/>
@@ -7741,7 +7741,7 @@
                           <a:ea typeface="Arial" pitchFamily="34" charset="-122"/>
                           <a:cs typeface="Arial" pitchFamily="34" charset="-120"/>
                         </a:rPr>
-                        <a:t>9.35</a:t>
+                        <a:t>9.38</a:t>
                       </a:r>
                       <a:endParaRPr lang="en-US" sz="900" dirty="0">
                         <a:latin typeface="Arial" charset="0"/>
@@ -7879,7 +7879,7 @@
                           <a:ea typeface="Arial" pitchFamily="34" charset="-122"/>
                           <a:cs typeface="Arial" pitchFamily="34" charset="-120"/>
                         </a:rPr>
-                        <a:t>12</a:t>
+                        <a:t>11</a:t>
                       </a:r>
                       <a:endParaRPr lang="en-US" sz="900" dirty="0">
                         <a:latin typeface="Arial" charset="0"/>
@@ -7947,7 +7947,7 @@
                           <a:ea typeface="Arial" pitchFamily="34" charset="-122"/>
                           <a:cs typeface="Arial" pitchFamily="34" charset="-120"/>
                         </a:rPr>
-                        <a:t>9.33</a:t>
+                        <a:t>9.36</a:t>
                       </a:r>
                       <a:endParaRPr lang="en-US" sz="900" dirty="0">
                         <a:latin typeface="Arial" charset="0"/>
@@ -8083,7 +8083,7 @@
                           <a:ea typeface="Arial" pitchFamily="34" charset="-122"/>
                           <a:cs typeface="Arial" pitchFamily="34" charset="-120"/>
                         </a:rPr>
-                        <a:t>9.33</a:t>
+                        <a:t>9.36</a:t>
                       </a:r>
                       <a:endParaRPr lang="en-US" sz="900" dirty="0">
                         <a:latin typeface="Arial" charset="0"/>
@@ -8221,7 +8221,7 @@
                           <a:ea typeface="Arial" pitchFamily="34" charset="-122"/>
                           <a:cs typeface="Arial" pitchFamily="34" charset="-120"/>
                         </a:rPr>
-                        <a:t>27</a:t>
+                        <a:t>26</a:t>
                       </a:r>
                       <a:endParaRPr lang="en-US" sz="900" dirty="0">
                         <a:latin typeface="Arial" charset="0"/>
@@ -8289,7 +8289,7 @@
                           <a:ea typeface="Arial" pitchFamily="34" charset="-122"/>
                           <a:cs typeface="Arial" pitchFamily="34" charset="-120"/>
                         </a:rPr>
-                        <a:t>4.67</a:t>
+                        <a:t>4.65</a:t>
                       </a:r>
                       <a:endParaRPr lang="en-US" sz="900" dirty="0">
                         <a:latin typeface="Arial" charset="0"/>
@@ -8425,7 +8425,7 @@
                           <a:ea typeface="Arial" pitchFamily="34" charset="-122"/>
                           <a:cs typeface="Arial" pitchFamily="34" charset="-120"/>
                         </a:rPr>
-                        <a:t>9.33</a:t>
+                        <a:t>9.31</a:t>
                       </a:r>
                       <a:endParaRPr lang="en-US" sz="900" dirty="0">
                         <a:latin typeface="Arial" charset="0"/>
@@ -8905,7 +8905,7 @@
                           <a:ea typeface="Arial" pitchFamily="34" charset="-122"/>
                           <a:cs typeface="Arial" pitchFamily="34" charset="-120"/>
                         </a:rPr>
-                        <a:t>9</a:t>
+                        <a:t>12</a:t>
                       </a:r>
                       <a:endParaRPr lang="en-US" sz="900" dirty="0">
                         <a:latin typeface="Arial" charset="0"/>
@@ -8973,7 +8973,7 @@
                           <a:ea typeface="Arial" pitchFamily="34" charset="-122"/>
                           <a:cs typeface="Arial" pitchFamily="34" charset="-120"/>
                         </a:rPr>
-                        <a:t>4.44</a:t>
+                        <a:t>4.42</a:t>
                       </a:r>
                       <a:endParaRPr lang="en-US" sz="900" dirty="0">
                         <a:latin typeface="Arial" charset="0"/>
@@ -9109,7 +9109,7 @@
                           <a:ea typeface="Arial" pitchFamily="34" charset="-122"/>
                           <a:cs typeface="Arial" pitchFamily="34" charset="-120"/>
                         </a:rPr>
-                        <a:t>8.89</a:t>
+                        <a:t>8.83</a:t>
                       </a:r>
                       <a:endParaRPr lang="en-US" sz="900" dirty="0">
                         <a:latin typeface="Arial" charset="0"/>
@@ -9247,7 +9247,7 @@
                           <a:ea typeface="Arial" pitchFamily="34" charset="-122"/>
                           <a:cs typeface="Arial" pitchFamily="34" charset="-120"/>
                         </a:rPr>
-                        <a:t>22</a:t>
+                        <a:t>21</a:t>
                       </a:r>
                       <a:endParaRPr lang="en-US" sz="900" dirty="0">
                         <a:latin typeface="Arial" charset="0"/>
@@ -9315,7 +9315,7 @@
                           <a:ea typeface="Arial" pitchFamily="34" charset="-122"/>
                           <a:cs typeface="Arial" pitchFamily="34" charset="-120"/>
                         </a:rPr>
-                        <a:t>8.77</a:t>
+                        <a:t>8.71</a:t>
                       </a:r>
                       <a:endParaRPr lang="en-US" sz="900" dirty="0">
                         <a:latin typeface="Arial" charset="0"/>
@@ -9451,7 +9451,7 @@
                           <a:ea typeface="Arial" pitchFamily="34" charset="-122"/>
                           <a:cs typeface="Arial" pitchFamily="34" charset="-120"/>
                         </a:rPr>
-                        <a:t>8.77</a:t>
+                        <a:t>8.71</a:t>
                       </a:r>
                       <a:endParaRPr lang="en-US" sz="900" dirty="0">
                         <a:latin typeface="Arial" charset="0"/>
@@ -9859,7 +9859,7 @@
                 <a:ea typeface="Arial" pitchFamily="34" charset="-122"/>
                 <a:cs typeface="Arial" pitchFamily="34" charset="-120"/>
               </a:rPr>
-              <a:t>124件（92.5%）</a:t>
+              <a:t>125件（92.6%）</a:t>
             </a:r>
             <a:endParaRPr lang="en-US" sz="1100" dirty="0"/>
           </a:p>
@@ -10467,7 +10467,7 @@
                 <a:ea typeface="Arial" pitchFamily="34" charset="-122"/>
                 <a:cs typeface="Arial" pitchFamily="34" charset="-120"/>
               </a:rPr>
-              <a:t>部屋も清潔で、スタッフの感じもよくてよかったです</a:t>
+              <a:t>お部屋も綺麗で親切な対応をしていただいたのでとても良かったです</a:t>
             </a:r>
             <a:endParaRPr lang="en-US" sz="900" dirty="0"/>
           </a:p>
@@ -10506,7 +10506,7 @@
                 <a:ea typeface="Arial" pitchFamily="34" charset="-122"/>
                 <a:cs typeface="Arial" pitchFamily="34" charset="-120"/>
               </a:rPr>
-              <a:t>「また備え付けのティッシュケースがあるのですが四角い容器にこれでもかと言うほどティッシュが限界パンパンに入っていてそ...」</a:t>
+              <a:t>「部屋も清潔で、スタッフの感じもよくてよかったです」</a:t>
             </a:r>
             <a:endParaRPr lang="en-US" sz="900" dirty="0"/>
           </a:p>
@@ -10690,7 +10690,7 @@
                 <a:ea typeface="Arial" pitchFamily="34" charset="-122"/>
                 <a:cs typeface="Arial" pitchFamily="34" charset="-120"/>
               </a:rPr>
-              <a:t>朝食はそれなりの品数で美味しかったし</a:t>
+              <a:t>朝食も必要ないし、寝るだけなので、安く泊まれて良かったです</a:t>
             </a:r>
             <a:endParaRPr lang="en-US" sz="900" dirty="0"/>
           </a:p>
@@ -10729,7 +10729,7 @@
                 <a:ea typeface="Arial" pitchFamily="34" charset="-122"/>
                 <a:cs typeface="Arial" pitchFamily="34" charset="-120"/>
               </a:rPr>
-              <a:t>「朝食は品数がそこまで多く無いですが、キッズメニューは充実してるので子連れには良かったです」</a:t>
+              <a:t>「朝食はそれなりの品数で美味しかったし」</a:t>
             </a:r>
             <a:endParaRPr lang="en-US" sz="900" dirty="0"/>
           </a:p>
@@ -10913,7 +10913,7 @@
                 <a:ea typeface="Arial" pitchFamily="34" charset="-122"/>
                 <a:cs typeface="Arial" pitchFamily="34" charset="-120"/>
               </a:rPr>
-              <a:t>ホテルスタッフさんの対応が親切で部屋も快適で大満足です</a:t>
+              <a:t>』と声が出てしまう程広く、ベッドもとても大きくて広い</a:t>
             </a:r>
             <a:endParaRPr lang="en-US" sz="900" dirty="0"/>
           </a:p>
@@ -10952,7 +10952,7 @@
                 <a:ea typeface="Arial" pitchFamily="34" charset="-122"/>
                 <a:cs typeface="Arial" pitchFamily="34" charset="-120"/>
               </a:rPr>
-              <a:t>「部屋も広く、コミュニティもたくさんありとても快適に過ごせました🙆‍♀️ 次行く機会があればまた、泊まりたいです❤...」</a:t>
+              <a:t>「ホテルスタッフさんの対応が親切で部屋も快適で大満足です」</a:t>
             </a:r>
             <a:endParaRPr lang="en-US" sz="900" dirty="0"/>
           </a:p>
@@ -11136,7 +11136,7 @@
                 <a:ea typeface="Arial" pitchFamily="34" charset="-122"/>
                 <a:cs typeface="Arial" pitchFamily="34" charset="-120"/>
               </a:rPr>
-              <a:t>ホテルスタッフさんの対応が親切で部屋も快適で大満足です</a:t>
+              <a:t>お部屋も綺麗で親切な対応をしていただいたのでとても良かったです</a:t>
             </a:r>
             <a:endParaRPr lang="en-US" sz="900" dirty="0"/>
           </a:p>
@@ -11175,7 +11175,7 @@
                 <a:ea typeface="Arial" pitchFamily="34" charset="-122"/>
                 <a:cs typeface="Arial" pitchFamily="34" charset="-120"/>
               </a:rPr>
-              <a:t>「部屋も清潔で、スタッフの感じもよくてよかったです」</a:t>
+              <a:t>「喫煙者の為、エレベーターで22時頃に1階の喫煙所に行くと、恐らくDisney帰りの人達が長蛇の列でエレベーター待ち...」</a:t>
             </a:r>
             <a:endParaRPr lang="en-US" sz="900" dirty="0"/>
           </a:p>
@@ -11359,7 +11359,7 @@
                 <a:ea typeface="Arial" pitchFamily="34" charset="-122"/>
                 <a:cs typeface="Arial" pitchFamily="34" charset="-120"/>
               </a:rPr>
-              <a:t>お部屋が可愛く、ちょっとした仕掛けもあって、楽しかったです⭐︎ ローソンがホテルにあるので便利でした</a:t>
+              <a:t>ディズニーリゾートも近いし駐車場もあるため使いやすい、コスパいいんじゃないかな</a:t>
             </a:r>
             <a:endParaRPr lang="en-US" sz="900" dirty="0"/>
           </a:p>
@@ -11398,7 +11398,7 @@
                 <a:ea typeface="Arial" pitchFamily="34" charset="-122"/>
                 <a:cs typeface="Arial" pitchFamily="34" charset="-120"/>
               </a:rPr>
-              <a:t>「駅から少し離れている以外はよかったです」</a:t>
+              <a:t>「お部屋が可愛く、ちょっとした仕掛けもあって、楽しかったです⭐︎ ローソンがホテルにあるので便利でした」</a:t>
             </a:r>
             <a:endParaRPr lang="en-US" sz="900" dirty="0"/>
           </a:p>
@@ -12311,7 +12311,7 @@
                           <a:ea typeface="Arial" pitchFamily="34" charset="-122"/>
                           <a:cs typeface="Arial" pitchFamily="34" charset="-120"/>
                         </a:rPr>
-                        <a:t>ディズニーランドにいきましたが、無料シャトルバスがでてたので助かりました</a:t>
+                        <a:t>バストイレ別で、浴槽もとても大きくて大満足でした</a:t>
                       </a:r>
                       <a:endParaRPr lang="en-US" sz="900" dirty="0">
                         <a:latin typeface="Arial" charset="0"/>
@@ -12585,7 +12585,7 @@
                           <a:ea typeface="Arial" pitchFamily="34" charset="-122"/>
                           <a:cs typeface="Arial" pitchFamily="34" charset="-120"/>
                         </a:rPr>
-                        <a:t>個人的な意見ですが、バスタオルなどの場所が分かりづらかったので部屋に入ってすぐにお風呂に入りたい我が家にとっては（...</a:t>
+                        <a:t>ディズニーまでのバスの本数が少ないのと、最終時間が早いのが残念</a:t>
                       </a:r>
                       <a:endParaRPr lang="en-US" sz="900" dirty="0">
                         <a:latin typeface="Arial" charset="0"/>
@@ -12653,7 +12653,7 @@
                           <a:ea typeface="Arial" pitchFamily="34" charset="-122"/>
                           <a:cs typeface="Arial" pitchFamily="34" charset="-120"/>
                         </a:rPr>
-                        <a:t>7件</a:t>
+                        <a:t>8件</a:t>
                       </a:r>
                       <a:endParaRPr lang="en-US" sz="900" dirty="0">
                         <a:latin typeface="Arial" charset="0"/>

--- a/納品レポート/ホテル別レポート/comfort_suites_tokyobay_口コミ分析レポート.pptx
+++ b/納品レポート/ホテル別レポート/comfort_suites_tokyobay_口コミ分析レポート.pptx
@@ -211,13 +211,13 @@
                   <c:v>9.38</c:v>
                 </c:pt>
                 <c:pt idx="1">
-                  <c:v>9.36</c:v>
+                  <c:v>9.33</c:v>
                 </c:pt>
                 <c:pt idx="2">
-                  <c:v>9.31</c:v>
+                  <c:v>9.26</c:v>
                 </c:pt>
                 <c:pt idx="3">
-                  <c:v>9.27</c:v>
+                  <c:v>9.26</c:v>
                 </c:pt>
                 <c:pt idx="4">
                   <c:v>8.83</c:v>
@@ -566,7 +566,7 @@
               <c:numCache>
                 <c:ptCount val="3"/>
                 <c:pt idx="0">
-                  <c:v>125</c:v>
+                  <c:v>129</c:v>
                 </c:pt>
                 <c:pt idx="1">
                   <c:v>9</c:v>
@@ -781,13 +781,13 @@
                 <c:formatCode>General</c:formatCode>
                 <c:ptCount val="6"/>
                 <c:pt idx="0">
-                  <c:v>83</c:v>
+                  <c:v>84</c:v>
                 </c:pt>
                 <c:pt idx="1">
-                  <c:v>11</c:v>
+                  <c:v>12</c:v>
                 </c:pt>
                 <c:pt idx="2">
-                  <c:v>31</c:v>
+                  <c:v>33</c:v>
                 </c:pt>
                 <c:pt idx="3">
                   <c:v>4</c:v>
@@ -2747,7 +2747,7 @@
                 <a:ea typeface="Arial" pitchFamily="34" charset="-122"/>
                 <a:cs typeface="Arial" pitchFamily="34" charset="-120"/>
               </a:rPr>
-              <a:t>レビュー総数：135件（6サイト）</a:t>
+              <a:t>レビュー総数：139件（6サイト）</a:t>
             </a:r>
             <a:endParaRPr lang="en-US" sz="1000" dirty="0"/>
           </a:p>
@@ -2767,7 +2767,7 @@
                 <a:ea typeface="Arial" pitchFamily="34" charset="-122"/>
                 <a:cs typeface="Arial" pitchFamily="34" charset="-120"/>
               </a:rPr>
-              <a:t>作成日：2026年3月18日</a:t>
+              <a:t>作成日：2026年3月19日</a:t>
             </a:r>
             <a:endParaRPr lang="en-US" sz="1000" dirty="0"/>
           </a:p>
@@ -3313,7 +3313,7 @@
                           <a:ea typeface="Arial" pitchFamily="34" charset="-122"/>
                           <a:cs typeface="Arial" pitchFamily="34" charset="-120"/>
                         </a:rPr>
-                        <a:t>9.18点</a:t>
+                        <a:t>9.17点</a:t>
                       </a:r>
                       <a:endParaRPr lang="en-US" sz="1000" dirty="0">
                         <a:latin typeface="Arial" charset="0"/>
@@ -3587,7 +3587,7 @@
                           <a:ea typeface="Arial" pitchFamily="34" charset="-122"/>
                           <a:cs typeface="Arial" pitchFamily="34" charset="-120"/>
                         </a:rPr>
-                        <a:t>92.6%</a:t>
+                        <a:t>92.8%</a:t>
                       </a:r>
                       <a:endParaRPr lang="en-US" sz="1000" dirty="0">
                         <a:latin typeface="Arial" charset="0"/>
@@ -4409,7 +4409,7 @@
                           <a:ea typeface="Arial" pitchFamily="34" charset="-122"/>
                           <a:cs typeface="Arial" pitchFamily="34" charset="-120"/>
                         </a:rPr>
-                        <a:t>約46件/期間</a:t>
+                        <a:t>約47件/期間</a:t>
                       </a:r>
                       <a:endParaRPr lang="en-US" sz="1000" dirty="0">
                         <a:latin typeface="Arial" charset="0"/>
@@ -5048,7 +5048,7 @@
                 <a:ea typeface="Arial" pitchFamily="34" charset="-122"/>
                 <a:cs typeface="Arial" pitchFamily="34" charset="-120"/>
               </a:rPr>
-              <a:t>9.18</a:t>
+              <a:t>9.17</a:t>
             </a:r>
             <a:endParaRPr lang="en-US" sz="3200" dirty="0"/>
           </a:p>
@@ -5173,7 +5173,7 @@
                 <a:ea typeface="Arial" pitchFamily="34" charset="-122"/>
                 <a:cs typeface="Arial" pitchFamily="34" charset="-120"/>
               </a:rPr>
-              <a:t>92.6%</a:t>
+              <a:t>92.8%</a:t>
             </a:r>
             <a:endParaRPr lang="en-US" sz="3200" dirty="0"/>
           </a:p>
@@ -5423,7 +5423,7 @@
                 <a:ea typeface="Arial" pitchFamily="34" charset="-122"/>
                 <a:cs typeface="Arial" pitchFamily="34" charset="-120"/>
               </a:rPr>
-              <a:t>135件</a:t>
+              <a:t>139件</a:t>
             </a:r>
             <a:endParaRPr lang="en-US" sz="3200" dirty="0"/>
           </a:p>
@@ -5571,7 +5571,7 @@
                 <a:ea typeface="Arial" pitchFamily="34" charset="-122"/>
                 <a:cs typeface="Arial" pitchFamily="34" charset="-120"/>
               </a:rPr>
-              <a:t>  お部屋も綺麗で親切な対応をしていただいたのでとても良かったです</a:t>
+              <a:t>  とっても綺麗なホテルで、宝探し</a:t>
             </a:r>
             <a:endParaRPr lang="en-US" sz="1100" dirty="0"/>
           </a:p>
@@ -5799,7 +5799,7 @@
                 <a:ea typeface="Arial" pitchFamily="34" charset="-122"/>
                 <a:cs typeface="Arial" pitchFamily="34" charset="-120"/>
               </a:rPr>
-              <a:t>  バストイレ別で、浴槽もとても大きくて大満足でした</a:t>
+              <a:t>  To Narita Airport need 2900 yen/person Need to walk to Hy...</a:t>
             </a:r>
             <a:endParaRPr lang="en-US" sz="1100" dirty="0"/>
           </a:p>
@@ -6232,7 +6232,7 @@
                 <a:ea typeface="Arial" pitchFamily="34" charset="-122"/>
                 <a:cs typeface="Arial" pitchFamily="34" charset="-120"/>
               </a:rPr>
-              <a:t>9.18</a:t>
+              <a:t>9.17</a:t>
             </a:r>
             <a:endParaRPr lang="en-US" sz="3200" dirty="0"/>
           </a:p>
@@ -6357,7 +6357,7 @@
                 <a:ea typeface="Arial" pitchFamily="34" charset="-122"/>
                 <a:cs typeface="Arial" pitchFamily="34" charset="-120"/>
               </a:rPr>
-              <a:t>92.6%</a:t>
+              <a:t>92.8%</a:t>
             </a:r>
             <a:endParaRPr lang="en-US" sz="3200" dirty="0"/>
           </a:p>
@@ -6607,7 +6607,7 @@
                 <a:ea typeface="Arial" pitchFamily="34" charset="-122"/>
                 <a:cs typeface="Arial" pitchFamily="34" charset="-120"/>
               </a:rPr>
-              <a:t>135件</a:t>
+              <a:t>139件</a:t>
             </a:r>
             <a:endParaRPr lang="en-US" sz="3200" dirty="0"/>
           </a:p>
@@ -7879,7 +7879,7 @@
                           <a:ea typeface="Arial" pitchFamily="34" charset="-122"/>
                           <a:cs typeface="Arial" pitchFamily="34" charset="-120"/>
                         </a:rPr>
-                        <a:t>11</a:t>
+                        <a:t>12</a:t>
                       </a:r>
                       <a:endParaRPr lang="en-US" sz="900" dirty="0">
                         <a:latin typeface="Arial" charset="0"/>
@@ -7947,7 +7947,7 @@
                           <a:ea typeface="Arial" pitchFamily="34" charset="-122"/>
                           <a:cs typeface="Arial" pitchFamily="34" charset="-120"/>
                         </a:rPr>
-                        <a:t>9.36</a:t>
+                        <a:t>9.33</a:t>
                       </a:r>
                       <a:endParaRPr lang="en-US" sz="900" dirty="0">
                         <a:latin typeface="Arial" charset="0"/>
@@ -8083,7 +8083,7 @@
                           <a:ea typeface="Arial" pitchFamily="34" charset="-122"/>
                           <a:cs typeface="Arial" pitchFamily="34" charset="-120"/>
                         </a:rPr>
-                        <a:t>9.36</a:t>
+                        <a:t>9.33</a:t>
                       </a:r>
                       <a:endParaRPr lang="en-US" sz="900" dirty="0">
                         <a:latin typeface="Arial" charset="0"/>
@@ -8221,7 +8221,7 @@
                           <a:ea typeface="Arial" pitchFamily="34" charset="-122"/>
                           <a:cs typeface="Arial" pitchFamily="34" charset="-120"/>
                         </a:rPr>
-                        <a:t>26</a:t>
+                        <a:t>27</a:t>
                       </a:r>
                       <a:endParaRPr lang="en-US" sz="900" dirty="0">
                         <a:latin typeface="Arial" charset="0"/>
@@ -8289,7 +8289,7 @@
                           <a:ea typeface="Arial" pitchFamily="34" charset="-122"/>
                           <a:cs typeface="Arial" pitchFamily="34" charset="-120"/>
                         </a:rPr>
-                        <a:t>4.65</a:t>
+                        <a:t>4.63</a:t>
                       </a:r>
                       <a:endParaRPr lang="en-US" sz="900" dirty="0">
                         <a:latin typeface="Arial" charset="0"/>
@@ -8425,7 +8425,7 @@
                           <a:ea typeface="Arial" pitchFamily="34" charset="-122"/>
                           <a:cs typeface="Arial" pitchFamily="34" charset="-120"/>
                         </a:rPr>
-                        <a:t>9.31</a:t>
+                        <a:t>9.26</a:t>
                       </a:r>
                       <a:endParaRPr lang="en-US" sz="900" dirty="0">
                         <a:latin typeface="Arial" charset="0"/>
@@ -8563,7 +8563,7 @@
                           <a:ea typeface="Arial" pitchFamily="34" charset="-122"/>
                           <a:cs typeface="Arial" pitchFamily="34" charset="-120"/>
                         </a:rPr>
-                        <a:t>44</a:t>
+                        <a:t>46</a:t>
                       </a:r>
                       <a:endParaRPr lang="en-US" sz="900" dirty="0">
                         <a:latin typeface="Arial" charset="0"/>
@@ -8631,7 +8631,7 @@
                           <a:ea typeface="Arial" pitchFamily="34" charset="-122"/>
                           <a:cs typeface="Arial" pitchFamily="34" charset="-120"/>
                         </a:rPr>
-                        <a:t>4.64</a:t>
+                        <a:t>4.63</a:t>
                       </a:r>
                       <a:endParaRPr lang="en-US" sz="900" dirty="0">
                         <a:latin typeface="Arial" charset="0"/>
@@ -8767,7 +8767,7 @@
                           <a:ea typeface="Arial" pitchFamily="34" charset="-122"/>
                           <a:cs typeface="Arial" pitchFamily="34" charset="-120"/>
                         </a:rPr>
-                        <a:t>9.27</a:t>
+                        <a:t>9.26</a:t>
                       </a:r>
                       <a:endParaRPr lang="en-US" sz="900" dirty="0">
                         <a:latin typeface="Arial" charset="0"/>
@@ -9859,7 +9859,7 @@
                 <a:ea typeface="Arial" pitchFamily="34" charset="-122"/>
                 <a:cs typeface="Arial" pitchFamily="34" charset="-120"/>
               </a:rPr>
-              <a:t>125件（92.6%）</a:t>
+              <a:t>129件（92.8%）</a:t>
             </a:r>
             <a:endParaRPr lang="en-US" sz="1100" dirty="0"/>
           </a:p>
@@ -9957,7 +9957,7 @@
                 <a:ea typeface="Arial" pitchFamily="34" charset="-122"/>
                 <a:cs typeface="Arial" pitchFamily="34" charset="-120"/>
               </a:rPr>
-              <a:t>9件（6.7%）</a:t>
+              <a:t>9件（6.5%）</a:t>
             </a:r>
             <a:endParaRPr lang="en-US" sz="1100" dirty="0"/>
           </a:p>
@@ -10467,7 +10467,7 @@
                 <a:ea typeface="Arial" pitchFamily="34" charset="-122"/>
                 <a:cs typeface="Arial" pitchFamily="34" charset="-120"/>
               </a:rPr>
-              <a:t>お部屋も綺麗で親切な対応をしていただいたのでとても良かったです</a:t>
+              <a:t>とっても綺麗なホテルで、宝探し</a:t>
             </a:r>
             <a:endParaRPr lang="en-US" sz="900" dirty="0"/>
           </a:p>
@@ -10506,7 +10506,7 @@
                 <a:ea typeface="Arial" pitchFamily="34" charset="-122"/>
                 <a:cs typeface="Arial" pitchFamily="34" charset="-120"/>
               </a:rPr>
-              <a:t>「部屋も清潔で、スタッフの感じもよくてよかったです」</a:t>
+              <a:t>「お部屋も綺麗で親切な対応をしていただいたのでとても良かったです」</a:t>
             </a:r>
             <a:endParaRPr lang="en-US" sz="900" dirty="0"/>
           </a:p>
@@ -10729,7 +10729,7 @@
                 <a:ea typeface="Arial" pitchFamily="34" charset="-122"/>
                 <a:cs typeface="Arial" pitchFamily="34" charset="-120"/>
               </a:rPr>
-              <a:t>「朝食はそれなりの品数で美味しかったし」</a:t>
+              <a:t>「朝食の種類が豊富で、どれも丁寧に作られていて満足感が高かったです」</a:t>
             </a:r>
             <a:endParaRPr lang="en-US" sz="900" dirty="0"/>
           </a:p>
@@ -11136,7 +11136,7 @@
                 <a:ea typeface="Arial" pitchFamily="34" charset="-122"/>
                 <a:cs typeface="Arial" pitchFamily="34" charset="-120"/>
               </a:rPr>
-              <a:t>お部屋も綺麗で親切な対応をしていただいたのでとても良かったです</a:t>
+              <a:t>みたいな事をやってたみたいで、部屋で隠されてるカードを探してフロントに持って行ったら、お菓子もらえた</a:t>
             </a:r>
             <a:endParaRPr lang="en-US" sz="900" dirty="0"/>
           </a:p>
@@ -11175,7 +11175,7 @@
                 <a:ea typeface="Arial" pitchFamily="34" charset="-122"/>
                 <a:cs typeface="Arial" pitchFamily="34" charset="-120"/>
               </a:rPr>
-              <a:t>「喫煙者の為、エレベーターで22時頃に1階の喫煙所に行くと、恐らくDisney帰りの人達が長蛇の列でエレベーター待ち...」</a:t>
+              <a:t>「お部屋も綺麗で親切な対応をしていただいたのでとても良かったです」</a:t>
             </a:r>
             <a:endParaRPr lang="en-US" sz="900" dirty="0"/>
           </a:p>
@@ -11359,7 +11359,7 @@
                 <a:ea typeface="Arial" pitchFamily="34" charset="-122"/>
                 <a:cs typeface="Arial" pitchFamily="34" charset="-120"/>
               </a:rPr>
-              <a:t>ディズニーリゾートも近いし駐車場もあるため使いやすい、コスパいいんじゃないかな</a:t>
+              <a:t>バス乗り場はハイアットリージェンシーまで徒歩約3分です</a:t>
             </a:r>
             <a:endParaRPr lang="en-US" sz="900" dirty="0"/>
           </a:p>
@@ -11398,7 +11398,7 @@
                 <a:ea typeface="Arial" pitchFamily="34" charset="-122"/>
                 <a:cs typeface="Arial" pitchFamily="34" charset="-120"/>
               </a:rPr>
-              <a:t>「お部屋が可愛く、ちょっとした仕掛けもあって、楽しかったです⭐︎ ローソンがホテルにあるので便利でした」</a:t>
+              <a:t>「ディズニーリゾートも近いし駐車場もあるため使いやすい、コスパいいんじゃないかな」</a:t>
             </a:r>
             <a:endParaRPr lang="en-US" sz="900" dirty="0"/>
           </a:p>
@@ -12311,7 +12311,7 @@
                           <a:ea typeface="Arial" pitchFamily="34" charset="-122"/>
                           <a:cs typeface="Arial" pitchFamily="34" charset="-120"/>
                         </a:rPr>
-                        <a:t>バストイレ別で、浴槽もとても大きくて大満足でした</a:t>
+                        <a:t>To Narita Airport need 2900 yen/person Need to walk to Hy...</a:t>
                       </a:r>
                       <a:endParaRPr lang="en-US" sz="900" dirty="0">
                         <a:latin typeface="Arial" charset="0"/>
@@ -12379,7 +12379,7 @@
                           <a:ea typeface="Arial" pitchFamily="34" charset="-122"/>
                           <a:cs typeface="Arial" pitchFamily="34" charset="-120"/>
                         </a:rPr>
-                        <a:t>46件</a:t>
+                        <a:t>47件</a:t>
                       </a:r>
                       <a:endParaRPr lang="en-US" sz="900" dirty="0">
                         <a:latin typeface="Arial" charset="0"/>

--- a/納品レポート/ホテル別レポート/comfort_suites_tokyobay_口コミ分析レポート.pptx
+++ b/納品レポート/ホテル別レポート/comfort_suites_tokyobay_口コミ分析レポート.pptx
@@ -186,10 +186,10 @@
                     <c:v>Trip.com</c:v>
                   </c:pt>
                   <c:pt idx="2">
-                    <c:v>じゃらん</c:v>
+                    <c:v>楽天トラベル</c:v>
                   </c:pt>
                   <c:pt idx="3">
-                    <c:v>楽天トラベル</c:v>
+                    <c:v>じゃらん</c:v>
                   </c:pt>
                   <c:pt idx="4">
                     <c:v>Google</c:v>
@@ -208,13 +208,13 @@
                 <c:formatCode>General</c:formatCode>
                 <c:ptCount val="6"/>
                 <c:pt idx="0">
-                  <c:v>9.38</c:v>
+                  <c:v>9.4</c:v>
                 </c:pt>
                 <c:pt idx="1">
                   <c:v>9.33</c:v>
                 </c:pt>
                 <c:pt idx="2">
-                  <c:v>9.26</c:v>
+                  <c:v>9.28</c:v>
                 </c:pt>
                 <c:pt idx="3">
                   <c:v>9.26</c:v>
@@ -781,10 +781,10 @@
                 <c:formatCode>General</c:formatCode>
                 <c:ptCount val="6"/>
                 <c:pt idx="0">
-                  <c:v>84</c:v>
+                  <c:v>85</c:v>
                 </c:pt>
                 <c:pt idx="1">
-                  <c:v>12</c:v>
+                  <c:v>11</c:v>
                 </c:pt>
                 <c:pt idx="2">
                   <c:v>33</c:v>
@@ -2767,7 +2767,7 @@
                 <a:ea typeface="Arial" pitchFamily="34" charset="-122"/>
                 <a:cs typeface="Arial" pitchFamily="34" charset="-120"/>
               </a:rPr>
-              <a:t>作成日：2026年3月19日</a:t>
+              <a:t>作成日：2026年3月20日</a:t>
             </a:r>
             <a:endParaRPr lang="en-US" sz="1000" dirty="0"/>
           </a:p>
@@ -5551,6 +5551,46 @@
                 <a:ea typeface="Arial" pitchFamily="34" charset="-122"/>
                 <a:cs typeface="Arial" pitchFamily="34" charset="-120"/>
               </a:rPr>
+              <a:t>朝食 </a:t>
+            </a:r>
+            <a:endParaRPr lang="en-US" sz="1100" dirty="0"/>
+          </a:p>
+          <a:p>
+            <a:pPr indent="0" marL="0">
+              <a:spcAft>
+                <a:spcPts val="200"/>
+              </a:spcAft>
+              <a:buNone/>
+            </a:pPr>
+            <a:r>
+              <a:rPr lang="en-US" sz="900" dirty="0">
+                <a:solidFill>
+                  <a:srgbClr val="64748B"/>
+                </a:solidFill>
+                <a:latin typeface="Arial" pitchFamily="34" charset="0"/>
+                <a:ea typeface="Arial" pitchFamily="34" charset="-122"/>
+                <a:cs typeface="Arial" pitchFamily="34" charset="-120"/>
+              </a:rPr>
+              <a:t>  小学6年生まで添寝が無料なうえ、朝食ビュッフェ付きでとても良かったです</a:t>
+            </a:r>
+            <a:endParaRPr lang="en-US" sz="1100" dirty="0"/>
+          </a:p>
+          <a:p>
+            <a:pPr indent="0" marL="0">
+              <a:spcAft>
+                <a:spcPts val="200"/>
+              </a:spcAft>
+              <a:buNone/>
+            </a:pPr>
+            <a:r>
+              <a:rPr lang="en-US" sz="1100" b="1" dirty="0">
+                <a:solidFill>
+                  <a:srgbClr val="334155"/>
+                </a:solidFill>
+                <a:latin typeface="Arial" pitchFamily="34" charset="0"/>
+                <a:ea typeface="Arial" pitchFamily="34" charset="-122"/>
+                <a:cs typeface="Arial" pitchFamily="34" charset="-120"/>
+              </a:rPr>
               <a:t>清潔さ・清掃 </a:t>
             </a:r>
             <a:endParaRPr lang="en-US" sz="1100" dirty="0"/>
@@ -5591,7 +5631,7 @@
                 <a:ea typeface="Arial" pitchFamily="34" charset="-122"/>
                 <a:cs typeface="Arial" pitchFamily="34" charset="-120"/>
               </a:rPr>
-              <a:t>朝食 </a:t>
+              <a:t>快適さ・設備 </a:t>
             </a:r>
             <a:endParaRPr lang="en-US" sz="1100" dirty="0"/>
           </a:p>
@@ -5611,47 +5651,7 @@
                 <a:ea typeface="Arial" pitchFamily="34" charset="-122"/>
                 <a:cs typeface="Arial" pitchFamily="34" charset="-120"/>
               </a:rPr>
-              <a:t>  朝食も必要ないし、寝るだけなので、安く泊まれて良かったです</a:t>
-            </a:r>
-            <a:endParaRPr lang="en-US" sz="1100" dirty="0"/>
-          </a:p>
-          <a:p>
-            <a:pPr indent="0" marL="0">
-              <a:spcAft>
-                <a:spcPts val="200"/>
-              </a:spcAft>
-              <a:buNone/>
-            </a:pPr>
-            <a:r>
-              <a:rPr lang="en-US" sz="1100" b="1" dirty="0">
-                <a:solidFill>
-                  <a:srgbClr val="334155"/>
-                </a:solidFill>
-                <a:latin typeface="Arial" pitchFamily="34" charset="0"/>
-                <a:ea typeface="Arial" pitchFamily="34" charset="-122"/>
-                <a:cs typeface="Arial" pitchFamily="34" charset="-120"/>
-              </a:rPr>
-              <a:t>快適さ・設備 </a:t>
-            </a:r>
-            <a:endParaRPr lang="en-US" sz="1100" dirty="0"/>
-          </a:p>
-          <a:p>
-            <a:pPr indent="0" marL="0">
-              <a:spcAft>
-                <a:spcPts val="200"/>
-              </a:spcAft>
-              <a:buNone/>
-            </a:pPr>
-            <a:r>
-              <a:rPr lang="en-US" sz="900" dirty="0">
-                <a:solidFill>
-                  <a:srgbClr val="64748B"/>
-                </a:solidFill>
-                <a:latin typeface="Arial" pitchFamily="34" charset="0"/>
-                <a:ea typeface="Arial" pitchFamily="34" charset="-122"/>
-                <a:cs typeface="Arial" pitchFamily="34" charset="-120"/>
-              </a:rPr>
-              <a:t>  』と声が出てしまう程広く、ベッドもとても大きくて広い</a:t>
+              <a:t>  今回連泊で利用させていただきましたが、毎日ベッドメイキングをしてくださり、とても気持ちよく利用できました</a:t>
             </a:r>
             <a:endParaRPr lang="en-US" sz="1100" dirty="0"/>
           </a:p>
@@ -7028,7 +7028,7 @@
                 <a:ea typeface="Arial" pitchFamily="34" charset="-122"/>
                 <a:cs typeface="Arial" pitchFamily="34" charset="-120"/>
               </a:rPr>
-              <a:t>Agoda(9.38)が最高スコア。</a:t>
+              <a:t>Agoda(9.40)が最高スコア。</a:t>
             </a:r>
             <a:endParaRPr lang="en-US" sz="1100" dirty="0"/>
           </a:p>
@@ -7537,7 +7537,7 @@
                           <a:ea typeface="Arial" pitchFamily="34" charset="-122"/>
                           <a:cs typeface="Arial" pitchFamily="34" charset="-120"/>
                         </a:rPr>
-                        <a:t>21</a:t>
+                        <a:t>20</a:t>
                       </a:r>
                       <a:endParaRPr lang="en-US" sz="900" dirty="0">
                         <a:latin typeface="Arial" charset="0"/>
@@ -7605,7 +7605,7 @@
                           <a:ea typeface="Arial" pitchFamily="34" charset="-122"/>
                           <a:cs typeface="Arial" pitchFamily="34" charset="-120"/>
                         </a:rPr>
-                        <a:t>9.38</a:t>
+                        <a:t>9.4</a:t>
                       </a:r>
                       <a:endParaRPr lang="en-US" sz="900" dirty="0">
                         <a:latin typeface="Arial" charset="0"/>
@@ -7741,7 +7741,7 @@
                           <a:ea typeface="Arial" pitchFamily="34" charset="-122"/>
                           <a:cs typeface="Arial" pitchFamily="34" charset="-120"/>
                         </a:rPr>
-                        <a:t>9.38</a:t>
+                        <a:t>9.4</a:t>
                       </a:r>
                       <a:endParaRPr lang="en-US" sz="900" dirty="0">
                         <a:latin typeface="Arial" charset="0"/>
@@ -8153,7 +8153,7 @@
                           <a:ea typeface="Arial" pitchFamily="34" charset="-122"/>
                           <a:cs typeface="Arial" pitchFamily="34" charset="-120"/>
                         </a:rPr>
-                        <a:t>じゃらん</a:t>
+                        <a:t>楽天トラベル</a:t>
                       </a:r>
                       <a:endParaRPr lang="en-US" sz="900" dirty="0">
                         <a:latin typeface="Arial" charset="0"/>
@@ -8221,7 +8221,7 @@
                           <a:ea typeface="Arial" pitchFamily="34" charset="-122"/>
                           <a:cs typeface="Arial" pitchFamily="34" charset="-120"/>
                         </a:rPr>
-                        <a:t>27</a:t>
+                        <a:t>47</a:t>
                       </a:r>
                       <a:endParaRPr lang="en-US" sz="900" dirty="0">
                         <a:latin typeface="Arial" charset="0"/>
@@ -8289,7 +8289,7 @@
                           <a:ea typeface="Arial" pitchFamily="34" charset="-122"/>
                           <a:cs typeface="Arial" pitchFamily="34" charset="-120"/>
                         </a:rPr>
-                        <a:t>4.63</a:t>
+                        <a:t>4.64</a:t>
                       </a:r>
                       <a:endParaRPr lang="en-US" sz="900" dirty="0">
                         <a:latin typeface="Arial" charset="0"/>
@@ -8425,7 +8425,7 @@
                           <a:ea typeface="Arial" pitchFamily="34" charset="-122"/>
                           <a:cs typeface="Arial" pitchFamily="34" charset="-120"/>
                         </a:rPr>
-                        <a:t>9.26</a:t>
+                        <a:t>9.28</a:t>
                       </a:r>
                       <a:endParaRPr lang="en-US" sz="900" dirty="0">
                         <a:latin typeface="Arial" charset="0"/>
@@ -8495,7 +8495,7 @@
                           <a:ea typeface="Arial" pitchFamily="34" charset="-122"/>
                           <a:cs typeface="Arial" pitchFamily="34" charset="-120"/>
                         </a:rPr>
-                        <a:t>楽天トラベル</a:t>
+                        <a:t>じゃらん</a:t>
                       </a:r>
                       <a:endParaRPr lang="en-US" sz="900" dirty="0">
                         <a:latin typeface="Arial" charset="0"/>
@@ -8563,7 +8563,7 @@
                           <a:ea typeface="Arial" pitchFamily="34" charset="-122"/>
                           <a:cs typeface="Arial" pitchFamily="34" charset="-120"/>
                         </a:rPr>
-                        <a:t>46</a:t>
+                        <a:t>27</a:t>
                       </a:r>
                       <a:endParaRPr lang="en-US" sz="900" dirty="0">
                         <a:latin typeface="Arial" charset="0"/>
@@ -10428,6 +10428,229 @@
                 <a:ea typeface="Arial" pitchFamily="34" charset="-122"/>
                 <a:cs typeface="Arial" pitchFamily="34" charset="-120"/>
               </a:rPr>
+              <a:t>朝食</a:t>
+            </a:r>
+            <a:endParaRPr lang="en-US" sz="1300" dirty="0"/>
+          </a:p>
+        </p:txBody>
+      </p:sp>
+      <p:sp>
+        <p:nvSpPr>
+          <p:cNvPr id="10" name="Text 8"/>
+          <p:cNvSpPr/>
+          <p:nvPr/>
+        </p:nvSpPr>
+        <p:spPr>
+          <a:xfrm>
+            <a:off x="594360" y="1417320"/>
+            <a:ext cx="2377440" cy="365760"/>
+          </a:xfrm>
+          <a:prstGeom prst="rect">
+            <a:avLst/>
+          </a:prstGeom>
+          <a:noFill/>
+          <a:ln/>
+        </p:spPr>
+        <p:txBody>
+          <a:bodyPr wrap="square" lIns="0" tIns="0" rIns="0" bIns="0" rtlCol="0" anchor="ctr"/>
+          <a:lstStyle/>
+          <a:p>
+            <a:pPr indent="0" marL="0">
+              <a:buNone/>
+            </a:pPr>
+            <a:r>
+              <a:rPr lang="en-US" sz="900" dirty="0">
+                <a:solidFill>
+                  <a:srgbClr val="64748B"/>
+                </a:solidFill>
+                <a:latin typeface="Arial" pitchFamily="34" charset="0"/>
+                <a:ea typeface="Arial" pitchFamily="34" charset="-122"/>
+                <a:cs typeface="Arial" pitchFamily="34" charset="-120"/>
+              </a:rPr>
+              <a:t>小学6年生まで添寝が無料なうえ、朝食ビュッフェ付きでとても良かったです</a:t>
+            </a:r>
+            <a:endParaRPr lang="en-US" sz="900" dirty="0"/>
+          </a:p>
+        </p:txBody>
+      </p:sp>
+      <p:sp>
+        <p:nvSpPr>
+          <p:cNvPr id="11" name="Text 9"/>
+          <p:cNvSpPr/>
+          <p:nvPr/>
+        </p:nvSpPr>
+        <p:spPr>
+          <a:xfrm>
+            <a:off x="594360" y="1828800"/>
+            <a:ext cx="2377440" cy="640080"/>
+          </a:xfrm>
+          <a:prstGeom prst="rect">
+            <a:avLst/>
+          </a:prstGeom>
+          <a:noFill/>
+          <a:ln/>
+        </p:spPr>
+        <p:txBody>
+          <a:bodyPr wrap="square" lIns="0" tIns="0" rIns="0" bIns="0" rtlCol="0" anchor="ctr"/>
+          <a:lstStyle/>
+          <a:p>
+            <a:pPr indent="0" marL="0">
+              <a:buNone/>
+            </a:pPr>
+            <a:r>
+              <a:rPr lang="en-US" sz="900" i="1" dirty="0">
+                <a:solidFill>
+                  <a:srgbClr val="3B7DD8"/>
+                </a:solidFill>
+                <a:latin typeface="Arial" pitchFamily="34" charset="0"/>
+                <a:ea typeface="Arial" pitchFamily="34" charset="-122"/>
+                <a:cs typeface="Arial" pitchFamily="34" charset="-120"/>
+              </a:rPr>
+              <a:t>「朝食も必要ないし、寝るだけなので、安く泊まれて良かったです」</a:t>
+            </a:r>
+            <a:endParaRPr lang="en-US" sz="900" dirty="0"/>
+          </a:p>
+        </p:txBody>
+      </p:sp>
+      <p:sp>
+        <p:nvSpPr>
+          <p:cNvPr id="12" name="Shape 10"/>
+          <p:cNvSpPr/>
+          <p:nvPr/>
+        </p:nvSpPr>
+        <p:spPr>
+          <a:xfrm>
+            <a:off x="3291840" y="1051560"/>
+            <a:ext cx="2651760" cy="1600200"/>
+          </a:xfrm>
+          <a:prstGeom prst="rect">
+            <a:avLst/>
+          </a:prstGeom>
+          <a:solidFill>
+            <a:srgbClr val="FFFFFF"/>
+          </a:solidFill>
+          <a:ln/>
+          <a:effectLst>
+            <a:outerShdw sx="100000" sy="100000" kx="0" ky="0" algn="bl" rotWithShape="0" blurRad="50800" dist="25400" dir="8100000">
+              <a:srgbClr val="000000">
+                <a:alpha val="10000"/>
+              </a:srgbClr>
+            </a:outerShdw>
+          </a:effectLst>
+        </p:spPr>
+      </p:sp>
+      <p:sp>
+        <p:nvSpPr>
+          <p:cNvPr id="13" name="Shape 11"/>
+          <p:cNvSpPr/>
+          <p:nvPr/>
+        </p:nvSpPr>
+        <p:spPr>
+          <a:xfrm>
+            <a:off x="3291840" y="1051560"/>
+            <a:ext cx="54864" cy="1600200"/>
+          </a:xfrm>
+          <a:prstGeom prst="rect">
+            <a:avLst/>
+          </a:prstGeom>
+          <a:solidFill>
+            <a:srgbClr val="16A34A"/>
+          </a:solidFill>
+          <a:ln/>
+        </p:spPr>
+      </p:sp>
+      <p:sp>
+        <p:nvSpPr>
+          <p:cNvPr id="14" name="Shape 12"/>
+          <p:cNvSpPr/>
+          <p:nvPr/>
+        </p:nvSpPr>
+        <p:spPr>
+          <a:xfrm>
+            <a:off x="5120640" y="1124712"/>
+            <a:ext cx="658368" cy="228600"/>
+          </a:xfrm>
+          <a:prstGeom prst="rect">
+            <a:avLst/>
+          </a:prstGeom>
+          <a:solidFill>
+            <a:srgbClr val="DCFCE7"/>
+          </a:solidFill>
+          <a:ln/>
+        </p:spPr>
+      </p:sp>
+      <p:sp>
+        <p:nvSpPr>
+          <p:cNvPr id="15" name="Text 13"/>
+          <p:cNvSpPr/>
+          <p:nvPr/>
+        </p:nvSpPr>
+        <p:spPr>
+          <a:xfrm>
+            <a:off x="5120640" y="1124712"/>
+            <a:ext cx="658368" cy="228600"/>
+          </a:xfrm>
+          <a:prstGeom prst="rect">
+            <a:avLst/>
+          </a:prstGeom>
+          <a:noFill/>
+          <a:ln/>
+        </p:spPr>
+        <p:txBody>
+          <a:bodyPr wrap="square" lIns="0" tIns="0" rIns="0" bIns="0" rtlCol="0" anchor="ctr"/>
+          <a:lstStyle/>
+          <a:p>
+            <a:pPr algn="ctr" indent="0" marL="0">
+              <a:buNone/>
+            </a:pPr>
+            <a:r>
+              <a:rPr lang="en-US" sz="900" b="1" dirty="0">
+                <a:solidFill>
+                  <a:srgbClr val="16A34A"/>
+                </a:solidFill>
+                <a:latin typeface="Arial" pitchFamily="34" charset="0"/>
+                <a:ea typeface="Arial" pitchFamily="34" charset="-122"/>
+                <a:cs typeface="Arial" pitchFamily="34" charset="-120"/>
+              </a:rPr>
+              <a:t>20件+</a:t>
+            </a:r>
+            <a:endParaRPr lang="en-US" sz="900" dirty="0"/>
+          </a:p>
+        </p:txBody>
+      </p:sp>
+      <p:sp>
+        <p:nvSpPr>
+          <p:cNvPr id="16" name="Text 14"/>
+          <p:cNvSpPr/>
+          <p:nvPr/>
+        </p:nvSpPr>
+        <p:spPr>
+          <a:xfrm>
+            <a:off x="3429000" y="1124712"/>
+            <a:ext cx="1645920" cy="274320"/>
+          </a:xfrm>
+          <a:prstGeom prst="rect">
+            <a:avLst/>
+          </a:prstGeom>
+          <a:noFill/>
+          <a:ln/>
+        </p:spPr>
+        <p:txBody>
+          <a:bodyPr wrap="square" lIns="0" tIns="0" rIns="0" bIns="0" rtlCol="0" anchor="ctr"/>
+          <a:lstStyle/>
+          <a:p>
+            <a:pPr indent="0" marL="0">
+              <a:buNone/>
+            </a:pPr>
+            <a:r>
+              <a:rPr lang="en-US" sz="1300" b="1" dirty="0">
+                <a:solidFill>
+                  <a:srgbClr val="1A2744"/>
+                </a:solidFill>
+                <a:latin typeface="Arial" pitchFamily="34" charset="0"/>
+                <a:ea typeface="Arial" pitchFamily="34" charset="-122"/>
+                <a:cs typeface="Arial" pitchFamily="34" charset="-120"/>
+              </a:rPr>
               <a:t>清潔さ・清掃</a:t>
             </a:r>
             <a:endParaRPr lang="en-US" sz="1300" dirty="0"/>
@@ -10436,13 +10659,13 @@
       </p:sp>
       <p:sp>
         <p:nvSpPr>
-          <p:cNvPr id="10" name="Text 8"/>
-          <p:cNvSpPr/>
-          <p:nvPr/>
-        </p:nvSpPr>
-        <p:spPr>
-          <a:xfrm>
-            <a:off x="594360" y="1417320"/>
+          <p:cNvPr id="17" name="Text 15"/>
+          <p:cNvSpPr/>
+          <p:nvPr/>
+        </p:nvSpPr>
+        <p:spPr>
+          <a:xfrm>
+            <a:off x="3429000" y="1417320"/>
             <a:ext cx="2377440" cy="365760"/>
           </a:xfrm>
           <a:prstGeom prst="rect">
@@ -10475,13 +10698,13 @@
       </p:sp>
       <p:sp>
         <p:nvSpPr>
-          <p:cNvPr id="11" name="Text 9"/>
-          <p:cNvSpPr/>
-          <p:nvPr/>
-        </p:nvSpPr>
-        <p:spPr>
-          <a:xfrm>
-            <a:off x="594360" y="1828800"/>
+          <p:cNvPr id="18" name="Text 16"/>
+          <p:cNvSpPr/>
+          <p:nvPr/>
+        </p:nvSpPr>
+        <p:spPr>
+          <a:xfrm>
+            <a:off x="3429000" y="1828800"/>
             <a:ext cx="2377440" cy="640080"/>
           </a:xfrm>
           <a:prstGeom prst="rect">
@@ -10514,13 +10737,13 @@
       </p:sp>
       <p:sp>
         <p:nvSpPr>
-          <p:cNvPr id="12" name="Shape 10"/>
-          <p:cNvSpPr/>
-          <p:nvPr/>
-        </p:nvSpPr>
-        <p:spPr>
-          <a:xfrm>
-            <a:off x="3291840" y="1051560"/>
+          <p:cNvPr id="19" name="Shape 17"/>
+          <p:cNvSpPr/>
+          <p:nvPr/>
+        </p:nvSpPr>
+        <p:spPr>
+          <a:xfrm>
+            <a:off x="6126480" y="1051560"/>
             <a:ext cx="2651760" cy="1600200"/>
           </a:xfrm>
           <a:prstGeom prst="rect">
@@ -10541,13 +10764,13 @@
       </p:sp>
       <p:sp>
         <p:nvSpPr>
-          <p:cNvPr id="13" name="Shape 11"/>
-          <p:cNvSpPr/>
-          <p:nvPr/>
-        </p:nvSpPr>
-        <p:spPr>
-          <a:xfrm>
-            <a:off x="3291840" y="1051560"/>
+          <p:cNvPr id="20" name="Shape 18"/>
+          <p:cNvSpPr/>
+          <p:nvPr/>
+        </p:nvSpPr>
+        <p:spPr>
+          <a:xfrm>
+            <a:off x="6126480" y="1051560"/>
             <a:ext cx="54864" cy="1600200"/>
           </a:xfrm>
           <a:prstGeom prst="rect">
@@ -10561,13 +10784,13 @@
       </p:sp>
       <p:sp>
         <p:nvSpPr>
-          <p:cNvPr id="14" name="Shape 12"/>
-          <p:cNvSpPr/>
-          <p:nvPr/>
-        </p:nvSpPr>
-        <p:spPr>
-          <a:xfrm>
-            <a:off x="5120640" y="1124712"/>
+          <p:cNvPr id="21" name="Shape 19"/>
+          <p:cNvSpPr/>
+          <p:nvPr/>
+        </p:nvSpPr>
+        <p:spPr>
+          <a:xfrm>
+            <a:off x="7955280" y="1124712"/>
             <a:ext cx="658368" cy="228600"/>
           </a:xfrm>
           <a:prstGeom prst="rect">
@@ -10581,13 +10804,13 @@
       </p:sp>
       <p:sp>
         <p:nvSpPr>
-          <p:cNvPr id="15" name="Text 13"/>
-          <p:cNvSpPr/>
-          <p:nvPr/>
-        </p:nvSpPr>
-        <p:spPr>
-          <a:xfrm>
-            <a:off x="5120640" y="1124712"/>
+          <p:cNvPr id="22" name="Text 20"/>
+          <p:cNvSpPr/>
+          <p:nvPr/>
+        </p:nvSpPr>
+        <p:spPr>
+          <a:xfrm>
+            <a:off x="7955280" y="1124712"/>
             <a:ext cx="658368" cy="228600"/>
           </a:xfrm>
           <a:prstGeom prst="rect">
@@ -10620,229 +10843,6 @@
       </p:sp>
       <p:sp>
         <p:nvSpPr>
-          <p:cNvPr id="16" name="Text 14"/>
-          <p:cNvSpPr/>
-          <p:nvPr/>
-        </p:nvSpPr>
-        <p:spPr>
-          <a:xfrm>
-            <a:off x="3429000" y="1124712"/>
-            <a:ext cx="1645920" cy="274320"/>
-          </a:xfrm>
-          <a:prstGeom prst="rect">
-            <a:avLst/>
-          </a:prstGeom>
-          <a:noFill/>
-          <a:ln/>
-        </p:spPr>
-        <p:txBody>
-          <a:bodyPr wrap="square" lIns="0" tIns="0" rIns="0" bIns="0" rtlCol="0" anchor="ctr"/>
-          <a:lstStyle/>
-          <a:p>
-            <a:pPr indent="0" marL="0">
-              <a:buNone/>
-            </a:pPr>
-            <a:r>
-              <a:rPr lang="en-US" sz="1300" b="1" dirty="0">
-                <a:solidFill>
-                  <a:srgbClr val="1A2744"/>
-                </a:solidFill>
-                <a:latin typeface="Arial" pitchFamily="34" charset="0"/>
-                <a:ea typeface="Arial" pitchFamily="34" charset="-122"/>
-                <a:cs typeface="Arial" pitchFamily="34" charset="-120"/>
-              </a:rPr>
-              <a:t>朝食</a:t>
-            </a:r>
-            <a:endParaRPr lang="en-US" sz="1300" dirty="0"/>
-          </a:p>
-        </p:txBody>
-      </p:sp>
-      <p:sp>
-        <p:nvSpPr>
-          <p:cNvPr id="17" name="Text 15"/>
-          <p:cNvSpPr/>
-          <p:nvPr/>
-        </p:nvSpPr>
-        <p:spPr>
-          <a:xfrm>
-            <a:off x="3429000" y="1417320"/>
-            <a:ext cx="2377440" cy="365760"/>
-          </a:xfrm>
-          <a:prstGeom prst="rect">
-            <a:avLst/>
-          </a:prstGeom>
-          <a:noFill/>
-          <a:ln/>
-        </p:spPr>
-        <p:txBody>
-          <a:bodyPr wrap="square" lIns="0" tIns="0" rIns="0" bIns="0" rtlCol="0" anchor="ctr"/>
-          <a:lstStyle/>
-          <a:p>
-            <a:pPr indent="0" marL="0">
-              <a:buNone/>
-            </a:pPr>
-            <a:r>
-              <a:rPr lang="en-US" sz="900" dirty="0">
-                <a:solidFill>
-                  <a:srgbClr val="64748B"/>
-                </a:solidFill>
-                <a:latin typeface="Arial" pitchFamily="34" charset="0"/>
-                <a:ea typeface="Arial" pitchFamily="34" charset="-122"/>
-                <a:cs typeface="Arial" pitchFamily="34" charset="-120"/>
-              </a:rPr>
-              <a:t>朝食も必要ないし、寝るだけなので、安く泊まれて良かったです</a:t>
-            </a:r>
-            <a:endParaRPr lang="en-US" sz="900" dirty="0"/>
-          </a:p>
-        </p:txBody>
-      </p:sp>
-      <p:sp>
-        <p:nvSpPr>
-          <p:cNvPr id="18" name="Text 16"/>
-          <p:cNvSpPr/>
-          <p:nvPr/>
-        </p:nvSpPr>
-        <p:spPr>
-          <a:xfrm>
-            <a:off x="3429000" y="1828800"/>
-            <a:ext cx="2377440" cy="640080"/>
-          </a:xfrm>
-          <a:prstGeom prst="rect">
-            <a:avLst/>
-          </a:prstGeom>
-          <a:noFill/>
-          <a:ln/>
-        </p:spPr>
-        <p:txBody>
-          <a:bodyPr wrap="square" lIns="0" tIns="0" rIns="0" bIns="0" rtlCol="0" anchor="ctr"/>
-          <a:lstStyle/>
-          <a:p>
-            <a:pPr indent="0" marL="0">
-              <a:buNone/>
-            </a:pPr>
-            <a:r>
-              <a:rPr lang="en-US" sz="900" i="1" dirty="0">
-                <a:solidFill>
-                  <a:srgbClr val="3B7DD8"/>
-                </a:solidFill>
-                <a:latin typeface="Arial" pitchFamily="34" charset="0"/>
-                <a:ea typeface="Arial" pitchFamily="34" charset="-122"/>
-                <a:cs typeface="Arial" pitchFamily="34" charset="-120"/>
-              </a:rPr>
-              <a:t>「朝食の種類が豊富で、どれも丁寧に作られていて満足感が高かったです」</a:t>
-            </a:r>
-            <a:endParaRPr lang="en-US" sz="900" dirty="0"/>
-          </a:p>
-        </p:txBody>
-      </p:sp>
-      <p:sp>
-        <p:nvSpPr>
-          <p:cNvPr id="19" name="Shape 17"/>
-          <p:cNvSpPr/>
-          <p:nvPr/>
-        </p:nvSpPr>
-        <p:spPr>
-          <a:xfrm>
-            <a:off x="6126480" y="1051560"/>
-            <a:ext cx="2651760" cy="1600200"/>
-          </a:xfrm>
-          <a:prstGeom prst="rect">
-            <a:avLst/>
-          </a:prstGeom>
-          <a:solidFill>
-            <a:srgbClr val="FFFFFF"/>
-          </a:solidFill>
-          <a:ln/>
-          <a:effectLst>
-            <a:outerShdw sx="100000" sy="100000" kx="0" ky="0" algn="bl" rotWithShape="0" blurRad="50800" dist="25400" dir="8100000">
-              <a:srgbClr val="000000">
-                <a:alpha val="10000"/>
-              </a:srgbClr>
-            </a:outerShdw>
-          </a:effectLst>
-        </p:spPr>
-      </p:sp>
-      <p:sp>
-        <p:nvSpPr>
-          <p:cNvPr id="20" name="Shape 18"/>
-          <p:cNvSpPr/>
-          <p:nvPr/>
-        </p:nvSpPr>
-        <p:spPr>
-          <a:xfrm>
-            <a:off x="6126480" y="1051560"/>
-            <a:ext cx="54864" cy="1600200"/>
-          </a:xfrm>
-          <a:prstGeom prst="rect">
-            <a:avLst/>
-          </a:prstGeom>
-          <a:solidFill>
-            <a:srgbClr val="16A34A"/>
-          </a:solidFill>
-          <a:ln/>
-        </p:spPr>
-      </p:sp>
-      <p:sp>
-        <p:nvSpPr>
-          <p:cNvPr id="21" name="Shape 19"/>
-          <p:cNvSpPr/>
-          <p:nvPr/>
-        </p:nvSpPr>
-        <p:spPr>
-          <a:xfrm>
-            <a:off x="7955280" y="1124712"/>
-            <a:ext cx="658368" cy="228600"/>
-          </a:xfrm>
-          <a:prstGeom prst="rect">
-            <a:avLst/>
-          </a:prstGeom>
-          <a:solidFill>
-            <a:srgbClr val="DCFCE7"/>
-          </a:solidFill>
-          <a:ln/>
-        </p:spPr>
-      </p:sp>
-      <p:sp>
-        <p:nvSpPr>
-          <p:cNvPr id="22" name="Text 20"/>
-          <p:cNvSpPr/>
-          <p:nvPr/>
-        </p:nvSpPr>
-        <p:spPr>
-          <a:xfrm>
-            <a:off x="7955280" y="1124712"/>
-            <a:ext cx="658368" cy="228600"/>
-          </a:xfrm>
-          <a:prstGeom prst="rect">
-            <a:avLst/>
-          </a:prstGeom>
-          <a:noFill/>
-          <a:ln/>
-        </p:spPr>
-        <p:txBody>
-          <a:bodyPr wrap="square" lIns="0" tIns="0" rIns="0" bIns="0" rtlCol="0" anchor="ctr"/>
-          <a:lstStyle/>
-          <a:p>
-            <a:pPr algn="ctr" indent="0" marL="0">
-              <a:buNone/>
-            </a:pPr>
-            <a:r>
-              <a:rPr lang="en-US" sz="900" b="1" dirty="0">
-                <a:solidFill>
-                  <a:srgbClr val="16A34A"/>
-                </a:solidFill>
-                <a:latin typeface="Arial" pitchFamily="34" charset="0"/>
-                <a:ea typeface="Arial" pitchFamily="34" charset="-122"/>
-                <a:cs typeface="Arial" pitchFamily="34" charset="-120"/>
-              </a:rPr>
-              <a:t>20件+</a:t>
-            </a:r>
-            <a:endParaRPr lang="en-US" sz="900" dirty="0"/>
-          </a:p>
-        </p:txBody>
-      </p:sp>
-      <p:sp>
-        <p:nvSpPr>
           <p:cNvPr id="23" name="Text 21"/>
           <p:cNvSpPr/>
           <p:nvPr/>
@@ -10913,7 +10913,7 @@
                 <a:ea typeface="Arial" pitchFamily="34" charset="-122"/>
                 <a:cs typeface="Arial" pitchFamily="34" charset="-120"/>
               </a:rPr>
-              <a:t>』と声が出てしまう程広く、ベッドもとても大きくて広い</a:t>
+              <a:t>今回連泊で利用させていただきましたが、毎日ベッドメイキングをしてくださり、とても気持ちよく利用できました</a:t>
             </a:r>
             <a:endParaRPr lang="en-US" sz="900" dirty="0"/>
           </a:p>
@@ -10952,7 +10952,7 @@
                 <a:ea typeface="Arial" pitchFamily="34" charset="-122"/>
                 <a:cs typeface="Arial" pitchFamily="34" charset="-120"/>
               </a:rPr>
-              <a:t>「ホテルスタッフさんの対応が親切で部屋も快適で大満足です」</a:t>
+              <a:t>「』と声が出てしまう程広く、ベッドもとても大きくて広い」</a:t>
             </a:r>
             <a:endParaRPr lang="en-US" sz="900" dirty="0"/>
           </a:p>

--- a/納品レポート/ホテル別レポート/comfort_suites_tokyobay_口コミ分析レポート.pptx
+++ b/納品レポート/ホテル別レポート/comfort_suites_tokyobay_口コミ分析レポート.pptx
@@ -211,19 +211,19 @@
                   <c:v>9.4</c:v>
                 </c:pt>
                 <c:pt idx="1">
-                  <c:v>9.33</c:v>
+                  <c:v>9.38</c:v>
                 </c:pt>
                 <c:pt idx="2">
-                  <c:v>9.28</c:v>
+                  <c:v>9.32</c:v>
                 </c:pt>
                 <c:pt idx="3">
-                  <c:v>9.26</c:v>
+                  <c:v>9.29</c:v>
                 </c:pt>
                 <c:pt idx="4">
-                  <c:v>8.83</c:v>
+                  <c:v>9.09</c:v>
                 </c:pt>
                 <c:pt idx="5">
-                  <c:v>8.71</c:v>
+                  <c:v>8.75</c:v>
                 </c:pt>
               </c:numCache>
             </c:numRef>
@@ -566,10 +566,10 @@
               <c:numCache>
                 <c:ptCount val="3"/>
                 <c:pt idx="0">
-                  <c:v>129</c:v>
+                  <c:v>132</c:v>
                 </c:pt>
                 <c:pt idx="1">
-                  <c:v>9</c:v>
+                  <c:v>7</c:v>
                 </c:pt>
                 <c:pt idx="2">
                   <c:v>1</c:v>
@@ -781,19 +781,19 @@
                 <c:formatCode>General</c:formatCode>
                 <c:ptCount val="6"/>
                 <c:pt idx="0">
-                  <c:v>85</c:v>
+                  <c:v>86</c:v>
                 </c:pt>
                 <c:pt idx="1">
-                  <c:v>11</c:v>
+                  <c:v>12</c:v>
                 </c:pt>
                 <c:pt idx="2">
-                  <c:v>33</c:v>
+                  <c:v>34</c:v>
                 </c:pt>
                 <c:pt idx="3">
                   <c:v>4</c:v>
                 </c:pt>
                 <c:pt idx="4">
-                  <c:v>5</c:v>
+                  <c:v>3</c:v>
                 </c:pt>
                 <c:pt idx="5">
                   <c:v>1</c:v>
@@ -2747,7 +2747,7 @@
                 <a:ea typeface="Arial" pitchFamily="34" charset="-122"/>
                 <a:cs typeface="Arial" pitchFamily="34" charset="-120"/>
               </a:rPr>
-              <a:t>レビュー総数：139件（6サイト）</a:t>
+              <a:t>レビュー総数：140件（6サイト）</a:t>
             </a:r>
             <a:endParaRPr lang="en-US" sz="1000" dirty="0"/>
           </a:p>
@@ -2767,7 +2767,7 @@
                 <a:ea typeface="Arial" pitchFamily="34" charset="-122"/>
                 <a:cs typeface="Arial" pitchFamily="34" charset="-120"/>
               </a:rPr>
-              <a:t>作成日：2026年3月20日</a:t>
+              <a:t>作成日：2026年3月21日</a:t>
             </a:r>
             <a:endParaRPr lang="en-US" sz="1000" dirty="0"/>
           </a:p>
@@ -3313,7 +3313,7 @@
                           <a:ea typeface="Arial" pitchFamily="34" charset="-122"/>
                           <a:cs typeface="Arial" pitchFamily="34" charset="-120"/>
                         </a:rPr>
-                        <a:t>9.17点</a:t>
+                        <a:t>9.21点</a:t>
                       </a:r>
                       <a:endParaRPr lang="en-US" sz="1000" dirty="0">
                         <a:latin typeface="Arial" charset="0"/>
@@ -3587,7 +3587,7 @@
                           <a:ea typeface="Arial" pitchFamily="34" charset="-122"/>
                           <a:cs typeface="Arial" pitchFamily="34" charset="-120"/>
                         </a:rPr>
-                        <a:t>92.8%</a:t>
+                        <a:t>94.3%</a:t>
                       </a:r>
                       <a:endParaRPr lang="en-US" sz="1000" dirty="0">
                         <a:latin typeface="Arial" charset="0"/>
@@ -3655,7 +3655,7 @@
                           <a:ea typeface="Arial" pitchFamily="34" charset="-122"/>
                           <a:cs typeface="Arial" pitchFamily="34" charset="-120"/>
                         </a:rPr>
-                        <a:t>95%以上</a:t>
+                        <a:t>96%以上</a:t>
                       </a:r>
                       <a:endParaRPr lang="en-US" sz="1000" dirty="0">
                         <a:latin typeface="Arial" charset="0"/>
@@ -5048,7 +5048,7 @@
                 <a:ea typeface="Arial" pitchFamily="34" charset="-122"/>
                 <a:cs typeface="Arial" pitchFamily="34" charset="-120"/>
               </a:rPr>
-              <a:t>9.17</a:t>
+              <a:t>9.21</a:t>
             </a:r>
             <a:endParaRPr lang="en-US" sz="3200" dirty="0"/>
           </a:p>
@@ -5173,7 +5173,7 @@
                 <a:ea typeface="Arial" pitchFamily="34" charset="-122"/>
                 <a:cs typeface="Arial" pitchFamily="34" charset="-120"/>
               </a:rPr>
-              <a:t>92.8%</a:t>
+              <a:t>94.3%</a:t>
             </a:r>
             <a:endParaRPr lang="en-US" sz="3200" dirty="0"/>
           </a:p>
@@ -5423,7 +5423,7 @@
                 <a:ea typeface="Arial" pitchFamily="34" charset="-122"/>
                 <a:cs typeface="Arial" pitchFamily="34" charset="-120"/>
               </a:rPr>
-              <a:t>139件</a:t>
+              <a:t>140件</a:t>
             </a:r>
             <a:endParaRPr lang="en-US" sz="3200" dirty="0"/>
           </a:p>
@@ -5571,7 +5571,7 @@
                 <a:ea typeface="Arial" pitchFamily="34" charset="-122"/>
                 <a:cs typeface="Arial" pitchFamily="34" charset="-120"/>
               </a:rPr>
-              <a:t>  小学6年生まで添寝が無料なうえ、朝食ビュッフェ付きでとても良かったです</a:t>
+              <a:t>  朝食も本当に美味しくて、種類もたくさんで是非また泊まらせていただきたいです</a:t>
             </a:r>
             <a:endParaRPr lang="en-US" sz="1100" dirty="0"/>
           </a:p>
@@ -5611,7 +5611,7 @@
                 <a:ea typeface="Arial" pitchFamily="34" charset="-122"/>
                 <a:cs typeface="Arial" pitchFamily="34" charset="-120"/>
               </a:rPr>
-              <a:t>  とっても綺麗なホテルで、宝探し</a:t>
+              <a:t>  ホテルのお部屋の中もとても綺麗で清潔でした</a:t>
             </a:r>
             <a:endParaRPr lang="en-US" sz="1100" dirty="0"/>
           </a:p>
@@ -5651,7 +5651,7 @@
                 <a:ea typeface="Arial" pitchFamily="34" charset="-122"/>
                 <a:cs typeface="Arial" pitchFamily="34" charset="-120"/>
               </a:rPr>
-              <a:t>  今回連泊で利用させていただきましたが、毎日ベッドメイキングをしてくださり、とても気持ちよく利用できました</a:t>
+              <a:t>  スタッフの方々もすごく親切で快適に宿泊できました</a:t>
             </a:r>
             <a:endParaRPr lang="en-US" sz="1100" dirty="0"/>
           </a:p>
@@ -6232,7 +6232,7 @@
                 <a:ea typeface="Arial" pitchFamily="34" charset="-122"/>
                 <a:cs typeface="Arial" pitchFamily="34" charset="-120"/>
               </a:rPr>
-              <a:t>9.17</a:t>
+              <a:t>9.21</a:t>
             </a:r>
             <a:endParaRPr lang="en-US" sz="3200" dirty="0"/>
           </a:p>
@@ -6357,7 +6357,7 @@
                 <a:ea typeface="Arial" pitchFamily="34" charset="-122"/>
                 <a:cs typeface="Arial" pitchFamily="34" charset="-120"/>
               </a:rPr>
-              <a:t>92.8%</a:t>
+              <a:t>94.3%</a:t>
             </a:r>
             <a:endParaRPr lang="en-US" sz="3200" dirty="0"/>
           </a:p>
@@ -6607,7 +6607,7 @@
                 <a:ea typeface="Arial" pitchFamily="34" charset="-122"/>
                 <a:cs typeface="Arial" pitchFamily="34" charset="-120"/>
               </a:rPr>
-              <a:t>139件</a:t>
+              <a:t>140件</a:t>
             </a:r>
             <a:endParaRPr lang="en-US" sz="3200" dirty="0"/>
           </a:p>
@@ -7879,7 +7879,7 @@
                           <a:ea typeface="Arial" pitchFamily="34" charset="-122"/>
                           <a:cs typeface="Arial" pitchFamily="34" charset="-120"/>
                         </a:rPr>
-                        <a:t>12</a:t>
+                        <a:t>13</a:t>
                       </a:r>
                       <a:endParaRPr lang="en-US" sz="900" dirty="0">
                         <a:latin typeface="Arial" charset="0"/>
@@ -7947,7 +7947,7 @@
                           <a:ea typeface="Arial" pitchFamily="34" charset="-122"/>
                           <a:cs typeface="Arial" pitchFamily="34" charset="-120"/>
                         </a:rPr>
-                        <a:t>9.33</a:t>
+                        <a:t>9.38</a:t>
                       </a:r>
                       <a:endParaRPr lang="en-US" sz="900" dirty="0">
                         <a:latin typeface="Arial" charset="0"/>
@@ -8083,7 +8083,7 @@
                           <a:ea typeface="Arial" pitchFamily="34" charset="-122"/>
                           <a:cs typeface="Arial" pitchFamily="34" charset="-120"/>
                         </a:rPr>
-                        <a:t>9.33</a:t>
+                        <a:t>9.38</a:t>
                       </a:r>
                       <a:endParaRPr lang="en-US" sz="900" dirty="0">
                         <a:latin typeface="Arial" charset="0"/>
@@ -8221,7 +8221,7 @@
                           <a:ea typeface="Arial" pitchFamily="34" charset="-122"/>
                           <a:cs typeface="Arial" pitchFamily="34" charset="-120"/>
                         </a:rPr>
-                        <a:t>47</a:t>
+                        <a:t>44</a:t>
                       </a:r>
                       <a:endParaRPr lang="en-US" sz="900" dirty="0">
                         <a:latin typeface="Arial" charset="0"/>
@@ -8289,7 +8289,7 @@
                           <a:ea typeface="Arial" pitchFamily="34" charset="-122"/>
                           <a:cs typeface="Arial" pitchFamily="34" charset="-120"/>
                         </a:rPr>
-                        <a:t>4.64</a:t>
+                        <a:t>4.66</a:t>
                       </a:r>
                       <a:endParaRPr lang="en-US" sz="900" dirty="0">
                         <a:latin typeface="Arial" charset="0"/>
@@ -8425,7 +8425,7 @@
                           <a:ea typeface="Arial" pitchFamily="34" charset="-122"/>
                           <a:cs typeface="Arial" pitchFamily="34" charset="-120"/>
                         </a:rPr>
-                        <a:t>9.28</a:t>
+                        <a:t>9.32</a:t>
                       </a:r>
                       <a:endParaRPr lang="en-US" sz="900" dirty="0">
                         <a:latin typeface="Arial" charset="0"/>
@@ -8563,7 +8563,7 @@
                           <a:ea typeface="Arial" pitchFamily="34" charset="-122"/>
                           <a:cs typeface="Arial" pitchFamily="34" charset="-120"/>
                         </a:rPr>
-                        <a:t>27</a:t>
+                        <a:t>28</a:t>
                       </a:r>
                       <a:endParaRPr lang="en-US" sz="900" dirty="0">
                         <a:latin typeface="Arial" charset="0"/>
@@ -8631,7 +8631,7 @@
                           <a:ea typeface="Arial" pitchFamily="34" charset="-122"/>
                           <a:cs typeface="Arial" pitchFamily="34" charset="-120"/>
                         </a:rPr>
-                        <a:t>4.63</a:t>
+                        <a:t>4.64</a:t>
                       </a:r>
                       <a:endParaRPr lang="en-US" sz="900" dirty="0">
                         <a:latin typeface="Arial" charset="0"/>
@@ -8767,7 +8767,7 @@
                           <a:ea typeface="Arial" pitchFamily="34" charset="-122"/>
                           <a:cs typeface="Arial" pitchFamily="34" charset="-120"/>
                         </a:rPr>
-                        <a:t>9.26</a:t>
+                        <a:t>9.29</a:t>
                       </a:r>
                       <a:endParaRPr lang="en-US" sz="900" dirty="0">
                         <a:latin typeface="Arial" charset="0"/>
@@ -8905,7 +8905,7 @@
                           <a:ea typeface="Arial" pitchFamily="34" charset="-122"/>
                           <a:cs typeface="Arial" pitchFamily="34" charset="-120"/>
                         </a:rPr>
-                        <a:t>12</a:t>
+                        <a:t>11</a:t>
                       </a:r>
                       <a:endParaRPr lang="en-US" sz="900" dirty="0">
                         <a:latin typeface="Arial" charset="0"/>
@@ -8973,7 +8973,7 @@
                           <a:ea typeface="Arial" pitchFamily="34" charset="-122"/>
                           <a:cs typeface="Arial" pitchFamily="34" charset="-120"/>
                         </a:rPr>
-                        <a:t>4.42</a:t>
+                        <a:t>4.55</a:t>
                       </a:r>
                       <a:endParaRPr lang="en-US" sz="900" dirty="0">
                         <a:latin typeface="Arial" charset="0"/>
@@ -9109,7 +9109,7 @@
                           <a:ea typeface="Arial" pitchFamily="34" charset="-122"/>
                           <a:cs typeface="Arial" pitchFamily="34" charset="-120"/>
                         </a:rPr>
-                        <a:t>8.83</a:t>
+                        <a:t>9.09</a:t>
                       </a:r>
                       <a:endParaRPr lang="en-US" sz="900" dirty="0">
                         <a:latin typeface="Arial" charset="0"/>
@@ -9247,7 +9247,7 @@
                           <a:ea typeface="Arial" pitchFamily="34" charset="-122"/>
                           <a:cs typeface="Arial" pitchFamily="34" charset="-120"/>
                         </a:rPr>
-                        <a:t>21</a:t>
+                        <a:t>24</a:t>
                       </a:r>
                       <a:endParaRPr lang="en-US" sz="900" dirty="0">
                         <a:latin typeface="Arial" charset="0"/>
@@ -9315,7 +9315,7 @@
                           <a:ea typeface="Arial" pitchFamily="34" charset="-122"/>
                           <a:cs typeface="Arial" pitchFamily="34" charset="-120"/>
                         </a:rPr>
-                        <a:t>8.71</a:t>
+                        <a:t>8.75</a:t>
                       </a:r>
                       <a:endParaRPr lang="en-US" sz="900" dirty="0">
                         <a:latin typeface="Arial" charset="0"/>
@@ -9451,7 +9451,7 @@
                           <a:ea typeface="Arial" pitchFamily="34" charset="-122"/>
                           <a:cs typeface="Arial" pitchFamily="34" charset="-120"/>
                         </a:rPr>
-                        <a:t>8.71</a:t>
+                        <a:t>8.75</a:t>
                       </a:r>
                       <a:endParaRPr lang="en-US" sz="900" dirty="0">
                         <a:latin typeface="Arial" charset="0"/>
@@ -9859,7 +9859,7 @@
                 <a:ea typeface="Arial" pitchFamily="34" charset="-122"/>
                 <a:cs typeface="Arial" pitchFamily="34" charset="-120"/>
               </a:rPr>
-              <a:t>129件（92.8%）</a:t>
+              <a:t>132件（94.3%）</a:t>
             </a:r>
             <a:endParaRPr lang="en-US" sz="1100" dirty="0"/>
           </a:p>
@@ -9957,7 +9957,7 @@
                 <a:ea typeface="Arial" pitchFamily="34" charset="-122"/>
                 <a:cs typeface="Arial" pitchFamily="34" charset="-120"/>
               </a:rPr>
-              <a:t>9件（6.5%）</a:t>
+              <a:t>7件（5.0%）</a:t>
             </a:r>
             <a:endParaRPr lang="en-US" sz="1100" dirty="0"/>
           </a:p>
@@ -10467,7 +10467,7 @@
                 <a:ea typeface="Arial" pitchFamily="34" charset="-122"/>
                 <a:cs typeface="Arial" pitchFamily="34" charset="-120"/>
               </a:rPr>
-              <a:t>小学6年生まで添寝が無料なうえ、朝食ビュッフェ付きでとても良かったです</a:t>
+              <a:t>朝食も本当に美味しくて、種類もたくさんで是非また泊まらせていただきたいです</a:t>
             </a:r>
             <a:endParaRPr lang="en-US" sz="900" dirty="0"/>
           </a:p>
@@ -10506,7 +10506,7 @@
                 <a:ea typeface="Arial" pitchFamily="34" charset="-122"/>
                 <a:cs typeface="Arial" pitchFamily="34" charset="-120"/>
               </a:rPr>
-              <a:t>「朝食も必要ないし、寝るだけなので、安く泊まれて良かったです」</a:t>
+              <a:t>「小学6年生まで添寝が無料なうえ、朝食ビュッフェ付きでとても良かったです」</a:t>
             </a:r>
             <a:endParaRPr lang="en-US" sz="900" dirty="0"/>
           </a:p>
@@ -10690,7 +10690,7 @@
                 <a:ea typeface="Arial" pitchFamily="34" charset="-122"/>
                 <a:cs typeface="Arial" pitchFamily="34" charset="-120"/>
               </a:rPr>
-              <a:t>とっても綺麗なホテルで、宝探し</a:t>
+              <a:t>ホテルのお部屋の中もとても綺麗で清潔でした</a:t>
             </a:r>
             <a:endParaRPr lang="en-US" sz="900" dirty="0"/>
           </a:p>
@@ -10729,7 +10729,7 @@
                 <a:ea typeface="Arial" pitchFamily="34" charset="-122"/>
                 <a:cs typeface="Arial" pitchFamily="34" charset="-120"/>
               </a:rPr>
-              <a:t>「お部屋も綺麗で親切な対応をしていただいたのでとても良かったです」</a:t>
+              <a:t>「とっても綺麗なホテルで、宝探し」</a:t>
             </a:r>
             <a:endParaRPr lang="en-US" sz="900" dirty="0"/>
           </a:p>
@@ -10913,7 +10913,7 @@
                 <a:ea typeface="Arial" pitchFamily="34" charset="-122"/>
                 <a:cs typeface="Arial" pitchFamily="34" charset="-120"/>
               </a:rPr>
-              <a:t>今回連泊で利用させていただきましたが、毎日ベッドメイキングをしてくださり、とても気持ちよく利用できました</a:t>
+              <a:t>スタッフの方々もすごく親切で快適に宿泊できました</a:t>
             </a:r>
             <a:endParaRPr lang="en-US" sz="900" dirty="0"/>
           </a:p>
@@ -10952,7 +10952,7 @@
                 <a:ea typeface="Arial" pitchFamily="34" charset="-122"/>
                 <a:cs typeface="Arial" pitchFamily="34" charset="-120"/>
               </a:rPr>
-              <a:t>「』と声が出てしまう程広く、ベッドもとても大きくて広い」</a:t>
+              <a:t>「フロントの方も親切でとても快適に過ごしました」</a:t>
             </a:r>
             <a:endParaRPr lang="en-US" sz="900" dirty="0"/>
           </a:p>
@@ -11136,7 +11136,7 @@
                 <a:ea typeface="Arial" pitchFamily="34" charset="-122"/>
                 <a:cs typeface="Arial" pitchFamily="34" charset="-120"/>
               </a:rPr>
-              <a:t>みたいな事をやってたみたいで、部屋で隠されてるカードを探してフロントに持って行ったら、お菓子もらえた</a:t>
+              <a:t>スタッフの方々もすごく親切で快適に宿泊できました</a:t>
             </a:r>
             <a:endParaRPr lang="en-US" sz="900" dirty="0"/>
           </a:p>
@@ -11175,7 +11175,7 @@
                 <a:ea typeface="Arial" pitchFamily="34" charset="-122"/>
                 <a:cs typeface="Arial" pitchFamily="34" charset="-120"/>
               </a:rPr>
-              <a:t>「お部屋も綺麗で親切な対応をしていただいたのでとても良かったです」</a:t>
+              <a:t>「フロントの方も親切でとても快適に過ごしました」</a:t>
             </a:r>
             <a:endParaRPr lang="en-US" sz="900" dirty="0"/>
           </a:p>
@@ -11398,7 +11398,7 @@
                 <a:ea typeface="Arial" pitchFamily="34" charset="-122"/>
                 <a:cs typeface="Arial" pitchFamily="34" charset="-120"/>
               </a:rPr>
-              <a:t>「ディズニーリゾートも近いし駐車場もあるため使いやすい、コスパいいんじゃないかな」</a:t>
+              <a:t>「ディズニーまでのシャトルバスが出ており、とても便利でありがたかったです」</a:t>
             </a:r>
             <a:endParaRPr lang="en-US" sz="900" dirty="0"/>
           </a:p>
@@ -13201,7 +13201,7 @@
                           <a:ea typeface="Arial" pitchFamily="34" charset="-122"/>
                           <a:cs typeface="Arial" pitchFamily="34" charset="-120"/>
                         </a:rPr>
-                        <a:t>4件</a:t>
+                        <a:t>3件</a:t>
                       </a:r>
                       <a:endParaRPr lang="en-US" sz="900" dirty="0">
                         <a:latin typeface="Arial" charset="0"/>

--- a/納品レポート/ホテル別レポート/comfort_suites_tokyobay_口コミ分析レポート.pptx
+++ b/納品レポート/ホテル別レポート/comfort_suites_tokyobay_口コミ分析レポート.pptx
@@ -186,10 +186,10 @@
                     <c:v>Trip.com</c:v>
                   </c:pt>
                   <c:pt idx="2">
-                    <c:v>楽天トラベル</c:v>
+                    <c:v>じゃらん</c:v>
                   </c:pt>
                   <c:pt idx="3">
-                    <c:v>じゃらん</c:v>
+                    <c:v>楽天トラベル</c:v>
                   </c:pt>
                   <c:pt idx="4">
                     <c:v>Google</c:v>
@@ -208,13 +208,13 @@
                 <c:formatCode>General</c:formatCode>
                 <c:ptCount val="6"/>
                 <c:pt idx="0">
-                  <c:v>9.4</c:v>
+                  <c:v>9.56</c:v>
                 </c:pt>
                 <c:pt idx="1">
                   <c:v>9.38</c:v>
                 </c:pt>
                 <c:pt idx="2">
-                  <c:v>9.32</c:v>
+                  <c:v>9.31</c:v>
                 </c:pt>
                 <c:pt idx="3">
                   <c:v>9.29</c:v>
@@ -223,7 +223,7 @@
                   <c:v>9.09</c:v>
                 </c:pt>
                 <c:pt idx="5">
-                  <c:v>8.75</c:v>
+                  <c:v>8.85</c:v>
                 </c:pt>
               </c:numCache>
             </c:numRef>
@@ -566,10 +566,10 @@
               <c:numCache>
                 <c:ptCount val="3"/>
                 <c:pt idx="0">
-                  <c:v>132</c:v>
+                  <c:v>136</c:v>
                 </c:pt>
                 <c:pt idx="1">
-                  <c:v>7</c:v>
+                  <c:v>5</c:v>
                 </c:pt>
                 <c:pt idx="2">
                   <c:v>1</c:v>
@@ -781,19 +781,19 @@
                 <c:formatCode>General</c:formatCode>
                 <c:ptCount val="6"/>
                 <c:pt idx="0">
-                  <c:v>86</c:v>
+                  <c:v>87</c:v>
                 </c:pt>
                 <c:pt idx="1">
-                  <c:v>12</c:v>
+                  <c:v>13</c:v>
                 </c:pt>
                 <c:pt idx="2">
-                  <c:v>34</c:v>
+                  <c:v>36</c:v>
                 </c:pt>
                 <c:pt idx="3">
-                  <c:v>4</c:v>
+                  <c:v>3</c:v>
                 </c:pt>
                 <c:pt idx="4">
-                  <c:v>3</c:v>
+                  <c:v>2</c:v>
                 </c:pt>
                 <c:pt idx="5">
                   <c:v>1</c:v>
@@ -2747,7 +2747,7 @@
                 <a:ea typeface="Arial" pitchFamily="34" charset="-122"/>
                 <a:cs typeface="Arial" pitchFamily="34" charset="-120"/>
               </a:rPr>
-              <a:t>レビュー総数：140件（6サイト）</a:t>
+              <a:t>レビュー総数：142件（6サイト）</a:t>
             </a:r>
             <a:endParaRPr lang="en-US" sz="1000" dirty="0"/>
           </a:p>
@@ -2767,7 +2767,7 @@
                 <a:ea typeface="Arial" pitchFamily="34" charset="-122"/>
                 <a:cs typeface="Arial" pitchFamily="34" charset="-120"/>
               </a:rPr>
-              <a:t>作成日：2026年3月21日</a:t>
+              <a:t>作成日：2026年3月23日</a:t>
             </a:r>
             <a:endParaRPr lang="en-US" sz="1000" dirty="0"/>
           </a:p>
@@ -3313,7 +3313,7 @@
                           <a:ea typeface="Arial" pitchFamily="34" charset="-122"/>
                           <a:cs typeface="Arial" pitchFamily="34" charset="-120"/>
                         </a:rPr>
-                        <a:t>9.21点</a:t>
+                        <a:t>9.24点</a:t>
                       </a:r>
                       <a:endParaRPr lang="en-US" sz="1000" dirty="0">
                         <a:latin typeface="Arial" charset="0"/>
@@ -3587,7 +3587,7 @@
                           <a:ea typeface="Arial" pitchFamily="34" charset="-122"/>
                           <a:cs typeface="Arial" pitchFamily="34" charset="-120"/>
                         </a:rPr>
-                        <a:t>94.3%</a:t>
+                        <a:t>95.8%</a:t>
                       </a:r>
                       <a:endParaRPr lang="en-US" sz="1000" dirty="0">
                         <a:latin typeface="Arial" charset="0"/>
@@ -3655,7 +3655,7 @@
                           <a:ea typeface="Arial" pitchFamily="34" charset="-122"/>
                           <a:cs typeface="Arial" pitchFamily="34" charset="-120"/>
                         </a:rPr>
-                        <a:t>96%以上</a:t>
+                        <a:t>98%以上</a:t>
                       </a:r>
                       <a:endParaRPr lang="en-US" sz="1000" dirty="0">
                         <a:latin typeface="Arial" charset="0"/>
@@ -4409,7 +4409,7 @@
                           <a:ea typeface="Arial" pitchFamily="34" charset="-122"/>
                           <a:cs typeface="Arial" pitchFamily="34" charset="-120"/>
                         </a:rPr>
-                        <a:t>約47件/期間</a:t>
+                        <a:t>約46件/期間</a:t>
                       </a:r>
                       <a:endParaRPr lang="en-US" sz="1000" dirty="0">
                         <a:latin typeface="Arial" charset="0"/>
@@ -5048,7 +5048,7 @@
                 <a:ea typeface="Arial" pitchFamily="34" charset="-122"/>
                 <a:cs typeface="Arial" pitchFamily="34" charset="-120"/>
               </a:rPr>
-              <a:t>9.21</a:t>
+              <a:t>9.24</a:t>
             </a:r>
             <a:endParaRPr lang="en-US" sz="3200" dirty="0"/>
           </a:p>
@@ -5173,7 +5173,7 @@
                 <a:ea typeface="Arial" pitchFamily="34" charset="-122"/>
                 <a:cs typeface="Arial" pitchFamily="34" charset="-120"/>
               </a:rPr>
-              <a:t>94.3%</a:t>
+              <a:t>95.8%</a:t>
             </a:r>
             <a:endParaRPr lang="en-US" sz="3200" dirty="0"/>
           </a:p>
@@ -5423,7 +5423,7 @@
                 <a:ea typeface="Arial" pitchFamily="34" charset="-122"/>
                 <a:cs typeface="Arial" pitchFamily="34" charset="-120"/>
               </a:rPr>
-              <a:t>140件</a:t>
+              <a:t>142件</a:t>
             </a:r>
             <a:endParaRPr lang="en-US" sz="3200" dirty="0"/>
           </a:p>
@@ -5551,6 +5551,46 @@
                 <a:ea typeface="Arial" pitchFamily="34" charset="-122"/>
                 <a:cs typeface="Arial" pitchFamily="34" charset="-120"/>
               </a:rPr>
+              <a:t>清潔さ・清掃 </a:t>
+            </a:r>
+            <a:endParaRPr lang="en-US" sz="1100" dirty="0"/>
+          </a:p>
+          <a:p>
+            <a:pPr indent="0" marL="0">
+              <a:spcAft>
+                <a:spcPts val="200"/>
+              </a:spcAft>
+              <a:buNone/>
+            </a:pPr>
+            <a:r>
+              <a:rPr lang="en-US" sz="900" dirty="0">
+                <a:solidFill>
+                  <a:srgbClr val="64748B"/>
+                </a:solidFill>
+                <a:latin typeface="Arial" pitchFamily="34" charset="0"/>
+                <a:ea typeface="Arial" pitchFamily="34" charset="-122"/>
+                <a:cs typeface="Arial" pitchFamily="34" charset="-120"/>
+              </a:rPr>
+              <a:t>  ・内装が綺麗 ・チェックイン、チェックアウトが楽 ・ホテル内にコンビニが併設 ・部屋が広かった ・強いて言うならお...</a:t>
+            </a:r>
+            <a:endParaRPr lang="en-US" sz="1100" dirty="0"/>
+          </a:p>
+          <a:p>
+            <a:pPr indent="0" marL="0">
+              <a:spcAft>
+                <a:spcPts val="200"/>
+              </a:spcAft>
+              <a:buNone/>
+            </a:pPr>
+            <a:r>
+              <a:rPr lang="en-US" sz="1100" b="1" dirty="0">
+                <a:solidFill>
+                  <a:srgbClr val="334155"/>
+                </a:solidFill>
+                <a:latin typeface="Arial" pitchFamily="34" charset="0"/>
+                <a:ea typeface="Arial" pitchFamily="34" charset="-122"/>
+                <a:cs typeface="Arial" pitchFamily="34" charset="-120"/>
+              </a:rPr>
               <a:t>朝食 </a:t>
             </a:r>
             <a:endParaRPr lang="en-US" sz="1100" dirty="0"/>
@@ -5591,7 +5631,7 @@
                 <a:ea typeface="Arial" pitchFamily="34" charset="-122"/>
                 <a:cs typeface="Arial" pitchFamily="34" charset="-120"/>
               </a:rPr>
-              <a:t>清潔さ・清掃 </a:t>
+              <a:t>快適さ・設備 </a:t>
             </a:r>
             <a:endParaRPr lang="en-US" sz="1100" dirty="0"/>
           </a:p>
@@ -5611,47 +5651,7 @@
                 <a:ea typeface="Arial" pitchFamily="34" charset="-122"/>
                 <a:cs typeface="Arial" pitchFamily="34" charset="-120"/>
               </a:rPr>
-              <a:t>  ホテルのお部屋の中もとても綺麗で清潔でした</a:t>
-            </a:r>
-            <a:endParaRPr lang="en-US" sz="1100" dirty="0"/>
-          </a:p>
-          <a:p>
-            <a:pPr indent="0" marL="0">
-              <a:spcAft>
-                <a:spcPts val="200"/>
-              </a:spcAft>
-              <a:buNone/>
-            </a:pPr>
-            <a:r>
-              <a:rPr lang="en-US" sz="1100" b="1" dirty="0">
-                <a:solidFill>
-                  <a:srgbClr val="334155"/>
-                </a:solidFill>
-                <a:latin typeface="Arial" pitchFamily="34" charset="0"/>
-                <a:ea typeface="Arial" pitchFamily="34" charset="-122"/>
-                <a:cs typeface="Arial" pitchFamily="34" charset="-120"/>
-              </a:rPr>
-              <a:t>快適さ・設備 </a:t>
-            </a:r>
-            <a:endParaRPr lang="en-US" sz="1100" dirty="0"/>
-          </a:p>
-          <a:p>
-            <a:pPr indent="0" marL="0">
-              <a:spcAft>
-                <a:spcPts val="200"/>
-              </a:spcAft>
-              <a:buNone/>
-            </a:pPr>
-            <a:r>
-              <a:rPr lang="en-US" sz="900" dirty="0">
-                <a:solidFill>
-                  <a:srgbClr val="64748B"/>
-                </a:solidFill>
-                <a:latin typeface="Arial" pitchFamily="34" charset="0"/>
-                <a:ea typeface="Arial" pitchFamily="34" charset="-122"/>
-                <a:cs typeface="Arial" pitchFamily="34" charset="-120"/>
-              </a:rPr>
-              <a:t>  スタッフの方々もすごく親切で快適に宿泊できました</a:t>
+              <a:t>  お部屋はベッドがくっついているのがよくて選んだので、快適でよかったです</a:t>
             </a:r>
             <a:endParaRPr lang="en-US" sz="1100" dirty="0"/>
           </a:p>
@@ -5799,7 +5799,7 @@
                 <a:ea typeface="Arial" pitchFamily="34" charset="-122"/>
                 <a:cs typeface="Arial" pitchFamily="34" charset="-120"/>
               </a:rPr>
-              <a:t>  To Narita Airport need 2900 yen/person Need to walk to Hy...</a:t>
+              <a:t>  送迎バスのドライバーさんのホスピタリティに溢れた対応に感謝です</a:t>
             </a:r>
             <a:endParaRPr lang="en-US" sz="1100" dirty="0"/>
           </a:p>
@@ -6232,7 +6232,7 @@
                 <a:ea typeface="Arial" pitchFamily="34" charset="-122"/>
                 <a:cs typeface="Arial" pitchFamily="34" charset="-120"/>
               </a:rPr>
-              <a:t>9.21</a:t>
+              <a:t>9.24</a:t>
             </a:r>
             <a:endParaRPr lang="en-US" sz="3200" dirty="0"/>
           </a:p>
@@ -6357,7 +6357,7 @@
                 <a:ea typeface="Arial" pitchFamily="34" charset="-122"/>
                 <a:cs typeface="Arial" pitchFamily="34" charset="-120"/>
               </a:rPr>
-              <a:t>94.3%</a:t>
+              <a:t>95.8%</a:t>
             </a:r>
             <a:endParaRPr lang="en-US" sz="3200" dirty="0"/>
           </a:p>
@@ -6607,7 +6607,7 @@
                 <a:ea typeface="Arial" pitchFamily="34" charset="-122"/>
                 <a:cs typeface="Arial" pitchFamily="34" charset="-120"/>
               </a:rPr>
-              <a:t>140件</a:t>
+              <a:t>142件</a:t>
             </a:r>
             <a:endParaRPr lang="en-US" sz="3200" dirty="0"/>
           </a:p>
@@ -7028,7 +7028,7 @@
                 <a:ea typeface="Arial" pitchFamily="34" charset="-122"/>
                 <a:cs typeface="Arial" pitchFamily="34" charset="-120"/>
               </a:rPr>
-              <a:t>Agoda(9.40)が最高スコア。</a:t>
+              <a:t>Agoda(9.56)が最高スコア。</a:t>
             </a:r>
             <a:endParaRPr lang="en-US" sz="1100" dirty="0"/>
           </a:p>
@@ -7537,7 +7537,7 @@
                           <a:ea typeface="Arial" pitchFamily="34" charset="-122"/>
                           <a:cs typeface="Arial" pitchFamily="34" charset="-120"/>
                         </a:rPr>
-                        <a:t>20</a:t>
+                        <a:t>18</a:t>
                       </a:r>
                       <a:endParaRPr lang="en-US" sz="900" dirty="0">
                         <a:latin typeface="Arial" charset="0"/>
@@ -7605,7 +7605,7 @@
                           <a:ea typeface="Arial" pitchFamily="34" charset="-122"/>
                           <a:cs typeface="Arial" pitchFamily="34" charset="-120"/>
                         </a:rPr>
-                        <a:t>9.4</a:t>
+                        <a:t>9.56</a:t>
                       </a:r>
                       <a:endParaRPr lang="en-US" sz="900" dirty="0">
                         <a:latin typeface="Arial" charset="0"/>
@@ -7741,7 +7741,7 @@
                           <a:ea typeface="Arial" pitchFamily="34" charset="-122"/>
                           <a:cs typeface="Arial" pitchFamily="34" charset="-120"/>
                         </a:rPr>
-                        <a:t>9.4</a:t>
+                        <a:t>9.56</a:t>
                       </a:r>
                       <a:endParaRPr lang="en-US" sz="900" dirty="0">
                         <a:latin typeface="Arial" charset="0"/>
@@ -8153,7 +8153,7 @@
                           <a:ea typeface="Arial" pitchFamily="34" charset="-122"/>
                           <a:cs typeface="Arial" pitchFamily="34" charset="-120"/>
                         </a:rPr>
-                        <a:t>楽天トラベル</a:t>
+                        <a:t>じゃらん</a:t>
                       </a:r>
                       <a:endParaRPr lang="en-US" sz="900" dirty="0">
                         <a:latin typeface="Arial" charset="0"/>
@@ -8221,7 +8221,7 @@
                           <a:ea typeface="Arial" pitchFamily="34" charset="-122"/>
                           <a:cs typeface="Arial" pitchFamily="34" charset="-120"/>
                         </a:rPr>
-                        <a:t>44</a:t>
+                        <a:t>29</a:t>
                       </a:r>
                       <a:endParaRPr lang="en-US" sz="900" dirty="0">
                         <a:latin typeface="Arial" charset="0"/>
@@ -8425,7 +8425,7 @@
                           <a:ea typeface="Arial" pitchFamily="34" charset="-122"/>
                           <a:cs typeface="Arial" pitchFamily="34" charset="-120"/>
                         </a:rPr>
-                        <a:t>9.32</a:t>
+                        <a:t>9.31</a:t>
                       </a:r>
                       <a:endParaRPr lang="en-US" sz="900" dirty="0">
                         <a:latin typeface="Arial" charset="0"/>
@@ -8495,7 +8495,7 @@
                           <a:ea typeface="Arial" pitchFamily="34" charset="-122"/>
                           <a:cs typeface="Arial" pitchFamily="34" charset="-120"/>
                         </a:rPr>
-                        <a:t>じゃらん</a:t>
+                        <a:t>楽天トラベル</a:t>
                       </a:r>
                       <a:endParaRPr lang="en-US" sz="900" dirty="0">
                         <a:latin typeface="Arial" charset="0"/>
@@ -8563,7 +8563,7 @@
                           <a:ea typeface="Arial" pitchFamily="34" charset="-122"/>
                           <a:cs typeface="Arial" pitchFamily="34" charset="-120"/>
                         </a:rPr>
-                        <a:t>28</a:t>
+                        <a:t>45</a:t>
                       </a:r>
                       <a:endParaRPr lang="en-US" sz="900" dirty="0">
                         <a:latin typeface="Arial" charset="0"/>
@@ -9247,7 +9247,7 @@
                           <a:ea typeface="Arial" pitchFamily="34" charset="-122"/>
                           <a:cs typeface="Arial" pitchFamily="34" charset="-120"/>
                         </a:rPr>
-                        <a:t>24</a:t>
+                        <a:t>26</a:t>
                       </a:r>
                       <a:endParaRPr lang="en-US" sz="900" dirty="0">
                         <a:latin typeface="Arial" charset="0"/>
@@ -9315,7 +9315,7 @@
                           <a:ea typeface="Arial" pitchFamily="34" charset="-122"/>
                           <a:cs typeface="Arial" pitchFamily="34" charset="-120"/>
                         </a:rPr>
-                        <a:t>8.75</a:t>
+                        <a:t>8.85</a:t>
                       </a:r>
                       <a:endParaRPr lang="en-US" sz="900" dirty="0">
                         <a:latin typeface="Arial" charset="0"/>
@@ -9451,7 +9451,7 @@
                           <a:ea typeface="Arial" pitchFamily="34" charset="-122"/>
                           <a:cs typeface="Arial" pitchFamily="34" charset="-120"/>
                         </a:rPr>
-                        <a:t>8.75</a:t>
+                        <a:t>8.85</a:t>
                       </a:r>
                       <a:endParaRPr lang="en-US" sz="900" dirty="0">
                         <a:latin typeface="Arial" charset="0"/>
@@ -9859,7 +9859,7 @@
                 <a:ea typeface="Arial" pitchFamily="34" charset="-122"/>
                 <a:cs typeface="Arial" pitchFamily="34" charset="-120"/>
               </a:rPr>
-              <a:t>132件（94.3%）</a:t>
+              <a:t>136件（95.8%）</a:t>
             </a:r>
             <a:endParaRPr lang="en-US" sz="1100" dirty="0"/>
           </a:p>
@@ -9957,7 +9957,7 @@
                 <a:ea typeface="Arial" pitchFamily="34" charset="-122"/>
                 <a:cs typeface="Arial" pitchFamily="34" charset="-120"/>
               </a:rPr>
-              <a:t>7件（5.0%）</a:t>
+              <a:t>5件（3.5%）</a:t>
             </a:r>
             <a:endParaRPr lang="en-US" sz="1100" dirty="0"/>
           </a:p>
@@ -10428,6 +10428,229 @@
                 <a:ea typeface="Arial" pitchFamily="34" charset="-122"/>
                 <a:cs typeface="Arial" pitchFamily="34" charset="-120"/>
               </a:rPr>
+              <a:t>清潔さ・清掃</a:t>
+            </a:r>
+            <a:endParaRPr lang="en-US" sz="1300" dirty="0"/>
+          </a:p>
+        </p:txBody>
+      </p:sp>
+      <p:sp>
+        <p:nvSpPr>
+          <p:cNvPr id="10" name="Text 8"/>
+          <p:cNvSpPr/>
+          <p:nvPr/>
+        </p:nvSpPr>
+        <p:spPr>
+          <a:xfrm>
+            <a:off x="594360" y="1417320"/>
+            <a:ext cx="2377440" cy="365760"/>
+          </a:xfrm>
+          <a:prstGeom prst="rect">
+            <a:avLst/>
+          </a:prstGeom>
+          <a:noFill/>
+          <a:ln/>
+        </p:spPr>
+        <p:txBody>
+          <a:bodyPr wrap="square" lIns="0" tIns="0" rIns="0" bIns="0" rtlCol="0" anchor="ctr"/>
+          <a:lstStyle/>
+          <a:p>
+            <a:pPr indent="0" marL="0">
+              <a:buNone/>
+            </a:pPr>
+            <a:r>
+              <a:rPr lang="en-US" sz="900" dirty="0">
+                <a:solidFill>
+                  <a:srgbClr val="64748B"/>
+                </a:solidFill>
+                <a:latin typeface="Arial" pitchFamily="34" charset="0"/>
+                <a:ea typeface="Arial" pitchFamily="34" charset="-122"/>
+                <a:cs typeface="Arial" pitchFamily="34" charset="-120"/>
+              </a:rPr>
+              <a:t>・内装が綺麗 ・チェックイン、チェックアウトが楽 ・ホテル内にコンビニが併設 ・部屋が広かった ・強いて言うならお...</a:t>
+            </a:r>
+            <a:endParaRPr lang="en-US" sz="900" dirty="0"/>
+          </a:p>
+        </p:txBody>
+      </p:sp>
+      <p:sp>
+        <p:nvSpPr>
+          <p:cNvPr id="11" name="Text 9"/>
+          <p:cNvSpPr/>
+          <p:nvPr/>
+        </p:nvSpPr>
+        <p:spPr>
+          <a:xfrm>
+            <a:off x="594360" y="1828800"/>
+            <a:ext cx="2377440" cy="640080"/>
+          </a:xfrm>
+          <a:prstGeom prst="rect">
+            <a:avLst/>
+          </a:prstGeom>
+          <a:noFill/>
+          <a:ln/>
+        </p:spPr>
+        <p:txBody>
+          <a:bodyPr wrap="square" lIns="0" tIns="0" rIns="0" bIns="0" rtlCol="0" anchor="ctr"/>
+          <a:lstStyle/>
+          <a:p>
+            <a:pPr indent="0" marL="0">
+              <a:buNone/>
+            </a:pPr>
+            <a:r>
+              <a:rPr lang="en-US" sz="900" i="1" dirty="0">
+                <a:solidFill>
+                  <a:srgbClr val="3B7DD8"/>
+                </a:solidFill>
+                <a:latin typeface="Arial" pitchFamily="34" charset="0"/>
+                <a:ea typeface="Arial" pitchFamily="34" charset="-122"/>
+                <a:cs typeface="Arial" pitchFamily="34" charset="-120"/>
+              </a:rPr>
+              <a:t>「ホテルも清潔で、快適でした」</a:t>
+            </a:r>
+            <a:endParaRPr lang="en-US" sz="900" dirty="0"/>
+          </a:p>
+        </p:txBody>
+      </p:sp>
+      <p:sp>
+        <p:nvSpPr>
+          <p:cNvPr id="12" name="Shape 10"/>
+          <p:cNvSpPr/>
+          <p:nvPr/>
+        </p:nvSpPr>
+        <p:spPr>
+          <a:xfrm>
+            <a:off x="3291840" y="1051560"/>
+            <a:ext cx="2651760" cy="1600200"/>
+          </a:xfrm>
+          <a:prstGeom prst="rect">
+            <a:avLst/>
+          </a:prstGeom>
+          <a:solidFill>
+            <a:srgbClr val="FFFFFF"/>
+          </a:solidFill>
+          <a:ln/>
+          <a:effectLst>
+            <a:outerShdw sx="100000" sy="100000" kx="0" ky="0" algn="bl" rotWithShape="0" blurRad="50800" dist="25400" dir="8100000">
+              <a:srgbClr val="000000">
+                <a:alpha val="10000"/>
+              </a:srgbClr>
+            </a:outerShdw>
+          </a:effectLst>
+        </p:spPr>
+      </p:sp>
+      <p:sp>
+        <p:nvSpPr>
+          <p:cNvPr id="13" name="Shape 11"/>
+          <p:cNvSpPr/>
+          <p:nvPr/>
+        </p:nvSpPr>
+        <p:spPr>
+          <a:xfrm>
+            <a:off x="3291840" y="1051560"/>
+            <a:ext cx="54864" cy="1600200"/>
+          </a:xfrm>
+          <a:prstGeom prst="rect">
+            <a:avLst/>
+          </a:prstGeom>
+          <a:solidFill>
+            <a:srgbClr val="16A34A"/>
+          </a:solidFill>
+          <a:ln/>
+        </p:spPr>
+      </p:sp>
+      <p:sp>
+        <p:nvSpPr>
+          <p:cNvPr id="14" name="Shape 12"/>
+          <p:cNvSpPr/>
+          <p:nvPr/>
+        </p:nvSpPr>
+        <p:spPr>
+          <a:xfrm>
+            <a:off x="5120640" y="1124712"/>
+            <a:ext cx="658368" cy="228600"/>
+          </a:xfrm>
+          <a:prstGeom prst="rect">
+            <a:avLst/>
+          </a:prstGeom>
+          <a:solidFill>
+            <a:srgbClr val="DCFCE7"/>
+          </a:solidFill>
+          <a:ln/>
+        </p:spPr>
+      </p:sp>
+      <p:sp>
+        <p:nvSpPr>
+          <p:cNvPr id="15" name="Text 13"/>
+          <p:cNvSpPr/>
+          <p:nvPr/>
+        </p:nvSpPr>
+        <p:spPr>
+          <a:xfrm>
+            <a:off x="5120640" y="1124712"/>
+            <a:ext cx="658368" cy="228600"/>
+          </a:xfrm>
+          <a:prstGeom prst="rect">
+            <a:avLst/>
+          </a:prstGeom>
+          <a:noFill/>
+          <a:ln/>
+        </p:spPr>
+        <p:txBody>
+          <a:bodyPr wrap="square" lIns="0" tIns="0" rIns="0" bIns="0" rtlCol="0" anchor="ctr"/>
+          <a:lstStyle/>
+          <a:p>
+            <a:pPr algn="ctr" indent="0" marL="0">
+              <a:buNone/>
+            </a:pPr>
+            <a:r>
+              <a:rPr lang="en-US" sz="900" b="1" dirty="0">
+                <a:solidFill>
+                  <a:srgbClr val="16A34A"/>
+                </a:solidFill>
+                <a:latin typeface="Arial" pitchFamily="34" charset="0"/>
+                <a:ea typeface="Arial" pitchFamily="34" charset="-122"/>
+                <a:cs typeface="Arial" pitchFamily="34" charset="-120"/>
+              </a:rPr>
+              <a:t>20件+</a:t>
+            </a:r>
+            <a:endParaRPr lang="en-US" sz="900" dirty="0"/>
+          </a:p>
+        </p:txBody>
+      </p:sp>
+      <p:sp>
+        <p:nvSpPr>
+          <p:cNvPr id="16" name="Text 14"/>
+          <p:cNvSpPr/>
+          <p:nvPr/>
+        </p:nvSpPr>
+        <p:spPr>
+          <a:xfrm>
+            <a:off x="3429000" y="1124712"/>
+            <a:ext cx="1645920" cy="274320"/>
+          </a:xfrm>
+          <a:prstGeom prst="rect">
+            <a:avLst/>
+          </a:prstGeom>
+          <a:noFill/>
+          <a:ln/>
+        </p:spPr>
+        <p:txBody>
+          <a:bodyPr wrap="square" lIns="0" tIns="0" rIns="0" bIns="0" rtlCol="0" anchor="ctr"/>
+          <a:lstStyle/>
+          <a:p>
+            <a:pPr indent="0" marL="0">
+              <a:buNone/>
+            </a:pPr>
+            <a:r>
+              <a:rPr lang="en-US" sz="1300" b="1" dirty="0">
+                <a:solidFill>
+                  <a:srgbClr val="1A2744"/>
+                </a:solidFill>
+                <a:latin typeface="Arial" pitchFamily="34" charset="0"/>
+                <a:ea typeface="Arial" pitchFamily="34" charset="-122"/>
+                <a:cs typeface="Arial" pitchFamily="34" charset="-120"/>
+              </a:rPr>
               <a:t>朝食</a:t>
             </a:r>
             <a:endParaRPr lang="en-US" sz="1300" dirty="0"/>
@@ -10436,13 +10659,13 @@
       </p:sp>
       <p:sp>
         <p:nvSpPr>
-          <p:cNvPr id="10" name="Text 8"/>
-          <p:cNvSpPr/>
-          <p:nvPr/>
-        </p:nvSpPr>
-        <p:spPr>
-          <a:xfrm>
-            <a:off x="594360" y="1417320"/>
+          <p:cNvPr id="17" name="Text 15"/>
+          <p:cNvSpPr/>
+          <p:nvPr/>
+        </p:nvSpPr>
+        <p:spPr>
+          <a:xfrm>
+            <a:off x="3429000" y="1417320"/>
             <a:ext cx="2377440" cy="365760"/>
           </a:xfrm>
           <a:prstGeom prst="rect">
@@ -10475,13 +10698,13 @@
       </p:sp>
       <p:sp>
         <p:nvSpPr>
-          <p:cNvPr id="11" name="Text 9"/>
-          <p:cNvSpPr/>
-          <p:nvPr/>
-        </p:nvSpPr>
-        <p:spPr>
-          <a:xfrm>
-            <a:off x="594360" y="1828800"/>
+          <p:cNvPr id="18" name="Text 16"/>
+          <p:cNvSpPr/>
+          <p:nvPr/>
+        </p:nvSpPr>
+        <p:spPr>
+          <a:xfrm>
+            <a:off x="3429000" y="1828800"/>
             <a:ext cx="2377440" cy="640080"/>
           </a:xfrm>
           <a:prstGeom prst="rect">
@@ -10514,13 +10737,13 @@
       </p:sp>
       <p:sp>
         <p:nvSpPr>
-          <p:cNvPr id="12" name="Shape 10"/>
-          <p:cNvSpPr/>
-          <p:nvPr/>
-        </p:nvSpPr>
-        <p:spPr>
-          <a:xfrm>
-            <a:off x="3291840" y="1051560"/>
+          <p:cNvPr id="19" name="Shape 17"/>
+          <p:cNvSpPr/>
+          <p:nvPr/>
+        </p:nvSpPr>
+        <p:spPr>
+          <a:xfrm>
+            <a:off x="6126480" y="1051560"/>
             <a:ext cx="2651760" cy="1600200"/>
           </a:xfrm>
           <a:prstGeom prst="rect">
@@ -10541,13 +10764,13 @@
       </p:sp>
       <p:sp>
         <p:nvSpPr>
-          <p:cNvPr id="13" name="Shape 11"/>
-          <p:cNvSpPr/>
-          <p:nvPr/>
-        </p:nvSpPr>
-        <p:spPr>
-          <a:xfrm>
-            <a:off x="3291840" y="1051560"/>
+          <p:cNvPr id="20" name="Shape 18"/>
+          <p:cNvSpPr/>
+          <p:nvPr/>
+        </p:nvSpPr>
+        <p:spPr>
+          <a:xfrm>
+            <a:off x="6126480" y="1051560"/>
             <a:ext cx="54864" cy="1600200"/>
           </a:xfrm>
           <a:prstGeom prst="rect">
@@ -10561,13 +10784,13 @@
       </p:sp>
       <p:sp>
         <p:nvSpPr>
-          <p:cNvPr id="14" name="Shape 12"/>
-          <p:cNvSpPr/>
-          <p:nvPr/>
-        </p:nvSpPr>
-        <p:spPr>
-          <a:xfrm>
-            <a:off x="5120640" y="1124712"/>
+          <p:cNvPr id="21" name="Shape 19"/>
+          <p:cNvSpPr/>
+          <p:nvPr/>
+        </p:nvSpPr>
+        <p:spPr>
+          <a:xfrm>
+            <a:off x="7955280" y="1124712"/>
             <a:ext cx="658368" cy="228600"/>
           </a:xfrm>
           <a:prstGeom prst="rect">
@@ -10581,13 +10804,13 @@
       </p:sp>
       <p:sp>
         <p:nvSpPr>
-          <p:cNvPr id="15" name="Text 13"/>
-          <p:cNvSpPr/>
-          <p:nvPr/>
-        </p:nvSpPr>
-        <p:spPr>
-          <a:xfrm>
-            <a:off x="5120640" y="1124712"/>
+          <p:cNvPr id="22" name="Text 20"/>
+          <p:cNvSpPr/>
+          <p:nvPr/>
+        </p:nvSpPr>
+        <p:spPr>
+          <a:xfrm>
+            <a:off x="7955280" y="1124712"/>
             <a:ext cx="658368" cy="228600"/>
           </a:xfrm>
           <a:prstGeom prst="rect">
@@ -10620,13 +10843,13 @@
       </p:sp>
       <p:sp>
         <p:nvSpPr>
-          <p:cNvPr id="16" name="Text 14"/>
-          <p:cNvSpPr/>
-          <p:nvPr/>
-        </p:nvSpPr>
-        <p:spPr>
-          <a:xfrm>
-            <a:off x="3429000" y="1124712"/>
+          <p:cNvPr id="23" name="Text 21"/>
+          <p:cNvSpPr/>
+          <p:nvPr/>
+        </p:nvSpPr>
+        <p:spPr>
+          <a:xfrm>
+            <a:off x="6263640" y="1124712"/>
             <a:ext cx="1645920" cy="274320"/>
           </a:xfrm>
           <a:prstGeom prst="rect">
@@ -10651,7 +10874,7 @@
                 <a:ea typeface="Arial" pitchFamily="34" charset="-122"/>
                 <a:cs typeface="Arial" pitchFamily="34" charset="-120"/>
               </a:rPr>
-              <a:t>清潔さ・清掃</a:t>
+              <a:t>快適さ・設備</a:t>
             </a:r>
             <a:endParaRPr lang="en-US" sz="1300" dirty="0"/>
           </a:p>
@@ -10659,13 +10882,13 @@
       </p:sp>
       <p:sp>
         <p:nvSpPr>
-          <p:cNvPr id="17" name="Text 15"/>
-          <p:cNvSpPr/>
-          <p:nvPr/>
-        </p:nvSpPr>
-        <p:spPr>
-          <a:xfrm>
-            <a:off x="3429000" y="1417320"/>
+          <p:cNvPr id="24" name="Text 22"/>
+          <p:cNvSpPr/>
+          <p:nvPr/>
+        </p:nvSpPr>
+        <p:spPr>
+          <a:xfrm>
+            <a:off x="6263640" y="1417320"/>
             <a:ext cx="2377440" cy="365760"/>
           </a:xfrm>
           <a:prstGeom prst="rect">
@@ -10690,7 +10913,7 @@
                 <a:ea typeface="Arial" pitchFamily="34" charset="-122"/>
                 <a:cs typeface="Arial" pitchFamily="34" charset="-120"/>
               </a:rPr>
-              <a:t>ホテルのお部屋の中もとても綺麗で清潔でした</a:t>
+              <a:t>お部屋はベッドがくっついているのがよくて選んだので、快適でよかったです</a:t>
             </a:r>
             <a:endParaRPr lang="en-US" sz="900" dirty="0"/>
           </a:p>
@@ -10698,13 +10921,13 @@
       </p:sp>
       <p:sp>
         <p:nvSpPr>
-          <p:cNvPr id="18" name="Text 16"/>
-          <p:cNvSpPr/>
-          <p:nvPr/>
-        </p:nvSpPr>
-        <p:spPr>
-          <a:xfrm>
-            <a:off x="3429000" y="1828800"/>
+          <p:cNvPr id="25" name="Text 23"/>
+          <p:cNvSpPr/>
+          <p:nvPr/>
+        </p:nvSpPr>
+        <p:spPr>
+          <a:xfrm>
+            <a:off x="6263640" y="1828800"/>
             <a:ext cx="2377440" cy="640080"/>
           </a:xfrm>
           <a:prstGeom prst="rect">
@@ -10729,7 +10952,7 @@
                 <a:ea typeface="Arial" pitchFamily="34" charset="-122"/>
                 <a:cs typeface="Arial" pitchFamily="34" charset="-120"/>
               </a:rPr>
-              <a:t>「とっても綺麗なホテルで、宝探し」</a:t>
+              <a:t>「ホテルも清潔で、快適でした」</a:t>
             </a:r>
             <a:endParaRPr lang="en-US" sz="900" dirty="0"/>
           </a:p>
@@ -10737,13 +10960,13 @@
       </p:sp>
       <p:sp>
         <p:nvSpPr>
-          <p:cNvPr id="19" name="Shape 17"/>
-          <p:cNvSpPr/>
-          <p:nvPr/>
-        </p:nvSpPr>
-        <p:spPr>
-          <a:xfrm>
-            <a:off x="6126480" y="1051560"/>
+          <p:cNvPr id="26" name="Shape 24"/>
+          <p:cNvSpPr/>
+          <p:nvPr/>
+        </p:nvSpPr>
+        <p:spPr>
+          <a:xfrm>
+            <a:off x="457200" y="2880360"/>
             <a:ext cx="2651760" cy="1600200"/>
           </a:xfrm>
           <a:prstGeom prst="rect">
@@ -10764,13 +10987,13 @@
       </p:sp>
       <p:sp>
         <p:nvSpPr>
-          <p:cNvPr id="20" name="Shape 18"/>
-          <p:cNvSpPr/>
-          <p:nvPr/>
-        </p:nvSpPr>
-        <p:spPr>
-          <a:xfrm>
-            <a:off x="6126480" y="1051560"/>
+          <p:cNvPr id="27" name="Shape 25"/>
+          <p:cNvSpPr/>
+          <p:nvPr/>
+        </p:nvSpPr>
+        <p:spPr>
+          <a:xfrm>
+            <a:off x="457200" y="2880360"/>
             <a:ext cx="54864" cy="1600200"/>
           </a:xfrm>
           <a:prstGeom prst="rect">
@@ -10784,13 +11007,13 @@
       </p:sp>
       <p:sp>
         <p:nvSpPr>
-          <p:cNvPr id="21" name="Shape 19"/>
-          <p:cNvSpPr/>
-          <p:nvPr/>
-        </p:nvSpPr>
-        <p:spPr>
-          <a:xfrm>
-            <a:off x="7955280" y="1124712"/>
+          <p:cNvPr id="28" name="Shape 26"/>
+          <p:cNvSpPr/>
+          <p:nvPr/>
+        </p:nvSpPr>
+        <p:spPr>
+          <a:xfrm>
+            <a:off x="2286000" y="2953512"/>
             <a:ext cx="658368" cy="228600"/>
           </a:xfrm>
           <a:prstGeom prst="rect">
@@ -10804,13 +11027,13 @@
       </p:sp>
       <p:sp>
         <p:nvSpPr>
-          <p:cNvPr id="22" name="Text 20"/>
-          <p:cNvSpPr/>
-          <p:nvPr/>
-        </p:nvSpPr>
-        <p:spPr>
-          <a:xfrm>
-            <a:off x="7955280" y="1124712"/>
+          <p:cNvPr id="29" name="Text 27"/>
+          <p:cNvSpPr/>
+          <p:nvPr/>
+        </p:nvSpPr>
+        <p:spPr>
+          <a:xfrm>
+            <a:off x="2286000" y="2953512"/>
             <a:ext cx="658368" cy="228600"/>
           </a:xfrm>
           <a:prstGeom prst="rect">
@@ -10843,13 +11066,13 @@
       </p:sp>
       <p:sp>
         <p:nvSpPr>
-          <p:cNvPr id="23" name="Text 21"/>
-          <p:cNvSpPr/>
-          <p:nvPr/>
-        </p:nvSpPr>
-        <p:spPr>
-          <a:xfrm>
-            <a:off x="6263640" y="1124712"/>
+          <p:cNvPr id="30" name="Text 28"/>
+          <p:cNvSpPr/>
+          <p:nvPr/>
+        </p:nvSpPr>
+        <p:spPr>
+          <a:xfrm>
+            <a:off x="594360" y="2953512"/>
             <a:ext cx="1645920" cy="274320"/>
           </a:xfrm>
           <a:prstGeom prst="rect">
@@ -10874,7 +11097,7 @@
                 <a:ea typeface="Arial" pitchFamily="34" charset="-122"/>
                 <a:cs typeface="Arial" pitchFamily="34" charset="-120"/>
               </a:rPr>
-              <a:t>快適さ・設備</a:t>
+              <a:t>スタッフの対応</a:t>
             </a:r>
             <a:endParaRPr lang="en-US" sz="1300" dirty="0"/>
           </a:p>
@@ -10882,13 +11105,13 @@
       </p:sp>
       <p:sp>
         <p:nvSpPr>
-          <p:cNvPr id="24" name="Text 22"/>
-          <p:cNvSpPr/>
-          <p:nvPr/>
-        </p:nvSpPr>
-        <p:spPr>
-          <a:xfrm>
-            <a:off x="6263640" y="1417320"/>
+          <p:cNvPr id="31" name="Text 29"/>
+          <p:cNvSpPr/>
+          <p:nvPr/>
+        </p:nvSpPr>
+        <p:spPr>
+          <a:xfrm>
+            <a:off x="594360" y="3246120"/>
             <a:ext cx="2377440" cy="365760"/>
           </a:xfrm>
           <a:prstGeom prst="rect">
@@ -10913,7 +11136,7 @@
                 <a:ea typeface="Arial" pitchFamily="34" charset="-122"/>
                 <a:cs typeface="Arial" pitchFamily="34" charset="-120"/>
               </a:rPr>
-              <a:t>スタッフの方々もすごく親切で快適に宿泊できました</a:t>
+              <a:t>送迎バスのドライバーさんのホスピタリティに溢れた対応に感謝です</a:t>
             </a:r>
             <a:endParaRPr lang="en-US" sz="900" dirty="0"/>
           </a:p>
@@ -10921,13 +11144,13 @@
       </p:sp>
       <p:sp>
         <p:nvSpPr>
-          <p:cNvPr id="25" name="Text 23"/>
-          <p:cNvSpPr/>
-          <p:nvPr/>
-        </p:nvSpPr>
-        <p:spPr>
-          <a:xfrm>
-            <a:off x="6263640" y="1828800"/>
+          <p:cNvPr id="32" name="Text 30"/>
+          <p:cNvSpPr/>
+          <p:nvPr/>
+        </p:nvSpPr>
+        <p:spPr>
+          <a:xfrm>
+            <a:off x="594360" y="3657600"/>
             <a:ext cx="2377440" cy="640080"/>
           </a:xfrm>
           <a:prstGeom prst="rect">
@@ -10952,7 +11175,7 @@
                 <a:ea typeface="Arial" pitchFamily="34" charset="-122"/>
                 <a:cs typeface="Arial" pitchFamily="34" charset="-120"/>
               </a:rPr>
-              <a:t>「フロントの方も親切でとても快適に過ごしました」</a:t>
+              <a:t>「とても丁寧な接客で気持ちが良かったです」</a:t>
             </a:r>
             <a:endParaRPr lang="en-US" sz="900" dirty="0"/>
           </a:p>
@@ -10960,13 +11183,13 @@
       </p:sp>
       <p:sp>
         <p:nvSpPr>
-          <p:cNvPr id="26" name="Shape 24"/>
-          <p:cNvSpPr/>
-          <p:nvPr/>
-        </p:nvSpPr>
-        <p:spPr>
-          <a:xfrm>
-            <a:off x="457200" y="2880360"/>
+          <p:cNvPr id="33" name="Shape 31"/>
+          <p:cNvSpPr/>
+          <p:nvPr/>
+        </p:nvSpPr>
+        <p:spPr>
+          <a:xfrm>
+            <a:off x="3291840" y="2880360"/>
             <a:ext cx="2651760" cy="1600200"/>
           </a:xfrm>
           <a:prstGeom prst="rect">
@@ -10987,13 +11210,13 @@
       </p:sp>
       <p:sp>
         <p:nvSpPr>
-          <p:cNvPr id="27" name="Shape 25"/>
-          <p:cNvSpPr/>
-          <p:nvPr/>
-        </p:nvSpPr>
-        <p:spPr>
-          <a:xfrm>
-            <a:off x="457200" y="2880360"/>
+          <p:cNvPr id="34" name="Shape 32"/>
+          <p:cNvSpPr/>
+          <p:nvPr/>
+        </p:nvSpPr>
+        <p:spPr>
+          <a:xfrm>
+            <a:off x="3291840" y="2880360"/>
             <a:ext cx="54864" cy="1600200"/>
           </a:xfrm>
           <a:prstGeom prst="rect">
@@ -11007,13 +11230,13 @@
       </p:sp>
       <p:sp>
         <p:nvSpPr>
-          <p:cNvPr id="28" name="Shape 26"/>
-          <p:cNvSpPr/>
-          <p:nvPr/>
-        </p:nvSpPr>
-        <p:spPr>
-          <a:xfrm>
-            <a:off x="2286000" y="2953512"/>
+          <p:cNvPr id="35" name="Shape 33"/>
+          <p:cNvSpPr/>
+          <p:nvPr/>
+        </p:nvSpPr>
+        <p:spPr>
+          <a:xfrm>
+            <a:off x="5120640" y="2953512"/>
             <a:ext cx="658368" cy="228600"/>
           </a:xfrm>
           <a:prstGeom prst="rect">
@@ -11027,13 +11250,13 @@
       </p:sp>
       <p:sp>
         <p:nvSpPr>
-          <p:cNvPr id="29" name="Text 27"/>
-          <p:cNvSpPr/>
-          <p:nvPr/>
-        </p:nvSpPr>
-        <p:spPr>
-          <a:xfrm>
-            <a:off x="2286000" y="2953512"/>
+          <p:cNvPr id="36" name="Text 34"/>
+          <p:cNvSpPr/>
+          <p:nvPr/>
+        </p:nvSpPr>
+        <p:spPr>
+          <a:xfrm>
+            <a:off x="5120640" y="2953512"/>
             <a:ext cx="658368" cy="228600"/>
           </a:xfrm>
           <a:prstGeom prst="rect">
@@ -11066,13 +11289,13 @@
       </p:sp>
       <p:sp>
         <p:nvSpPr>
-          <p:cNvPr id="30" name="Text 28"/>
-          <p:cNvSpPr/>
-          <p:nvPr/>
-        </p:nvSpPr>
-        <p:spPr>
-          <a:xfrm>
-            <a:off x="594360" y="2953512"/>
+          <p:cNvPr id="37" name="Text 35"/>
+          <p:cNvSpPr/>
+          <p:nvPr/>
+        </p:nvSpPr>
+        <p:spPr>
+          <a:xfrm>
+            <a:off x="3429000" y="2953512"/>
             <a:ext cx="1645920" cy="274320"/>
           </a:xfrm>
           <a:prstGeom prst="rect">
@@ -11097,7 +11320,7 @@
                 <a:ea typeface="Arial" pitchFamily="34" charset="-122"/>
                 <a:cs typeface="Arial" pitchFamily="34" charset="-120"/>
               </a:rPr>
-              <a:t>スタッフの対応</a:t>
+              <a:t>立地・アクセス</a:t>
             </a:r>
             <a:endParaRPr lang="en-US" sz="1300" dirty="0"/>
           </a:p>
@@ -11105,13 +11328,13 @@
       </p:sp>
       <p:sp>
         <p:nvSpPr>
-          <p:cNvPr id="31" name="Text 29"/>
-          <p:cNvSpPr/>
-          <p:nvPr/>
-        </p:nvSpPr>
-        <p:spPr>
-          <a:xfrm>
-            <a:off x="594360" y="3246120"/>
+          <p:cNvPr id="38" name="Text 36"/>
+          <p:cNvSpPr/>
+          <p:nvPr/>
+        </p:nvSpPr>
+        <p:spPr>
+          <a:xfrm>
+            <a:off x="3429000" y="3246120"/>
             <a:ext cx="2377440" cy="365760"/>
           </a:xfrm>
           <a:prstGeom prst="rect">
@@ -11136,7 +11359,7 @@
                 <a:ea typeface="Arial" pitchFamily="34" charset="-122"/>
                 <a:cs typeface="Arial" pitchFamily="34" charset="-120"/>
               </a:rPr>
-              <a:t>スタッフの方々もすごく親切で快適に宿泊できました</a:t>
+              <a:t>イベント会場や駅に近くてとても便利でした</a:t>
             </a:r>
             <a:endParaRPr lang="en-US" sz="900" dirty="0"/>
           </a:p>
@@ -11144,13 +11367,13 @@
       </p:sp>
       <p:sp>
         <p:nvSpPr>
-          <p:cNvPr id="32" name="Text 30"/>
-          <p:cNvSpPr/>
-          <p:nvPr/>
-        </p:nvSpPr>
-        <p:spPr>
-          <a:xfrm>
-            <a:off x="594360" y="3657600"/>
+          <p:cNvPr id="39" name="Text 37"/>
+          <p:cNvSpPr/>
+          <p:nvPr/>
+        </p:nvSpPr>
+        <p:spPr>
+          <a:xfrm>
+            <a:off x="3429000" y="3657600"/>
             <a:ext cx="2377440" cy="640080"/>
           </a:xfrm>
           <a:prstGeom prst="rect">
@@ -11175,7 +11398,7 @@
                 <a:ea typeface="Arial" pitchFamily="34" charset="-122"/>
                 <a:cs typeface="Arial" pitchFamily="34" charset="-120"/>
               </a:rPr>
-              <a:t>「フロントの方も親切でとても快適に過ごしました」</a:t>
+              <a:t>「チェックインやチェックアウトが機械でできるのが便利です」</a:t>
             </a:r>
             <a:endParaRPr lang="en-US" sz="900" dirty="0"/>
           </a:p>
@@ -11183,13 +11406,13 @@
       </p:sp>
       <p:sp>
         <p:nvSpPr>
-          <p:cNvPr id="33" name="Shape 31"/>
-          <p:cNvSpPr/>
-          <p:nvPr/>
-        </p:nvSpPr>
-        <p:spPr>
-          <a:xfrm>
-            <a:off x="3291840" y="2880360"/>
+          <p:cNvPr id="40" name="Shape 38"/>
+          <p:cNvSpPr/>
+          <p:nvPr/>
+        </p:nvSpPr>
+        <p:spPr>
+          <a:xfrm>
+            <a:off x="6126480" y="2880360"/>
             <a:ext cx="2651760" cy="1600200"/>
           </a:xfrm>
           <a:prstGeom prst="rect">
@@ -11210,13 +11433,13 @@
       </p:sp>
       <p:sp>
         <p:nvSpPr>
-          <p:cNvPr id="34" name="Shape 32"/>
-          <p:cNvSpPr/>
-          <p:nvPr/>
-        </p:nvSpPr>
-        <p:spPr>
-          <a:xfrm>
-            <a:off x="3291840" y="2880360"/>
+          <p:cNvPr id="41" name="Shape 39"/>
+          <p:cNvSpPr/>
+          <p:nvPr/>
+        </p:nvSpPr>
+        <p:spPr>
+          <a:xfrm>
+            <a:off x="6126480" y="2880360"/>
             <a:ext cx="54864" cy="1600200"/>
           </a:xfrm>
           <a:prstGeom prst="rect">
@@ -11230,13 +11453,13 @@
       </p:sp>
       <p:sp>
         <p:nvSpPr>
-          <p:cNvPr id="35" name="Shape 33"/>
-          <p:cNvSpPr/>
-          <p:nvPr/>
-        </p:nvSpPr>
-        <p:spPr>
-          <a:xfrm>
-            <a:off x="5120640" y="2953512"/>
+          <p:cNvPr id="42" name="Shape 40"/>
+          <p:cNvSpPr/>
+          <p:nvPr/>
+        </p:nvSpPr>
+        <p:spPr>
+          <a:xfrm>
+            <a:off x="7955280" y="2953512"/>
             <a:ext cx="658368" cy="228600"/>
           </a:xfrm>
           <a:prstGeom prst="rect">
@@ -11250,13 +11473,13 @@
       </p:sp>
       <p:sp>
         <p:nvSpPr>
-          <p:cNvPr id="36" name="Text 34"/>
-          <p:cNvSpPr/>
-          <p:nvPr/>
-        </p:nvSpPr>
-        <p:spPr>
-          <a:xfrm>
-            <a:off x="5120640" y="2953512"/>
+          <p:cNvPr id="43" name="Text 41"/>
+          <p:cNvSpPr/>
+          <p:nvPr/>
+        </p:nvSpPr>
+        <p:spPr>
+          <a:xfrm>
+            <a:off x="7955280" y="2953512"/>
             <a:ext cx="658368" cy="228600"/>
           </a:xfrm>
           <a:prstGeom prst="rect">
@@ -11289,229 +11512,6 @@
       </p:sp>
       <p:sp>
         <p:nvSpPr>
-          <p:cNvPr id="37" name="Text 35"/>
-          <p:cNvSpPr/>
-          <p:nvPr/>
-        </p:nvSpPr>
-        <p:spPr>
-          <a:xfrm>
-            <a:off x="3429000" y="2953512"/>
-            <a:ext cx="1645920" cy="274320"/>
-          </a:xfrm>
-          <a:prstGeom prst="rect">
-            <a:avLst/>
-          </a:prstGeom>
-          <a:noFill/>
-          <a:ln/>
-        </p:spPr>
-        <p:txBody>
-          <a:bodyPr wrap="square" lIns="0" tIns="0" rIns="0" bIns="0" rtlCol="0" anchor="ctr"/>
-          <a:lstStyle/>
-          <a:p>
-            <a:pPr indent="0" marL="0">
-              <a:buNone/>
-            </a:pPr>
-            <a:r>
-              <a:rPr lang="en-US" sz="1300" b="1" dirty="0">
-                <a:solidFill>
-                  <a:srgbClr val="1A2744"/>
-                </a:solidFill>
-                <a:latin typeface="Arial" pitchFamily="34" charset="0"/>
-                <a:ea typeface="Arial" pitchFamily="34" charset="-122"/>
-                <a:cs typeface="Arial" pitchFamily="34" charset="-120"/>
-              </a:rPr>
-              <a:t>立地・アクセス</a:t>
-            </a:r>
-            <a:endParaRPr lang="en-US" sz="1300" dirty="0"/>
-          </a:p>
-        </p:txBody>
-      </p:sp>
-      <p:sp>
-        <p:nvSpPr>
-          <p:cNvPr id="38" name="Text 36"/>
-          <p:cNvSpPr/>
-          <p:nvPr/>
-        </p:nvSpPr>
-        <p:spPr>
-          <a:xfrm>
-            <a:off x="3429000" y="3246120"/>
-            <a:ext cx="2377440" cy="365760"/>
-          </a:xfrm>
-          <a:prstGeom prst="rect">
-            <a:avLst/>
-          </a:prstGeom>
-          <a:noFill/>
-          <a:ln/>
-        </p:spPr>
-        <p:txBody>
-          <a:bodyPr wrap="square" lIns="0" tIns="0" rIns="0" bIns="0" rtlCol="0" anchor="ctr"/>
-          <a:lstStyle/>
-          <a:p>
-            <a:pPr indent="0" marL="0">
-              <a:buNone/>
-            </a:pPr>
-            <a:r>
-              <a:rPr lang="en-US" sz="900" dirty="0">
-                <a:solidFill>
-                  <a:srgbClr val="64748B"/>
-                </a:solidFill>
-                <a:latin typeface="Arial" pitchFamily="34" charset="0"/>
-                <a:ea typeface="Arial" pitchFamily="34" charset="-122"/>
-                <a:cs typeface="Arial" pitchFamily="34" charset="-120"/>
-              </a:rPr>
-              <a:t>バス乗り場はハイアットリージェンシーまで徒歩約3分です</a:t>
-            </a:r>
-            <a:endParaRPr lang="en-US" sz="900" dirty="0"/>
-          </a:p>
-        </p:txBody>
-      </p:sp>
-      <p:sp>
-        <p:nvSpPr>
-          <p:cNvPr id="39" name="Text 37"/>
-          <p:cNvSpPr/>
-          <p:nvPr/>
-        </p:nvSpPr>
-        <p:spPr>
-          <a:xfrm>
-            <a:off x="3429000" y="3657600"/>
-            <a:ext cx="2377440" cy="640080"/>
-          </a:xfrm>
-          <a:prstGeom prst="rect">
-            <a:avLst/>
-          </a:prstGeom>
-          <a:noFill/>
-          <a:ln/>
-        </p:spPr>
-        <p:txBody>
-          <a:bodyPr wrap="square" lIns="0" tIns="0" rIns="0" bIns="0" rtlCol="0" anchor="ctr"/>
-          <a:lstStyle/>
-          <a:p>
-            <a:pPr indent="0" marL="0">
-              <a:buNone/>
-            </a:pPr>
-            <a:r>
-              <a:rPr lang="en-US" sz="900" i="1" dirty="0">
-                <a:solidFill>
-                  <a:srgbClr val="3B7DD8"/>
-                </a:solidFill>
-                <a:latin typeface="Arial" pitchFamily="34" charset="0"/>
-                <a:ea typeface="Arial" pitchFamily="34" charset="-122"/>
-                <a:cs typeface="Arial" pitchFamily="34" charset="-120"/>
-              </a:rPr>
-              <a:t>「ディズニーまでのシャトルバスが出ており、とても便利でありがたかったです」</a:t>
-            </a:r>
-            <a:endParaRPr lang="en-US" sz="900" dirty="0"/>
-          </a:p>
-        </p:txBody>
-      </p:sp>
-      <p:sp>
-        <p:nvSpPr>
-          <p:cNvPr id="40" name="Shape 38"/>
-          <p:cNvSpPr/>
-          <p:nvPr/>
-        </p:nvSpPr>
-        <p:spPr>
-          <a:xfrm>
-            <a:off x="6126480" y="2880360"/>
-            <a:ext cx="2651760" cy="1600200"/>
-          </a:xfrm>
-          <a:prstGeom prst="rect">
-            <a:avLst/>
-          </a:prstGeom>
-          <a:solidFill>
-            <a:srgbClr val="FFFFFF"/>
-          </a:solidFill>
-          <a:ln/>
-          <a:effectLst>
-            <a:outerShdw sx="100000" sy="100000" kx="0" ky="0" algn="bl" rotWithShape="0" blurRad="50800" dist="25400" dir="8100000">
-              <a:srgbClr val="000000">
-                <a:alpha val="10000"/>
-              </a:srgbClr>
-            </a:outerShdw>
-          </a:effectLst>
-        </p:spPr>
-      </p:sp>
-      <p:sp>
-        <p:nvSpPr>
-          <p:cNvPr id="41" name="Shape 39"/>
-          <p:cNvSpPr/>
-          <p:nvPr/>
-        </p:nvSpPr>
-        <p:spPr>
-          <a:xfrm>
-            <a:off x="6126480" y="2880360"/>
-            <a:ext cx="54864" cy="1600200"/>
-          </a:xfrm>
-          <a:prstGeom prst="rect">
-            <a:avLst/>
-          </a:prstGeom>
-          <a:solidFill>
-            <a:srgbClr val="16A34A"/>
-          </a:solidFill>
-          <a:ln/>
-        </p:spPr>
-      </p:sp>
-      <p:sp>
-        <p:nvSpPr>
-          <p:cNvPr id="42" name="Shape 40"/>
-          <p:cNvSpPr/>
-          <p:nvPr/>
-        </p:nvSpPr>
-        <p:spPr>
-          <a:xfrm>
-            <a:off x="7955280" y="2953512"/>
-            <a:ext cx="658368" cy="228600"/>
-          </a:xfrm>
-          <a:prstGeom prst="rect">
-            <a:avLst/>
-          </a:prstGeom>
-          <a:solidFill>
-            <a:srgbClr val="DCFCE7"/>
-          </a:solidFill>
-          <a:ln/>
-        </p:spPr>
-      </p:sp>
-      <p:sp>
-        <p:nvSpPr>
-          <p:cNvPr id="43" name="Text 41"/>
-          <p:cNvSpPr/>
-          <p:nvPr/>
-        </p:nvSpPr>
-        <p:spPr>
-          <a:xfrm>
-            <a:off x="7955280" y="2953512"/>
-            <a:ext cx="658368" cy="228600"/>
-          </a:xfrm>
-          <a:prstGeom prst="rect">
-            <a:avLst/>
-          </a:prstGeom>
-          <a:noFill/>
-          <a:ln/>
-        </p:spPr>
-        <p:txBody>
-          <a:bodyPr wrap="square" lIns="0" tIns="0" rIns="0" bIns="0" rtlCol="0" anchor="ctr"/>
-          <a:lstStyle/>
-          <a:p>
-            <a:pPr algn="ctr" indent="0" marL="0">
-              <a:buNone/>
-            </a:pPr>
-            <a:r>
-              <a:rPr lang="en-US" sz="900" b="1" dirty="0">
-                <a:solidFill>
-                  <a:srgbClr val="16A34A"/>
-                </a:solidFill>
-                <a:latin typeface="Arial" pitchFamily="34" charset="0"/>
-                <a:ea typeface="Arial" pitchFamily="34" charset="-122"/>
-                <a:cs typeface="Arial" pitchFamily="34" charset="-120"/>
-              </a:rPr>
-              <a:t>20件+</a:t>
-            </a:r>
-            <a:endParaRPr lang="en-US" sz="900" dirty="0"/>
-          </a:p>
-        </p:txBody>
-      </p:sp>
-      <p:sp>
-        <p:nvSpPr>
           <p:cNvPr id="44" name="Text 42"/>
           <p:cNvSpPr/>
           <p:nvPr/>
@@ -11582,7 +11582,7 @@
                 <a:ea typeface="Arial" pitchFamily="34" charset="-122"/>
                 <a:cs typeface="Arial" pitchFamily="34" charset="-120"/>
               </a:rPr>
-              <a:t>お部屋が可愛く、ちょっとした仕掛けもあって、楽しかったです⭐︎ ローソンがホテルにあるので便利でした</a:t>
+              <a:t>・内装が綺麗 ・チェックイン、チェックアウトが楽 ・ホテル内にコンビニが併設 ・部屋が広かった ・強いて言うならお...</a:t>
             </a:r>
             <a:endParaRPr lang="en-US" sz="900" dirty="0"/>
           </a:p>
@@ -11621,7 +11621,7 @@
                 <a:ea typeface="Arial" pitchFamily="34" charset="-122"/>
                 <a:cs typeface="Arial" pitchFamily="34" charset="-120"/>
               </a:rPr>
-              <a:t>「ドリンクサービスあり　コンビニ併設」</a:t>
+              <a:t>「ホテルにはローソンもある」</a:t>
             </a:r>
             <a:endParaRPr lang="en-US" sz="900" dirty="0"/>
           </a:p>
@@ -12311,7 +12311,7 @@
                           <a:ea typeface="Arial" pitchFamily="34" charset="-122"/>
                           <a:cs typeface="Arial" pitchFamily="34" charset="-120"/>
                         </a:rPr>
-                        <a:t>To Narita Airport need 2900 yen/person Need to walk to Hy...</a:t>
+                        <a:t>送迎バスのドライバーさんのホスピタリティに溢れた対応に感謝です</a:t>
                       </a:r>
                       <a:endParaRPr lang="en-US" sz="900" dirty="0">
                         <a:latin typeface="Arial" charset="0"/>
@@ -12379,7 +12379,7 @@
                           <a:ea typeface="Arial" pitchFamily="34" charset="-122"/>
                           <a:cs typeface="Arial" pitchFamily="34" charset="-120"/>
                         </a:rPr>
-                        <a:t>47件</a:t>
+                        <a:t>46件</a:t>
                       </a:r>
                       <a:endParaRPr lang="en-US" sz="900" dirty="0">
                         <a:latin typeface="Arial" charset="0"/>
@@ -12927,7 +12927,7 @@
                           <a:ea typeface="Arial" pitchFamily="34" charset="-122"/>
                           <a:cs typeface="Arial" pitchFamily="34" charset="-120"/>
                         </a:rPr>
-                        <a:t>6件</a:t>
+                        <a:t>5件</a:t>
                       </a:r>
                       <a:endParaRPr lang="en-US" sz="900" dirty="0">
                         <a:latin typeface="Arial" charset="0"/>
@@ -13065,7 +13065,7 @@
                           <a:ea typeface="Arial" pitchFamily="34" charset="-122"/>
                           <a:cs typeface="Arial" pitchFamily="34" charset="-120"/>
                         </a:rPr>
-                        <a:t>部屋の狭さ</a:t>
+                        <a:t>エアコン・空調</a:t>
                       </a:r>
                       <a:endParaRPr lang="en-US" sz="900" dirty="0">
                         <a:latin typeface="Arial" charset="0"/>
@@ -13133,7 +13133,7 @@
                           <a:ea typeface="Arial" pitchFamily="34" charset="-122"/>
                           <a:cs typeface="Arial" pitchFamily="34" charset="-120"/>
                         </a:rPr>
-                        <a:t>小さいキッズスペースがあったり、ウェルカムドリンクをゆっくり飲めるスペースがあったりととても過ごしやすかったです</a:t>
+                        <a:t>エアコンや冷蔵庫の音が気になりました エアコンや冷蔵庫の音が気になりました</a:t>
                       </a:r>
                       <a:endParaRPr lang="en-US" sz="900" dirty="0">
                         <a:latin typeface="Arial" charset="0"/>
@@ -13201,7 +13201,7 @@
                           <a:ea typeface="Arial" pitchFamily="34" charset="-122"/>
                           <a:cs typeface="Arial" pitchFamily="34" charset="-120"/>
                         </a:rPr>
-                        <a:t>3件</a:t>
+                        <a:t>5件</a:t>
                       </a:r>
                       <a:endParaRPr lang="en-US" sz="900" dirty="0">
                         <a:latin typeface="Arial" charset="0"/>
@@ -13339,7 +13339,7 @@
                           <a:ea typeface="Arial" pitchFamily="34" charset="-122"/>
                           <a:cs typeface="Arial" pitchFamily="34" charset="-120"/>
                         </a:rPr>
-                        <a:t>エアコン・空調</a:t>
+                        <a:t>防音性能</a:t>
                       </a:r>
                       <a:endParaRPr lang="en-US" sz="900" dirty="0">
                         <a:latin typeface="Arial" charset="0"/>
@@ -13407,7 +13407,7 @@
                           <a:ea typeface="Arial" pitchFamily="34" charset="-122"/>
                           <a:cs typeface="Arial" pitchFamily="34" charset="-120"/>
                         </a:rPr>
-                        <a:t>All facilities are excellent, free coffee downstairs and ...</a:t>
+                        <a:t>エアコンや冷蔵庫の音が気になりました エアコンや冷蔵庫の音が気になりました</a:t>
                       </a:r>
                       <a:endParaRPr lang="en-US" sz="900" dirty="0">
                         <a:latin typeface="Arial" charset="0"/>
@@ -13475,7 +13475,7 @@
                           <a:ea typeface="Arial" pitchFamily="34" charset="-122"/>
                           <a:cs typeface="Arial" pitchFamily="34" charset="-120"/>
                         </a:rPr>
-                        <a:t>3件</a:t>
+                        <a:t>2件</a:t>
                       </a:r>
                       <a:endParaRPr lang="en-US" sz="900" dirty="0">
                         <a:latin typeface="Arial" charset="0"/>
@@ -13613,7 +13613,7 @@
                           <a:ea typeface="Arial" pitchFamily="34" charset="-122"/>
                           <a:cs typeface="Arial" pitchFamily="34" charset="-120"/>
                         </a:rPr>
-                        <a:t>防音性能</a:t>
+                        <a:t>部屋の狭さ</a:t>
                       </a:r>
                       <a:endParaRPr lang="en-US" sz="900" dirty="0">
                         <a:latin typeface="Arial" charset="0"/>
@@ -13681,7 +13681,7 @@
                           <a:ea typeface="Arial" pitchFamily="34" charset="-122"/>
                           <a:cs typeface="Arial" pitchFamily="34" charset="-120"/>
                         </a:rPr>
-                        <a:t>小さな子連れが多いホテルな印象でしたが廊下や隣の部屋から声や音が聞こえてくる事もなく快適に過ごすことができました</a:t>
+                        <a:t>小さいキッズスペースがあったり、ウェルカムドリンクをゆっくり飲めるスペースがあったりととても過ごしやすかったです</a:t>
                       </a:r>
                       <a:endParaRPr lang="en-US" sz="900" dirty="0">
                         <a:latin typeface="Arial" charset="0"/>
@@ -13749,7 +13749,7 @@
                           <a:ea typeface="Arial" pitchFamily="34" charset="-122"/>
                           <a:cs typeface="Arial" pitchFamily="34" charset="-120"/>
                         </a:rPr>
-                        <a:t>1件</a:t>
+                        <a:t>2件</a:t>
                       </a:r>
                       <a:endParaRPr lang="en-US" sz="900" dirty="0">
                         <a:latin typeface="Arial" charset="0"/>

--- a/納品レポート/ホテル別レポート/comfort_suites_tokyobay_口コミ分析レポート.pptx
+++ b/納品レポート/ホテル別レポート/comfort_suites_tokyobay_口コミ分析レポート.pptx
@@ -214,10 +214,10 @@
                   <c:v>9.38</c:v>
                 </c:pt>
                 <c:pt idx="2">
-                  <c:v>9.31</c:v>
+                  <c:v>9.27</c:v>
                 </c:pt>
                 <c:pt idx="3">
-                  <c:v>9.29</c:v>
+                  <c:v>9.24</c:v>
                 </c:pt>
                 <c:pt idx="4">
                   <c:v>9.09</c:v>
@@ -566,7 +566,7 @@
               <c:numCache>
                 <c:ptCount val="3"/>
                 <c:pt idx="0">
-                  <c:v>136</c:v>
+                  <c:v>137</c:v>
                 </c:pt>
                 <c:pt idx="1">
                   <c:v>5</c:v>
@@ -781,13 +781,13 @@
                 <c:formatCode>General</c:formatCode>
                 <c:ptCount val="6"/>
                 <c:pt idx="0">
-                  <c:v>87</c:v>
+                  <c:v>86</c:v>
                 </c:pt>
                 <c:pt idx="1">
                   <c:v>13</c:v>
                 </c:pt>
                 <c:pt idx="2">
-                  <c:v>36</c:v>
+                  <c:v>38</c:v>
                 </c:pt>
                 <c:pt idx="3">
                   <c:v>3</c:v>
@@ -2747,7 +2747,7 @@
                 <a:ea typeface="Arial" pitchFamily="34" charset="-122"/>
                 <a:cs typeface="Arial" pitchFamily="34" charset="-120"/>
               </a:rPr>
-              <a:t>レビュー総数：142件（6サイト）</a:t>
+              <a:t>レビュー総数：143件（6サイト）</a:t>
             </a:r>
             <a:endParaRPr lang="en-US" sz="1000" dirty="0"/>
           </a:p>
@@ -2767,7 +2767,7 @@
                 <a:ea typeface="Arial" pitchFamily="34" charset="-122"/>
                 <a:cs typeface="Arial" pitchFamily="34" charset="-120"/>
               </a:rPr>
-              <a:t>作成日：2026年3月23日</a:t>
+              <a:t>作成日：2026年3月24日</a:t>
             </a:r>
             <a:endParaRPr lang="en-US" sz="1000" dirty="0"/>
           </a:p>
@@ -3313,7 +3313,7 @@
                           <a:ea typeface="Arial" pitchFamily="34" charset="-122"/>
                           <a:cs typeface="Arial" pitchFamily="34" charset="-120"/>
                         </a:rPr>
-                        <a:t>9.24点</a:t>
+                        <a:t>9.22点</a:t>
                       </a:r>
                       <a:endParaRPr lang="en-US" sz="1000" dirty="0">
                         <a:latin typeface="Arial" charset="0"/>
@@ -5048,7 +5048,7 @@
                 <a:ea typeface="Arial" pitchFamily="34" charset="-122"/>
                 <a:cs typeface="Arial" pitchFamily="34" charset="-120"/>
               </a:rPr>
-              <a:t>9.24</a:t>
+              <a:t>9.22</a:t>
             </a:r>
             <a:endParaRPr lang="en-US" sz="3200" dirty="0"/>
           </a:p>
@@ -5423,7 +5423,7 @@
                 <a:ea typeface="Arial" pitchFamily="34" charset="-122"/>
                 <a:cs typeface="Arial" pitchFamily="34" charset="-120"/>
               </a:rPr>
-              <a:t>142件</a:t>
+              <a:t>143件</a:t>
             </a:r>
             <a:endParaRPr lang="en-US" sz="3200" dirty="0"/>
           </a:p>
@@ -5551,6 +5551,86 @@
                 <a:ea typeface="Arial" pitchFamily="34" charset="-122"/>
                 <a:cs typeface="Arial" pitchFamily="34" charset="-120"/>
               </a:rPr>
+              <a:t>朝食 </a:t>
+            </a:r>
+            <a:endParaRPr lang="en-US" sz="1100" dirty="0"/>
+          </a:p>
+          <a:p>
+            <a:pPr indent="0" marL="0">
+              <a:spcAft>
+                <a:spcPts val="200"/>
+              </a:spcAft>
+              <a:buNone/>
+            </a:pPr>
+            <a:r>
+              <a:rPr lang="en-US" sz="900" dirty="0">
+                <a:solidFill>
+                  <a:srgbClr val="64748B"/>
+                </a:solidFill>
+                <a:latin typeface="Arial" pitchFamily="34" charset="0"/>
+                <a:ea typeface="Arial" pitchFamily="34" charset="-122"/>
+                <a:cs typeface="Arial" pitchFamily="34" charset="-120"/>
+              </a:rPr>
+              <a:t>  朝食のバイキングは子供も食べられるものがおおくてありがたかったです</a:t>
+            </a:r>
+            <a:endParaRPr lang="en-US" sz="1100" dirty="0"/>
+          </a:p>
+          <a:p>
+            <a:pPr indent="0" marL="0">
+              <a:spcAft>
+                <a:spcPts val="200"/>
+              </a:spcAft>
+              <a:buNone/>
+            </a:pPr>
+            <a:r>
+              <a:rPr lang="en-US" sz="1100" b="1" dirty="0">
+                <a:solidFill>
+                  <a:srgbClr val="334155"/>
+                </a:solidFill>
+                <a:latin typeface="Arial" pitchFamily="34" charset="0"/>
+                <a:ea typeface="Arial" pitchFamily="34" charset="-122"/>
+                <a:cs typeface="Arial" pitchFamily="34" charset="-120"/>
+              </a:rPr>
+              <a:t>快適さ・設備 </a:t>
+            </a:r>
+            <a:endParaRPr lang="en-US" sz="1100" dirty="0"/>
+          </a:p>
+          <a:p>
+            <a:pPr indent="0" marL="0">
+              <a:spcAft>
+                <a:spcPts val="200"/>
+              </a:spcAft>
+              <a:buNone/>
+            </a:pPr>
+            <a:r>
+              <a:rPr lang="en-US" sz="900" dirty="0">
+                <a:solidFill>
+                  <a:srgbClr val="64748B"/>
+                </a:solidFill>
+                <a:latin typeface="Arial" pitchFamily="34" charset="0"/>
+                <a:ea typeface="Arial" pitchFamily="34" charset="-122"/>
+                <a:cs typeface="Arial" pitchFamily="34" charset="-120"/>
+              </a:rPr>
+              <a:t>  お部屋はベッドがくっついているのがよくて選んだので、快適でよかったです</a:t>
+            </a:r>
+            <a:endParaRPr lang="en-US" sz="1100" dirty="0"/>
+          </a:p>
+          <a:p>
+            <a:pPr indent="0" marL="0">
+              <a:spcAft>
+                <a:spcPts val="200"/>
+              </a:spcAft>
+              <a:buNone/>
+            </a:pPr>
+            <a:r>
+              <a:rPr lang="en-US" sz="1100" b="1" dirty="0">
+                <a:solidFill>
+                  <a:srgbClr val="334155"/>
+                </a:solidFill>
+                <a:latin typeface="Arial" pitchFamily="34" charset="0"/>
+                <a:ea typeface="Arial" pitchFamily="34" charset="-122"/>
+                <a:cs typeface="Arial" pitchFamily="34" charset="-120"/>
+              </a:rPr>
               <a:t>清潔さ・清掃 </a:t>
             </a:r>
             <a:endParaRPr lang="en-US" sz="1100" dirty="0"/>
@@ -5575,86 +5655,6 @@
             </a:r>
             <a:endParaRPr lang="en-US" sz="1100" dirty="0"/>
           </a:p>
-          <a:p>
-            <a:pPr indent="0" marL="0">
-              <a:spcAft>
-                <a:spcPts val="200"/>
-              </a:spcAft>
-              <a:buNone/>
-            </a:pPr>
-            <a:r>
-              <a:rPr lang="en-US" sz="1100" b="1" dirty="0">
-                <a:solidFill>
-                  <a:srgbClr val="334155"/>
-                </a:solidFill>
-                <a:latin typeface="Arial" pitchFamily="34" charset="0"/>
-                <a:ea typeface="Arial" pitchFamily="34" charset="-122"/>
-                <a:cs typeface="Arial" pitchFamily="34" charset="-120"/>
-              </a:rPr>
-              <a:t>朝食 </a:t>
-            </a:r>
-            <a:endParaRPr lang="en-US" sz="1100" dirty="0"/>
-          </a:p>
-          <a:p>
-            <a:pPr indent="0" marL="0">
-              <a:spcAft>
-                <a:spcPts val="200"/>
-              </a:spcAft>
-              <a:buNone/>
-            </a:pPr>
-            <a:r>
-              <a:rPr lang="en-US" sz="900" dirty="0">
-                <a:solidFill>
-                  <a:srgbClr val="64748B"/>
-                </a:solidFill>
-                <a:latin typeface="Arial" pitchFamily="34" charset="0"/>
-                <a:ea typeface="Arial" pitchFamily="34" charset="-122"/>
-                <a:cs typeface="Arial" pitchFamily="34" charset="-120"/>
-              </a:rPr>
-              <a:t>  朝食も本当に美味しくて、種類もたくさんで是非また泊まらせていただきたいです</a:t>
-            </a:r>
-            <a:endParaRPr lang="en-US" sz="1100" dirty="0"/>
-          </a:p>
-          <a:p>
-            <a:pPr indent="0" marL="0">
-              <a:spcAft>
-                <a:spcPts val="200"/>
-              </a:spcAft>
-              <a:buNone/>
-            </a:pPr>
-            <a:r>
-              <a:rPr lang="en-US" sz="1100" b="1" dirty="0">
-                <a:solidFill>
-                  <a:srgbClr val="334155"/>
-                </a:solidFill>
-                <a:latin typeface="Arial" pitchFamily="34" charset="0"/>
-                <a:ea typeface="Arial" pitchFamily="34" charset="-122"/>
-                <a:cs typeface="Arial" pitchFamily="34" charset="-120"/>
-              </a:rPr>
-              <a:t>快適さ・設備 </a:t>
-            </a:r>
-            <a:endParaRPr lang="en-US" sz="1100" dirty="0"/>
-          </a:p>
-          <a:p>
-            <a:pPr indent="0" marL="0">
-              <a:spcAft>
-                <a:spcPts val="200"/>
-              </a:spcAft>
-              <a:buNone/>
-            </a:pPr>
-            <a:r>
-              <a:rPr lang="en-US" sz="900" dirty="0">
-                <a:solidFill>
-                  <a:srgbClr val="64748B"/>
-                </a:solidFill>
-                <a:latin typeface="Arial" pitchFamily="34" charset="0"/>
-                <a:ea typeface="Arial" pitchFamily="34" charset="-122"/>
-                <a:cs typeface="Arial" pitchFamily="34" charset="-120"/>
-              </a:rPr>
-              <a:t>  お部屋はベッドがくっついているのがよくて選んだので、快適でよかったです</a:t>
-            </a:r>
-            <a:endParaRPr lang="en-US" sz="1100" dirty="0"/>
-          </a:p>
         </p:txBody>
       </p:sp>
       <p:sp>
@@ -5859,7 +5859,7 @@
                 <a:ea typeface="Arial" pitchFamily="34" charset="-122"/>
                 <a:cs typeface="Arial" pitchFamily="34" charset="-120"/>
               </a:rPr>
-              <a:t>朝食の改善要望 </a:t>
+              <a:t>エアコン・空調 </a:t>
             </a:r>
             <a:endParaRPr lang="en-US" sz="1100" dirty="0"/>
           </a:p>
@@ -5879,7 +5879,7 @@
                 <a:ea typeface="Arial" pitchFamily="34" charset="-122"/>
                 <a:cs typeface="Arial" pitchFamily="34" charset="-120"/>
               </a:rPr>
-              <a:t>  朝食はそれなりの品数で美味しかったし。ドリンクサービスあり　コンビニ併設。駐車場あり。1泊1500円。ディズニーに...</a:t>
+              <a:t>  エアコンや冷蔵庫の音が気になりました エアコンや冷蔵庫の音が気になりました</a:t>
             </a:r>
             <a:endParaRPr lang="en-US" sz="1100" dirty="0"/>
           </a:p>
@@ -6232,7 +6232,7 @@
                 <a:ea typeface="Arial" pitchFamily="34" charset="-122"/>
                 <a:cs typeface="Arial" pitchFamily="34" charset="-120"/>
               </a:rPr>
-              <a:t>9.24</a:t>
+              <a:t>9.22</a:t>
             </a:r>
             <a:endParaRPr lang="en-US" sz="3200" dirty="0"/>
           </a:p>
@@ -6607,7 +6607,7 @@
                 <a:ea typeface="Arial" pitchFamily="34" charset="-122"/>
                 <a:cs typeface="Arial" pitchFamily="34" charset="-120"/>
               </a:rPr>
-              <a:t>142件</a:t>
+              <a:t>143件</a:t>
             </a:r>
             <a:endParaRPr lang="en-US" sz="3200" dirty="0"/>
           </a:p>
@@ -8221,7 +8221,7 @@
                           <a:ea typeface="Arial" pitchFamily="34" charset="-122"/>
                           <a:cs typeface="Arial" pitchFamily="34" charset="-120"/>
                         </a:rPr>
-                        <a:t>29</a:t>
+                        <a:t>30</a:t>
                       </a:r>
                       <a:endParaRPr lang="en-US" sz="900" dirty="0">
                         <a:latin typeface="Arial" charset="0"/>
@@ -8289,7 +8289,7 @@
                           <a:ea typeface="Arial" pitchFamily="34" charset="-122"/>
                           <a:cs typeface="Arial" pitchFamily="34" charset="-120"/>
                         </a:rPr>
-                        <a:t>4.66</a:t>
+                        <a:t>4.63</a:t>
                       </a:r>
                       <a:endParaRPr lang="en-US" sz="900" dirty="0">
                         <a:latin typeface="Arial" charset="0"/>
@@ -8425,7 +8425,7 @@
                           <a:ea typeface="Arial" pitchFamily="34" charset="-122"/>
                           <a:cs typeface="Arial" pitchFamily="34" charset="-120"/>
                         </a:rPr>
-                        <a:t>9.31</a:t>
+                        <a:t>9.27</a:t>
                       </a:r>
                       <a:endParaRPr lang="en-US" sz="900" dirty="0">
                         <a:latin typeface="Arial" charset="0"/>
@@ -8631,7 +8631,7 @@
                           <a:ea typeface="Arial" pitchFamily="34" charset="-122"/>
                           <a:cs typeface="Arial" pitchFamily="34" charset="-120"/>
                         </a:rPr>
-                        <a:t>4.64</a:t>
+                        <a:t>4.62</a:t>
                       </a:r>
                       <a:endParaRPr lang="en-US" sz="900" dirty="0">
                         <a:latin typeface="Arial" charset="0"/>
@@ -8767,7 +8767,7 @@
                           <a:ea typeface="Arial" pitchFamily="34" charset="-122"/>
                           <a:cs typeface="Arial" pitchFamily="34" charset="-120"/>
                         </a:rPr>
-                        <a:t>9.29</a:t>
+                        <a:t>9.24</a:t>
                       </a:r>
                       <a:endParaRPr lang="en-US" sz="900" dirty="0">
                         <a:latin typeface="Arial" charset="0"/>
@@ -9859,7 +9859,7 @@
                 <a:ea typeface="Arial" pitchFamily="34" charset="-122"/>
                 <a:cs typeface="Arial" pitchFamily="34" charset="-120"/>
               </a:rPr>
-              <a:t>136件（95.8%）</a:t>
+              <a:t>137件（95.8%）</a:t>
             </a:r>
             <a:endParaRPr lang="en-US" sz="1100" dirty="0"/>
           </a:p>
@@ -10428,6 +10428,452 @@
                 <a:ea typeface="Arial" pitchFamily="34" charset="-122"/>
                 <a:cs typeface="Arial" pitchFamily="34" charset="-120"/>
               </a:rPr>
+              <a:t>朝食</a:t>
+            </a:r>
+            <a:endParaRPr lang="en-US" sz="1300" dirty="0"/>
+          </a:p>
+        </p:txBody>
+      </p:sp>
+      <p:sp>
+        <p:nvSpPr>
+          <p:cNvPr id="10" name="Text 8"/>
+          <p:cNvSpPr/>
+          <p:nvPr/>
+        </p:nvSpPr>
+        <p:spPr>
+          <a:xfrm>
+            <a:off x="594360" y="1417320"/>
+            <a:ext cx="2377440" cy="365760"/>
+          </a:xfrm>
+          <a:prstGeom prst="rect">
+            <a:avLst/>
+          </a:prstGeom>
+          <a:noFill/>
+          <a:ln/>
+        </p:spPr>
+        <p:txBody>
+          <a:bodyPr wrap="square" lIns="0" tIns="0" rIns="0" bIns="0" rtlCol="0" anchor="ctr"/>
+          <a:lstStyle/>
+          <a:p>
+            <a:pPr indent="0" marL="0">
+              <a:buNone/>
+            </a:pPr>
+            <a:r>
+              <a:rPr lang="en-US" sz="900" dirty="0">
+                <a:solidFill>
+                  <a:srgbClr val="64748B"/>
+                </a:solidFill>
+                <a:latin typeface="Arial" pitchFamily="34" charset="0"/>
+                <a:ea typeface="Arial" pitchFamily="34" charset="-122"/>
+                <a:cs typeface="Arial" pitchFamily="34" charset="-120"/>
+              </a:rPr>
+              <a:t>朝食のバイキングは子供も食べられるものがおおくてありがたかったです</a:t>
+            </a:r>
+            <a:endParaRPr lang="en-US" sz="900" dirty="0"/>
+          </a:p>
+        </p:txBody>
+      </p:sp>
+      <p:sp>
+        <p:nvSpPr>
+          <p:cNvPr id="11" name="Text 9"/>
+          <p:cNvSpPr/>
+          <p:nvPr/>
+        </p:nvSpPr>
+        <p:spPr>
+          <a:xfrm>
+            <a:off x="594360" y="1828800"/>
+            <a:ext cx="2377440" cy="640080"/>
+          </a:xfrm>
+          <a:prstGeom prst="rect">
+            <a:avLst/>
+          </a:prstGeom>
+          <a:noFill/>
+          <a:ln/>
+        </p:spPr>
+        <p:txBody>
+          <a:bodyPr wrap="square" lIns="0" tIns="0" rIns="0" bIns="0" rtlCol="0" anchor="ctr"/>
+          <a:lstStyle/>
+          <a:p>
+            <a:pPr indent="0" marL="0">
+              <a:buNone/>
+            </a:pPr>
+            <a:r>
+              <a:rPr lang="en-US" sz="900" i="1" dirty="0">
+                <a:solidFill>
+                  <a:srgbClr val="3B7DD8"/>
+                </a:solidFill>
+                <a:latin typeface="Arial" pitchFamily="34" charset="0"/>
+                <a:ea typeface="Arial" pitchFamily="34" charset="-122"/>
+                <a:cs typeface="Arial" pitchFamily="34" charset="-120"/>
+              </a:rPr>
+              <a:t>「ウェルカムドリンクや朝食のブュッフェ、それに部屋も過ごしやく1日楽しんで疲れた体を休めることができました」</a:t>
+            </a:r>
+            <a:endParaRPr lang="en-US" sz="900" dirty="0"/>
+          </a:p>
+        </p:txBody>
+      </p:sp>
+      <p:sp>
+        <p:nvSpPr>
+          <p:cNvPr id="12" name="Shape 10"/>
+          <p:cNvSpPr/>
+          <p:nvPr/>
+        </p:nvSpPr>
+        <p:spPr>
+          <a:xfrm>
+            <a:off x="3291840" y="1051560"/>
+            <a:ext cx="2651760" cy="1600200"/>
+          </a:xfrm>
+          <a:prstGeom prst="rect">
+            <a:avLst/>
+          </a:prstGeom>
+          <a:solidFill>
+            <a:srgbClr val="FFFFFF"/>
+          </a:solidFill>
+          <a:ln/>
+          <a:effectLst>
+            <a:outerShdw sx="100000" sy="100000" kx="0" ky="0" algn="bl" rotWithShape="0" blurRad="50800" dist="25400" dir="8100000">
+              <a:srgbClr val="000000">
+                <a:alpha val="10000"/>
+              </a:srgbClr>
+            </a:outerShdw>
+          </a:effectLst>
+        </p:spPr>
+      </p:sp>
+      <p:sp>
+        <p:nvSpPr>
+          <p:cNvPr id="13" name="Shape 11"/>
+          <p:cNvSpPr/>
+          <p:nvPr/>
+        </p:nvSpPr>
+        <p:spPr>
+          <a:xfrm>
+            <a:off x="3291840" y="1051560"/>
+            <a:ext cx="54864" cy="1600200"/>
+          </a:xfrm>
+          <a:prstGeom prst="rect">
+            <a:avLst/>
+          </a:prstGeom>
+          <a:solidFill>
+            <a:srgbClr val="16A34A"/>
+          </a:solidFill>
+          <a:ln/>
+        </p:spPr>
+      </p:sp>
+      <p:sp>
+        <p:nvSpPr>
+          <p:cNvPr id="14" name="Shape 12"/>
+          <p:cNvSpPr/>
+          <p:nvPr/>
+        </p:nvSpPr>
+        <p:spPr>
+          <a:xfrm>
+            <a:off x="5120640" y="1124712"/>
+            <a:ext cx="658368" cy="228600"/>
+          </a:xfrm>
+          <a:prstGeom prst="rect">
+            <a:avLst/>
+          </a:prstGeom>
+          <a:solidFill>
+            <a:srgbClr val="DCFCE7"/>
+          </a:solidFill>
+          <a:ln/>
+        </p:spPr>
+      </p:sp>
+      <p:sp>
+        <p:nvSpPr>
+          <p:cNvPr id="15" name="Text 13"/>
+          <p:cNvSpPr/>
+          <p:nvPr/>
+        </p:nvSpPr>
+        <p:spPr>
+          <a:xfrm>
+            <a:off x="5120640" y="1124712"/>
+            <a:ext cx="658368" cy="228600"/>
+          </a:xfrm>
+          <a:prstGeom prst="rect">
+            <a:avLst/>
+          </a:prstGeom>
+          <a:noFill/>
+          <a:ln/>
+        </p:spPr>
+        <p:txBody>
+          <a:bodyPr wrap="square" lIns="0" tIns="0" rIns="0" bIns="0" rtlCol="0" anchor="ctr"/>
+          <a:lstStyle/>
+          <a:p>
+            <a:pPr algn="ctr" indent="0" marL="0">
+              <a:buNone/>
+            </a:pPr>
+            <a:r>
+              <a:rPr lang="en-US" sz="900" b="1" dirty="0">
+                <a:solidFill>
+                  <a:srgbClr val="16A34A"/>
+                </a:solidFill>
+                <a:latin typeface="Arial" pitchFamily="34" charset="0"/>
+                <a:ea typeface="Arial" pitchFamily="34" charset="-122"/>
+                <a:cs typeface="Arial" pitchFamily="34" charset="-120"/>
+              </a:rPr>
+              <a:t>20件+</a:t>
+            </a:r>
+            <a:endParaRPr lang="en-US" sz="900" dirty="0"/>
+          </a:p>
+        </p:txBody>
+      </p:sp>
+      <p:sp>
+        <p:nvSpPr>
+          <p:cNvPr id="16" name="Text 14"/>
+          <p:cNvSpPr/>
+          <p:nvPr/>
+        </p:nvSpPr>
+        <p:spPr>
+          <a:xfrm>
+            <a:off x="3429000" y="1124712"/>
+            <a:ext cx="1645920" cy="274320"/>
+          </a:xfrm>
+          <a:prstGeom prst="rect">
+            <a:avLst/>
+          </a:prstGeom>
+          <a:noFill/>
+          <a:ln/>
+        </p:spPr>
+        <p:txBody>
+          <a:bodyPr wrap="square" lIns="0" tIns="0" rIns="0" bIns="0" rtlCol="0" anchor="ctr"/>
+          <a:lstStyle/>
+          <a:p>
+            <a:pPr indent="0" marL="0">
+              <a:buNone/>
+            </a:pPr>
+            <a:r>
+              <a:rPr lang="en-US" sz="1300" b="1" dirty="0">
+                <a:solidFill>
+                  <a:srgbClr val="1A2744"/>
+                </a:solidFill>
+                <a:latin typeface="Arial" pitchFamily="34" charset="0"/>
+                <a:ea typeface="Arial" pitchFamily="34" charset="-122"/>
+                <a:cs typeface="Arial" pitchFamily="34" charset="-120"/>
+              </a:rPr>
+              <a:t>快適さ・設備</a:t>
+            </a:r>
+            <a:endParaRPr lang="en-US" sz="1300" dirty="0"/>
+          </a:p>
+        </p:txBody>
+      </p:sp>
+      <p:sp>
+        <p:nvSpPr>
+          <p:cNvPr id="17" name="Text 15"/>
+          <p:cNvSpPr/>
+          <p:nvPr/>
+        </p:nvSpPr>
+        <p:spPr>
+          <a:xfrm>
+            <a:off x="3429000" y="1417320"/>
+            <a:ext cx="2377440" cy="365760"/>
+          </a:xfrm>
+          <a:prstGeom prst="rect">
+            <a:avLst/>
+          </a:prstGeom>
+          <a:noFill/>
+          <a:ln/>
+        </p:spPr>
+        <p:txBody>
+          <a:bodyPr wrap="square" lIns="0" tIns="0" rIns="0" bIns="0" rtlCol="0" anchor="ctr"/>
+          <a:lstStyle/>
+          <a:p>
+            <a:pPr indent="0" marL="0">
+              <a:buNone/>
+            </a:pPr>
+            <a:r>
+              <a:rPr lang="en-US" sz="900" dirty="0">
+                <a:solidFill>
+                  <a:srgbClr val="64748B"/>
+                </a:solidFill>
+                <a:latin typeface="Arial" pitchFamily="34" charset="0"/>
+                <a:ea typeface="Arial" pitchFamily="34" charset="-122"/>
+                <a:cs typeface="Arial" pitchFamily="34" charset="-120"/>
+              </a:rPr>
+              <a:t>お部屋はベッドがくっついているのがよくて選んだので、快適でよかったです</a:t>
+            </a:r>
+            <a:endParaRPr lang="en-US" sz="900" dirty="0"/>
+          </a:p>
+        </p:txBody>
+      </p:sp>
+      <p:sp>
+        <p:nvSpPr>
+          <p:cNvPr id="18" name="Text 16"/>
+          <p:cNvSpPr/>
+          <p:nvPr/>
+        </p:nvSpPr>
+        <p:spPr>
+          <a:xfrm>
+            <a:off x="3429000" y="1828800"/>
+            <a:ext cx="2377440" cy="640080"/>
+          </a:xfrm>
+          <a:prstGeom prst="rect">
+            <a:avLst/>
+          </a:prstGeom>
+          <a:noFill/>
+          <a:ln/>
+        </p:spPr>
+        <p:txBody>
+          <a:bodyPr wrap="square" lIns="0" tIns="0" rIns="0" bIns="0" rtlCol="0" anchor="ctr"/>
+          <a:lstStyle/>
+          <a:p>
+            <a:pPr indent="0" marL="0">
+              <a:buNone/>
+            </a:pPr>
+            <a:r>
+              <a:rPr lang="en-US" sz="900" i="1" dirty="0">
+                <a:solidFill>
+                  <a:srgbClr val="3B7DD8"/>
+                </a:solidFill>
+                <a:latin typeface="Arial" pitchFamily="34" charset="0"/>
+                <a:ea typeface="Arial" pitchFamily="34" charset="-122"/>
+                <a:cs typeface="Arial" pitchFamily="34" charset="-120"/>
+              </a:rPr>
+              <a:t>「小学生までなら添い寝無料で、小6・小3と添い寝しましたが大きめのベッドだったので4人でも余裕でした」</a:t>
+            </a:r>
+            <a:endParaRPr lang="en-US" sz="900" dirty="0"/>
+          </a:p>
+        </p:txBody>
+      </p:sp>
+      <p:sp>
+        <p:nvSpPr>
+          <p:cNvPr id="19" name="Shape 17"/>
+          <p:cNvSpPr/>
+          <p:nvPr/>
+        </p:nvSpPr>
+        <p:spPr>
+          <a:xfrm>
+            <a:off x="6126480" y="1051560"/>
+            <a:ext cx="2651760" cy="1600200"/>
+          </a:xfrm>
+          <a:prstGeom prst="rect">
+            <a:avLst/>
+          </a:prstGeom>
+          <a:solidFill>
+            <a:srgbClr val="FFFFFF"/>
+          </a:solidFill>
+          <a:ln/>
+          <a:effectLst>
+            <a:outerShdw sx="100000" sy="100000" kx="0" ky="0" algn="bl" rotWithShape="0" blurRad="50800" dist="25400" dir="8100000">
+              <a:srgbClr val="000000">
+                <a:alpha val="10000"/>
+              </a:srgbClr>
+            </a:outerShdw>
+          </a:effectLst>
+        </p:spPr>
+      </p:sp>
+      <p:sp>
+        <p:nvSpPr>
+          <p:cNvPr id="20" name="Shape 18"/>
+          <p:cNvSpPr/>
+          <p:nvPr/>
+        </p:nvSpPr>
+        <p:spPr>
+          <a:xfrm>
+            <a:off x="6126480" y="1051560"/>
+            <a:ext cx="54864" cy="1600200"/>
+          </a:xfrm>
+          <a:prstGeom prst="rect">
+            <a:avLst/>
+          </a:prstGeom>
+          <a:solidFill>
+            <a:srgbClr val="16A34A"/>
+          </a:solidFill>
+          <a:ln/>
+        </p:spPr>
+      </p:sp>
+      <p:sp>
+        <p:nvSpPr>
+          <p:cNvPr id="21" name="Shape 19"/>
+          <p:cNvSpPr/>
+          <p:nvPr/>
+        </p:nvSpPr>
+        <p:spPr>
+          <a:xfrm>
+            <a:off x="7955280" y="1124712"/>
+            <a:ext cx="658368" cy="228600"/>
+          </a:xfrm>
+          <a:prstGeom prst="rect">
+            <a:avLst/>
+          </a:prstGeom>
+          <a:solidFill>
+            <a:srgbClr val="DCFCE7"/>
+          </a:solidFill>
+          <a:ln/>
+        </p:spPr>
+      </p:sp>
+      <p:sp>
+        <p:nvSpPr>
+          <p:cNvPr id="22" name="Text 20"/>
+          <p:cNvSpPr/>
+          <p:nvPr/>
+        </p:nvSpPr>
+        <p:spPr>
+          <a:xfrm>
+            <a:off x="7955280" y="1124712"/>
+            <a:ext cx="658368" cy="228600"/>
+          </a:xfrm>
+          <a:prstGeom prst="rect">
+            <a:avLst/>
+          </a:prstGeom>
+          <a:noFill/>
+          <a:ln/>
+        </p:spPr>
+        <p:txBody>
+          <a:bodyPr wrap="square" lIns="0" tIns="0" rIns="0" bIns="0" rtlCol="0" anchor="ctr"/>
+          <a:lstStyle/>
+          <a:p>
+            <a:pPr algn="ctr" indent="0" marL="0">
+              <a:buNone/>
+            </a:pPr>
+            <a:r>
+              <a:rPr lang="en-US" sz="900" b="1" dirty="0">
+                <a:solidFill>
+                  <a:srgbClr val="16A34A"/>
+                </a:solidFill>
+                <a:latin typeface="Arial" pitchFamily="34" charset="0"/>
+                <a:ea typeface="Arial" pitchFamily="34" charset="-122"/>
+                <a:cs typeface="Arial" pitchFamily="34" charset="-120"/>
+              </a:rPr>
+              <a:t>20件+</a:t>
+            </a:r>
+            <a:endParaRPr lang="en-US" sz="900" dirty="0"/>
+          </a:p>
+        </p:txBody>
+      </p:sp>
+      <p:sp>
+        <p:nvSpPr>
+          <p:cNvPr id="23" name="Text 21"/>
+          <p:cNvSpPr/>
+          <p:nvPr/>
+        </p:nvSpPr>
+        <p:spPr>
+          <a:xfrm>
+            <a:off x="6263640" y="1124712"/>
+            <a:ext cx="1645920" cy="274320"/>
+          </a:xfrm>
+          <a:prstGeom prst="rect">
+            <a:avLst/>
+          </a:prstGeom>
+          <a:noFill/>
+          <a:ln/>
+        </p:spPr>
+        <p:txBody>
+          <a:bodyPr wrap="square" lIns="0" tIns="0" rIns="0" bIns="0" rtlCol="0" anchor="ctr"/>
+          <a:lstStyle/>
+          <a:p>
+            <a:pPr indent="0" marL="0">
+              <a:buNone/>
+            </a:pPr>
+            <a:r>
+              <a:rPr lang="en-US" sz="1300" b="1" dirty="0">
+                <a:solidFill>
+                  <a:srgbClr val="1A2744"/>
+                </a:solidFill>
+                <a:latin typeface="Arial" pitchFamily="34" charset="0"/>
+                <a:ea typeface="Arial" pitchFamily="34" charset="-122"/>
+                <a:cs typeface="Arial" pitchFamily="34" charset="-120"/>
+              </a:rPr>
               <a:t>清潔さ・清掃</a:t>
             </a:r>
             <a:endParaRPr lang="en-US" sz="1300" dirty="0"/>
@@ -10436,13 +10882,13 @@
       </p:sp>
       <p:sp>
         <p:nvSpPr>
-          <p:cNvPr id="10" name="Text 8"/>
-          <p:cNvSpPr/>
-          <p:nvPr/>
-        </p:nvSpPr>
-        <p:spPr>
-          <a:xfrm>
-            <a:off x="594360" y="1417320"/>
+          <p:cNvPr id="24" name="Text 22"/>
+          <p:cNvSpPr/>
+          <p:nvPr/>
+        </p:nvSpPr>
+        <p:spPr>
+          <a:xfrm>
+            <a:off x="6263640" y="1417320"/>
             <a:ext cx="2377440" cy="365760"/>
           </a:xfrm>
           <a:prstGeom prst="rect">
@@ -10475,13 +10921,13 @@
       </p:sp>
       <p:sp>
         <p:nvSpPr>
-          <p:cNvPr id="11" name="Text 9"/>
-          <p:cNvSpPr/>
-          <p:nvPr/>
-        </p:nvSpPr>
-        <p:spPr>
-          <a:xfrm>
-            <a:off x="594360" y="1828800"/>
+          <p:cNvPr id="25" name="Text 23"/>
+          <p:cNvSpPr/>
+          <p:nvPr/>
+        </p:nvSpPr>
+        <p:spPr>
+          <a:xfrm>
+            <a:off x="6263640" y="1828800"/>
             <a:ext cx="2377440" cy="640080"/>
           </a:xfrm>
           <a:prstGeom prst="rect">
@@ -10514,13 +10960,13 @@
       </p:sp>
       <p:sp>
         <p:nvSpPr>
-          <p:cNvPr id="12" name="Shape 10"/>
-          <p:cNvSpPr/>
-          <p:nvPr/>
-        </p:nvSpPr>
-        <p:spPr>
-          <a:xfrm>
-            <a:off x="3291840" y="1051560"/>
+          <p:cNvPr id="26" name="Shape 24"/>
+          <p:cNvSpPr/>
+          <p:nvPr/>
+        </p:nvSpPr>
+        <p:spPr>
+          <a:xfrm>
+            <a:off x="457200" y="2880360"/>
             <a:ext cx="2651760" cy="1600200"/>
           </a:xfrm>
           <a:prstGeom prst="rect">
@@ -10541,13 +10987,13 @@
       </p:sp>
       <p:sp>
         <p:nvSpPr>
-          <p:cNvPr id="13" name="Shape 11"/>
-          <p:cNvSpPr/>
-          <p:nvPr/>
-        </p:nvSpPr>
-        <p:spPr>
-          <a:xfrm>
-            <a:off x="3291840" y="1051560"/>
+          <p:cNvPr id="27" name="Shape 25"/>
+          <p:cNvSpPr/>
+          <p:nvPr/>
+        </p:nvSpPr>
+        <p:spPr>
+          <a:xfrm>
+            <a:off x="457200" y="2880360"/>
             <a:ext cx="54864" cy="1600200"/>
           </a:xfrm>
           <a:prstGeom prst="rect">
@@ -10561,13 +11007,13 @@
       </p:sp>
       <p:sp>
         <p:nvSpPr>
-          <p:cNvPr id="14" name="Shape 12"/>
-          <p:cNvSpPr/>
-          <p:nvPr/>
-        </p:nvSpPr>
-        <p:spPr>
-          <a:xfrm>
-            <a:off x="5120640" y="1124712"/>
+          <p:cNvPr id="28" name="Shape 26"/>
+          <p:cNvSpPr/>
+          <p:nvPr/>
+        </p:nvSpPr>
+        <p:spPr>
+          <a:xfrm>
+            <a:off x="2286000" y="2953512"/>
             <a:ext cx="658368" cy="228600"/>
           </a:xfrm>
           <a:prstGeom prst="rect">
@@ -10581,13 +11027,13 @@
       </p:sp>
       <p:sp>
         <p:nvSpPr>
-          <p:cNvPr id="15" name="Text 13"/>
-          <p:cNvSpPr/>
-          <p:nvPr/>
-        </p:nvSpPr>
-        <p:spPr>
-          <a:xfrm>
-            <a:off x="5120640" y="1124712"/>
+          <p:cNvPr id="29" name="Text 27"/>
+          <p:cNvSpPr/>
+          <p:nvPr/>
+        </p:nvSpPr>
+        <p:spPr>
+          <a:xfrm>
+            <a:off x="2286000" y="2953512"/>
             <a:ext cx="658368" cy="228600"/>
           </a:xfrm>
           <a:prstGeom prst="rect">
@@ -10620,13 +11066,13 @@
       </p:sp>
       <p:sp>
         <p:nvSpPr>
-          <p:cNvPr id="16" name="Text 14"/>
-          <p:cNvSpPr/>
-          <p:nvPr/>
-        </p:nvSpPr>
-        <p:spPr>
-          <a:xfrm>
-            <a:off x="3429000" y="1124712"/>
+          <p:cNvPr id="30" name="Text 28"/>
+          <p:cNvSpPr/>
+          <p:nvPr/>
+        </p:nvSpPr>
+        <p:spPr>
+          <a:xfrm>
+            <a:off x="594360" y="2953512"/>
             <a:ext cx="1645920" cy="274320"/>
           </a:xfrm>
           <a:prstGeom prst="rect">
@@ -10651,7 +11097,7 @@
                 <a:ea typeface="Arial" pitchFamily="34" charset="-122"/>
                 <a:cs typeface="Arial" pitchFamily="34" charset="-120"/>
               </a:rPr>
-              <a:t>朝食</a:t>
+              <a:t>スタッフの対応</a:t>
             </a:r>
             <a:endParaRPr lang="en-US" sz="1300" dirty="0"/>
           </a:p>
@@ -10659,13 +11105,13 @@
       </p:sp>
       <p:sp>
         <p:nvSpPr>
-          <p:cNvPr id="17" name="Text 15"/>
-          <p:cNvSpPr/>
-          <p:nvPr/>
-        </p:nvSpPr>
-        <p:spPr>
-          <a:xfrm>
-            <a:off x="3429000" y="1417320"/>
+          <p:cNvPr id="31" name="Text 29"/>
+          <p:cNvSpPr/>
+          <p:nvPr/>
+        </p:nvSpPr>
+        <p:spPr>
+          <a:xfrm>
+            <a:off x="594360" y="3246120"/>
             <a:ext cx="2377440" cy="365760"/>
           </a:xfrm>
           <a:prstGeom prst="rect">
@@ -10690,7 +11136,7 @@
                 <a:ea typeface="Arial" pitchFamily="34" charset="-122"/>
                 <a:cs typeface="Arial" pitchFamily="34" charset="-120"/>
               </a:rPr>
-              <a:t>朝食も本当に美味しくて、種類もたくさんで是非また泊まらせていただきたいです</a:t>
+              <a:t>（もちろんAI対応でもありがたいです</a:t>
             </a:r>
             <a:endParaRPr lang="en-US" sz="900" dirty="0"/>
           </a:p>
@@ -10698,13 +11144,13 @@
       </p:sp>
       <p:sp>
         <p:nvSpPr>
-          <p:cNvPr id="18" name="Text 16"/>
-          <p:cNvSpPr/>
-          <p:nvPr/>
-        </p:nvSpPr>
-        <p:spPr>
-          <a:xfrm>
-            <a:off x="3429000" y="1828800"/>
+          <p:cNvPr id="32" name="Text 30"/>
+          <p:cNvSpPr/>
+          <p:nvPr/>
+        </p:nvSpPr>
+        <p:spPr>
+          <a:xfrm>
+            <a:off x="594360" y="3657600"/>
             <a:ext cx="2377440" cy="640080"/>
           </a:xfrm>
           <a:prstGeom prst="rect">
@@ -10729,7 +11175,7 @@
                 <a:ea typeface="Arial" pitchFamily="34" charset="-122"/>
                 <a:cs typeface="Arial" pitchFamily="34" charset="-120"/>
               </a:rPr>
-              <a:t>「小学6年生まで添寝が無料なうえ、朝食ビュッフェ付きでとても良かったです」</a:t>
+              <a:t>「送迎バスのドライバーさんのホスピタリティに溢れた対応に感謝です」</a:t>
             </a:r>
             <a:endParaRPr lang="en-US" sz="900" dirty="0"/>
           </a:p>
@@ -10737,13 +11183,13 @@
       </p:sp>
       <p:sp>
         <p:nvSpPr>
-          <p:cNvPr id="19" name="Shape 17"/>
-          <p:cNvSpPr/>
-          <p:nvPr/>
-        </p:nvSpPr>
-        <p:spPr>
-          <a:xfrm>
-            <a:off x="6126480" y="1051560"/>
+          <p:cNvPr id="33" name="Shape 31"/>
+          <p:cNvSpPr/>
+          <p:nvPr/>
+        </p:nvSpPr>
+        <p:spPr>
+          <a:xfrm>
+            <a:off x="3291840" y="2880360"/>
             <a:ext cx="2651760" cy="1600200"/>
           </a:xfrm>
           <a:prstGeom prst="rect">
@@ -10764,13 +11210,13 @@
       </p:sp>
       <p:sp>
         <p:nvSpPr>
-          <p:cNvPr id="20" name="Shape 18"/>
-          <p:cNvSpPr/>
-          <p:nvPr/>
-        </p:nvSpPr>
-        <p:spPr>
-          <a:xfrm>
-            <a:off x="6126480" y="1051560"/>
+          <p:cNvPr id="34" name="Shape 32"/>
+          <p:cNvSpPr/>
+          <p:nvPr/>
+        </p:nvSpPr>
+        <p:spPr>
+          <a:xfrm>
+            <a:off x="3291840" y="2880360"/>
             <a:ext cx="54864" cy="1600200"/>
           </a:xfrm>
           <a:prstGeom prst="rect">
@@ -10784,13 +11230,13 @@
       </p:sp>
       <p:sp>
         <p:nvSpPr>
-          <p:cNvPr id="21" name="Shape 19"/>
-          <p:cNvSpPr/>
-          <p:nvPr/>
-        </p:nvSpPr>
-        <p:spPr>
-          <a:xfrm>
-            <a:off x="7955280" y="1124712"/>
+          <p:cNvPr id="35" name="Shape 33"/>
+          <p:cNvSpPr/>
+          <p:nvPr/>
+        </p:nvSpPr>
+        <p:spPr>
+          <a:xfrm>
+            <a:off x="5120640" y="2953512"/>
             <a:ext cx="658368" cy="228600"/>
           </a:xfrm>
           <a:prstGeom prst="rect">
@@ -10804,13 +11250,13 @@
       </p:sp>
       <p:sp>
         <p:nvSpPr>
-          <p:cNvPr id="22" name="Text 20"/>
-          <p:cNvSpPr/>
-          <p:nvPr/>
-        </p:nvSpPr>
-        <p:spPr>
-          <a:xfrm>
-            <a:off x="7955280" y="1124712"/>
+          <p:cNvPr id="36" name="Text 34"/>
+          <p:cNvSpPr/>
+          <p:nvPr/>
+        </p:nvSpPr>
+        <p:spPr>
+          <a:xfrm>
+            <a:off x="5120640" y="2953512"/>
             <a:ext cx="658368" cy="228600"/>
           </a:xfrm>
           <a:prstGeom prst="rect">
@@ -10843,13 +11289,13 @@
       </p:sp>
       <p:sp>
         <p:nvSpPr>
-          <p:cNvPr id="23" name="Text 21"/>
-          <p:cNvSpPr/>
-          <p:nvPr/>
-        </p:nvSpPr>
-        <p:spPr>
-          <a:xfrm>
-            <a:off x="6263640" y="1124712"/>
+          <p:cNvPr id="37" name="Text 35"/>
+          <p:cNvSpPr/>
+          <p:nvPr/>
+        </p:nvSpPr>
+        <p:spPr>
+          <a:xfrm>
+            <a:off x="3429000" y="2953512"/>
             <a:ext cx="1645920" cy="274320"/>
           </a:xfrm>
           <a:prstGeom prst="rect">
@@ -10874,7 +11320,7 @@
                 <a:ea typeface="Arial" pitchFamily="34" charset="-122"/>
                 <a:cs typeface="Arial" pitchFamily="34" charset="-120"/>
               </a:rPr>
-              <a:t>快適さ・設備</a:t>
+              <a:t>立地・アクセス</a:t>
             </a:r>
             <a:endParaRPr lang="en-US" sz="1300" dirty="0"/>
           </a:p>
@@ -10882,13 +11328,13 @@
       </p:sp>
       <p:sp>
         <p:nvSpPr>
-          <p:cNvPr id="24" name="Text 22"/>
-          <p:cNvSpPr/>
-          <p:nvPr/>
-        </p:nvSpPr>
-        <p:spPr>
-          <a:xfrm>
-            <a:off x="6263640" y="1417320"/>
+          <p:cNvPr id="38" name="Text 36"/>
+          <p:cNvSpPr/>
+          <p:nvPr/>
+        </p:nvSpPr>
+        <p:spPr>
+          <a:xfrm>
+            <a:off x="3429000" y="3246120"/>
             <a:ext cx="2377440" cy="365760"/>
           </a:xfrm>
           <a:prstGeom prst="rect">
@@ -10913,7 +11359,7 @@
                 <a:ea typeface="Arial" pitchFamily="34" charset="-122"/>
                 <a:cs typeface="Arial" pitchFamily="34" charset="-120"/>
               </a:rPr>
-              <a:t>お部屋はベッドがくっついているのがよくて選んだので、快適でよかったです</a:t>
+              <a:t>立地もディズニーから車ですぐで良かったです</a:t>
             </a:r>
             <a:endParaRPr lang="en-US" sz="900" dirty="0"/>
           </a:p>
@@ -10921,13 +11367,13 @@
       </p:sp>
       <p:sp>
         <p:nvSpPr>
-          <p:cNvPr id="25" name="Text 23"/>
-          <p:cNvSpPr/>
-          <p:nvPr/>
-        </p:nvSpPr>
-        <p:spPr>
-          <a:xfrm>
-            <a:off x="6263640" y="1828800"/>
+          <p:cNvPr id="39" name="Text 37"/>
+          <p:cNvSpPr/>
+          <p:nvPr/>
+        </p:nvSpPr>
+        <p:spPr>
+          <a:xfrm>
+            <a:off x="3429000" y="3657600"/>
             <a:ext cx="2377440" cy="640080"/>
           </a:xfrm>
           <a:prstGeom prst="rect">
@@ -10952,7 +11398,7 @@
                 <a:ea typeface="Arial" pitchFamily="34" charset="-122"/>
                 <a:cs typeface="Arial" pitchFamily="34" charset="-120"/>
               </a:rPr>
-              <a:t>「ホテルも清潔で、快適でした」</a:t>
+              <a:t>「イベント会場や駅に近くてとても便利でした」</a:t>
             </a:r>
             <a:endParaRPr lang="en-US" sz="900" dirty="0"/>
           </a:p>
@@ -10960,13 +11406,13 @@
       </p:sp>
       <p:sp>
         <p:nvSpPr>
-          <p:cNvPr id="26" name="Shape 24"/>
-          <p:cNvSpPr/>
-          <p:nvPr/>
-        </p:nvSpPr>
-        <p:spPr>
-          <a:xfrm>
-            <a:off x="457200" y="2880360"/>
+          <p:cNvPr id="40" name="Shape 38"/>
+          <p:cNvSpPr/>
+          <p:nvPr/>
+        </p:nvSpPr>
+        <p:spPr>
+          <a:xfrm>
+            <a:off x="6126480" y="2880360"/>
             <a:ext cx="2651760" cy="1600200"/>
           </a:xfrm>
           <a:prstGeom prst="rect">
@@ -10987,13 +11433,13 @@
       </p:sp>
       <p:sp>
         <p:nvSpPr>
-          <p:cNvPr id="27" name="Shape 25"/>
-          <p:cNvSpPr/>
-          <p:nvPr/>
-        </p:nvSpPr>
-        <p:spPr>
-          <a:xfrm>
-            <a:off x="457200" y="2880360"/>
+          <p:cNvPr id="41" name="Shape 39"/>
+          <p:cNvSpPr/>
+          <p:nvPr/>
+        </p:nvSpPr>
+        <p:spPr>
+          <a:xfrm>
+            <a:off x="6126480" y="2880360"/>
             <a:ext cx="54864" cy="1600200"/>
           </a:xfrm>
           <a:prstGeom prst="rect">
@@ -11007,13 +11453,13 @@
       </p:sp>
       <p:sp>
         <p:nvSpPr>
-          <p:cNvPr id="28" name="Shape 26"/>
-          <p:cNvSpPr/>
-          <p:nvPr/>
-        </p:nvSpPr>
-        <p:spPr>
-          <a:xfrm>
-            <a:off x="2286000" y="2953512"/>
+          <p:cNvPr id="42" name="Shape 40"/>
+          <p:cNvSpPr/>
+          <p:nvPr/>
+        </p:nvSpPr>
+        <p:spPr>
+          <a:xfrm>
+            <a:off x="7955280" y="2953512"/>
             <a:ext cx="658368" cy="228600"/>
           </a:xfrm>
           <a:prstGeom prst="rect">
@@ -11027,13 +11473,13 @@
       </p:sp>
       <p:sp>
         <p:nvSpPr>
-          <p:cNvPr id="29" name="Text 27"/>
-          <p:cNvSpPr/>
-          <p:nvPr/>
-        </p:nvSpPr>
-        <p:spPr>
-          <a:xfrm>
-            <a:off x="2286000" y="2953512"/>
+          <p:cNvPr id="43" name="Text 41"/>
+          <p:cNvSpPr/>
+          <p:nvPr/>
+        </p:nvSpPr>
+        <p:spPr>
+          <a:xfrm>
+            <a:off x="7955280" y="2953512"/>
             <a:ext cx="658368" cy="228600"/>
           </a:xfrm>
           <a:prstGeom prst="rect">
@@ -11066,452 +11512,6 @@
       </p:sp>
       <p:sp>
         <p:nvSpPr>
-          <p:cNvPr id="30" name="Text 28"/>
-          <p:cNvSpPr/>
-          <p:nvPr/>
-        </p:nvSpPr>
-        <p:spPr>
-          <a:xfrm>
-            <a:off x="594360" y="2953512"/>
-            <a:ext cx="1645920" cy="274320"/>
-          </a:xfrm>
-          <a:prstGeom prst="rect">
-            <a:avLst/>
-          </a:prstGeom>
-          <a:noFill/>
-          <a:ln/>
-        </p:spPr>
-        <p:txBody>
-          <a:bodyPr wrap="square" lIns="0" tIns="0" rIns="0" bIns="0" rtlCol="0" anchor="ctr"/>
-          <a:lstStyle/>
-          <a:p>
-            <a:pPr indent="0" marL="0">
-              <a:buNone/>
-            </a:pPr>
-            <a:r>
-              <a:rPr lang="en-US" sz="1300" b="1" dirty="0">
-                <a:solidFill>
-                  <a:srgbClr val="1A2744"/>
-                </a:solidFill>
-                <a:latin typeface="Arial" pitchFamily="34" charset="0"/>
-                <a:ea typeface="Arial" pitchFamily="34" charset="-122"/>
-                <a:cs typeface="Arial" pitchFamily="34" charset="-120"/>
-              </a:rPr>
-              <a:t>スタッフの対応</a:t>
-            </a:r>
-            <a:endParaRPr lang="en-US" sz="1300" dirty="0"/>
-          </a:p>
-        </p:txBody>
-      </p:sp>
-      <p:sp>
-        <p:nvSpPr>
-          <p:cNvPr id="31" name="Text 29"/>
-          <p:cNvSpPr/>
-          <p:nvPr/>
-        </p:nvSpPr>
-        <p:spPr>
-          <a:xfrm>
-            <a:off x="594360" y="3246120"/>
-            <a:ext cx="2377440" cy="365760"/>
-          </a:xfrm>
-          <a:prstGeom prst="rect">
-            <a:avLst/>
-          </a:prstGeom>
-          <a:noFill/>
-          <a:ln/>
-        </p:spPr>
-        <p:txBody>
-          <a:bodyPr wrap="square" lIns="0" tIns="0" rIns="0" bIns="0" rtlCol="0" anchor="ctr"/>
-          <a:lstStyle/>
-          <a:p>
-            <a:pPr indent="0" marL="0">
-              <a:buNone/>
-            </a:pPr>
-            <a:r>
-              <a:rPr lang="en-US" sz="900" dirty="0">
-                <a:solidFill>
-                  <a:srgbClr val="64748B"/>
-                </a:solidFill>
-                <a:latin typeface="Arial" pitchFamily="34" charset="0"/>
-                <a:ea typeface="Arial" pitchFamily="34" charset="-122"/>
-                <a:cs typeface="Arial" pitchFamily="34" charset="-120"/>
-              </a:rPr>
-              <a:t>送迎バスのドライバーさんのホスピタリティに溢れた対応に感謝です</a:t>
-            </a:r>
-            <a:endParaRPr lang="en-US" sz="900" dirty="0"/>
-          </a:p>
-        </p:txBody>
-      </p:sp>
-      <p:sp>
-        <p:nvSpPr>
-          <p:cNvPr id="32" name="Text 30"/>
-          <p:cNvSpPr/>
-          <p:nvPr/>
-        </p:nvSpPr>
-        <p:spPr>
-          <a:xfrm>
-            <a:off x="594360" y="3657600"/>
-            <a:ext cx="2377440" cy="640080"/>
-          </a:xfrm>
-          <a:prstGeom prst="rect">
-            <a:avLst/>
-          </a:prstGeom>
-          <a:noFill/>
-          <a:ln/>
-        </p:spPr>
-        <p:txBody>
-          <a:bodyPr wrap="square" lIns="0" tIns="0" rIns="0" bIns="0" rtlCol="0" anchor="ctr"/>
-          <a:lstStyle/>
-          <a:p>
-            <a:pPr indent="0" marL="0">
-              <a:buNone/>
-            </a:pPr>
-            <a:r>
-              <a:rPr lang="en-US" sz="900" i="1" dirty="0">
-                <a:solidFill>
-                  <a:srgbClr val="3B7DD8"/>
-                </a:solidFill>
-                <a:latin typeface="Arial" pitchFamily="34" charset="0"/>
-                <a:ea typeface="Arial" pitchFamily="34" charset="-122"/>
-                <a:cs typeface="Arial" pitchFamily="34" charset="-120"/>
-              </a:rPr>
-              <a:t>「とても丁寧な接客で気持ちが良かったです」</a:t>
-            </a:r>
-            <a:endParaRPr lang="en-US" sz="900" dirty="0"/>
-          </a:p>
-        </p:txBody>
-      </p:sp>
-      <p:sp>
-        <p:nvSpPr>
-          <p:cNvPr id="33" name="Shape 31"/>
-          <p:cNvSpPr/>
-          <p:nvPr/>
-        </p:nvSpPr>
-        <p:spPr>
-          <a:xfrm>
-            <a:off x="3291840" y="2880360"/>
-            <a:ext cx="2651760" cy="1600200"/>
-          </a:xfrm>
-          <a:prstGeom prst="rect">
-            <a:avLst/>
-          </a:prstGeom>
-          <a:solidFill>
-            <a:srgbClr val="FFFFFF"/>
-          </a:solidFill>
-          <a:ln/>
-          <a:effectLst>
-            <a:outerShdw sx="100000" sy="100000" kx="0" ky="0" algn="bl" rotWithShape="0" blurRad="50800" dist="25400" dir="8100000">
-              <a:srgbClr val="000000">
-                <a:alpha val="10000"/>
-              </a:srgbClr>
-            </a:outerShdw>
-          </a:effectLst>
-        </p:spPr>
-      </p:sp>
-      <p:sp>
-        <p:nvSpPr>
-          <p:cNvPr id="34" name="Shape 32"/>
-          <p:cNvSpPr/>
-          <p:nvPr/>
-        </p:nvSpPr>
-        <p:spPr>
-          <a:xfrm>
-            <a:off x="3291840" y="2880360"/>
-            <a:ext cx="54864" cy="1600200"/>
-          </a:xfrm>
-          <a:prstGeom prst="rect">
-            <a:avLst/>
-          </a:prstGeom>
-          <a:solidFill>
-            <a:srgbClr val="16A34A"/>
-          </a:solidFill>
-          <a:ln/>
-        </p:spPr>
-      </p:sp>
-      <p:sp>
-        <p:nvSpPr>
-          <p:cNvPr id="35" name="Shape 33"/>
-          <p:cNvSpPr/>
-          <p:nvPr/>
-        </p:nvSpPr>
-        <p:spPr>
-          <a:xfrm>
-            <a:off x="5120640" y="2953512"/>
-            <a:ext cx="658368" cy="228600"/>
-          </a:xfrm>
-          <a:prstGeom prst="rect">
-            <a:avLst/>
-          </a:prstGeom>
-          <a:solidFill>
-            <a:srgbClr val="DCFCE7"/>
-          </a:solidFill>
-          <a:ln/>
-        </p:spPr>
-      </p:sp>
-      <p:sp>
-        <p:nvSpPr>
-          <p:cNvPr id="36" name="Text 34"/>
-          <p:cNvSpPr/>
-          <p:nvPr/>
-        </p:nvSpPr>
-        <p:spPr>
-          <a:xfrm>
-            <a:off x="5120640" y="2953512"/>
-            <a:ext cx="658368" cy="228600"/>
-          </a:xfrm>
-          <a:prstGeom prst="rect">
-            <a:avLst/>
-          </a:prstGeom>
-          <a:noFill/>
-          <a:ln/>
-        </p:spPr>
-        <p:txBody>
-          <a:bodyPr wrap="square" lIns="0" tIns="0" rIns="0" bIns="0" rtlCol="0" anchor="ctr"/>
-          <a:lstStyle/>
-          <a:p>
-            <a:pPr algn="ctr" indent="0" marL="0">
-              <a:buNone/>
-            </a:pPr>
-            <a:r>
-              <a:rPr lang="en-US" sz="900" b="1" dirty="0">
-                <a:solidFill>
-                  <a:srgbClr val="16A34A"/>
-                </a:solidFill>
-                <a:latin typeface="Arial" pitchFamily="34" charset="0"/>
-                <a:ea typeface="Arial" pitchFamily="34" charset="-122"/>
-                <a:cs typeface="Arial" pitchFamily="34" charset="-120"/>
-              </a:rPr>
-              <a:t>20件+</a:t>
-            </a:r>
-            <a:endParaRPr lang="en-US" sz="900" dirty="0"/>
-          </a:p>
-        </p:txBody>
-      </p:sp>
-      <p:sp>
-        <p:nvSpPr>
-          <p:cNvPr id="37" name="Text 35"/>
-          <p:cNvSpPr/>
-          <p:nvPr/>
-        </p:nvSpPr>
-        <p:spPr>
-          <a:xfrm>
-            <a:off x="3429000" y="2953512"/>
-            <a:ext cx="1645920" cy="274320"/>
-          </a:xfrm>
-          <a:prstGeom prst="rect">
-            <a:avLst/>
-          </a:prstGeom>
-          <a:noFill/>
-          <a:ln/>
-        </p:spPr>
-        <p:txBody>
-          <a:bodyPr wrap="square" lIns="0" tIns="0" rIns="0" bIns="0" rtlCol="0" anchor="ctr"/>
-          <a:lstStyle/>
-          <a:p>
-            <a:pPr indent="0" marL="0">
-              <a:buNone/>
-            </a:pPr>
-            <a:r>
-              <a:rPr lang="en-US" sz="1300" b="1" dirty="0">
-                <a:solidFill>
-                  <a:srgbClr val="1A2744"/>
-                </a:solidFill>
-                <a:latin typeface="Arial" pitchFamily="34" charset="0"/>
-                <a:ea typeface="Arial" pitchFamily="34" charset="-122"/>
-                <a:cs typeface="Arial" pitchFamily="34" charset="-120"/>
-              </a:rPr>
-              <a:t>立地・アクセス</a:t>
-            </a:r>
-            <a:endParaRPr lang="en-US" sz="1300" dirty="0"/>
-          </a:p>
-        </p:txBody>
-      </p:sp>
-      <p:sp>
-        <p:nvSpPr>
-          <p:cNvPr id="38" name="Text 36"/>
-          <p:cNvSpPr/>
-          <p:nvPr/>
-        </p:nvSpPr>
-        <p:spPr>
-          <a:xfrm>
-            <a:off x="3429000" y="3246120"/>
-            <a:ext cx="2377440" cy="365760"/>
-          </a:xfrm>
-          <a:prstGeom prst="rect">
-            <a:avLst/>
-          </a:prstGeom>
-          <a:noFill/>
-          <a:ln/>
-        </p:spPr>
-        <p:txBody>
-          <a:bodyPr wrap="square" lIns="0" tIns="0" rIns="0" bIns="0" rtlCol="0" anchor="ctr"/>
-          <a:lstStyle/>
-          <a:p>
-            <a:pPr indent="0" marL="0">
-              <a:buNone/>
-            </a:pPr>
-            <a:r>
-              <a:rPr lang="en-US" sz="900" dirty="0">
-                <a:solidFill>
-                  <a:srgbClr val="64748B"/>
-                </a:solidFill>
-                <a:latin typeface="Arial" pitchFamily="34" charset="0"/>
-                <a:ea typeface="Arial" pitchFamily="34" charset="-122"/>
-                <a:cs typeface="Arial" pitchFamily="34" charset="-120"/>
-              </a:rPr>
-              <a:t>イベント会場や駅に近くてとても便利でした</a:t>
-            </a:r>
-            <a:endParaRPr lang="en-US" sz="900" dirty="0"/>
-          </a:p>
-        </p:txBody>
-      </p:sp>
-      <p:sp>
-        <p:nvSpPr>
-          <p:cNvPr id="39" name="Text 37"/>
-          <p:cNvSpPr/>
-          <p:nvPr/>
-        </p:nvSpPr>
-        <p:spPr>
-          <a:xfrm>
-            <a:off x="3429000" y="3657600"/>
-            <a:ext cx="2377440" cy="640080"/>
-          </a:xfrm>
-          <a:prstGeom prst="rect">
-            <a:avLst/>
-          </a:prstGeom>
-          <a:noFill/>
-          <a:ln/>
-        </p:spPr>
-        <p:txBody>
-          <a:bodyPr wrap="square" lIns="0" tIns="0" rIns="0" bIns="0" rtlCol="0" anchor="ctr"/>
-          <a:lstStyle/>
-          <a:p>
-            <a:pPr indent="0" marL="0">
-              <a:buNone/>
-            </a:pPr>
-            <a:r>
-              <a:rPr lang="en-US" sz="900" i="1" dirty="0">
-                <a:solidFill>
-                  <a:srgbClr val="3B7DD8"/>
-                </a:solidFill>
-                <a:latin typeface="Arial" pitchFamily="34" charset="0"/>
-                <a:ea typeface="Arial" pitchFamily="34" charset="-122"/>
-                <a:cs typeface="Arial" pitchFamily="34" charset="-120"/>
-              </a:rPr>
-              <a:t>「チェックインやチェックアウトが機械でできるのが便利です」</a:t>
-            </a:r>
-            <a:endParaRPr lang="en-US" sz="900" dirty="0"/>
-          </a:p>
-        </p:txBody>
-      </p:sp>
-      <p:sp>
-        <p:nvSpPr>
-          <p:cNvPr id="40" name="Shape 38"/>
-          <p:cNvSpPr/>
-          <p:nvPr/>
-        </p:nvSpPr>
-        <p:spPr>
-          <a:xfrm>
-            <a:off x="6126480" y="2880360"/>
-            <a:ext cx="2651760" cy="1600200"/>
-          </a:xfrm>
-          <a:prstGeom prst="rect">
-            <a:avLst/>
-          </a:prstGeom>
-          <a:solidFill>
-            <a:srgbClr val="FFFFFF"/>
-          </a:solidFill>
-          <a:ln/>
-          <a:effectLst>
-            <a:outerShdw sx="100000" sy="100000" kx="0" ky="0" algn="bl" rotWithShape="0" blurRad="50800" dist="25400" dir="8100000">
-              <a:srgbClr val="000000">
-                <a:alpha val="10000"/>
-              </a:srgbClr>
-            </a:outerShdw>
-          </a:effectLst>
-        </p:spPr>
-      </p:sp>
-      <p:sp>
-        <p:nvSpPr>
-          <p:cNvPr id="41" name="Shape 39"/>
-          <p:cNvSpPr/>
-          <p:nvPr/>
-        </p:nvSpPr>
-        <p:spPr>
-          <a:xfrm>
-            <a:off x="6126480" y="2880360"/>
-            <a:ext cx="54864" cy="1600200"/>
-          </a:xfrm>
-          <a:prstGeom prst="rect">
-            <a:avLst/>
-          </a:prstGeom>
-          <a:solidFill>
-            <a:srgbClr val="16A34A"/>
-          </a:solidFill>
-          <a:ln/>
-        </p:spPr>
-      </p:sp>
-      <p:sp>
-        <p:nvSpPr>
-          <p:cNvPr id="42" name="Shape 40"/>
-          <p:cNvSpPr/>
-          <p:nvPr/>
-        </p:nvSpPr>
-        <p:spPr>
-          <a:xfrm>
-            <a:off x="7955280" y="2953512"/>
-            <a:ext cx="658368" cy="228600"/>
-          </a:xfrm>
-          <a:prstGeom prst="rect">
-            <a:avLst/>
-          </a:prstGeom>
-          <a:solidFill>
-            <a:srgbClr val="DCFCE7"/>
-          </a:solidFill>
-          <a:ln/>
-        </p:spPr>
-      </p:sp>
-      <p:sp>
-        <p:nvSpPr>
-          <p:cNvPr id="43" name="Text 41"/>
-          <p:cNvSpPr/>
-          <p:nvPr/>
-        </p:nvSpPr>
-        <p:spPr>
-          <a:xfrm>
-            <a:off x="7955280" y="2953512"/>
-            <a:ext cx="658368" cy="228600"/>
-          </a:xfrm>
-          <a:prstGeom prst="rect">
-            <a:avLst/>
-          </a:prstGeom>
-          <a:noFill/>
-          <a:ln/>
-        </p:spPr>
-        <p:txBody>
-          <a:bodyPr wrap="square" lIns="0" tIns="0" rIns="0" bIns="0" rtlCol="0" anchor="ctr"/>
-          <a:lstStyle/>
-          <a:p>
-            <a:pPr algn="ctr" indent="0" marL="0">
-              <a:buNone/>
-            </a:pPr>
-            <a:r>
-              <a:rPr lang="en-US" sz="900" b="1" dirty="0">
-                <a:solidFill>
-                  <a:srgbClr val="16A34A"/>
-                </a:solidFill>
-                <a:latin typeface="Arial" pitchFamily="34" charset="0"/>
-                <a:ea typeface="Arial" pitchFamily="34" charset="-122"/>
-                <a:cs typeface="Arial" pitchFamily="34" charset="-120"/>
-              </a:rPr>
-              <a:t>20件+</a:t>
-            </a:r>
-            <a:endParaRPr lang="en-US" sz="900" dirty="0"/>
-          </a:p>
-        </p:txBody>
-      </p:sp>
-      <p:sp>
-        <p:nvSpPr>
           <p:cNvPr id="44" name="Text 42"/>
           <p:cNvSpPr/>
           <p:nvPr/>
@@ -11582,7 +11582,7 @@
                 <a:ea typeface="Arial" pitchFamily="34" charset="-122"/>
                 <a:cs typeface="Arial" pitchFamily="34" charset="-120"/>
               </a:rPr>
-              <a:t>・内装が綺麗 ・チェックイン、チェックアウトが楽 ・ホテル内にコンビニが併設 ・部屋が広かった ・強いて言うならお...</a:t>
+              <a:t>隣接しているローソンも大変助かりました</a:t>
             </a:r>
             <a:endParaRPr lang="en-US" sz="900" dirty="0"/>
           </a:p>
@@ -11621,7 +11621,7 @@
                 <a:ea typeface="Arial" pitchFamily="34" charset="-122"/>
                 <a:cs typeface="Arial" pitchFamily="34" charset="-120"/>
               </a:rPr>
-              <a:t>「ホテルにはローソンもある」</a:t>
+              <a:t>「・内装が綺麗 ・チェックイン、チェックアウトが楽 ・ホテル内にコンビニが併設 ・部屋が広かった ・強いて言うならお...」</a:t>
             </a:r>
             <a:endParaRPr lang="en-US" sz="900" dirty="0"/>
           </a:p>
@@ -12791,7 +12791,7 @@
                           <a:ea typeface="Arial" pitchFamily="34" charset="-122"/>
                           <a:cs typeface="Arial" pitchFamily="34" charset="-120"/>
                         </a:rPr>
-                        <a:t>朝食の改善要望</a:t>
+                        <a:t>エアコン・空調</a:t>
                       </a:r>
                       <a:endParaRPr lang="en-US" sz="900" dirty="0">
                         <a:latin typeface="Arial" charset="0"/>
@@ -12859,7 +12859,7 @@
                           <a:ea typeface="Arial" pitchFamily="34" charset="-122"/>
                           <a:cs typeface="Arial" pitchFamily="34" charset="-120"/>
                         </a:rPr>
-                        <a:t>朝食はそれなりの品数で美味しかったし。ドリンクサービスあり　コンビニ併設。駐車場あり。1泊1500円。ディズニーに...</a:t>
+                        <a:t>エアコンや冷蔵庫の音が気になりました エアコンや冷蔵庫の音が気になりました</a:t>
                       </a:r>
                       <a:endParaRPr lang="en-US" sz="900" dirty="0">
                         <a:latin typeface="Arial" charset="0"/>
@@ -13065,7 +13065,7 @@
                           <a:ea typeface="Arial" pitchFamily="34" charset="-122"/>
                           <a:cs typeface="Arial" pitchFamily="34" charset="-120"/>
                         </a:rPr>
-                        <a:t>エアコン・空調</a:t>
+                        <a:t>朝食の改善要望</a:t>
                       </a:r>
                       <a:endParaRPr lang="en-US" sz="900" dirty="0">
                         <a:latin typeface="Arial" charset="0"/>
@@ -13133,7 +13133,7 @@
                           <a:ea typeface="Arial" pitchFamily="34" charset="-122"/>
                           <a:cs typeface="Arial" pitchFamily="34" charset="-120"/>
                         </a:rPr>
-                        <a:t>エアコンや冷蔵庫の音が気になりました エアコンや冷蔵庫の音が気になりました</a:t>
+                        <a:t>朝食はそれなりの品数で美味しかったし。ドリンクサービスあり　コンビニ併設。駐車場あり。1泊1500円。ディズニーに...</a:t>
                       </a:r>
                       <a:endParaRPr lang="en-US" sz="900" dirty="0">
                         <a:latin typeface="Arial" charset="0"/>
@@ -13201,7 +13201,7 @@
                           <a:ea typeface="Arial" pitchFamily="34" charset="-122"/>
                           <a:cs typeface="Arial" pitchFamily="34" charset="-120"/>
                         </a:rPr>
-                        <a:t>5件</a:t>
+                        <a:t>4件</a:t>
                       </a:r>
                       <a:endParaRPr lang="en-US" sz="900" dirty="0">
                         <a:latin typeface="Arial" charset="0"/>

--- a/納品レポート/ホテル別レポート/comfort_suites_tokyobay_口コミ分析レポート.pptx
+++ b/納品レポート/ホテル別レポート/comfort_suites_tokyobay_口コミ分析レポート.pptx
@@ -180,19 +180,19 @@
                 <c:ptCount val="6"/>
                 <c:lvl>
                   <c:pt idx="0">
+                    <c:v>Trip.com</c:v>
+                  </c:pt>
+                  <c:pt idx="1">
                     <c:v>Agoda</c:v>
                   </c:pt>
-                  <c:pt idx="1">
-                    <c:v>Trip.com</c:v>
-                  </c:pt>
                   <c:pt idx="2">
-                    <c:v>じゃらん</c:v>
+                    <c:v>Google</c:v>
                   </c:pt>
                   <c:pt idx="3">
                     <c:v>楽天トラベル</c:v>
                   </c:pt>
                   <c:pt idx="4">
-                    <c:v>Google</c:v>
+                    <c:v>じゃらん</c:v>
                   </c:pt>
                   <c:pt idx="5">
                     <c:v>Booking.com</c:v>
@@ -208,19 +208,19 @@
                 <c:formatCode>General</c:formatCode>
                 <c:ptCount val="6"/>
                 <c:pt idx="0">
-                  <c:v>9.56</c:v>
+                  <c:v>9.62</c:v>
                 </c:pt>
                 <c:pt idx="1">
-                  <c:v>9.38</c:v>
+                  <c:v>9.5</c:v>
                 </c:pt>
                 <c:pt idx="2">
-                  <c:v>9.27</c:v>
+                  <c:v>9.25</c:v>
                 </c:pt>
                 <c:pt idx="3">
-                  <c:v>9.24</c:v>
+                  <c:v>9.22</c:v>
                 </c:pt>
                 <c:pt idx="4">
-                  <c:v>9.09</c:v>
+                  <c:v>9.16</c:v>
                 </c:pt>
                 <c:pt idx="5">
                   <c:v>8.85</c:v>
@@ -566,10 +566,10 @@
               <c:numCache>
                 <c:ptCount val="3"/>
                 <c:pt idx="0">
-                  <c:v>137</c:v>
+                  <c:v>139</c:v>
                 </c:pt>
                 <c:pt idx="1">
-                  <c:v>5</c:v>
+                  <c:v>3</c:v>
                 </c:pt>
                 <c:pt idx="2">
                   <c:v>1</c:v>
@@ -781,19 +781,19 @@
                 <c:formatCode>General</c:formatCode>
                 <c:ptCount val="6"/>
                 <c:pt idx="0">
-                  <c:v>86</c:v>
+                  <c:v>83</c:v>
                 </c:pt>
                 <c:pt idx="1">
-                  <c:v>13</c:v>
+                  <c:v>15</c:v>
                 </c:pt>
                 <c:pt idx="2">
-                  <c:v>38</c:v>
+                  <c:v>41</c:v>
                 </c:pt>
                 <c:pt idx="3">
-                  <c:v>3</c:v>
+                  <c:v>2</c:v>
                 </c:pt>
                 <c:pt idx="4">
-                  <c:v>2</c:v>
+                  <c:v>1</c:v>
                 </c:pt>
                 <c:pt idx="5">
                   <c:v>1</c:v>
@@ -2767,7 +2767,7 @@
                 <a:ea typeface="Arial" pitchFamily="34" charset="-122"/>
                 <a:cs typeface="Arial" pitchFamily="34" charset="-120"/>
               </a:rPr>
-              <a:t>作成日：2026年3月24日</a:t>
+              <a:t>作成日：2026年3月25日</a:t>
             </a:r>
             <a:endParaRPr lang="en-US" sz="1000" dirty="0"/>
           </a:p>
@@ -3313,7 +3313,7 @@
                           <a:ea typeface="Arial" pitchFamily="34" charset="-122"/>
                           <a:cs typeface="Arial" pitchFamily="34" charset="-120"/>
                         </a:rPr>
-                        <a:t>9.22点</a:t>
+                        <a:t>9.21点</a:t>
                       </a:r>
                       <a:endParaRPr lang="en-US" sz="1000" dirty="0">
                         <a:latin typeface="Arial" charset="0"/>
@@ -3587,7 +3587,7 @@
                           <a:ea typeface="Arial" pitchFamily="34" charset="-122"/>
                           <a:cs typeface="Arial" pitchFamily="34" charset="-120"/>
                         </a:rPr>
-                        <a:t>95.8%</a:t>
+                        <a:t>97.2%</a:t>
                       </a:r>
                       <a:endParaRPr lang="en-US" sz="1000" dirty="0">
                         <a:latin typeface="Arial" charset="0"/>
@@ -4409,7 +4409,7 @@
                           <a:ea typeface="Arial" pitchFamily="34" charset="-122"/>
                           <a:cs typeface="Arial" pitchFamily="34" charset="-120"/>
                         </a:rPr>
-                        <a:t>約46件/期間</a:t>
+                        <a:t>約51件/期間</a:t>
                       </a:r>
                       <a:endParaRPr lang="en-US" sz="1000" dirty="0">
                         <a:latin typeface="Arial" charset="0"/>
@@ -4477,7 +4477,7 @@
                           <a:ea typeface="Arial" pitchFamily="34" charset="-122"/>
                           <a:cs typeface="Arial" pitchFamily="34" charset="-120"/>
                         </a:rPr>
-                        <a:t>23件以下</a:t>
+                        <a:t>25件以下</a:t>
                       </a:r>
                       <a:endParaRPr lang="en-US" sz="1000" dirty="0">
                         <a:latin typeface="Arial" charset="0"/>
@@ -5048,7 +5048,7 @@
                 <a:ea typeface="Arial" pitchFamily="34" charset="-122"/>
                 <a:cs typeface="Arial" pitchFamily="34" charset="-120"/>
               </a:rPr>
-              <a:t>9.22</a:t>
+              <a:t>9.21</a:t>
             </a:r>
             <a:endParaRPr lang="en-US" sz="3200" dirty="0"/>
           </a:p>
@@ -5173,7 +5173,7 @@
                 <a:ea typeface="Arial" pitchFamily="34" charset="-122"/>
                 <a:cs typeface="Arial" pitchFamily="34" charset="-120"/>
               </a:rPr>
-              <a:t>95.8%</a:t>
+              <a:t>97.2%</a:t>
             </a:r>
             <a:endParaRPr lang="en-US" sz="3200" dirty="0"/>
           </a:p>
@@ -5571,7 +5571,7 @@
                 <a:ea typeface="Arial" pitchFamily="34" charset="-122"/>
                 <a:cs typeface="Arial" pitchFamily="34" charset="-120"/>
               </a:rPr>
-              <a:t>  朝食のバイキングは子供も食べられるものがおおくてありがたかったです</a:t>
+              <a:t>  朝食は大人も子どもも大満足で種類豊富で、食べるのが楽しかったです</a:t>
             </a:r>
             <a:endParaRPr lang="en-US" sz="1100" dirty="0"/>
           </a:p>
@@ -5611,7 +5611,7 @@
                 <a:ea typeface="Arial" pitchFamily="34" charset="-122"/>
                 <a:cs typeface="Arial" pitchFamily="34" charset="-120"/>
               </a:rPr>
-              <a:t>  お部屋はベッドがくっついているのがよくて選んだので、快適でよかったです</a:t>
+              <a:t>  とても広々したお部屋、お風呂もトイレと別れており快適でした</a:t>
             </a:r>
             <a:endParaRPr lang="en-US" sz="1100" dirty="0"/>
           </a:p>
@@ -5651,7 +5651,7 @@
                 <a:ea typeface="Arial" pitchFamily="34" charset="-122"/>
                 <a:cs typeface="Arial" pitchFamily="34" charset="-120"/>
               </a:rPr>
-              <a:t>  ・内装が綺麗 ・チェックイン、チェックアウトが楽 ・ホテル内にコンビニが併設 ・部屋が広かった ・強いて言うならお...</a:t>
+              <a:t>  清潔感もあり、コンセントもいくつもあったので、スマホやモバイルバッテリー、子どものカメラなど複数充電できました</a:t>
             </a:r>
             <a:endParaRPr lang="en-US" sz="1100" dirty="0"/>
           </a:p>
@@ -5799,7 +5799,7 @@
                 <a:ea typeface="Arial" pitchFamily="34" charset="-122"/>
                 <a:cs typeface="Arial" pitchFamily="34" charset="-120"/>
               </a:rPr>
-              <a:t>  送迎バスのドライバーさんのホスピタリティに溢れた対応に感謝です</a:t>
+              <a:t>  とても広々したお部屋、お風呂もトイレと別れており快適でした</a:t>
             </a:r>
             <a:endParaRPr lang="en-US" sz="1100" dirty="0"/>
           </a:p>
@@ -5839,7 +5839,7 @@
                 <a:ea typeface="Arial" pitchFamily="34" charset="-122"/>
                 <a:cs typeface="Arial" pitchFamily="34" charset="-120"/>
               </a:rPr>
-              <a:t>  ディズニーまでのバスの本数が少ないのと、最終時間が早いのが残念</a:t>
+              <a:t>  本当はもっと沢山食べたかったけれど朝なのであまりお腹に入らず残念でした</a:t>
             </a:r>
             <a:endParaRPr lang="en-US" sz="1100" dirty="0"/>
           </a:p>
@@ -6232,7 +6232,7 @@
                 <a:ea typeface="Arial" pitchFamily="34" charset="-122"/>
                 <a:cs typeface="Arial" pitchFamily="34" charset="-120"/>
               </a:rPr>
-              <a:t>9.22</a:t>
+              <a:t>9.21</a:t>
             </a:r>
             <a:endParaRPr lang="en-US" sz="3200" dirty="0"/>
           </a:p>
@@ -6357,7 +6357,7 @@
                 <a:ea typeface="Arial" pitchFamily="34" charset="-122"/>
                 <a:cs typeface="Arial" pitchFamily="34" charset="-120"/>
               </a:rPr>
-              <a:t>95.8%</a:t>
+              <a:t>97.2%</a:t>
             </a:r>
             <a:endParaRPr lang="en-US" sz="3200" dirty="0"/>
           </a:p>
@@ -7028,7 +7028,7 @@
                 <a:ea typeface="Arial" pitchFamily="34" charset="-122"/>
                 <a:cs typeface="Arial" pitchFamily="34" charset="-120"/>
               </a:rPr>
-              <a:t>Agoda(9.56)が最高スコア。</a:t>
+              <a:t>Trip.com(9.62)が最高スコア。</a:t>
             </a:r>
             <a:endParaRPr lang="en-US" sz="1100" dirty="0"/>
           </a:p>
@@ -7469,7 +7469,7 @@
                           <a:ea typeface="Arial" pitchFamily="34" charset="-122"/>
                           <a:cs typeface="Arial" pitchFamily="34" charset="-120"/>
                         </a:rPr>
-                        <a:t>Agoda</a:t>
+                        <a:t>Trip.com</a:t>
                       </a:r>
                       <a:endParaRPr lang="en-US" sz="900" dirty="0">
                         <a:latin typeface="Arial" charset="0"/>
@@ -7537,7 +7537,7 @@
                           <a:ea typeface="Arial" pitchFamily="34" charset="-122"/>
                           <a:cs typeface="Arial" pitchFamily="34" charset="-120"/>
                         </a:rPr>
-                        <a:t>18</a:t>
+                        <a:t>13</a:t>
                       </a:r>
                       <a:endParaRPr lang="en-US" sz="900" dirty="0">
                         <a:latin typeface="Arial" charset="0"/>
@@ -7605,7 +7605,7 @@
                           <a:ea typeface="Arial" pitchFamily="34" charset="-122"/>
                           <a:cs typeface="Arial" pitchFamily="34" charset="-120"/>
                         </a:rPr>
-                        <a:t>9.56</a:t>
+                        <a:t>9.62</a:t>
                       </a:r>
                       <a:endParaRPr lang="en-US" sz="900" dirty="0">
                         <a:latin typeface="Arial" charset="0"/>
@@ -7741,7 +7741,7 @@
                           <a:ea typeface="Arial" pitchFamily="34" charset="-122"/>
                           <a:cs typeface="Arial" pitchFamily="34" charset="-120"/>
                         </a:rPr>
-                        <a:t>9.56</a:t>
+                        <a:t>9.62</a:t>
                       </a:r>
                       <a:endParaRPr lang="en-US" sz="900" dirty="0">
                         <a:latin typeface="Arial" charset="0"/>
@@ -7811,7 +7811,7 @@
                           <a:ea typeface="Arial" pitchFamily="34" charset="-122"/>
                           <a:cs typeface="Arial" pitchFamily="34" charset="-120"/>
                         </a:rPr>
-                        <a:t>Trip.com</a:t>
+                        <a:t>Agoda</a:t>
                       </a:r>
                       <a:endParaRPr lang="en-US" sz="900" dirty="0">
                         <a:latin typeface="Arial" charset="0"/>
@@ -7879,7 +7879,7 @@
                           <a:ea typeface="Arial" pitchFamily="34" charset="-122"/>
                           <a:cs typeface="Arial" pitchFamily="34" charset="-120"/>
                         </a:rPr>
-                        <a:t>13</a:t>
+                        <a:t>18</a:t>
                       </a:r>
                       <a:endParaRPr lang="en-US" sz="900" dirty="0">
                         <a:latin typeface="Arial" charset="0"/>
@@ -7947,7 +7947,7 @@
                           <a:ea typeface="Arial" pitchFamily="34" charset="-122"/>
                           <a:cs typeface="Arial" pitchFamily="34" charset="-120"/>
                         </a:rPr>
-                        <a:t>9.38</a:t>
+                        <a:t>9.5</a:t>
                       </a:r>
                       <a:endParaRPr lang="en-US" sz="900" dirty="0">
                         <a:latin typeface="Arial" charset="0"/>
@@ -8083,7 +8083,691 @@
                           <a:ea typeface="Arial" pitchFamily="34" charset="-122"/>
                           <a:cs typeface="Arial" pitchFamily="34" charset="-120"/>
                         </a:rPr>
-                        <a:t>9.38</a:t>
+                        <a:t>9.5</a:t>
+                      </a:r>
+                      <a:endParaRPr lang="en-US" sz="900" dirty="0">
+                        <a:latin typeface="Arial" charset="0"/>
+                        <a:ea typeface="Arial" charset="0"/>
+                        <a:cs typeface="Arial" charset="0"/>
+                      </a:endParaRPr>
+                    </a:p>
+                  </a:txBody>
+                  <a:tcPr marL="91440" marR="91440" marT="45720" marB="45720">
+                    <a:lnL w="6350" cap="flat" cmpd="sng" algn="ctr">
+                      <a:solidFill>
+                        <a:srgbClr val="CBD5E1"/>
+                      </a:solidFill>
+                      <a:prstDash val="solid"/>
+                      <a:round/>
+                      <a:headEnd type="none" w="med" len="med"/>
+                      <a:tailEnd type="none" w="med" len="med"/>
+                    </a:lnL>
+                    <a:lnR w="6350" cap="flat" cmpd="sng" algn="ctr">
+                      <a:solidFill>
+                        <a:srgbClr val="CBD5E1"/>
+                      </a:solidFill>
+                      <a:prstDash val="solid"/>
+                      <a:round/>
+                      <a:headEnd type="none" w="med" len="med"/>
+                      <a:tailEnd type="none" w="med" len="med"/>
+                    </a:lnR>
+                    <a:lnT w="6350" cap="flat" cmpd="sng" algn="ctr">
+                      <a:solidFill>
+                        <a:srgbClr val="CBD5E1"/>
+                      </a:solidFill>
+                      <a:prstDash val="solid"/>
+                      <a:round/>
+                      <a:headEnd type="none" w="med" len="med"/>
+                      <a:tailEnd type="none" w="med" len="med"/>
+                    </a:lnT>
+                    <a:lnB w="6350" cap="flat" cmpd="sng" algn="ctr">
+                      <a:solidFill>
+                        <a:srgbClr val="CBD5E1"/>
+                      </a:solidFill>
+                      <a:prstDash val="solid"/>
+                      <a:round/>
+                      <a:headEnd type="none" w="med" len="med"/>
+                      <a:tailEnd type="none" w="med" len="med"/>
+                    </a:lnB>
+                    <a:solidFill>
+                      <a:srgbClr val="FFFFFF"/>
+                    </a:solidFill>
+                  </a:tcPr>
+                </a:tc>
+              </a:tr>
+              <a:tr h="201168">
+                <a:tc>
+                  <a:txBody>
+                    <a:bodyPr/>
+                    <a:lstStyle/>
+                    <a:p>
+                      <a:pPr algn="ctr" indent="0" marL="0">
+                        <a:buNone/>
+                      </a:pPr>
+                      <a:r>
+                        <a:rPr lang="en-US" sz="900" dirty="0">
+                          <a:solidFill>
+                            <a:srgbClr val="000000"/>
+                          </a:solidFill>
+                          <a:latin typeface="Arial" pitchFamily="34" charset="0"/>
+                          <a:ea typeface="Arial" pitchFamily="34" charset="-122"/>
+                          <a:cs typeface="Arial" pitchFamily="34" charset="-120"/>
+                        </a:rPr>
+                        <a:t>Google</a:t>
+                      </a:r>
+                      <a:endParaRPr lang="en-US" sz="900" dirty="0">
+                        <a:latin typeface="Arial" charset="0"/>
+                        <a:ea typeface="Arial" charset="0"/>
+                        <a:cs typeface="Arial" charset="0"/>
+                      </a:endParaRPr>
+                    </a:p>
+                  </a:txBody>
+                  <a:tcPr marL="91440" marR="91440" marT="45720" marB="45720">
+                    <a:lnL w="6350" cap="flat" cmpd="sng" algn="ctr">
+                      <a:solidFill>
+                        <a:srgbClr val="CBD5E1"/>
+                      </a:solidFill>
+                      <a:prstDash val="solid"/>
+                      <a:round/>
+                      <a:headEnd type="none" w="med" len="med"/>
+                      <a:tailEnd type="none" w="med" len="med"/>
+                    </a:lnL>
+                    <a:lnR w="6350" cap="flat" cmpd="sng" algn="ctr">
+                      <a:solidFill>
+                        <a:srgbClr val="CBD5E1"/>
+                      </a:solidFill>
+                      <a:prstDash val="solid"/>
+                      <a:round/>
+                      <a:headEnd type="none" w="med" len="med"/>
+                      <a:tailEnd type="none" w="med" len="med"/>
+                    </a:lnR>
+                    <a:lnT w="6350" cap="flat" cmpd="sng" algn="ctr">
+                      <a:solidFill>
+                        <a:srgbClr val="CBD5E1"/>
+                      </a:solidFill>
+                      <a:prstDash val="solid"/>
+                      <a:round/>
+                      <a:headEnd type="none" w="med" len="med"/>
+                      <a:tailEnd type="none" w="med" len="med"/>
+                    </a:lnT>
+                    <a:lnB w="6350" cap="flat" cmpd="sng" algn="ctr">
+                      <a:solidFill>
+                        <a:srgbClr val="CBD5E1"/>
+                      </a:solidFill>
+                      <a:prstDash val="solid"/>
+                      <a:round/>
+                      <a:headEnd type="none" w="med" len="med"/>
+                      <a:tailEnd type="none" w="med" len="med"/>
+                    </a:lnB>
+                    <a:solidFill>
+                      <a:srgbClr val="E8EFF8"/>
+                    </a:solidFill>
+                  </a:tcPr>
+                </a:tc>
+                <a:tc>
+                  <a:txBody>
+                    <a:bodyPr/>
+                    <a:lstStyle/>
+                    <a:p>
+                      <a:pPr algn="ctr" indent="0" marL="0">
+                        <a:buNone/>
+                      </a:pPr>
+                      <a:r>
+                        <a:rPr lang="en-US" sz="900" dirty="0">
+                          <a:solidFill>
+                            <a:srgbClr val="000000"/>
+                          </a:solidFill>
+                          <a:latin typeface="Arial" pitchFamily="34" charset="0"/>
+                          <a:ea typeface="Arial" pitchFamily="34" charset="-122"/>
+                          <a:cs typeface="Arial" pitchFamily="34" charset="-120"/>
+                        </a:rPr>
+                        <a:t>8</a:t>
+                      </a:r>
+                      <a:endParaRPr lang="en-US" sz="900" dirty="0">
+                        <a:latin typeface="Arial" charset="0"/>
+                        <a:ea typeface="Arial" charset="0"/>
+                        <a:cs typeface="Arial" charset="0"/>
+                      </a:endParaRPr>
+                    </a:p>
+                  </a:txBody>
+                  <a:tcPr marL="91440" marR="91440" marT="45720" marB="45720">
+                    <a:lnL w="6350" cap="flat" cmpd="sng" algn="ctr">
+                      <a:solidFill>
+                        <a:srgbClr val="CBD5E1"/>
+                      </a:solidFill>
+                      <a:prstDash val="solid"/>
+                      <a:round/>
+                      <a:headEnd type="none" w="med" len="med"/>
+                      <a:tailEnd type="none" w="med" len="med"/>
+                    </a:lnL>
+                    <a:lnR w="6350" cap="flat" cmpd="sng" algn="ctr">
+                      <a:solidFill>
+                        <a:srgbClr val="CBD5E1"/>
+                      </a:solidFill>
+                      <a:prstDash val="solid"/>
+                      <a:round/>
+                      <a:headEnd type="none" w="med" len="med"/>
+                      <a:tailEnd type="none" w="med" len="med"/>
+                    </a:lnR>
+                    <a:lnT w="6350" cap="flat" cmpd="sng" algn="ctr">
+                      <a:solidFill>
+                        <a:srgbClr val="CBD5E1"/>
+                      </a:solidFill>
+                      <a:prstDash val="solid"/>
+                      <a:round/>
+                      <a:headEnd type="none" w="med" len="med"/>
+                      <a:tailEnd type="none" w="med" len="med"/>
+                    </a:lnT>
+                    <a:lnB w="6350" cap="flat" cmpd="sng" algn="ctr">
+                      <a:solidFill>
+                        <a:srgbClr val="CBD5E1"/>
+                      </a:solidFill>
+                      <a:prstDash val="solid"/>
+                      <a:round/>
+                      <a:headEnd type="none" w="med" len="med"/>
+                      <a:tailEnd type="none" w="med" len="med"/>
+                    </a:lnB>
+                    <a:solidFill>
+                      <a:srgbClr val="E8EFF8"/>
+                    </a:solidFill>
+                  </a:tcPr>
+                </a:tc>
+                <a:tc>
+                  <a:txBody>
+                    <a:bodyPr/>
+                    <a:lstStyle/>
+                    <a:p>
+                      <a:pPr algn="ctr" indent="0" marL="0">
+                        <a:buNone/>
+                      </a:pPr>
+                      <a:r>
+                        <a:rPr lang="en-US" sz="900" dirty="0">
+                          <a:solidFill>
+                            <a:srgbClr val="000000"/>
+                          </a:solidFill>
+                          <a:latin typeface="Arial" pitchFamily="34" charset="0"/>
+                          <a:ea typeface="Arial" pitchFamily="34" charset="-122"/>
+                          <a:cs typeface="Arial" pitchFamily="34" charset="-120"/>
+                        </a:rPr>
+                        <a:t>4.62</a:t>
+                      </a:r>
+                      <a:endParaRPr lang="en-US" sz="900" dirty="0">
+                        <a:latin typeface="Arial" charset="0"/>
+                        <a:ea typeface="Arial" charset="0"/>
+                        <a:cs typeface="Arial" charset="0"/>
+                      </a:endParaRPr>
+                    </a:p>
+                  </a:txBody>
+                  <a:tcPr marL="91440" marR="91440" marT="45720" marB="45720">
+                    <a:lnL w="6350" cap="flat" cmpd="sng" algn="ctr">
+                      <a:solidFill>
+                        <a:srgbClr val="CBD5E1"/>
+                      </a:solidFill>
+                      <a:prstDash val="solid"/>
+                      <a:round/>
+                      <a:headEnd type="none" w="med" len="med"/>
+                      <a:tailEnd type="none" w="med" len="med"/>
+                    </a:lnL>
+                    <a:lnR w="6350" cap="flat" cmpd="sng" algn="ctr">
+                      <a:solidFill>
+                        <a:srgbClr val="CBD5E1"/>
+                      </a:solidFill>
+                      <a:prstDash val="solid"/>
+                      <a:round/>
+                      <a:headEnd type="none" w="med" len="med"/>
+                      <a:tailEnd type="none" w="med" len="med"/>
+                    </a:lnR>
+                    <a:lnT w="6350" cap="flat" cmpd="sng" algn="ctr">
+                      <a:solidFill>
+                        <a:srgbClr val="CBD5E1"/>
+                      </a:solidFill>
+                      <a:prstDash val="solid"/>
+                      <a:round/>
+                      <a:headEnd type="none" w="med" len="med"/>
+                      <a:tailEnd type="none" w="med" len="med"/>
+                    </a:lnT>
+                    <a:lnB w="6350" cap="flat" cmpd="sng" algn="ctr">
+                      <a:solidFill>
+                        <a:srgbClr val="CBD5E1"/>
+                      </a:solidFill>
+                      <a:prstDash val="solid"/>
+                      <a:round/>
+                      <a:headEnd type="none" w="med" len="med"/>
+                      <a:tailEnd type="none" w="med" len="med"/>
+                    </a:lnB>
+                    <a:solidFill>
+                      <a:srgbClr val="E8EFF8"/>
+                    </a:solidFill>
+                  </a:tcPr>
+                </a:tc>
+                <a:tc>
+                  <a:txBody>
+                    <a:bodyPr/>
+                    <a:lstStyle/>
+                    <a:p>
+                      <a:pPr algn="ctr" indent="0" marL="0">
+                        <a:buNone/>
+                      </a:pPr>
+                      <a:r>
+                        <a:rPr lang="en-US" sz="900" dirty="0">
+                          <a:solidFill>
+                            <a:srgbClr val="000000"/>
+                          </a:solidFill>
+                          <a:latin typeface="Arial" pitchFamily="34" charset="0"/>
+                          <a:ea typeface="Arial" pitchFamily="34" charset="-122"/>
+                          <a:cs typeface="Arial" pitchFamily="34" charset="-120"/>
+                        </a:rPr>
+                        <a:t>/5 (×2)</a:t>
+                      </a:r>
+                      <a:endParaRPr lang="en-US" sz="900" dirty="0">
+                        <a:latin typeface="Arial" charset="0"/>
+                        <a:ea typeface="Arial" charset="0"/>
+                        <a:cs typeface="Arial" charset="0"/>
+                      </a:endParaRPr>
+                    </a:p>
+                  </a:txBody>
+                  <a:tcPr marL="91440" marR="91440" marT="45720" marB="45720">
+                    <a:lnL w="6350" cap="flat" cmpd="sng" algn="ctr">
+                      <a:solidFill>
+                        <a:srgbClr val="CBD5E1"/>
+                      </a:solidFill>
+                      <a:prstDash val="solid"/>
+                      <a:round/>
+                      <a:headEnd type="none" w="med" len="med"/>
+                      <a:tailEnd type="none" w="med" len="med"/>
+                    </a:lnL>
+                    <a:lnR w="6350" cap="flat" cmpd="sng" algn="ctr">
+                      <a:solidFill>
+                        <a:srgbClr val="CBD5E1"/>
+                      </a:solidFill>
+                      <a:prstDash val="solid"/>
+                      <a:round/>
+                      <a:headEnd type="none" w="med" len="med"/>
+                      <a:tailEnd type="none" w="med" len="med"/>
+                    </a:lnR>
+                    <a:lnT w="6350" cap="flat" cmpd="sng" algn="ctr">
+                      <a:solidFill>
+                        <a:srgbClr val="CBD5E1"/>
+                      </a:solidFill>
+                      <a:prstDash val="solid"/>
+                      <a:round/>
+                      <a:headEnd type="none" w="med" len="med"/>
+                      <a:tailEnd type="none" w="med" len="med"/>
+                    </a:lnT>
+                    <a:lnB w="6350" cap="flat" cmpd="sng" algn="ctr">
+                      <a:solidFill>
+                        <a:srgbClr val="CBD5E1"/>
+                      </a:solidFill>
+                      <a:prstDash val="solid"/>
+                      <a:round/>
+                      <a:headEnd type="none" w="med" len="med"/>
+                      <a:tailEnd type="none" w="med" len="med"/>
+                    </a:lnB>
+                    <a:solidFill>
+                      <a:srgbClr val="E8EFF8"/>
+                    </a:solidFill>
+                  </a:tcPr>
+                </a:tc>
+                <a:tc>
+                  <a:txBody>
+                    <a:bodyPr/>
+                    <a:lstStyle/>
+                    <a:p>
+                      <a:pPr algn="ctr" indent="0" marL="0">
+                        <a:buNone/>
+                      </a:pPr>
+                      <a:r>
+                        <a:rPr lang="en-US" sz="900" dirty="0">
+                          <a:solidFill>
+                            <a:srgbClr val="000000"/>
+                          </a:solidFill>
+                          <a:latin typeface="Arial" pitchFamily="34" charset="0"/>
+                          <a:ea typeface="Arial" pitchFamily="34" charset="-122"/>
+                          <a:cs typeface="Arial" pitchFamily="34" charset="-120"/>
+                        </a:rPr>
+                        <a:t>9.25</a:t>
+                      </a:r>
+                      <a:endParaRPr lang="en-US" sz="900" dirty="0">
+                        <a:latin typeface="Arial" charset="0"/>
+                        <a:ea typeface="Arial" charset="0"/>
+                        <a:cs typeface="Arial" charset="0"/>
+                      </a:endParaRPr>
+                    </a:p>
+                  </a:txBody>
+                  <a:tcPr marL="91440" marR="91440" marT="45720" marB="45720">
+                    <a:lnL w="6350" cap="flat" cmpd="sng" algn="ctr">
+                      <a:solidFill>
+                        <a:srgbClr val="CBD5E1"/>
+                      </a:solidFill>
+                      <a:prstDash val="solid"/>
+                      <a:round/>
+                      <a:headEnd type="none" w="med" len="med"/>
+                      <a:tailEnd type="none" w="med" len="med"/>
+                    </a:lnL>
+                    <a:lnR w="6350" cap="flat" cmpd="sng" algn="ctr">
+                      <a:solidFill>
+                        <a:srgbClr val="CBD5E1"/>
+                      </a:solidFill>
+                      <a:prstDash val="solid"/>
+                      <a:round/>
+                      <a:headEnd type="none" w="med" len="med"/>
+                      <a:tailEnd type="none" w="med" len="med"/>
+                    </a:lnR>
+                    <a:lnT w="6350" cap="flat" cmpd="sng" algn="ctr">
+                      <a:solidFill>
+                        <a:srgbClr val="CBD5E1"/>
+                      </a:solidFill>
+                      <a:prstDash val="solid"/>
+                      <a:round/>
+                      <a:headEnd type="none" w="med" len="med"/>
+                      <a:tailEnd type="none" w="med" len="med"/>
+                    </a:lnT>
+                    <a:lnB w="6350" cap="flat" cmpd="sng" algn="ctr">
+                      <a:solidFill>
+                        <a:srgbClr val="CBD5E1"/>
+                      </a:solidFill>
+                      <a:prstDash val="solid"/>
+                      <a:round/>
+                      <a:headEnd type="none" w="med" len="med"/>
+                      <a:tailEnd type="none" w="med" len="med"/>
+                    </a:lnB>
+                    <a:solidFill>
+                      <a:srgbClr val="E8EFF8"/>
+                    </a:solidFill>
+                  </a:tcPr>
+                </a:tc>
+              </a:tr>
+              <a:tr h="201168">
+                <a:tc>
+                  <a:txBody>
+                    <a:bodyPr/>
+                    <a:lstStyle/>
+                    <a:p>
+                      <a:pPr algn="ctr" indent="0" marL="0">
+                        <a:buNone/>
+                      </a:pPr>
+                      <a:r>
+                        <a:rPr lang="en-US" sz="900" dirty="0">
+                          <a:solidFill>
+                            <a:srgbClr val="000000"/>
+                          </a:solidFill>
+                          <a:latin typeface="Arial" pitchFamily="34" charset="0"/>
+                          <a:ea typeface="Arial" pitchFamily="34" charset="-122"/>
+                          <a:cs typeface="Arial" pitchFamily="34" charset="-120"/>
+                        </a:rPr>
+                        <a:t>楽天トラベル</a:t>
+                      </a:r>
+                      <a:endParaRPr lang="en-US" sz="900" dirty="0">
+                        <a:latin typeface="Arial" charset="0"/>
+                        <a:ea typeface="Arial" charset="0"/>
+                        <a:cs typeface="Arial" charset="0"/>
+                      </a:endParaRPr>
+                    </a:p>
+                  </a:txBody>
+                  <a:tcPr marL="91440" marR="91440" marT="45720" marB="45720">
+                    <a:lnL w="6350" cap="flat" cmpd="sng" algn="ctr">
+                      <a:solidFill>
+                        <a:srgbClr val="CBD5E1"/>
+                      </a:solidFill>
+                      <a:prstDash val="solid"/>
+                      <a:round/>
+                      <a:headEnd type="none" w="med" len="med"/>
+                      <a:tailEnd type="none" w="med" len="med"/>
+                    </a:lnL>
+                    <a:lnR w="6350" cap="flat" cmpd="sng" algn="ctr">
+                      <a:solidFill>
+                        <a:srgbClr val="CBD5E1"/>
+                      </a:solidFill>
+                      <a:prstDash val="solid"/>
+                      <a:round/>
+                      <a:headEnd type="none" w="med" len="med"/>
+                      <a:tailEnd type="none" w="med" len="med"/>
+                    </a:lnR>
+                    <a:lnT w="6350" cap="flat" cmpd="sng" algn="ctr">
+                      <a:solidFill>
+                        <a:srgbClr val="CBD5E1"/>
+                      </a:solidFill>
+                      <a:prstDash val="solid"/>
+                      <a:round/>
+                      <a:headEnd type="none" w="med" len="med"/>
+                      <a:tailEnd type="none" w="med" len="med"/>
+                    </a:lnT>
+                    <a:lnB w="6350" cap="flat" cmpd="sng" algn="ctr">
+                      <a:solidFill>
+                        <a:srgbClr val="CBD5E1"/>
+                      </a:solidFill>
+                      <a:prstDash val="solid"/>
+                      <a:round/>
+                      <a:headEnd type="none" w="med" len="med"/>
+                      <a:tailEnd type="none" w="med" len="med"/>
+                    </a:lnB>
+                    <a:solidFill>
+                      <a:srgbClr val="FFFFFF"/>
+                    </a:solidFill>
+                  </a:tcPr>
+                </a:tc>
+                <a:tc>
+                  <a:txBody>
+                    <a:bodyPr/>
+                    <a:lstStyle/>
+                    <a:p>
+                      <a:pPr algn="ctr" indent="0" marL="0">
+                        <a:buNone/>
+                      </a:pPr>
+                      <a:r>
+                        <a:rPr lang="en-US" sz="900" dirty="0">
+                          <a:solidFill>
+                            <a:srgbClr val="000000"/>
+                          </a:solidFill>
+                          <a:latin typeface="Arial" pitchFamily="34" charset="0"/>
+                          <a:ea typeface="Arial" pitchFamily="34" charset="-122"/>
+                          <a:cs typeface="Arial" pitchFamily="34" charset="-120"/>
+                        </a:rPr>
+                        <a:t>46</a:t>
+                      </a:r>
+                      <a:endParaRPr lang="en-US" sz="900" dirty="0">
+                        <a:latin typeface="Arial" charset="0"/>
+                        <a:ea typeface="Arial" charset="0"/>
+                        <a:cs typeface="Arial" charset="0"/>
+                      </a:endParaRPr>
+                    </a:p>
+                  </a:txBody>
+                  <a:tcPr marL="91440" marR="91440" marT="45720" marB="45720">
+                    <a:lnL w="6350" cap="flat" cmpd="sng" algn="ctr">
+                      <a:solidFill>
+                        <a:srgbClr val="CBD5E1"/>
+                      </a:solidFill>
+                      <a:prstDash val="solid"/>
+                      <a:round/>
+                      <a:headEnd type="none" w="med" len="med"/>
+                      <a:tailEnd type="none" w="med" len="med"/>
+                    </a:lnL>
+                    <a:lnR w="6350" cap="flat" cmpd="sng" algn="ctr">
+                      <a:solidFill>
+                        <a:srgbClr val="CBD5E1"/>
+                      </a:solidFill>
+                      <a:prstDash val="solid"/>
+                      <a:round/>
+                      <a:headEnd type="none" w="med" len="med"/>
+                      <a:tailEnd type="none" w="med" len="med"/>
+                    </a:lnR>
+                    <a:lnT w="6350" cap="flat" cmpd="sng" algn="ctr">
+                      <a:solidFill>
+                        <a:srgbClr val="CBD5E1"/>
+                      </a:solidFill>
+                      <a:prstDash val="solid"/>
+                      <a:round/>
+                      <a:headEnd type="none" w="med" len="med"/>
+                      <a:tailEnd type="none" w="med" len="med"/>
+                    </a:lnT>
+                    <a:lnB w="6350" cap="flat" cmpd="sng" algn="ctr">
+                      <a:solidFill>
+                        <a:srgbClr val="CBD5E1"/>
+                      </a:solidFill>
+                      <a:prstDash val="solid"/>
+                      <a:round/>
+                      <a:headEnd type="none" w="med" len="med"/>
+                      <a:tailEnd type="none" w="med" len="med"/>
+                    </a:lnB>
+                    <a:solidFill>
+                      <a:srgbClr val="FFFFFF"/>
+                    </a:solidFill>
+                  </a:tcPr>
+                </a:tc>
+                <a:tc>
+                  <a:txBody>
+                    <a:bodyPr/>
+                    <a:lstStyle/>
+                    <a:p>
+                      <a:pPr algn="ctr" indent="0" marL="0">
+                        <a:buNone/>
+                      </a:pPr>
+                      <a:r>
+                        <a:rPr lang="en-US" sz="900" dirty="0">
+                          <a:solidFill>
+                            <a:srgbClr val="000000"/>
+                          </a:solidFill>
+                          <a:latin typeface="Arial" pitchFamily="34" charset="0"/>
+                          <a:ea typeface="Arial" pitchFamily="34" charset="-122"/>
+                          <a:cs typeface="Arial" pitchFamily="34" charset="-120"/>
+                        </a:rPr>
+                        <a:t>4.61</a:t>
+                      </a:r>
+                      <a:endParaRPr lang="en-US" sz="900" dirty="0">
+                        <a:latin typeface="Arial" charset="0"/>
+                        <a:ea typeface="Arial" charset="0"/>
+                        <a:cs typeface="Arial" charset="0"/>
+                      </a:endParaRPr>
+                    </a:p>
+                  </a:txBody>
+                  <a:tcPr marL="91440" marR="91440" marT="45720" marB="45720">
+                    <a:lnL w="6350" cap="flat" cmpd="sng" algn="ctr">
+                      <a:solidFill>
+                        <a:srgbClr val="CBD5E1"/>
+                      </a:solidFill>
+                      <a:prstDash val="solid"/>
+                      <a:round/>
+                      <a:headEnd type="none" w="med" len="med"/>
+                      <a:tailEnd type="none" w="med" len="med"/>
+                    </a:lnL>
+                    <a:lnR w="6350" cap="flat" cmpd="sng" algn="ctr">
+                      <a:solidFill>
+                        <a:srgbClr val="CBD5E1"/>
+                      </a:solidFill>
+                      <a:prstDash val="solid"/>
+                      <a:round/>
+                      <a:headEnd type="none" w="med" len="med"/>
+                      <a:tailEnd type="none" w="med" len="med"/>
+                    </a:lnR>
+                    <a:lnT w="6350" cap="flat" cmpd="sng" algn="ctr">
+                      <a:solidFill>
+                        <a:srgbClr val="CBD5E1"/>
+                      </a:solidFill>
+                      <a:prstDash val="solid"/>
+                      <a:round/>
+                      <a:headEnd type="none" w="med" len="med"/>
+                      <a:tailEnd type="none" w="med" len="med"/>
+                    </a:lnT>
+                    <a:lnB w="6350" cap="flat" cmpd="sng" algn="ctr">
+                      <a:solidFill>
+                        <a:srgbClr val="CBD5E1"/>
+                      </a:solidFill>
+                      <a:prstDash val="solid"/>
+                      <a:round/>
+                      <a:headEnd type="none" w="med" len="med"/>
+                      <a:tailEnd type="none" w="med" len="med"/>
+                    </a:lnB>
+                    <a:solidFill>
+                      <a:srgbClr val="FFFFFF"/>
+                    </a:solidFill>
+                  </a:tcPr>
+                </a:tc>
+                <a:tc>
+                  <a:txBody>
+                    <a:bodyPr/>
+                    <a:lstStyle/>
+                    <a:p>
+                      <a:pPr algn="ctr" indent="0" marL="0">
+                        <a:buNone/>
+                      </a:pPr>
+                      <a:r>
+                        <a:rPr lang="en-US" sz="900" dirty="0">
+                          <a:solidFill>
+                            <a:srgbClr val="000000"/>
+                          </a:solidFill>
+                          <a:latin typeface="Arial" pitchFamily="34" charset="0"/>
+                          <a:ea typeface="Arial" pitchFamily="34" charset="-122"/>
+                          <a:cs typeface="Arial" pitchFamily="34" charset="-120"/>
+                        </a:rPr>
+                        <a:t>/5 (×2)</a:t>
+                      </a:r>
+                      <a:endParaRPr lang="en-US" sz="900" dirty="0">
+                        <a:latin typeface="Arial" charset="0"/>
+                        <a:ea typeface="Arial" charset="0"/>
+                        <a:cs typeface="Arial" charset="0"/>
+                      </a:endParaRPr>
+                    </a:p>
+                  </a:txBody>
+                  <a:tcPr marL="91440" marR="91440" marT="45720" marB="45720">
+                    <a:lnL w="6350" cap="flat" cmpd="sng" algn="ctr">
+                      <a:solidFill>
+                        <a:srgbClr val="CBD5E1"/>
+                      </a:solidFill>
+                      <a:prstDash val="solid"/>
+                      <a:round/>
+                      <a:headEnd type="none" w="med" len="med"/>
+                      <a:tailEnd type="none" w="med" len="med"/>
+                    </a:lnL>
+                    <a:lnR w="6350" cap="flat" cmpd="sng" algn="ctr">
+                      <a:solidFill>
+                        <a:srgbClr val="CBD5E1"/>
+                      </a:solidFill>
+                      <a:prstDash val="solid"/>
+                      <a:round/>
+                      <a:headEnd type="none" w="med" len="med"/>
+                      <a:tailEnd type="none" w="med" len="med"/>
+                    </a:lnR>
+                    <a:lnT w="6350" cap="flat" cmpd="sng" algn="ctr">
+                      <a:solidFill>
+                        <a:srgbClr val="CBD5E1"/>
+                      </a:solidFill>
+                      <a:prstDash val="solid"/>
+                      <a:round/>
+                      <a:headEnd type="none" w="med" len="med"/>
+                      <a:tailEnd type="none" w="med" len="med"/>
+                    </a:lnT>
+                    <a:lnB w="6350" cap="flat" cmpd="sng" algn="ctr">
+                      <a:solidFill>
+                        <a:srgbClr val="CBD5E1"/>
+                      </a:solidFill>
+                      <a:prstDash val="solid"/>
+                      <a:round/>
+                      <a:headEnd type="none" w="med" len="med"/>
+                      <a:tailEnd type="none" w="med" len="med"/>
+                    </a:lnB>
+                    <a:solidFill>
+                      <a:srgbClr val="FFFFFF"/>
+                    </a:solidFill>
+                  </a:tcPr>
+                </a:tc>
+                <a:tc>
+                  <a:txBody>
+                    <a:bodyPr/>
+                    <a:lstStyle/>
+                    <a:p>
+                      <a:pPr algn="ctr" indent="0" marL="0">
+                        <a:buNone/>
+                      </a:pPr>
+                      <a:r>
+                        <a:rPr lang="en-US" sz="900" dirty="0">
+                          <a:solidFill>
+                            <a:srgbClr val="000000"/>
+                          </a:solidFill>
+                          <a:latin typeface="Arial" pitchFamily="34" charset="0"/>
+                          <a:ea typeface="Arial" pitchFamily="34" charset="-122"/>
+                          <a:cs typeface="Arial" pitchFamily="34" charset="-120"/>
+                        </a:rPr>
+                        <a:t>9.22</a:t>
                       </a:r>
                       <a:endParaRPr lang="en-US" sz="900" dirty="0">
                         <a:latin typeface="Arial" charset="0"/>
@@ -8221,7 +8905,7 @@
                           <a:ea typeface="Arial" pitchFamily="34" charset="-122"/>
                           <a:cs typeface="Arial" pitchFamily="34" charset="-120"/>
                         </a:rPr>
-                        <a:t>30</a:t>
+                        <a:t>31</a:t>
                       </a:r>
                       <a:endParaRPr lang="en-US" sz="900" dirty="0">
                         <a:latin typeface="Arial" charset="0"/>
@@ -8289,7 +8973,7 @@
                           <a:ea typeface="Arial" pitchFamily="34" charset="-122"/>
                           <a:cs typeface="Arial" pitchFamily="34" charset="-120"/>
                         </a:rPr>
-                        <a:t>4.63</a:t>
+                        <a:t>4.58</a:t>
                       </a:r>
                       <a:endParaRPr lang="en-US" sz="900" dirty="0">
                         <a:latin typeface="Arial" charset="0"/>
@@ -8425,691 +9109,7 @@
                           <a:ea typeface="Arial" pitchFamily="34" charset="-122"/>
                           <a:cs typeface="Arial" pitchFamily="34" charset="-120"/>
                         </a:rPr>
-                        <a:t>9.27</a:t>
-                      </a:r>
-                      <a:endParaRPr lang="en-US" sz="900" dirty="0">
-                        <a:latin typeface="Arial" charset="0"/>
-                        <a:ea typeface="Arial" charset="0"/>
-                        <a:cs typeface="Arial" charset="0"/>
-                      </a:endParaRPr>
-                    </a:p>
-                  </a:txBody>
-                  <a:tcPr marL="91440" marR="91440" marT="45720" marB="45720">
-                    <a:lnL w="6350" cap="flat" cmpd="sng" algn="ctr">
-                      <a:solidFill>
-                        <a:srgbClr val="CBD5E1"/>
-                      </a:solidFill>
-                      <a:prstDash val="solid"/>
-                      <a:round/>
-                      <a:headEnd type="none" w="med" len="med"/>
-                      <a:tailEnd type="none" w="med" len="med"/>
-                    </a:lnL>
-                    <a:lnR w="6350" cap="flat" cmpd="sng" algn="ctr">
-                      <a:solidFill>
-                        <a:srgbClr val="CBD5E1"/>
-                      </a:solidFill>
-                      <a:prstDash val="solid"/>
-                      <a:round/>
-                      <a:headEnd type="none" w="med" len="med"/>
-                      <a:tailEnd type="none" w="med" len="med"/>
-                    </a:lnR>
-                    <a:lnT w="6350" cap="flat" cmpd="sng" algn="ctr">
-                      <a:solidFill>
-                        <a:srgbClr val="CBD5E1"/>
-                      </a:solidFill>
-                      <a:prstDash val="solid"/>
-                      <a:round/>
-                      <a:headEnd type="none" w="med" len="med"/>
-                      <a:tailEnd type="none" w="med" len="med"/>
-                    </a:lnT>
-                    <a:lnB w="6350" cap="flat" cmpd="sng" algn="ctr">
-                      <a:solidFill>
-                        <a:srgbClr val="CBD5E1"/>
-                      </a:solidFill>
-                      <a:prstDash val="solid"/>
-                      <a:round/>
-                      <a:headEnd type="none" w="med" len="med"/>
-                      <a:tailEnd type="none" w="med" len="med"/>
-                    </a:lnB>
-                    <a:solidFill>
-                      <a:srgbClr val="E8EFF8"/>
-                    </a:solidFill>
-                  </a:tcPr>
-                </a:tc>
-              </a:tr>
-              <a:tr h="201168">
-                <a:tc>
-                  <a:txBody>
-                    <a:bodyPr/>
-                    <a:lstStyle/>
-                    <a:p>
-                      <a:pPr algn="ctr" indent="0" marL="0">
-                        <a:buNone/>
-                      </a:pPr>
-                      <a:r>
-                        <a:rPr lang="en-US" sz="900" dirty="0">
-                          <a:solidFill>
-                            <a:srgbClr val="000000"/>
-                          </a:solidFill>
-                          <a:latin typeface="Arial" pitchFamily="34" charset="0"/>
-                          <a:ea typeface="Arial" pitchFamily="34" charset="-122"/>
-                          <a:cs typeface="Arial" pitchFamily="34" charset="-120"/>
-                        </a:rPr>
-                        <a:t>楽天トラベル</a:t>
-                      </a:r>
-                      <a:endParaRPr lang="en-US" sz="900" dirty="0">
-                        <a:latin typeface="Arial" charset="0"/>
-                        <a:ea typeface="Arial" charset="0"/>
-                        <a:cs typeface="Arial" charset="0"/>
-                      </a:endParaRPr>
-                    </a:p>
-                  </a:txBody>
-                  <a:tcPr marL="91440" marR="91440" marT="45720" marB="45720">
-                    <a:lnL w="6350" cap="flat" cmpd="sng" algn="ctr">
-                      <a:solidFill>
-                        <a:srgbClr val="CBD5E1"/>
-                      </a:solidFill>
-                      <a:prstDash val="solid"/>
-                      <a:round/>
-                      <a:headEnd type="none" w="med" len="med"/>
-                      <a:tailEnd type="none" w="med" len="med"/>
-                    </a:lnL>
-                    <a:lnR w="6350" cap="flat" cmpd="sng" algn="ctr">
-                      <a:solidFill>
-                        <a:srgbClr val="CBD5E1"/>
-                      </a:solidFill>
-                      <a:prstDash val="solid"/>
-                      <a:round/>
-                      <a:headEnd type="none" w="med" len="med"/>
-                      <a:tailEnd type="none" w="med" len="med"/>
-                    </a:lnR>
-                    <a:lnT w="6350" cap="flat" cmpd="sng" algn="ctr">
-                      <a:solidFill>
-                        <a:srgbClr val="CBD5E1"/>
-                      </a:solidFill>
-                      <a:prstDash val="solid"/>
-                      <a:round/>
-                      <a:headEnd type="none" w="med" len="med"/>
-                      <a:tailEnd type="none" w="med" len="med"/>
-                    </a:lnT>
-                    <a:lnB w="6350" cap="flat" cmpd="sng" algn="ctr">
-                      <a:solidFill>
-                        <a:srgbClr val="CBD5E1"/>
-                      </a:solidFill>
-                      <a:prstDash val="solid"/>
-                      <a:round/>
-                      <a:headEnd type="none" w="med" len="med"/>
-                      <a:tailEnd type="none" w="med" len="med"/>
-                    </a:lnB>
-                    <a:solidFill>
-                      <a:srgbClr val="FFFFFF"/>
-                    </a:solidFill>
-                  </a:tcPr>
-                </a:tc>
-                <a:tc>
-                  <a:txBody>
-                    <a:bodyPr/>
-                    <a:lstStyle/>
-                    <a:p>
-                      <a:pPr algn="ctr" indent="0" marL="0">
-                        <a:buNone/>
-                      </a:pPr>
-                      <a:r>
-                        <a:rPr lang="en-US" sz="900" dirty="0">
-                          <a:solidFill>
-                            <a:srgbClr val="000000"/>
-                          </a:solidFill>
-                          <a:latin typeface="Arial" pitchFamily="34" charset="0"/>
-                          <a:ea typeface="Arial" pitchFamily="34" charset="-122"/>
-                          <a:cs typeface="Arial" pitchFamily="34" charset="-120"/>
-                        </a:rPr>
-                        <a:t>45</a:t>
-                      </a:r>
-                      <a:endParaRPr lang="en-US" sz="900" dirty="0">
-                        <a:latin typeface="Arial" charset="0"/>
-                        <a:ea typeface="Arial" charset="0"/>
-                        <a:cs typeface="Arial" charset="0"/>
-                      </a:endParaRPr>
-                    </a:p>
-                  </a:txBody>
-                  <a:tcPr marL="91440" marR="91440" marT="45720" marB="45720">
-                    <a:lnL w="6350" cap="flat" cmpd="sng" algn="ctr">
-                      <a:solidFill>
-                        <a:srgbClr val="CBD5E1"/>
-                      </a:solidFill>
-                      <a:prstDash val="solid"/>
-                      <a:round/>
-                      <a:headEnd type="none" w="med" len="med"/>
-                      <a:tailEnd type="none" w="med" len="med"/>
-                    </a:lnL>
-                    <a:lnR w="6350" cap="flat" cmpd="sng" algn="ctr">
-                      <a:solidFill>
-                        <a:srgbClr val="CBD5E1"/>
-                      </a:solidFill>
-                      <a:prstDash val="solid"/>
-                      <a:round/>
-                      <a:headEnd type="none" w="med" len="med"/>
-                      <a:tailEnd type="none" w="med" len="med"/>
-                    </a:lnR>
-                    <a:lnT w="6350" cap="flat" cmpd="sng" algn="ctr">
-                      <a:solidFill>
-                        <a:srgbClr val="CBD5E1"/>
-                      </a:solidFill>
-                      <a:prstDash val="solid"/>
-                      <a:round/>
-                      <a:headEnd type="none" w="med" len="med"/>
-                      <a:tailEnd type="none" w="med" len="med"/>
-                    </a:lnT>
-                    <a:lnB w="6350" cap="flat" cmpd="sng" algn="ctr">
-                      <a:solidFill>
-                        <a:srgbClr val="CBD5E1"/>
-                      </a:solidFill>
-                      <a:prstDash val="solid"/>
-                      <a:round/>
-                      <a:headEnd type="none" w="med" len="med"/>
-                      <a:tailEnd type="none" w="med" len="med"/>
-                    </a:lnB>
-                    <a:solidFill>
-                      <a:srgbClr val="FFFFFF"/>
-                    </a:solidFill>
-                  </a:tcPr>
-                </a:tc>
-                <a:tc>
-                  <a:txBody>
-                    <a:bodyPr/>
-                    <a:lstStyle/>
-                    <a:p>
-                      <a:pPr algn="ctr" indent="0" marL="0">
-                        <a:buNone/>
-                      </a:pPr>
-                      <a:r>
-                        <a:rPr lang="en-US" sz="900" dirty="0">
-                          <a:solidFill>
-                            <a:srgbClr val="000000"/>
-                          </a:solidFill>
-                          <a:latin typeface="Arial" pitchFamily="34" charset="0"/>
-                          <a:ea typeface="Arial" pitchFamily="34" charset="-122"/>
-                          <a:cs typeface="Arial" pitchFamily="34" charset="-120"/>
-                        </a:rPr>
-                        <a:t>4.62</a:t>
-                      </a:r>
-                      <a:endParaRPr lang="en-US" sz="900" dirty="0">
-                        <a:latin typeface="Arial" charset="0"/>
-                        <a:ea typeface="Arial" charset="0"/>
-                        <a:cs typeface="Arial" charset="0"/>
-                      </a:endParaRPr>
-                    </a:p>
-                  </a:txBody>
-                  <a:tcPr marL="91440" marR="91440" marT="45720" marB="45720">
-                    <a:lnL w="6350" cap="flat" cmpd="sng" algn="ctr">
-                      <a:solidFill>
-                        <a:srgbClr val="CBD5E1"/>
-                      </a:solidFill>
-                      <a:prstDash val="solid"/>
-                      <a:round/>
-                      <a:headEnd type="none" w="med" len="med"/>
-                      <a:tailEnd type="none" w="med" len="med"/>
-                    </a:lnL>
-                    <a:lnR w="6350" cap="flat" cmpd="sng" algn="ctr">
-                      <a:solidFill>
-                        <a:srgbClr val="CBD5E1"/>
-                      </a:solidFill>
-                      <a:prstDash val="solid"/>
-                      <a:round/>
-                      <a:headEnd type="none" w="med" len="med"/>
-                      <a:tailEnd type="none" w="med" len="med"/>
-                    </a:lnR>
-                    <a:lnT w="6350" cap="flat" cmpd="sng" algn="ctr">
-                      <a:solidFill>
-                        <a:srgbClr val="CBD5E1"/>
-                      </a:solidFill>
-                      <a:prstDash val="solid"/>
-                      <a:round/>
-                      <a:headEnd type="none" w="med" len="med"/>
-                      <a:tailEnd type="none" w="med" len="med"/>
-                    </a:lnT>
-                    <a:lnB w="6350" cap="flat" cmpd="sng" algn="ctr">
-                      <a:solidFill>
-                        <a:srgbClr val="CBD5E1"/>
-                      </a:solidFill>
-                      <a:prstDash val="solid"/>
-                      <a:round/>
-                      <a:headEnd type="none" w="med" len="med"/>
-                      <a:tailEnd type="none" w="med" len="med"/>
-                    </a:lnB>
-                    <a:solidFill>
-                      <a:srgbClr val="FFFFFF"/>
-                    </a:solidFill>
-                  </a:tcPr>
-                </a:tc>
-                <a:tc>
-                  <a:txBody>
-                    <a:bodyPr/>
-                    <a:lstStyle/>
-                    <a:p>
-                      <a:pPr algn="ctr" indent="0" marL="0">
-                        <a:buNone/>
-                      </a:pPr>
-                      <a:r>
-                        <a:rPr lang="en-US" sz="900" dirty="0">
-                          <a:solidFill>
-                            <a:srgbClr val="000000"/>
-                          </a:solidFill>
-                          <a:latin typeface="Arial" pitchFamily="34" charset="0"/>
-                          <a:ea typeface="Arial" pitchFamily="34" charset="-122"/>
-                          <a:cs typeface="Arial" pitchFamily="34" charset="-120"/>
-                        </a:rPr>
-                        <a:t>/5 (×2)</a:t>
-                      </a:r>
-                      <a:endParaRPr lang="en-US" sz="900" dirty="0">
-                        <a:latin typeface="Arial" charset="0"/>
-                        <a:ea typeface="Arial" charset="0"/>
-                        <a:cs typeface="Arial" charset="0"/>
-                      </a:endParaRPr>
-                    </a:p>
-                  </a:txBody>
-                  <a:tcPr marL="91440" marR="91440" marT="45720" marB="45720">
-                    <a:lnL w="6350" cap="flat" cmpd="sng" algn="ctr">
-                      <a:solidFill>
-                        <a:srgbClr val="CBD5E1"/>
-                      </a:solidFill>
-                      <a:prstDash val="solid"/>
-                      <a:round/>
-                      <a:headEnd type="none" w="med" len="med"/>
-                      <a:tailEnd type="none" w="med" len="med"/>
-                    </a:lnL>
-                    <a:lnR w="6350" cap="flat" cmpd="sng" algn="ctr">
-                      <a:solidFill>
-                        <a:srgbClr val="CBD5E1"/>
-                      </a:solidFill>
-                      <a:prstDash val="solid"/>
-                      <a:round/>
-                      <a:headEnd type="none" w="med" len="med"/>
-                      <a:tailEnd type="none" w="med" len="med"/>
-                    </a:lnR>
-                    <a:lnT w="6350" cap="flat" cmpd="sng" algn="ctr">
-                      <a:solidFill>
-                        <a:srgbClr val="CBD5E1"/>
-                      </a:solidFill>
-                      <a:prstDash val="solid"/>
-                      <a:round/>
-                      <a:headEnd type="none" w="med" len="med"/>
-                      <a:tailEnd type="none" w="med" len="med"/>
-                    </a:lnT>
-                    <a:lnB w="6350" cap="flat" cmpd="sng" algn="ctr">
-                      <a:solidFill>
-                        <a:srgbClr val="CBD5E1"/>
-                      </a:solidFill>
-                      <a:prstDash val="solid"/>
-                      <a:round/>
-                      <a:headEnd type="none" w="med" len="med"/>
-                      <a:tailEnd type="none" w="med" len="med"/>
-                    </a:lnB>
-                    <a:solidFill>
-                      <a:srgbClr val="FFFFFF"/>
-                    </a:solidFill>
-                  </a:tcPr>
-                </a:tc>
-                <a:tc>
-                  <a:txBody>
-                    <a:bodyPr/>
-                    <a:lstStyle/>
-                    <a:p>
-                      <a:pPr algn="ctr" indent="0" marL="0">
-                        <a:buNone/>
-                      </a:pPr>
-                      <a:r>
-                        <a:rPr lang="en-US" sz="900" dirty="0">
-                          <a:solidFill>
-                            <a:srgbClr val="000000"/>
-                          </a:solidFill>
-                          <a:latin typeface="Arial" pitchFamily="34" charset="0"/>
-                          <a:ea typeface="Arial" pitchFamily="34" charset="-122"/>
-                          <a:cs typeface="Arial" pitchFamily="34" charset="-120"/>
-                        </a:rPr>
-                        <a:t>9.24</a:t>
-                      </a:r>
-                      <a:endParaRPr lang="en-US" sz="900" dirty="0">
-                        <a:latin typeface="Arial" charset="0"/>
-                        <a:ea typeface="Arial" charset="0"/>
-                        <a:cs typeface="Arial" charset="0"/>
-                      </a:endParaRPr>
-                    </a:p>
-                  </a:txBody>
-                  <a:tcPr marL="91440" marR="91440" marT="45720" marB="45720">
-                    <a:lnL w="6350" cap="flat" cmpd="sng" algn="ctr">
-                      <a:solidFill>
-                        <a:srgbClr val="CBD5E1"/>
-                      </a:solidFill>
-                      <a:prstDash val="solid"/>
-                      <a:round/>
-                      <a:headEnd type="none" w="med" len="med"/>
-                      <a:tailEnd type="none" w="med" len="med"/>
-                    </a:lnL>
-                    <a:lnR w="6350" cap="flat" cmpd="sng" algn="ctr">
-                      <a:solidFill>
-                        <a:srgbClr val="CBD5E1"/>
-                      </a:solidFill>
-                      <a:prstDash val="solid"/>
-                      <a:round/>
-                      <a:headEnd type="none" w="med" len="med"/>
-                      <a:tailEnd type="none" w="med" len="med"/>
-                    </a:lnR>
-                    <a:lnT w="6350" cap="flat" cmpd="sng" algn="ctr">
-                      <a:solidFill>
-                        <a:srgbClr val="CBD5E1"/>
-                      </a:solidFill>
-                      <a:prstDash val="solid"/>
-                      <a:round/>
-                      <a:headEnd type="none" w="med" len="med"/>
-                      <a:tailEnd type="none" w="med" len="med"/>
-                    </a:lnT>
-                    <a:lnB w="6350" cap="flat" cmpd="sng" algn="ctr">
-                      <a:solidFill>
-                        <a:srgbClr val="CBD5E1"/>
-                      </a:solidFill>
-                      <a:prstDash val="solid"/>
-                      <a:round/>
-                      <a:headEnd type="none" w="med" len="med"/>
-                      <a:tailEnd type="none" w="med" len="med"/>
-                    </a:lnB>
-                    <a:solidFill>
-                      <a:srgbClr val="FFFFFF"/>
-                    </a:solidFill>
-                  </a:tcPr>
-                </a:tc>
-              </a:tr>
-              <a:tr h="201168">
-                <a:tc>
-                  <a:txBody>
-                    <a:bodyPr/>
-                    <a:lstStyle/>
-                    <a:p>
-                      <a:pPr algn="ctr" indent="0" marL="0">
-                        <a:buNone/>
-                      </a:pPr>
-                      <a:r>
-                        <a:rPr lang="en-US" sz="900" dirty="0">
-                          <a:solidFill>
-                            <a:srgbClr val="000000"/>
-                          </a:solidFill>
-                          <a:latin typeface="Arial" pitchFamily="34" charset="0"/>
-                          <a:ea typeface="Arial" pitchFamily="34" charset="-122"/>
-                          <a:cs typeface="Arial" pitchFamily="34" charset="-120"/>
-                        </a:rPr>
-                        <a:t>Google</a:t>
-                      </a:r>
-                      <a:endParaRPr lang="en-US" sz="900" dirty="0">
-                        <a:latin typeface="Arial" charset="0"/>
-                        <a:ea typeface="Arial" charset="0"/>
-                        <a:cs typeface="Arial" charset="0"/>
-                      </a:endParaRPr>
-                    </a:p>
-                  </a:txBody>
-                  <a:tcPr marL="91440" marR="91440" marT="45720" marB="45720">
-                    <a:lnL w="6350" cap="flat" cmpd="sng" algn="ctr">
-                      <a:solidFill>
-                        <a:srgbClr val="CBD5E1"/>
-                      </a:solidFill>
-                      <a:prstDash val="solid"/>
-                      <a:round/>
-                      <a:headEnd type="none" w="med" len="med"/>
-                      <a:tailEnd type="none" w="med" len="med"/>
-                    </a:lnL>
-                    <a:lnR w="6350" cap="flat" cmpd="sng" algn="ctr">
-                      <a:solidFill>
-                        <a:srgbClr val="CBD5E1"/>
-                      </a:solidFill>
-                      <a:prstDash val="solid"/>
-                      <a:round/>
-                      <a:headEnd type="none" w="med" len="med"/>
-                      <a:tailEnd type="none" w="med" len="med"/>
-                    </a:lnR>
-                    <a:lnT w="6350" cap="flat" cmpd="sng" algn="ctr">
-                      <a:solidFill>
-                        <a:srgbClr val="CBD5E1"/>
-                      </a:solidFill>
-                      <a:prstDash val="solid"/>
-                      <a:round/>
-                      <a:headEnd type="none" w="med" len="med"/>
-                      <a:tailEnd type="none" w="med" len="med"/>
-                    </a:lnT>
-                    <a:lnB w="6350" cap="flat" cmpd="sng" algn="ctr">
-                      <a:solidFill>
-                        <a:srgbClr val="CBD5E1"/>
-                      </a:solidFill>
-                      <a:prstDash val="solid"/>
-                      <a:round/>
-                      <a:headEnd type="none" w="med" len="med"/>
-                      <a:tailEnd type="none" w="med" len="med"/>
-                    </a:lnB>
-                    <a:solidFill>
-                      <a:srgbClr val="E8EFF8"/>
-                    </a:solidFill>
-                  </a:tcPr>
-                </a:tc>
-                <a:tc>
-                  <a:txBody>
-                    <a:bodyPr/>
-                    <a:lstStyle/>
-                    <a:p>
-                      <a:pPr algn="ctr" indent="0" marL="0">
-                        <a:buNone/>
-                      </a:pPr>
-                      <a:r>
-                        <a:rPr lang="en-US" sz="900" dirty="0">
-                          <a:solidFill>
-                            <a:srgbClr val="000000"/>
-                          </a:solidFill>
-                          <a:latin typeface="Arial" pitchFamily="34" charset="0"/>
-                          <a:ea typeface="Arial" pitchFamily="34" charset="-122"/>
-                          <a:cs typeface="Arial" pitchFamily="34" charset="-120"/>
-                        </a:rPr>
-                        <a:t>11</a:t>
-                      </a:r>
-                      <a:endParaRPr lang="en-US" sz="900" dirty="0">
-                        <a:latin typeface="Arial" charset="0"/>
-                        <a:ea typeface="Arial" charset="0"/>
-                        <a:cs typeface="Arial" charset="0"/>
-                      </a:endParaRPr>
-                    </a:p>
-                  </a:txBody>
-                  <a:tcPr marL="91440" marR="91440" marT="45720" marB="45720">
-                    <a:lnL w="6350" cap="flat" cmpd="sng" algn="ctr">
-                      <a:solidFill>
-                        <a:srgbClr val="CBD5E1"/>
-                      </a:solidFill>
-                      <a:prstDash val="solid"/>
-                      <a:round/>
-                      <a:headEnd type="none" w="med" len="med"/>
-                      <a:tailEnd type="none" w="med" len="med"/>
-                    </a:lnL>
-                    <a:lnR w="6350" cap="flat" cmpd="sng" algn="ctr">
-                      <a:solidFill>
-                        <a:srgbClr val="CBD5E1"/>
-                      </a:solidFill>
-                      <a:prstDash val="solid"/>
-                      <a:round/>
-                      <a:headEnd type="none" w="med" len="med"/>
-                      <a:tailEnd type="none" w="med" len="med"/>
-                    </a:lnR>
-                    <a:lnT w="6350" cap="flat" cmpd="sng" algn="ctr">
-                      <a:solidFill>
-                        <a:srgbClr val="CBD5E1"/>
-                      </a:solidFill>
-                      <a:prstDash val="solid"/>
-                      <a:round/>
-                      <a:headEnd type="none" w="med" len="med"/>
-                      <a:tailEnd type="none" w="med" len="med"/>
-                    </a:lnT>
-                    <a:lnB w="6350" cap="flat" cmpd="sng" algn="ctr">
-                      <a:solidFill>
-                        <a:srgbClr val="CBD5E1"/>
-                      </a:solidFill>
-                      <a:prstDash val="solid"/>
-                      <a:round/>
-                      <a:headEnd type="none" w="med" len="med"/>
-                      <a:tailEnd type="none" w="med" len="med"/>
-                    </a:lnB>
-                    <a:solidFill>
-                      <a:srgbClr val="E8EFF8"/>
-                    </a:solidFill>
-                  </a:tcPr>
-                </a:tc>
-                <a:tc>
-                  <a:txBody>
-                    <a:bodyPr/>
-                    <a:lstStyle/>
-                    <a:p>
-                      <a:pPr algn="ctr" indent="0" marL="0">
-                        <a:buNone/>
-                      </a:pPr>
-                      <a:r>
-                        <a:rPr lang="en-US" sz="900" dirty="0">
-                          <a:solidFill>
-                            <a:srgbClr val="000000"/>
-                          </a:solidFill>
-                          <a:latin typeface="Arial" pitchFamily="34" charset="0"/>
-                          <a:ea typeface="Arial" pitchFamily="34" charset="-122"/>
-                          <a:cs typeface="Arial" pitchFamily="34" charset="-120"/>
-                        </a:rPr>
-                        <a:t>4.55</a:t>
-                      </a:r>
-                      <a:endParaRPr lang="en-US" sz="900" dirty="0">
-                        <a:latin typeface="Arial" charset="0"/>
-                        <a:ea typeface="Arial" charset="0"/>
-                        <a:cs typeface="Arial" charset="0"/>
-                      </a:endParaRPr>
-                    </a:p>
-                  </a:txBody>
-                  <a:tcPr marL="91440" marR="91440" marT="45720" marB="45720">
-                    <a:lnL w="6350" cap="flat" cmpd="sng" algn="ctr">
-                      <a:solidFill>
-                        <a:srgbClr val="CBD5E1"/>
-                      </a:solidFill>
-                      <a:prstDash val="solid"/>
-                      <a:round/>
-                      <a:headEnd type="none" w="med" len="med"/>
-                      <a:tailEnd type="none" w="med" len="med"/>
-                    </a:lnL>
-                    <a:lnR w="6350" cap="flat" cmpd="sng" algn="ctr">
-                      <a:solidFill>
-                        <a:srgbClr val="CBD5E1"/>
-                      </a:solidFill>
-                      <a:prstDash val="solid"/>
-                      <a:round/>
-                      <a:headEnd type="none" w="med" len="med"/>
-                      <a:tailEnd type="none" w="med" len="med"/>
-                    </a:lnR>
-                    <a:lnT w="6350" cap="flat" cmpd="sng" algn="ctr">
-                      <a:solidFill>
-                        <a:srgbClr val="CBD5E1"/>
-                      </a:solidFill>
-                      <a:prstDash val="solid"/>
-                      <a:round/>
-                      <a:headEnd type="none" w="med" len="med"/>
-                      <a:tailEnd type="none" w="med" len="med"/>
-                    </a:lnT>
-                    <a:lnB w="6350" cap="flat" cmpd="sng" algn="ctr">
-                      <a:solidFill>
-                        <a:srgbClr val="CBD5E1"/>
-                      </a:solidFill>
-                      <a:prstDash val="solid"/>
-                      <a:round/>
-                      <a:headEnd type="none" w="med" len="med"/>
-                      <a:tailEnd type="none" w="med" len="med"/>
-                    </a:lnB>
-                    <a:solidFill>
-                      <a:srgbClr val="E8EFF8"/>
-                    </a:solidFill>
-                  </a:tcPr>
-                </a:tc>
-                <a:tc>
-                  <a:txBody>
-                    <a:bodyPr/>
-                    <a:lstStyle/>
-                    <a:p>
-                      <a:pPr algn="ctr" indent="0" marL="0">
-                        <a:buNone/>
-                      </a:pPr>
-                      <a:r>
-                        <a:rPr lang="en-US" sz="900" dirty="0">
-                          <a:solidFill>
-                            <a:srgbClr val="000000"/>
-                          </a:solidFill>
-                          <a:latin typeface="Arial" pitchFamily="34" charset="0"/>
-                          <a:ea typeface="Arial" pitchFamily="34" charset="-122"/>
-                          <a:cs typeface="Arial" pitchFamily="34" charset="-120"/>
-                        </a:rPr>
-                        <a:t>/5 (×2)</a:t>
-                      </a:r>
-                      <a:endParaRPr lang="en-US" sz="900" dirty="0">
-                        <a:latin typeface="Arial" charset="0"/>
-                        <a:ea typeface="Arial" charset="0"/>
-                        <a:cs typeface="Arial" charset="0"/>
-                      </a:endParaRPr>
-                    </a:p>
-                  </a:txBody>
-                  <a:tcPr marL="91440" marR="91440" marT="45720" marB="45720">
-                    <a:lnL w="6350" cap="flat" cmpd="sng" algn="ctr">
-                      <a:solidFill>
-                        <a:srgbClr val="CBD5E1"/>
-                      </a:solidFill>
-                      <a:prstDash val="solid"/>
-                      <a:round/>
-                      <a:headEnd type="none" w="med" len="med"/>
-                      <a:tailEnd type="none" w="med" len="med"/>
-                    </a:lnL>
-                    <a:lnR w="6350" cap="flat" cmpd="sng" algn="ctr">
-                      <a:solidFill>
-                        <a:srgbClr val="CBD5E1"/>
-                      </a:solidFill>
-                      <a:prstDash val="solid"/>
-                      <a:round/>
-                      <a:headEnd type="none" w="med" len="med"/>
-                      <a:tailEnd type="none" w="med" len="med"/>
-                    </a:lnR>
-                    <a:lnT w="6350" cap="flat" cmpd="sng" algn="ctr">
-                      <a:solidFill>
-                        <a:srgbClr val="CBD5E1"/>
-                      </a:solidFill>
-                      <a:prstDash val="solid"/>
-                      <a:round/>
-                      <a:headEnd type="none" w="med" len="med"/>
-                      <a:tailEnd type="none" w="med" len="med"/>
-                    </a:lnT>
-                    <a:lnB w="6350" cap="flat" cmpd="sng" algn="ctr">
-                      <a:solidFill>
-                        <a:srgbClr val="CBD5E1"/>
-                      </a:solidFill>
-                      <a:prstDash val="solid"/>
-                      <a:round/>
-                      <a:headEnd type="none" w="med" len="med"/>
-                      <a:tailEnd type="none" w="med" len="med"/>
-                    </a:lnB>
-                    <a:solidFill>
-                      <a:srgbClr val="E8EFF8"/>
-                    </a:solidFill>
-                  </a:tcPr>
-                </a:tc>
-                <a:tc>
-                  <a:txBody>
-                    <a:bodyPr/>
-                    <a:lstStyle/>
-                    <a:p>
-                      <a:pPr algn="ctr" indent="0" marL="0">
-                        <a:buNone/>
-                      </a:pPr>
-                      <a:r>
-                        <a:rPr lang="en-US" sz="900" dirty="0">
-                          <a:solidFill>
-                            <a:srgbClr val="000000"/>
-                          </a:solidFill>
-                          <a:latin typeface="Arial" pitchFamily="34" charset="0"/>
-                          <a:ea typeface="Arial" pitchFamily="34" charset="-122"/>
-                          <a:cs typeface="Arial" pitchFamily="34" charset="-120"/>
-                        </a:rPr>
-                        <a:t>9.09</a:t>
+                        <a:t>9.16</a:t>
                       </a:r>
                       <a:endParaRPr lang="en-US" sz="900" dirty="0">
                         <a:latin typeface="Arial" charset="0"/>
@@ -9247,7 +9247,7 @@
                           <a:ea typeface="Arial" pitchFamily="34" charset="-122"/>
                           <a:cs typeface="Arial" pitchFamily="34" charset="-120"/>
                         </a:rPr>
-                        <a:t>26</a:t>
+                        <a:t>27</a:t>
                       </a:r>
                       <a:endParaRPr lang="en-US" sz="900" dirty="0">
                         <a:latin typeface="Arial" charset="0"/>
@@ -9859,7 +9859,7 @@
                 <a:ea typeface="Arial" pitchFamily="34" charset="-122"/>
                 <a:cs typeface="Arial" pitchFamily="34" charset="-120"/>
               </a:rPr>
-              <a:t>137件（95.8%）</a:t>
+              <a:t>139件（97.2%）</a:t>
             </a:r>
             <a:endParaRPr lang="en-US" sz="1100" dirty="0"/>
           </a:p>
@@ -9957,7 +9957,7 @@
                 <a:ea typeface="Arial" pitchFamily="34" charset="-122"/>
                 <a:cs typeface="Arial" pitchFamily="34" charset="-120"/>
               </a:rPr>
-              <a:t>5件（3.5%）</a:t>
+              <a:t>3件（2.1%）</a:t>
             </a:r>
             <a:endParaRPr lang="en-US" sz="1100" dirty="0"/>
           </a:p>
@@ -10467,7 +10467,7 @@
                 <a:ea typeface="Arial" pitchFamily="34" charset="-122"/>
                 <a:cs typeface="Arial" pitchFamily="34" charset="-120"/>
               </a:rPr>
-              <a:t>朝食のバイキングは子供も食べられるものがおおくてありがたかったです</a:t>
+              <a:t>朝食は大人も子どもも大満足で種類豊富で、食べるのが楽しかったです</a:t>
             </a:r>
             <a:endParaRPr lang="en-US" sz="900" dirty="0"/>
           </a:p>
@@ -10506,7 +10506,7 @@
                 <a:ea typeface="Arial" pitchFamily="34" charset="-122"/>
                 <a:cs typeface="Arial" pitchFamily="34" charset="-120"/>
               </a:rPr>
-              <a:t>「ウェルカムドリンクや朝食のブュッフェ、それに部屋も過ごしやく1日楽しんで疲れた体を休めることができました」</a:t>
+              <a:t>「シャトルバスもあり、部屋・朝食・スタッフ対応も良くコンビニもありとても良かったです」</a:t>
             </a:r>
             <a:endParaRPr lang="en-US" sz="900" dirty="0"/>
           </a:p>
@@ -10690,7 +10690,7 @@
                 <a:ea typeface="Arial" pitchFamily="34" charset="-122"/>
                 <a:cs typeface="Arial" pitchFamily="34" charset="-120"/>
               </a:rPr>
-              <a:t>お部屋はベッドがくっついているのがよくて選んだので、快適でよかったです</a:t>
+              <a:t>とても広々したお部屋、お風呂もトイレと別れており快適でした</a:t>
             </a:r>
             <a:endParaRPr lang="en-US" sz="900" dirty="0"/>
           </a:p>
@@ -10729,7 +10729,7 @@
                 <a:ea typeface="Arial" pitchFamily="34" charset="-122"/>
                 <a:cs typeface="Arial" pitchFamily="34" charset="-120"/>
               </a:rPr>
-              <a:t>「小学生までなら添い寝無料で、小6・小3と添い寝しましたが大きめのベッドだったので4人でも余裕でした」</a:t>
+              <a:t>「ベッドも広く添い寝でものびのび寝れたし、お風呂、洗面所、トイレも別になっているので、自宅のように～自宅以上に快適に...」</a:t>
             </a:r>
             <a:endParaRPr lang="en-US" sz="900" dirty="0"/>
           </a:p>
@@ -10913,7 +10913,7 @@
                 <a:ea typeface="Arial" pitchFamily="34" charset="-122"/>
                 <a:cs typeface="Arial" pitchFamily="34" charset="-120"/>
               </a:rPr>
-              <a:t>・内装が綺麗 ・チェックイン、チェックアウトが楽 ・ホテル内にコンビニが併設 ・部屋が広かった ・強いて言うならお...</a:t>
+              <a:t>清潔感もあり、コンセントもいくつもあったので、スマホやモバイルバッテリー、子どものカメラなど複数充電できました</a:t>
             </a:r>
             <a:endParaRPr lang="en-US" sz="900" dirty="0"/>
           </a:p>
@@ -10952,7 +10952,7 @@
                 <a:ea typeface="Arial" pitchFamily="34" charset="-122"/>
                 <a:cs typeface="Arial" pitchFamily="34" charset="-120"/>
               </a:rPr>
-              <a:t>「ホテルも清潔で、快適でした」</a:t>
+              <a:t>「部屋が綺麗で広い お風呂とトイレが別でよかった ウェルカムドリンクがあってよかった 部屋が綺麗で広い お風呂とトイ...」</a:t>
             </a:r>
             <a:endParaRPr lang="en-US" sz="900" dirty="0"/>
           </a:p>
@@ -11136,7 +11136,7 @@
                 <a:ea typeface="Arial" pitchFamily="34" charset="-122"/>
                 <a:cs typeface="Arial" pitchFamily="34" charset="-120"/>
               </a:rPr>
-              <a:t>（もちろんAI対応でもありがたいです</a:t>
+              <a:t>シャトルバスもあり、部屋・朝食・スタッフ対応も良くコンビニもありとても良かったです</a:t>
             </a:r>
             <a:endParaRPr lang="en-US" sz="900" dirty="0"/>
           </a:p>
@@ -11175,7 +11175,7 @@
                 <a:ea typeface="Arial" pitchFamily="34" charset="-122"/>
                 <a:cs typeface="Arial" pitchFamily="34" charset="-120"/>
               </a:rPr>
-              <a:t>「送迎バスのドライバーさんのホスピタリティに溢れた対応に感謝です」</a:t>
+              <a:t>「（もちろんAI対応でもありがたいです」</a:t>
             </a:r>
             <a:endParaRPr lang="en-US" sz="900" dirty="0"/>
           </a:p>
@@ -11359,7 +11359,7 @@
                 <a:ea typeface="Arial" pitchFamily="34" charset="-122"/>
                 <a:cs typeface="Arial" pitchFamily="34" charset="-120"/>
               </a:rPr>
-              <a:t>立地もディズニーから車ですぐで良かったです</a:t>
+              <a:t>部屋は広く電子レンジもあるため、とても便利でした</a:t>
             </a:r>
             <a:endParaRPr lang="en-US" sz="900" dirty="0"/>
           </a:p>
@@ -11398,7 +11398,7 @@
                 <a:ea typeface="Arial" pitchFamily="34" charset="-122"/>
                 <a:cs typeface="Arial" pitchFamily="34" charset="-120"/>
               </a:rPr>
-              <a:t>「イベント会場や駅に近くてとても便利でした」</a:t>
+              <a:t>「立地もディズニーから車ですぐで良かったです」</a:t>
             </a:r>
             <a:endParaRPr lang="en-US" sz="900" dirty="0"/>
           </a:p>
@@ -11582,7 +11582,7 @@
                 <a:ea typeface="Arial" pitchFamily="34" charset="-122"/>
                 <a:cs typeface="Arial" pitchFamily="34" charset="-120"/>
               </a:rPr>
-              <a:t>隣接しているローソンも大変助かりました</a:t>
+              <a:t>シャトルバスもあり、部屋・朝食・スタッフ対応も良くコンビニもありとても良かったです</a:t>
             </a:r>
             <a:endParaRPr lang="en-US" sz="900" dirty="0"/>
           </a:p>
@@ -11621,7 +11621,7 @@
                 <a:ea typeface="Arial" pitchFamily="34" charset="-122"/>
                 <a:cs typeface="Arial" pitchFamily="34" charset="-120"/>
               </a:rPr>
-              <a:t>「・内装が綺麗 ・チェックイン、チェックアウトが楽 ・ホテル内にコンビニが併設 ・部屋が広かった ・強いて言うならお...」</a:t>
+              <a:t>「隣接しているローソンも大変助かりました」</a:t>
             </a:r>
             <a:endParaRPr lang="en-US" sz="900" dirty="0"/>
           </a:p>
@@ -12311,7 +12311,7 @@
                           <a:ea typeface="Arial" pitchFamily="34" charset="-122"/>
                           <a:cs typeface="Arial" pitchFamily="34" charset="-120"/>
                         </a:rPr>
-                        <a:t>送迎バスのドライバーさんのホスピタリティに溢れた対応に感謝です</a:t>
+                        <a:t>とても広々したお部屋、お風呂もトイレと別れており快適でした</a:t>
                       </a:r>
                       <a:endParaRPr lang="en-US" sz="900" dirty="0">
                         <a:latin typeface="Arial" charset="0"/>
@@ -12379,7 +12379,7 @@
                           <a:ea typeface="Arial" pitchFamily="34" charset="-122"/>
                           <a:cs typeface="Arial" pitchFamily="34" charset="-120"/>
                         </a:rPr>
-                        <a:t>46件</a:t>
+                        <a:t>51件</a:t>
                       </a:r>
                       <a:endParaRPr lang="en-US" sz="900" dirty="0">
                         <a:latin typeface="Arial" charset="0"/>
@@ -12585,7 +12585,7 @@
                           <a:ea typeface="Arial" pitchFamily="34" charset="-122"/>
                           <a:cs typeface="Arial" pitchFamily="34" charset="-120"/>
                         </a:rPr>
-                        <a:t>ディズニーまでのバスの本数が少ないのと、最終時間が早いのが残念</a:t>
+                        <a:t>本当はもっと沢山食べたかったけれど朝なのであまりお腹に入らず残念でした</a:t>
                       </a:r>
                       <a:endParaRPr lang="en-US" sz="900" dirty="0">
                         <a:latin typeface="Arial" charset="0"/>
@@ -12653,7 +12653,7 @@
                           <a:ea typeface="Arial" pitchFamily="34" charset="-122"/>
                           <a:cs typeface="Arial" pitchFamily="34" charset="-120"/>
                         </a:rPr>
-                        <a:t>8件</a:t>
+                        <a:t>9件</a:t>
                       </a:r>
                       <a:endParaRPr lang="en-US" sz="900" dirty="0">
                         <a:latin typeface="Arial" charset="0"/>

--- a/納品レポート/ホテル別レポート/comfort_suites_tokyobay_口コミ分析レポート.pptx
+++ b/納品レポート/ホテル別レポート/comfort_suites_tokyobay_口コミ分析レポート.pptx
@@ -2767,7 +2767,7 @@
                 <a:ea typeface="Arial" pitchFamily="34" charset="-122"/>
                 <a:cs typeface="Arial" pitchFamily="34" charset="-120"/>
               </a:rPr>
-              <a:t>作成日：2026年3月25日</a:t>
+              <a:t>作成日：2026年3月26日</a:t>
             </a:r>
             <a:endParaRPr lang="en-US" sz="1000" dirty="0"/>
           </a:p>

--- a/納品レポート/ホテル別レポート/comfort_suites_tokyobay_口コミ分析レポート.pptx
+++ b/納品レポート/ホテル別レポート/comfort_suites_tokyobay_口コミ分析レポート.pptx
@@ -189,10 +189,10 @@
                     <c:v>Google</c:v>
                   </c:pt>
                   <c:pt idx="3">
-                    <c:v>楽天トラベル</c:v>
+                    <c:v>じゃらん</c:v>
                   </c:pt>
                   <c:pt idx="4">
-                    <c:v>じゃらん</c:v>
+                    <c:v>楽天トラベル</c:v>
                   </c:pt>
                   <c:pt idx="5">
                     <c:v>Booking.com</c:v>
@@ -208,7 +208,7 @@
                 <c:formatCode>General</c:formatCode>
                 <c:ptCount val="6"/>
                 <c:pt idx="0">
-                  <c:v>9.62</c:v>
+                  <c:v>9.57</c:v>
                 </c:pt>
                 <c:pt idx="1">
                   <c:v>9.5</c:v>
@@ -217,10 +217,10 @@
                   <c:v>9.25</c:v>
                 </c:pt>
                 <c:pt idx="3">
-                  <c:v>9.22</c:v>
+                  <c:v>9.2</c:v>
                 </c:pt>
                 <c:pt idx="4">
-                  <c:v>9.16</c:v>
+                  <c:v>9.17</c:v>
                 </c:pt>
                 <c:pt idx="5">
                   <c:v>8.85</c:v>
@@ -781,10 +781,10 @@
                 <c:formatCode>General</c:formatCode>
                 <c:ptCount val="6"/>
                 <c:pt idx="0">
-                  <c:v>83</c:v>
+                  <c:v>82</c:v>
                 </c:pt>
                 <c:pt idx="1">
-                  <c:v>15</c:v>
+                  <c:v>16</c:v>
                 </c:pt>
                 <c:pt idx="2">
                   <c:v>41</c:v>
@@ -2767,7 +2767,7 @@
                 <a:ea typeface="Arial" pitchFamily="34" charset="-122"/>
                 <a:cs typeface="Arial" pitchFamily="34" charset="-120"/>
               </a:rPr>
-              <a:t>作成日：2026年3月26日</a:t>
+              <a:t>作成日：2026年3月27日</a:t>
             </a:r>
             <a:endParaRPr lang="en-US" sz="1000" dirty="0"/>
           </a:p>
@@ -3313,7 +3313,7 @@
                           <a:ea typeface="Arial" pitchFamily="34" charset="-122"/>
                           <a:cs typeface="Arial" pitchFamily="34" charset="-120"/>
                         </a:rPr>
-                        <a:t>9.21点</a:t>
+                        <a:t>9.20点</a:t>
                       </a:r>
                       <a:endParaRPr lang="en-US" sz="1000" dirty="0">
                         <a:latin typeface="Arial" charset="0"/>
@@ -4409,7 +4409,7 @@
                           <a:ea typeface="Arial" pitchFamily="34" charset="-122"/>
                           <a:cs typeface="Arial" pitchFamily="34" charset="-120"/>
                         </a:rPr>
-                        <a:t>約51件/期間</a:t>
+                        <a:t>約50件/期間</a:t>
                       </a:r>
                       <a:endParaRPr lang="en-US" sz="1000" dirty="0">
                         <a:latin typeface="Arial" charset="0"/>
@@ -5048,7 +5048,7 @@
                 <a:ea typeface="Arial" pitchFamily="34" charset="-122"/>
                 <a:cs typeface="Arial" pitchFamily="34" charset="-120"/>
               </a:rPr>
-              <a:t>9.21</a:t>
+              <a:t>9.20</a:t>
             </a:r>
             <a:endParaRPr lang="en-US" sz="3200" dirty="0"/>
           </a:p>
@@ -5571,7 +5571,7 @@
                 <a:ea typeface="Arial" pitchFamily="34" charset="-122"/>
                 <a:cs typeface="Arial" pitchFamily="34" charset="-120"/>
               </a:rPr>
-              <a:t>  朝食は大人も子どもも大満足で種類豊富で、食べるのが楽しかったです</a:t>
+              <a:t>  朝食は子どもが好きなメニューが多く、たくさん食べることができました</a:t>
             </a:r>
             <a:endParaRPr lang="en-US" sz="1100" dirty="0"/>
           </a:p>
@@ -5611,7 +5611,7 @@
                 <a:ea typeface="Arial" pitchFamily="34" charset="-122"/>
                 <a:cs typeface="Arial" pitchFamily="34" charset="-120"/>
               </a:rPr>
-              <a:t>  とても広々したお部屋、お風呂もトイレと別れており快適でした</a:t>
+              <a:t>  子ども2人と添い寝しても十分な大きさのベッドで、しっかり休めました</a:t>
             </a:r>
             <a:endParaRPr lang="en-US" sz="1100" dirty="0"/>
           </a:p>
@@ -5631,7 +5631,7 @@
                 <a:ea typeface="Arial" pitchFamily="34" charset="-122"/>
                 <a:cs typeface="Arial" pitchFamily="34" charset="-120"/>
               </a:rPr>
-              <a:t>清潔さ・清掃 </a:t>
+              <a:t>スタッフの対応 </a:t>
             </a:r>
             <a:endParaRPr lang="en-US" sz="1100" dirty="0"/>
           </a:p>
@@ -5651,7 +5651,7 @@
                 <a:ea typeface="Arial" pitchFamily="34" charset="-122"/>
                 <a:cs typeface="Arial" pitchFamily="34" charset="-120"/>
               </a:rPr>
-              <a:t>  清潔感もあり、コンセントもいくつもあったので、スマホやモバイルバッテリー、子どものカメラなど複数充電できました</a:t>
+              <a:t>  スタッフの方が親切で、声をかけてくれたり、ディズニー帰りで混み合っていてもスムーズな流れで何でも出来て良かった</a:t>
             </a:r>
             <a:endParaRPr lang="en-US" sz="1100" dirty="0"/>
           </a:p>
@@ -5799,7 +5799,7 @@
                 <a:ea typeface="Arial" pitchFamily="34" charset="-122"/>
                 <a:cs typeface="Arial" pitchFamily="34" charset="-120"/>
               </a:rPr>
-              <a:t>  とても広々したお部屋、お風呂もトイレと別れており快適でした</a:t>
+              <a:t>  ひとつ問題をあげるなら、ディズニーからホテルへ戻る時のバスが止まる場所が曖昧なことくらいです</a:t>
             </a:r>
             <a:endParaRPr lang="en-US" sz="1100" dirty="0"/>
           </a:p>
@@ -6232,7 +6232,7 @@
                 <a:ea typeface="Arial" pitchFamily="34" charset="-122"/>
                 <a:cs typeface="Arial" pitchFamily="34" charset="-120"/>
               </a:rPr>
-              <a:t>9.21</a:t>
+              <a:t>9.20</a:t>
             </a:r>
             <a:endParaRPr lang="en-US" sz="3200" dirty="0"/>
           </a:p>
@@ -7028,7 +7028,7 @@
                 <a:ea typeface="Arial" pitchFamily="34" charset="-122"/>
                 <a:cs typeface="Arial" pitchFamily="34" charset="-120"/>
               </a:rPr>
-              <a:t>Trip.com(9.62)が最高スコア。</a:t>
+              <a:t>Trip.com(9.57)が最高スコア。</a:t>
             </a:r>
             <a:endParaRPr lang="en-US" sz="1100" dirty="0"/>
           </a:p>
@@ -7537,7 +7537,7 @@
                           <a:ea typeface="Arial" pitchFamily="34" charset="-122"/>
                           <a:cs typeface="Arial" pitchFamily="34" charset="-120"/>
                         </a:rPr>
-                        <a:t>13</a:t>
+                        <a:t>14</a:t>
                       </a:r>
                       <a:endParaRPr lang="en-US" sz="900" dirty="0">
                         <a:latin typeface="Arial" charset="0"/>
@@ -7605,7 +7605,7 @@
                           <a:ea typeface="Arial" pitchFamily="34" charset="-122"/>
                           <a:cs typeface="Arial" pitchFamily="34" charset="-120"/>
                         </a:rPr>
-                        <a:t>9.62</a:t>
+                        <a:t>9.57</a:t>
                       </a:r>
                       <a:endParaRPr lang="en-US" sz="900" dirty="0">
                         <a:latin typeface="Arial" charset="0"/>
@@ -7741,7 +7741,7 @@
                           <a:ea typeface="Arial" pitchFamily="34" charset="-122"/>
                           <a:cs typeface="Arial" pitchFamily="34" charset="-120"/>
                         </a:rPr>
-                        <a:t>9.62</a:t>
+                        <a:t>9.57</a:t>
                       </a:r>
                       <a:endParaRPr lang="en-US" sz="900" dirty="0">
                         <a:latin typeface="Arial" charset="0"/>
@@ -8495,7 +8495,7 @@
                           <a:ea typeface="Arial" pitchFamily="34" charset="-122"/>
                           <a:cs typeface="Arial" pitchFamily="34" charset="-120"/>
                         </a:rPr>
-                        <a:t>楽天トラベル</a:t>
+                        <a:t>じゃらん</a:t>
                       </a:r>
                       <a:endParaRPr lang="en-US" sz="900" dirty="0">
                         <a:latin typeface="Arial" charset="0"/>
@@ -8563,7 +8563,7 @@
                           <a:ea typeface="Arial" pitchFamily="34" charset="-122"/>
                           <a:cs typeface="Arial" pitchFamily="34" charset="-120"/>
                         </a:rPr>
-                        <a:t>46</a:t>
+                        <a:t>30</a:t>
                       </a:r>
                       <a:endParaRPr lang="en-US" sz="900" dirty="0">
                         <a:latin typeface="Arial" charset="0"/>
@@ -8631,7 +8631,7 @@
                           <a:ea typeface="Arial" pitchFamily="34" charset="-122"/>
                           <a:cs typeface="Arial" pitchFamily="34" charset="-120"/>
                         </a:rPr>
-                        <a:t>4.61</a:t>
+                        <a:t>4.6</a:t>
                       </a:r>
                       <a:endParaRPr lang="en-US" sz="900" dirty="0">
                         <a:latin typeface="Arial" charset="0"/>
@@ -8767,7 +8767,7 @@
                           <a:ea typeface="Arial" pitchFamily="34" charset="-122"/>
                           <a:cs typeface="Arial" pitchFamily="34" charset="-120"/>
                         </a:rPr>
-                        <a:t>9.22</a:t>
+                        <a:t>9.2</a:t>
                       </a:r>
                       <a:endParaRPr lang="en-US" sz="900" dirty="0">
                         <a:latin typeface="Arial" charset="0"/>
@@ -8837,7 +8837,7 @@
                           <a:ea typeface="Arial" pitchFamily="34" charset="-122"/>
                           <a:cs typeface="Arial" pitchFamily="34" charset="-120"/>
                         </a:rPr>
-                        <a:t>じゃらん</a:t>
+                        <a:t>楽天トラベル</a:t>
                       </a:r>
                       <a:endParaRPr lang="en-US" sz="900" dirty="0">
                         <a:latin typeface="Arial" charset="0"/>
@@ -8905,7 +8905,7 @@
                           <a:ea typeface="Arial" pitchFamily="34" charset="-122"/>
                           <a:cs typeface="Arial" pitchFamily="34" charset="-120"/>
                         </a:rPr>
-                        <a:t>31</a:t>
+                        <a:t>46</a:t>
                       </a:r>
                       <a:endParaRPr lang="en-US" sz="900" dirty="0">
                         <a:latin typeface="Arial" charset="0"/>
@@ -8973,7 +8973,7 @@
                           <a:ea typeface="Arial" pitchFamily="34" charset="-122"/>
                           <a:cs typeface="Arial" pitchFamily="34" charset="-120"/>
                         </a:rPr>
-                        <a:t>4.58</a:t>
+                        <a:t>4.59</a:t>
                       </a:r>
                       <a:endParaRPr lang="en-US" sz="900" dirty="0">
                         <a:latin typeface="Arial" charset="0"/>
@@ -9109,7 +9109,7 @@
                           <a:ea typeface="Arial" pitchFamily="34" charset="-122"/>
                           <a:cs typeface="Arial" pitchFamily="34" charset="-120"/>
                         </a:rPr>
-                        <a:t>9.16</a:t>
+                        <a:t>9.17</a:t>
                       </a:r>
                       <a:endParaRPr lang="en-US" sz="900" dirty="0">
                         <a:latin typeface="Arial" charset="0"/>
@@ -10467,7 +10467,7 @@
                 <a:ea typeface="Arial" pitchFamily="34" charset="-122"/>
                 <a:cs typeface="Arial" pitchFamily="34" charset="-120"/>
               </a:rPr>
-              <a:t>朝食は大人も子どもも大満足で種類豊富で、食べるのが楽しかったです</a:t>
+              <a:t>朝食は子どもが好きなメニューが多く、たくさん食べることができました</a:t>
             </a:r>
             <a:endParaRPr lang="en-US" sz="900" dirty="0"/>
           </a:p>
@@ -10482,6 +10482,452 @@
         <p:spPr>
           <a:xfrm>
             <a:off x="594360" y="1828800"/>
+            <a:ext cx="2377440" cy="640080"/>
+          </a:xfrm>
+          <a:prstGeom prst="rect">
+            <a:avLst/>
+          </a:prstGeom>
+          <a:noFill/>
+          <a:ln/>
+        </p:spPr>
+        <p:txBody>
+          <a:bodyPr wrap="square" lIns="0" tIns="0" rIns="0" bIns="0" rtlCol="0" anchor="ctr"/>
+          <a:lstStyle/>
+          <a:p>
+            <a:pPr indent="0" marL="0">
+              <a:buNone/>
+            </a:pPr>
+            <a:r>
+              <a:rPr lang="en-US" sz="900" i="1" dirty="0">
+                <a:solidFill>
+                  <a:srgbClr val="3B7DD8"/>
+                </a:solidFill>
+                <a:latin typeface="Arial" pitchFamily="34" charset="0"/>
+                <a:ea typeface="Arial" pitchFamily="34" charset="-122"/>
+                <a:cs typeface="Arial" pitchFamily="34" charset="-120"/>
+              </a:rPr>
+              <a:t>「部屋に入った時のお楽しみ、ウェルカムドリンク、モーニングビュッフェのキッズメニューやおまけのお菓子など、子供を楽し...」</a:t>
+            </a:r>
+            <a:endParaRPr lang="en-US" sz="900" dirty="0"/>
+          </a:p>
+        </p:txBody>
+      </p:sp>
+      <p:sp>
+        <p:nvSpPr>
+          <p:cNvPr id="12" name="Shape 10"/>
+          <p:cNvSpPr/>
+          <p:nvPr/>
+        </p:nvSpPr>
+        <p:spPr>
+          <a:xfrm>
+            <a:off x="3291840" y="1051560"/>
+            <a:ext cx="2651760" cy="1600200"/>
+          </a:xfrm>
+          <a:prstGeom prst="rect">
+            <a:avLst/>
+          </a:prstGeom>
+          <a:solidFill>
+            <a:srgbClr val="FFFFFF"/>
+          </a:solidFill>
+          <a:ln/>
+          <a:effectLst>
+            <a:outerShdw sx="100000" sy="100000" kx="0" ky="0" algn="bl" rotWithShape="0" blurRad="50800" dist="25400" dir="8100000">
+              <a:srgbClr val="000000">
+                <a:alpha val="10000"/>
+              </a:srgbClr>
+            </a:outerShdw>
+          </a:effectLst>
+        </p:spPr>
+      </p:sp>
+      <p:sp>
+        <p:nvSpPr>
+          <p:cNvPr id="13" name="Shape 11"/>
+          <p:cNvSpPr/>
+          <p:nvPr/>
+        </p:nvSpPr>
+        <p:spPr>
+          <a:xfrm>
+            <a:off x="3291840" y="1051560"/>
+            <a:ext cx="54864" cy="1600200"/>
+          </a:xfrm>
+          <a:prstGeom prst="rect">
+            <a:avLst/>
+          </a:prstGeom>
+          <a:solidFill>
+            <a:srgbClr val="16A34A"/>
+          </a:solidFill>
+          <a:ln/>
+        </p:spPr>
+      </p:sp>
+      <p:sp>
+        <p:nvSpPr>
+          <p:cNvPr id="14" name="Shape 12"/>
+          <p:cNvSpPr/>
+          <p:nvPr/>
+        </p:nvSpPr>
+        <p:spPr>
+          <a:xfrm>
+            <a:off x="5120640" y="1124712"/>
+            <a:ext cx="658368" cy="228600"/>
+          </a:xfrm>
+          <a:prstGeom prst="rect">
+            <a:avLst/>
+          </a:prstGeom>
+          <a:solidFill>
+            <a:srgbClr val="DCFCE7"/>
+          </a:solidFill>
+          <a:ln/>
+        </p:spPr>
+      </p:sp>
+      <p:sp>
+        <p:nvSpPr>
+          <p:cNvPr id="15" name="Text 13"/>
+          <p:cNvSpPr/>
+          <p:nvPr/>
+        </p:nvSpPr>
+        <p:spPr>
+          <a:xfrm>
+            <a:off x="5120640" y="1124712"/>
+            <a:ext cx="658368" cy="228600"/>
+          </a:xfrm>
+          <a:prstGeom prst="rect">
+            <a:avLst/>
+          </a:prstGeom>
+          <a:noFill/>
+          <a:ln/>
+        </p:spPr>
+        <p:txBody>
+          <a:bodyPr wrap="square" lIns="0" tIns="0" rIns="0" bIns="0" rtlCol="0" anchor="ctr"/>
+          <a:lstStyle/>
+          <a:p>
+            <a:pPr algn="ctr" indent="0" marL="0">
+              <a:buNone/>
+            </a:pPr>
+            <a:r>
+              <a:rPr lang="en-US" sz="900" b="1" dirty="0">
+                <a:solidFill>
+                  <a:srgbClr val="16A34A"/>
+                </a:solidFill>
+                <a:latin typeface="Arial" pitchFamily="34" charset="0"/>
+                <a:ea typeface="Arial" pitchFamily="34" charset="-122"/>
+                <a:cs typeface="Arial" pitchFamily="34" charset="-120"/>
+              </a:rPr>
+              <a:t>20件+</a:t>
+            </a:r>
+            <a:endParaRPr lang="en-US" sz="900" dirty="0"/>
+          </a:p>
+        </p:txBody>
+      </p:sp>
+      <p:sp>
+        <p:nvSpPr>
+          <p:cNvPr id="16" name="Text 14"/>
+          <p:cNvSpPr/>
+          <p:nvPr/>
+        </p:nvSpPr>
+        <p:spPr>
+          <a:xfrm>
+            <a:off x="3429000" y="1124712"/>
+            <a:ext cx="1645920" cy="274320"/>
+          </a:xfrm>
+          <a:prstGeom prst="rect">
+            <a:avLst/>
+          </a:prstGeom>
+          <a:noFill/>
+          <a:ln/>
+        </p:spPr>
+        <p:txBody>
+          <a:bodyPr wrap="square" lIns="0" tIns="0" rIns="0" bIns="0" rtlCol="0" anchor="ctr"/>
+          <a:lstStyle/>
+          <a:p>
+            <a:pPr indent="0" marL="0">
+              <a:buNone/>
+            </a:pPr>
+            <a:r>
+              <a:rPr lang="en-US" sz="1300" b="1" dirty="0">
+                <a:solidFill>
+                  <a:srgbClr val="1A2744"/>
+                </a:solidFill>
+                <a:latin typeface="Arial" pitchFamily="34" charset="0"/>
+                <a:ea typeface="Arial" pitchFamily="34" charset="-122"/>
+                <a:cs typeface="Arial" pitchFamily="34" charset="-120"/>
+              </a:rPr>
+              <a:t>快適さ・設備</a:t>
+            </a:r>
+            <a:endParaRPr lang="en-US" sz="1300" dirty="0"/>
+          </a:p>
+        </p:txBody>
+      </p:sp>
+      <p:sp>
+        <p:nvSpPr>
+          <p:cNvPr id="17" name="Text 15"/>
+          <p:cNvSpPr/>
+          <p:nvPr/>
+        </p:nvSpPr>
+        <p:spPr>
+          <a:xfrm>
+            <a:off x="3429000" y="1417320"/>
+            <a:ext cx="2377440" cy="365760"/>
+          </a:xfrm>
+          <a:prstGeom prst="rect">
+            <a:avLst/>
+          </a:prstGeom>
+          <a:noFill/>
+          <a:ln/>
+        </p:spPr>
+        <p:txBody>
+          <a:bodyPr wrap="square" lIns="0" tIns="0" rIns="0" bIns="0" rtlCol="0" anchor="ctr"/>
+          <a:lstStyle/>
+          <a:p>
+            <a:pPr indent="0" marL="0">
+              <a:buNone/>
+            </a:pPr>
+            <a:r>
+              <a:rPr lang="en-US" sz="900" dirty="0">
+                <a:solidFill>
+                  <a:srgbClr val="64748B"/>
+                </a:solidFill>
+                <a:latin typeface="Arial" pitchFamily="34" charset="0"/>
+                <a:ea typeface="Arial" pitchFamily="34" charset="-122"/>
+                <a:cs typeface="Arial" pitchFamily="34" charset="-120"/>
+              </a:rPr>
+              <a:t>子ども2人と添い寝しても十分な大きさのベッドで、しっかり休めました</a:t>
+            </a:r>
+            <a:endParaRPr lang="en-US" sz="900" dirty="0"/>
+          </a:p>
+        </p:txBody>
+      </p:sp>
+      <p:sp>
+        <p:nvSpPr>
+          <p:cNvPr id="18" name="Text 16"/>
+          <p:cNvSpPr/>
+          <p:nvPr/>
+        </p:nvSpPr>
+        <p:spPr>
+          <a:xfrm>
+            <a:off x="3429000" y="1828800"/>
+            <a:ext cx="2377440" cy="640080"/>
+          </a:xfrm>
+          <a:prstGeom prst="rect">
+            <a:avLst/>
+          </a:prstGeom>
+          <a:noFill/>
+          <a:ln/>
+        </p:spPr>
+        <p:txBody>
+          <a:bodyPr wrap="square" lIns="0" tIns="0" rIns="0" bIns="0" rtlCol="0" anchor="ctr"/>
+          <a:lstStyle/>
+          <a:p>
+            <a:pPr indent="0" marL="0">
+              <a:buNone/>
+            </a:pPr>
+            <a:r>
+              <a:rPr lang="en-US" sz="900" i="1" dirty="0">
+                <a:solidFill>
+                  <a:srgbClr val="3B7DD8"/>
+                </a:solidFill>
+                <a:latin typeface="Arial" pitchFamily="34" charset="0"/>
+                <a:ea typeface="Arial" pitchFamily="34" charset="-122"/>
+                <a:cs typeface="Arial" pitchFamily="34" charset="-120"/>
+              </a:rPr>
+              <a:t>「とても広々したお部屋、お風呂もトイレと別れており快適でした」</a:t>
+            </a:r>
+            <a:endParaRPr lang="en-US" sz="900" dirty="0"/>
+          </a:p>
+        </p:txBody>
+      </p:sp>
+      <p:sp>
+        <p:nvSpPr>
+          <p:cNvPr id="19" name="Shape 17"/>
+          <p:cNvSpPr/>
+          <p:nvPr/>
+        </p:nvSpPr>
+        <p:spPr>
+          <a:xfrm>
+            <a:off x="6126480" y="1051560"/>
+            <a:ext cx="2651760" cy="1600200"/>
+          </a:xfrm>
+          <a:prstGeom prst="rect">
+            <a:avLst/>
+          </a:prstGeom>
+          <a:solidFill>
+            <a:srgbClr val="FFFFFF"/>
+          </a:solidFill>
+          <a:ln/>
+          <a:effectLst>
+            <a:outerShdw sx="100000" sy="100000" kx="0" ky="0" algn="bl" rotWithShape="0" blurRad="50800" dist="25400" dir="8100000">
+              <a:srgbClr val="000000">
+                <a:alpha val="10000"/>
+              </a:srgbClr>
+            </a:outerShdw>
+          </a:effectLst>
+        </p:spPr>
+      </p:sp>
+      <p:sp>
+        <p:nvSpPr>
+          <p:cNvPr id="20" name="Shape 18"/>
+          <p:cNvSpPr/>
+          <p:nvPr/>
+        </p:nvSpPr>
+        <p:spPr>
+          <a:xfrm>
+            <a:off x="6126480" y="1051560"/>
+            <a:ext cx="54864" cy="1600200"/>
+          </a:xfrm>
+          <a:prstGeom prst="rect">
+            <a:avLst/>
+          </a:prstGeom>
+          <a:solidFill>
+            <a:srgbClr val="16A34A"/>
+          </a:solidFill>
+          <a:ln/>
+        </p:spPr>
+      </p:sp>
+      <p:sp>
+        <p:nvSpPr>
+          <p:cNvPr id="21" name="Shape 19"/>
+          <p:cNvSpPr/>
+          <p:nvPr/>
+        </p:nvSpPr>
+        <p:spPr>
+          <a:xfrm>
+            <a:off x="7955280" y="1124712"/>
+            <a:ext cx="658368" cy="228600"/>
+          </a:xfrm>
+          <a:prstGeom prst="rect">
+            <a:avLst/>
+          </a:prstGeom>
+          <a:solidFill>
+            <a:srgbClr val="DCFCE7"/>
+          </a:solidFill>
+          <a:ln/>
+        </p:spPr>
+      </p:sp>
+      <p:sp>
+        <p:nvSpPr>
+          <p:cNvPr id="22" name="Text 20"/>
+          <p:cNvSpPr/>
+          <p:nvPr/>
+        </p:nvSpPr>
+        <p:spPr>
+          <a:xfrm>
+            <a:off x="7955280" y="1124712"/>
+            <a:ext cx="658368" cy="228600"/>
+          </a:xfrm>
+          <a:prstGeom prst="rect">
+            <a:avLst/>
+          </a:prstGeom>
+          <a:noFill/>
+          <a:ln/>
+        </p:spPr>
+        <p:txBody>
+          <a:bodyPr wrap="square" lIns="0" tIns="0" rIns="0" bIns="0" rtlCol="0" anchor="ctr"/>
+          <a:lstStyle/>
+          <a:p>
+            <a:pPr algn="ctr" indent="0" marL="0">
+              <a:buNone/>
+            </a:pPr>
+            <a:r>
+              <a:rPr lang="en-US" sz="900" b="1" dirty="0">
+                <a:solidFill>
+                  <a:srgbClr val="16A34A"/>
+                </a:solidFill>
+                <a:latin typeface="Arial" pitchFamily="34" charset="0"/>
+                <a:ea typeface="Arial" pitchFamily="34" charset="-122"/>
+                <a:cs typeface="Arial" pitchFamily="34" charset="-120"/>
+              </a:rPr>
+              <a:t>20件+</a:t>
+            </a:r>
+            <a:endParaRPr lang="en-US" sz="900" dirty="0"/>
+          </a:p>
+        </p:txBody>
+      </p:sp>
+      <p:sp>
+        <p:nvSpPr>
+          <p:cNvPr id="23" name="Text 21"/>
+          <p:cNvSpPr/>
+          <p:nvPr/>
+        </p:nvSpPr>
+        <p:spPr>
+          <a:xfrm>
+            <a:off x="6263640" y="1124712"/>
+            <a:ext cx="1645920" cy="274320"/>
+          </a:xfrm>
+          <a:prstGeom prst="rect">
+            <a:avLst/>
+          </a:prstGeom>
+          <a:noFill/>
+          <a:ln/>
+        </p:spPr>
+        <p:txBody>
+          <a:bodyPr wrap="square" lIns="0" tIns="0" rIns="0" bIns="0" rtlCol="0" anchor="ctr"/>
+          <a:lstStyle/>
+          <a:p>
+            <a:pPr indent="0" marL="0">
+              <a:buNone/>
+            </a:pPr>
+            <a:r>
+              <a:rPr lang="en-US" sz="1300" b="1" dirty="0">
+                <a:solidFill>
+                  <a:srgbClr val="1A2744"/>
+                </a:solidFill>
+                <a:latin typeface="Arial" pitchFamily="34" charset="0"/>
+                <a:ea typeface="Arial" pitchFamily="34" charset="-122"/>
+                <a:cs typeface="Arial" pitchFamily="34" charset="-120"/>
+              </a:rPr>
+              <a:t>スタッフの対応</a:t>
+            </a:r>
+            <a:endParaRPr lang="en-US" sz="1300" dirty="0"/>
+          </a:p>
+        </p:txBody>
+      </p:sp>
+      <p:sp>
+        <p:nvSpPr>
+          <p:cNvPr id="24" name="Text 22"/>
+          <p:cNvSpPr/>
+          <p:nvPr/>
+        </p:nvSpPr>
+        <p:spPr>
+          <a:xfrm>
+            <a:off x="6263640" y="1417320"/>
+            <a:ext cx="2377440" cy="365760"/>
+          </a:xfrm>
+          <a:prstGeom prst="rect">
+            <a:avLst/>
+          </a:prstGeom>
+          <a:noFill/>
+          <a:ln/>
+        </p:spPr>
+        <p:txBody>
+          <a:bodyPr wrap="square" lIns="0" tIns="0" rIns="0" bIns="0" rtlCol="0" anchor="ctr"/>
+          <a:lstStyle/>
+          <a:p>
+            <a:pPr indent="0" marL="0">
+              <a:buNone/>
+            </a:pPr>
+            <a:r>
+              <a:rPr lang="en-US" sz="900" dirty="0">
+                <a:solidFill>
+                  <a:srgbClr val="64748B"/>
+                </a:solidFill>
+                <a:latin typeface="Arial" pitchFamily="34" charset="0"/>
+                <a:ea typeface="Arial" pitchFamily="34" charset="-122"/>
+                <a:cs typeface="Arial" pitchFamily="34" charset="-120"/>
+              </a:rPr>
+              <a:t>スタッフの方が親切で、声をかけてくれたり、ディズニー帰りで混み合っていてもスムーズな流れで何でも出来て良かった</a:t>
+            </a:r>
+            <a:endParaRPr lang="en-US" sz="900" dirty="0"/>
+          </a:p>
+        </p:txBody>
+      </p:sp>
+      <p:sp>
+        <p:nvSpPr>
+          <p:cNvPr id="25" name="Text 23"/>
+          <p:cNvSpPr/>
+          <p:nvPr/>
+        </p:nvSpPr>
+        <p:spPr>
+          <a:xfrm>
+            <a:off x="6263640" y="1828800"/>
             <a:ext cx="2377440" cy="640080"/>
           </a:xfrm>
           <a:prstGeom prst="rect">
@@ -10514,13 +10960,13 @@
       </p:sp>
       <p:sp>
         <p:nvSpPr>
-          <p:cNvPr id="12" name="Shape 10"/>
-          <p:cNvSpPr/>
-          <p:nvPr/>
-        </p:nvSpPr>
-        <p:spPr>
-          <a:xfrm>
-            <a:off x="3291840" y="1051560"/>
+          <p:cNvPr id="26" name="Shape 24"/>
+          <p:cNvSpPr/>
+          <p:nvPr/>
+        </p:nvSpPr>
+        <p:spPr>
+          <a:xfrm>
+            <a:off x="457200" y="2880360"/>
             <a:ext cx="2651760" cy="1600200"/>
           </a:xfrm>
           <a:prstGeom prst="rect">
@@ -10541,13 +10987,13 @@
       </p:sp>
       <p:sp>
         <p:nvSpPr>
-          <p:cNvPr id="13" name="Shape 11"/>
-          <p:cNvSpPr/>
-          <p:nvPr/>
-        </p:nvSpPr>
-        <p:spPr>
-          <a:xfrm>
-            <a:off x="3291840" y="1051560"/>
+          <p:cNvPr id="27" name="Shape 25"/>
+          <p:cNvSpPr/>
+          <p:nvPr/>
+        </p:nvSpPr>
+        <p:spPr>
+          <a:xfrm>
+            <a:off x="457200" y="2880360"/>
             <a:ext cx="54864" cy="1600200"/>
           </a:xfrm>
           <a:prstGeom prst="rect">
@@ -10561,13 +11007,13 @@
       </p:sp>
       <p:sp>
         <p:nvSpPr>
-          <p:cNvPr id="14" name="Shape 12"/>
-          <p:cNvSpPr/>
-          <p:nvPr/>
-        </p:nvSpPr>
-        <p:spPr>
-          <a:xfrm>
-            <a:off x="5120640" y="1124712"/>
+          <p:cNvPr id="28" name="Shape 26"/>
+          <p:cNvSpPr/>
+          <p:nvPr/>
+        </p:nvSpPr>
+        <p:spPr>
+          <a:xfrm>
+            <a:off x="2286000" y="2953512"/>
             <a:ext cx="658368" cy="228600"/>
           </a:xfrm>
           <a:prstGeom prst="rect">
@@ -10581,13 +11027,13 @@
       </p:sp>
       <p:sp>
         <p:nvSpPr>
-          <p:cNvPr id="15" name="Text 13"/>
-          <p:cNvSpPr/>
-          <p:nvPr/>
-        </p:nvSpPr>
-        <p:spPr>
-          <a:xfrm>
-            <a:off x="5120640" y="1124712"/>
+          <p:cNvPr id="29" name="Text 27"/>
+          <p:cNvSpPr/>
+          <p:nvPr/>
+        </p:nvSpPr>
+        <p:spPr>
+          <a:xfrm>
+            <a:off x="2286000" y="2953512"/>
             <a:ext cx="658368" cy="228600"/>
           </a:xfrm>
           <a:prstGeom prst="rect">
@@ -10620,236 +11066,13 @@
       </p:sp>
       <p:sp>
         <p:nvSpPr>
-          <p:cNvPr id="16" name="Text 14"/>
-          <p:cNvSpPr/>
-          <p:nvPr/>
-        </p:nvSpPr>
-        <p:spPr>
-          <a:xfrm>
-            <a:off x="3429000" y="1124712"/>
-            <a:ext cx="1645920" cy="274320"/>
-          </a:xfrm>
-          <a:prstGeom prst="rect">
-            <a:avLst/>
-          </a:prstGeom>
-          <a:noFill/>
-          <a:ln/>
-        </p:spPr>
-        <p:txBody>
-          <a:bodyPr wrap="square" lIns="0" tIns="0" rIns="0" bIns="0" rtlCol="0" anchor="ctr"/>
-          <a:lstStyle/>
-          <a:p>
-            <a:pPr indent="0" marL="0">
-              <a:buNone/>
-            </a:pPr>
-            <a:r>
-              <a:rPr lang="en-US" sz="1300" b="1" dirty="0">
-                <a:solidFill>
-                  <a:srgbClr val="1A2744"/>
-                </a:solidFill>
-                <a:latin typeface="Arial" pitchFamily="34" charset="0"/>
-                <a:ea typeface="Arial" pitchFamily="34" charset="-122"/>
-                <a:cs typeface="Arial" pitchFamily="34" charset="-120"/>
-              </a:rPr>
-              <a:t>快適さ・設備</a:t>
-            </a:r>
-            <a:endParaRPr lang="en-US" sz="1300" dirty="0"/>
-          </a:p>
-        </p:txBody>
-      </p:sp>
-      <p:sp>
-        <p:nvSpPr>
-          <p:cNvPr id="17" name="Text 15"/>
-          <p:cNvSpPr/>
-          <p:nvPr/>
-        </p:nvSpPr>
-        <p:spPr>
-          <a:xfrm>
-            <a:off x="3429000" y="1417320"/>
-            <a:ext cx="2377440" cy="365760"/>
-          </a:xfrm>
-          <a:prstGeom prst="rect">
-            <a:avLst/>
-          </a:prstGeom>
-          <a:noFill/>
-          <a:ln/>
-        </p:spPr>
-        <p:txBody>
-          <a:bodyPr wrap="square" lIns="0" tIns="0" rIns="0" bIns="0" rtlCol="0" anchor="ctr"/>
-          <a:lstStyle/>
-          <a:p>
-            <a:pPr indent="0" marL="0">
-              <a:buNone/>
-            </a:pPr>
-            <a:r>
-              <a:rPr lang="en-US" sz="900" dirty="0">
-                <a:solidFill>
-                  <a:srgbClr val="64748B"/>
-                </a:solidFill>
-                <a:latin typeface="Arial" pitchFamily="34" charset="0"/>
-                <a:ea typeface="Arial" pitchFamily="34" charset="-122"/>
-                <a:cs typeface="Arial" pitchFamily="34" charset="-120"/>
-              </a:rPr>
-              <a:t>とても広々したお部屋、お風呂もトイレと別れており快適でした</a:t>
-            </a:r>
-            <a:endParaRPr lang="en-US" sz="900" dirty="0"/>
-          </a:p>
-        </p:txBody>
-      </p:sp>
-      <p:sp>
-        <p:nvSpPr>
-          <p:cNvPr id="18" name="Text 16"/>
-          <p:cNvSpPr/>
-          <p:nvPr/>
-        </p:nvSpPr>
-        <p:spPr>
-          <a:xfrm>
-            <a:off x="3429000" y="1828800"/>
-            <a:ext cx="2377440" cy="640080"/>
-          </a:xfrm>
-          <a:prstGeom prst="rect">
-            <a:avLst/>
-          </a:prstGeom>
-          <a:noFill/>
-          <a:ln/>
-        </p:spPr>
-        <p:txBody>
-          <a:bodyPr wrap="square" lIns="0" tIns="0" rIns="0" bIns="0" rtlCol="0" anchor="ctr"/>
-          <a:lstStyle/>
-          <a:p>
-            <a:pPr indent="0" marL="0">
-              <a:buNone/>
-            </a:pPr>
-            <a:r>
-              <a:rPr lang="en-US" sz="900" i="1" dirty="0">
-                <a:solidFill>
-                  <a:srgbClr val="3B7DD8"/>
-                </a:solidFill>
-                <a:latin typeface="Arial" pitchFamily="34" charset="0"/>
-                <a:ea typeface="Arial" pitchFamily="34" charset="-122"/>
-                <a:cs typeface="Arial" pitchFamily="34" charset="-120"/>
-              </a:rPr>
-              <a:t>「ベッドも広く添い寝でものびのび寝れたし、お風呂、洗面所、トイレも別になっているので、自宅のように～自宅以上に快適に...」</a:t>
-            </a:r>
-            <a:endParaRPr lang="en-US" sz="900" dirty="0"/>
-          </a:p>
-        </p:txBody>
-      </p:sp>
-      <p:sp>
-        <p:nvSpPr>
-          <p:cNvPr id="19" name="Shape 17"/>
-          <p:cNvSpPr/>
-          <p:nvPr/>
-        </p:nvSpPr>
-        <p:spPr>
-          <a:xfrm>
-            <a:off x="6126480" y="1051560"/>
-            <a:ext cx="2651760" cy="1600200"/>
-          </a:xfrm>
-          <a:prstGeom prst="rect">
-            <a:avLst/>
-          </a:prstGeom>
-          <a:solidFill>
-            <a:srgbClr val="FFFFFF"/>
-          </a:solidFill>
-          <a:ln/>
-          <a:effectLst>
-            <a:outerShdw sx="100000" sy="100000" kx="0" ky="0" algn="bl" rotWithShape="0" blurRad="50800" dist="25400" dir="8100000">
-              <a:srgbClr val="000000">
-                <a:alpha val="10000"/>
-              </a:srgbClr>
-            </a:outerShdw>
-          </a:effectLst>
-        </p:spPr>
-      </p:sp>
-      <p:sp>
-        <p:nvSpPr>
-          <p:cNvPr id="20" name="Shape 18"/>
-          <p:cNvSpPr/>
-          <p:nvPr/>
-        </p:nvSpPr>
-        <p:spPr>
-          <a:xfrm>
-            <a:off x="6126480" y="1051560"/>
-            <a:ext cx="54864" cy="1600200"/>
-          </a:xfrm>
-          <a:prstGeom prst="rect">
-            <a:avLst/>
-          </a:prstGeom>
-          <a:solidFill>
-            <a:srgbClr val="16A34A"/>
-          </a:solidFill>
-          <a:ln/>
-        </p:spPr>
-      </p:sp>
-      <p:sp>
-        <p:nvSpPr>
-          <p:cNvPr id="21" name="Shape 19"/>
-          <p:cNvSpPr/>
-          <p:nvPr/>
-        </p:nvSpPr>
-        <p:spPr>
-          <a:xfrm>
-            <a:off x="7955280" y="1124712"/>
-            <a:ext cx="658368" cy="228600"/>
-          </a:xfrm>
-          <a:prstGeom prst="rect">
-            <a:avLst/>
-          </a:prstGeom>
-          <a:solidFill>
-            <a:srgbClr val="DCFCE7"/>
-          </a:solidFill>
-          <a:ln/>
-        </p:spPr>
-      </p:sp>
-      <p:sp>
-        <p:nvSpPr>
-          <p:cNvPr id="22" name="Text 20"/>
-          <p:cNvSpPr/>
-          <p:nvPr/>
-        </p:nvSpPr>
-        <p:spPr>
-          <a:xfrm>
-            <a:off x="7955280" y="1124712"/>
-            <a:ext cx="658368" cy="228600"/>
-          </a:xfrm>
-          <a:prstGeom prst="rect">
-            <a:avLst/>
-          </a:prstGeom>
-          <a:noFill/>
-          <a:ln/>
-        </p:spPr>
-        <p:txBody>
-          <a:bodyPr wrap="square" lIns="0" tIns="0" rIns="0" bIns="0" rtlCol="0" anchor="ctr"/>
-          <a:lstStyle/>
-          <a:p>
-            <a:pPr algn="ctr" indent="0" marL="0">
-              <a:buNone/>
-            </a:pPr>
-            <a:r>
-              <a:rPr lang="en-US" sz="900" b="1" dirty="0">
-                <a:solidFill>
-                  <a:srgbClr val="16A34A"/>
-                </a:solidFill>
-                <a:latin typeface="Arial" pitchFamily="34" charset="0"/>
-                <a:ea typeface="Arial" pitchFamily="34" charset="-122"/>
-                <a:cs typeface="Arial" pitchFamily="34" charset="-120"/>
-              </a:rPr>
-              <a:t>20件+</a:t>
-            </a:r>
-            <a:endParaRPr lang="en-US" sz="900" dirty="0"/>
-          </a:p>
-        </p:txBody>
-      </p:sp>
-      <p:sp>
-        <p:nvSpPr>
-          <p:cNvPr id="23" name="Text 21"/>
-          <p:cNvSpPr/>
-          <p:nvPr/>
-        </p:nvSpPr>
-        <p:spPr>
-          <a:xfrm>
-            <a:off x="6263640" y="1124712"/>
+          <p:cNvPr id="30" name="Text 28"/>
+          <p:cNvSpPr/>
+          <p:nvPr/>
+        </p:nvSpPr>
+        <p:spPr>
+          <a:xfrm>
+            <a:off x="594360" y="2953512"/>
             <a:ext cx="1645920" cy="274320"/>
           </a:xfrm>
           <a:prstGeom prst="rect">
@@ -10882,13 +11105,13 @@
       </p:sp>
       <p:sp>
         <p:nvSpPr>
-          <p:cNvPr id="24" name="Text 22"/>
-          <p:cNvSpPr/>
-          <p:nvPr/>
-        </p:nvSpPr>
-        <p:spPr>
-          <a:xfrm>
-            <a:off x="6263640" y="1417320"/>
+          <p:cNvPr id="31" name="Text 29"/>
+          <p:cNvSpPr/>
+          <p:nvPr/>
+        </p:nvSpPr>
+        <p:spPr>
+          <a:xfrm>
+            <a:off x="594360" y="3246120"/>
             <a:ext cx="2377440" cy="365760"/>
           </a:xfrm>
           <a:prstGeom prst="rect">
@@ -10921,13 +11144,13 @@
       </p:sp>
       <p:sp>
         <p:nvSpPr>
-          <p:cNvPr id="25" name="Text 23"/>
-          <p:cNvSpPr/>
-          <p:nvPr/>
-        </p:nvSpPr>
-        <p:spPr>
-          <a:xfrm>
-            <a:off x="6263640" y="1828800"/>
+          <p:cNvPr id="32" name="Text 30"/>
+          <p:cNvSpPr/>
+          <p:nvPr/>
+        </p:nvSpPr>
+        <p:spPr>
+          <a:xfrm>
+            <a:off x="594360" y="3657600"/>
             <a:ext cx="2377440" cy="640080"/>
           </a:xfrm>
           <a:prstGeom prst="rect">
@@ -10952,230 +11175,7 @@
                 <a:ea typeface="Arial" pitchFamily="34" charset="-122"/>
                 <a:cs typeface="Arial" pitchFamily="34" charset="-120"/>
               </a:rPr>
-              <a:t>「部屋が綺麗で広い お風呂とトイレが別でよかった ウェルカムドリンクがあってよかった 部屋が綺麗で広い お風呂とトイ...」</a:t>
-            </a:r>
-            <a:endParaRPr lang="en-US" sz="900" dirty="0"/>
-          </a:p>
-        </p:txBody>
-      </p:sp>
-      <p:sp>
-        <p:nvSpPr>
-          <p:cNvPr id="26" name="Shape 24"/>
-          <p:cNvSpPr/>
-          <p:nvPr/>
-        </p:nvSpPr>
-        <p:spPr>
-          <a:xfrm>
-            <a:off x="457200" y="2880360"/>
-            <a:ext cx="2651760" cy="1600200"/>
-          </a:xfrm>
-          <a:prstGeom prst="rect">
-            <a:avLst/>
-          </a:prstGeom>
-          <a:solidFill>
-            <a:srgbClr val="FFFFFF"/>
-          </a:solidFill>
-          <a:ln/>
-          <a:effectLst>
-            <a:outerShdw sx="100000" sy="100000" kx="0" ky="0" algn="bl" rotWithShape="0" blurRad="50800" dist="25400" dir="8100000">
-              <a:srgbClr val="000000">
-                <a:alpha val="10000"/>
-              </a:srgbClr>
-            </a:outerShdw>
-          </a:effectLst>
-        </p:spPr>
-      </p:sp>
-      <p:sp>
-        <p:nvSpPr>
-          <p:cNvPr id="27" name="Shape 25"/>
-          <p:cNvSpPr/>
-          <p:nvPr/>
-        </p:nvSpPr>
-        <p:spPr>
-          <a:xfrm>
-            <a:off x="457200" y="2880360"/>
-            <a:ext cx="54864" cy="1600200"/>
-          </a:xfrm>
-          <a:prstGeom prst="rect">
-            <a:avLst/>
-          </a:prstGeom>
-          <a:solidFill>
-            <a:srgbClr val="16A34A"/>
-          </a:solidFill>
-          <a:ln/>
-        </p:spPr>
-      </p:sp>
-      <p:sp>
-        <p:nvSpPr>
-          <p:cNvPr id="28" name="Shape 26"/>
-          <p:cNvSpPr/>
-          <p:nvPr/>
-        </p:nvSpPr>
-        <p:spPr>
-          <a:xfrm>
-            <a:off x="2286000" y="2953512"/>
-            <a:ext cx="658368" cy="228600"/>
-          </a:xfrm>
-          <a:prstGeom prst="rect">
-            <a:avLst/>
-          </a:prstGeom>
-          <a:solidFill>
-            <a:srgbClr val="DCFCE7"/>
-          </a:solidFill>
-          <a:ln/>
-        </p:spPr>
-      </p:sp>
-      <p:sp>
-        <p:nvSpPr>
-          <p:cNvPr id="29" name="Text 27"/>
-          <p:cNvSpPr/>
-          <p:nvPr/>
-        </p:nvSpPr>
-        <p:spPr>
-          <a:xfrm>
-            <a:off x="2286000" y="2953512"/>
-            <a:ext cx="658368" cy="228600"/>
-          </a:xfrm>
-          <a:prstGeom prst="rect">
-            <a:avLst/>
-          </a:prstGeom>
-          <a:noFill/>
-          <a:ln/>
-        </p:spPr>
-        <p:txBody>
-          <a:bodyPr wrap="square" lIns="0" tIns="0" rIns="0" bIns="0" rtlCol="0" anchor="ctr"/>
-          <a:lstStyle/>
-          <a:p>
-            <a:pPr algn="ctr" indent="0" marL="0">
-              <a:buNone/>
-            </a:pPr>
-            <a:r>
-              <a:rPr lang="en-US" sz="900" b="1" dirty="0">
-                <a:solidFill>
-                  <a:srgbClr val="16A34A"/>
-                </a:solidFill>
-                <a:latin typeface="Arial" pitchFamily="34" charset="0"/>
-                <a:ea typeface="Arial" pitchFamily="34" charset="-122"/>
-                <a:cs typeface="Arial" pitchFamily="34" charset="-120"/>
-              </a:rPr>
-              <a:t>20件+</a:t>
-            </a:r>
-            <a:endParaRPr lang="en-US" sz="900" dirty="0"/>
-          </a:p>
-        </p:txBody>
-      </p:sp>
-      <p:sp>
-        <p:nvSpPr>
-          <p:cNvPr id="30" name="Text 28"/>
-          <p:cNvSpPr/>
-          <p:nvPr/>
-        </p:nvSpPr>
-        <p:spPr>
-          <a:xfrm>
-            <a:off x="594360" y="2953512"/>
-            <a:ext cx="1645920" cy="274320"/>
-          </a:xfrm>
-          <a:prstGeom prst="rect">
-            <a:avLst/>
-          </a:prstGeom>
-          <a:noFill/>
-          <a:ln/>
-        </p:spPr>
-        <p:txBody>
-          <a:bodyPr wrap="square" lIns="0" tIns="0" rIns="0" bIns="0" rtlCol="0" anchor="ctr"/>
-          <a:lstStyle/>
-          <a:p>
-            <a:pPr indent="0" marL="0">
-              <a:buNone/>
-            </a:pPr>
-            <a:r>
-              <a:rPr lang="en-US" sz="1300" b="1" dirty="0">
-                <a:solidFill>
-                  <a:srgbClr val="1A2744"/>
-                </a:solidFill>
-                <a:latin typeface="Arial" pitchFamily="34" charset="0"/>
-                <a:ea typeface="Arial" pitchFamily="34" charset="-122"/>
-                <a:cs typeface="Arial" pitchFamily="34" charset="-120"/>
-              </a:rPr>
-              <a:t>スタッフの対応</a:t>
-            </a:r>
-            <a:endParaRPr lang="en-US" sz="1300" dirty="0"/>
-          </a:p>
-        </p:txBody>
-      </p:sp>
-      <p:sp>
-        <p:nvSpPr>
-          <p:cNvPr id="31" name="Text 29"/>
-          <p:cNvSpPr/>
-          <p:nvPr/>
-        </p:nvSpPr>
-        <p:spPr>
-          <a:xfrm>
-            <a:off x="594360" y="3246120"/>
-            <a:ext cx="2377440" cy="365760"/>
-          </a:xfrm>
-          <a:prstGeom prst="rect">
-            <a:avLst/>
-          </a:prstGeom>
-          <a:noFill/>
-          <a:ln/>
-        </p:spPr>
-        <p:txBody>
-          <a:bodyPr wrap="square" lIns="0" tIns="0" rIns="0" bIns="0" rtlCol="0" anchor="ctr"/>
-          <a:lstStyle/>
-          <a:p>
-            <a:pPr indent="0" marL="0">
-              <a:buNone/>
-            </a:pPr>
-            <a:r>
-              <a:rPr lang="en-US" sz="900" dirty="0">
-                <a:solidFill>
-                  <a:srgbClr val="64748B"/>
-                </a:solidFill>
-                <a:latin typeface="Arial" pitchFamily="34" charset="0"/>
-                <a:ea typeface="Arial" pitchFamily="34" charset="-122"/>
-                <a:cs typeface="Arial" pitchFamily="34" charset="-120"/>
-              </a:rPr>
-              <a:t>シャトルバスもあり、部屋・朝食・スタッフ対応も良くコンビニもありとても良かったです</a:t>
-            </a:r>
-            <a:endParaRPr lang="en-US" sz="900" dirty="0"/>
-          </a:p>
-        </p:txBody>
-      </p:sp>
-      <p:sp>
-        <p:nvSpPr>
-          <p:cNvPr id="32" name="Text 30"/>
-          <p:cNvSpPr/>
-          <p:nvPr/>
-        </p:nvSpPr>
-        <p:spPr>
-          <a:xfrm>
-            <a:off x="594360" y="3657600"/>
-            <a:ext cx="2377440" cy="640080"/>
-          </a:xfrm>
-          <a:prstGeom prst="rect">
-            <a:avLst/>
-          </a:prstGeom>
-          <a:noFill/>
-          <a:ln/>
-        </p:spPr>
-        <p:txBody>
-          <a:bodyPr wrap="square" lIns="0" tIns="0" rIns="0" bIns="0" rtlCol="0" anchor="ctr"/>
-          <a:lstStyle/>
-          <a:p>
-            <a:pPr indent="0" marL="0">
-              <a:buNone/>
-            </a:pPr>
-            <a:r>
-              <a:rPr lang="en-US" sz="900" i="1" dirty="0">
-                <a:solidFill>
-                  <a:srgbClr val="3B7DD8"/>
-                </a:solidFill>
-                <a:latin typeface="Arial" pitchFamily="34" charset="0"/>
-                <a:ea typeface="Arial" pitchFamily="34" charset="-122"/>
-                <a:cs typeface="Arial" pitchFamily="34" charset="-120"/>
-              </a:rPr>
-              <a:t>「（もちろんAI対応でもありがたいです」</a:t>
+              <a:t>「日曜から月曜の宿泊でしたが、豪華な朝食ビュッフェもついてお値段も安く、部屋もきれいでした」</a:t>
             </a:r>
             <a:endParaRPr lang="en-US" sz="900" dirty="0"/>
           </a:p>
@@ -12311,7 +12311,7 @@
                           <a:ea typeface="Arial" pitchFamily="34" charset="-122"/>
                           <a:cs typeface="Arial" pitchFamily="34" charset="-120"/>
                         </a:rPr>
-                        <a:t>とても広々したお部屋、お風呂もトイレと別れており快適でした</a:t>
+                        <a:t>ひとつ問題をあげるなら、ディズニーからホテルへ戻る時のバスが止まる場所が曖昧なことくらいです</a:t>
                       </a:r>
                       <a:endParaRPr lang="en-US" sz="900" dirty="0">
                         <a:latin typeface="Arial" charset="0"/>
@@ -12379,7 +12379,7 @@
                           <a:ea typeface="Arial" pitchFamily="34" charset="-122"/>
                           <a:cs typeface="Arial" pitchFamily="34" charset="-120"/>
                         </a:rPr>
-                        <a:t>51件</a:t>
+                        <a:t>50件</a:t>
                       </a:r>
                       <a:endParaRPr lang="en-US" sz="900" dirty="0">
                         <a:latin typeface="Arial" charset="0"/>

--- a/納品レポート/ホテル別レポート/comfort_suites_tokyobay_口コミ分析レポート.pptx
+++ b/納品レポート/ホテル別レポート/comfort_suites_tokyobay_口コミ分析レポート.pptx
@@ -208,7 +208,7 @@
                 <c:formatCode>General</c:formatCode>
                 <c:ptCount val="6"/>
                 <c:pt idx="0">
-                  <c:v>9.57</c:v>
+                  <c:v>9.6</c:v>
                 </c:pt>
                 <c:pt idx="1">
                   <c:v>9.5</c:v>
@@ -217,10 +217,10 @@
                   <c:v>9.25</c:v>
                 </c:pt>
                 <c:pt idx="3">
-                  <c:v>9.2</c:v>
+                  <c:v>9.21</c:v>
                 </c:pt>
                 <c:pt idx="4">
-                  <c:v>9.17</c:v>
+                  <c:v>9.19</c:v>
                 </c:pt>
                 <c:pt idx="5">
                   <c:v>8.85</c:v>
@@ -781,13 +781,13 @@
                 <c:formatCode>General</c:formatCode>
                 <c:ptCount val="6"/>
                 <c:pt idx="0">
-                  <c:v>82</c:v>
+                  <c:v>83</c:v>
                 </c:pt>
                 <c:pt idx="1">
                   <c:v>16</c:v>
                 </c:pt>
                 <c:pt idx="2">
-                  <c:v>41</c:v>
+                  <c:v>40</c:v>
                 </c:pt>
                 <c:pt idx="3">
                   <c:v>2</c:v>
@@ -2767,7 +2767,7 @@
                 <a:ea typeface="Arial" pitchFamily="34" charset="-122"/>
                 <a:cs typeface="Arial" pitchFamily="34" charset="-120"/>
               </a:rPr>
-              <a:t>作成日：2026年3月27日</a:t>
+              <a:t>作成日：2026年3月28日</a:t>
             </a:r>
             <a:endParaRPr lang="en-US" sz="1000" dirty="0"/>
           </a:p>
@@ -3313,7 +3313,7 @@
                           <a:ea typeface="Arial" pitchFamily="34" charset="-122"/>
                           <a:cs typeface="Arial" pitchFamily="34" charset="-120"/>
                         </a:rPr>
-                        <a:t>9.20点</a:t>
+                        <a:t>9.22点</a:t>
                       </a:r>
                       <a:endParaRPr lang="en-US" sz="1000" dirty="0">
                         <a:latin typeface="Arial" charset="0"/>
@@ -4409,7 +4409,7 @@
                           <a:ea typeface="Arial" pitchFamily="34" charset="-122"/>
                           <a:cs typeface="Arial" pitchFamily="34" charset="-120"/>
                         </a:rPr>
-                        <a:t>約50件/期間</a:t>
+                        <a:t>約49件/期間</a:t>
                       </a:r>
                       <a:endParaRPr lang="en-US" sz="1000" dirty="0">
                         <a:latin typeface="Arial" charset="0"/>
@@ -4477,7 +4477,7 @@
                           <a:ea typeface="Arial" pitchFamily="34" charset="-122"/>
                           <a:cs typeface="Arial" pitchFamily="34" charset="-120"/>
                         </a:rPr>
-                        <a:t>25件以下</a:t>
+                        <a:t>24件以下</a:t>
                       </a:r>
                       <a:endParaRPr lang="en-US" sz="1000" dirty="0">
                         <a:latin typeface="Arial" charset="0"/>
@@ -5048,7 +5048,7 @@
                 <a:ea typeface="Arial" pitchFamily="34" charset="-122"/>
                 <a:cs typeface="Arial" pitchFamily="34" charset="-120"/>
               </a:rPr>
-              <a:t>9.20</a:t>
+              <a:t>9.22</a:t>
             </a:r>
             <a:endParaRPr lang="en-US" sz="3200" dirty="0"/>
           </a:p>
@@ -6232,7 +6232,7 @@
                 <a:ea typeface="Arial" pitchFamily="34" charset="-122"/>
                 <a:cs typeface="Arial" pitchFamily="34" charset="-120"/>
               </a:rPr>
-              <a:t>9.20</a:t>
+              <a:t>9.22</a:t>
             </a:r>
             <a:endParaRPr lang="en-US" sz="3200" dirty="0"/>
           </a:p>
@@ -7028,7 +7028,7 @@
                 <a:ea typeface="Arial" pitchFamily="34" charset="-122"/>
                 <a:cs typeface="Arial" pitchFamily="34" charset="-120"/>
               </a:rPr>
-              <a:t>Trip.com(9.57)が最高スコア。</a:t>
+              <a:t>Trip.com(9.60)が最高スコア。</a:t>
             </a:r>
             <a:endParaRPr lang="en-US" sz="1100" dirty="0"/>
           </a:p>
@@ -7537,7 +7537,7 @@
                           <a:ea typeface="Arial" pitchFamily="34" charset="-122"/>
                           <a:cs typeface="Arial" pitchFamily="34" charset="-120"/>
                         </a:rPr>
-                        <a:t>14</a:t>
+                        <a:t>15</a:t>
                       </a:r>
                       <a:endParaRPr lang="en-US" sz="900" dirty="0">
                         <a:latin typeface="Arial" charset="0"/>
@@ -7605,7 +7605,7 @@
                           <a:ea typeface="Arial" pitchFamily="34" charset="-122"/>
                           <a:cs typeface="Arial" pitchFamily="34" charset="-120"/>
                         </a:rPr>
-                        <a:t>9.57</a:t>
+                        <a:t>9.6</a:t>
                       </a:r>
                       <a:endParaRPr lang="en-US" sz="900" dirty="0">
                         <a:latin typeface="Arial" charset="0"/>
@@ -7741,7 +7741,7 @@
                           <a:ea typeface="Arial" pitchFamily="34" charset="-122"/>
                           <a:cs typeface="Arial" pitchFamily="34" charset="-120"/>
                         </a:rPr>
-                        <a:t>9.57</a:t>
+                        <a:t>9.6</a:t>
                       </a:r>
                       <a:endParaRPr lang="en-US" sz="900" dirty="0">
                         <a:latin typeface="Arial" charset="0"/>
@@ -8563,7 +8563,7 @@
                           <a:ea typeface="Arial" pitchFamily="34" charset="-122"/>
                           <a:cs typeface="Arial" pitchFamily="34" charset="-120"/>
                         </a:rPr>
-                        <a:t>30</a:t>
+                        <a:t>28</a:t>
                       </a:r>
                       <a:endParaRPr lang="en-US" sz="900" dirty="0">
                         <a:latin typeface="Arial" charset="0"/>
@@ -8631,7 +8631,7 @@
                           <a:ea typeface="Arial" pitchFamily="34" charset="-122"/>
                           <a:cs typeface="Arial" pitchFamily="34" charset="-120"/>
                         </a:rPr>
-                        <a:t>4.6</a:t>
+                        <a:t>4.61</a:t>
                       </a:r>
                       <a:endParaRPr lang="en-US" sz="900" dirty="0">
                         <a:latin typeface="Arial" charset="0"/>
@@ -8767,7 +8767,7 @@
                           <a:ea typeface="Arial" pitchFamily="34" charset="-122"/>
                           <a:cs typeface="Arial" pitchFamily="34" charset="-120"/>
                         </a:rPr>
-                        <a:t>9.2</a:t>
+                        <a:t>9.21</a:t>
                       </a:r>
                       <a:endParaRPr lang="en-US" sz="900" dirty="0">
                         <a:latin typeface="Arial" charset="0"/>
@@ -8905,7 +8905,7 @@
                           <a:ea typeface="Arial" pitchFamily="34" charset="-122"/>
                           <a:cs typeface="Arial" pitchFamily="34" charset="-120"/>
                         </a:rPr>
-                        <a:t>46</a:t>
+                        <a:t>47</a:t>
                       </a:r>
                       <a:endParaRPr lang="en-US" sz="900" dirty="0">
                         <a:latin typeface="Arial" charset="0"/>
@@ -8973,7 +8973,7 @@
                           <a:ea typeface="Arial" pitchFamily="34" charset="-122"/>
                           <a:cs typeface="Arial" pitchFamily="34" charset="-120"/>
                         </a:rPr>
-                        <a:t>4.59</a:t>
+                        <a:t>4.6</a:t>
                       </a:r>
                       <a:endParaRPr lang="en-US" sz="900" dirty="0">
                         <a:latin typeface="Arial" charset="0"/>
@@ -9109,7 +9109,7 @@
                           <a:ea typeface="Arial" pitchFamily="34" charset="-122"/>
                           <a:cs typeface="Arial" pitchFamily="34" charset="-120"/>
                         </a:rPr>
-                        <a:t>9.17</a:t>
+                        <a:t>9.19</a:t>
                       </a:r>
                       <a:endParaRPr lang="en-US" sz="900" dirty="0">
                         <a:latin typeface="Arial" charset="0"/>
@@ -12379,7 +12379,7 @@
                           <a:ea typeface="Arial" pitchFamily="34" charset="-122"/>
                           <a:cs typeface="Arial" pitchFamily="34" charset="-120"/>
                         </a:rPr>
-                        <a:t>50件</a:t>
+                        <a:t>49件</a:t>
                       </a:r>
                       <a:endParaRPr lang="en-US" sz="900" dirty="0">
                         <a:latin typeface="Arial" charset="0"/>
@@ -12653,7 +12653,7 @@
                           <a:ea typeface="Arial" pitchFamily="34" charset="-122"/>
                           <a:cs typeface="Arial" pitchFamily="34" charset="-120"/>
                         </a:rPr>
-                        <a:t>9件</a:t>
+                        <a:t>8件</a:t>
                       </a:r>
                       <a:endParaRPr lang="en-US" sz="900" dirty="0">
                         <a:latin typeface="Arial" charset="0"/>
@@ -13955,7 +13955,7 @@
                           <a:ea typeface="Arial" pitchFamily="34" charset="-122"/>
                           <a:cs typeface="Arial" pitchFamily="34" charset="-120"/>
                         </a:rPr>
-                        <a:t>お風呂も綺麗で明るく子どもと一緒に入ってもリフレッシュできました</a:t>
+                        <a:t>ロケーションは、窓が小さく、磨りガラスだったのと雨降りだったのでいまいちでした</a:t>
                       </a:r>
                       <a:endParaRPr lang="en-US" sz="900" dirty="0">
                         <a:latin typeface="Arial" charset="0"/>
@@ -14023,7 +14023,7 @@
                           <a:ea typeface="Arial" pitchFamily="34" charset="-122"/>
                           <a:cs typeface="Arial" pitchFamily="34" charset="-120"/>
                         </a:rPr>
-                        <a:t>1件</a:t>
+                        <a:t>2件</a:t>
                       </a:r>
                       <a:endParaRPr lang="en-US" sz="900" dirty="0">
                         <a:latin typeface="Arial" charset="0"/>

--- a/納品レポート/ホテル別レポート/comfort_suites_tokyobay_口コミ分析レポート.pptx
+++ b/納品レポート/ホテル別レポート/comfort_suites_tokyobay_口コミ分析レポート.pptx
@@ -246,10 +246,10 @@
                 <c:ptCount val="6"/>
                 <c:lvl>
                   <c:pt idx="0">
-                    <c:v>Trip.com</c:v>
+                    <c:v>Agoda</c:v>
                   </c:pt>
                   <c:pt idx="1">
-                    <c:v>Agoda</c:v>
+                    <c:v>Trip.com</c:v>
                   </c:pt>
                   <c:pt idx="2">
                     <c:v>Google</c:v>
@@ -274,22 +274,22 @@
                 <c:formatCode>General</c:formatCode>
                 <c:ptCount val="6"/>
                 <c:pt idx="0">
-                  <c:v>9.6</c:v>
+                  <c:v>9.47</c:v>
                 </c:pt>
                 <c:pt idx="1">
-                  <c:v>9.5</c:v>
+                  <c:v>9.41</c:v>
                 </c:pt>
                 <c:pt idx="2">
+                  <c:v>9.4</c:v>
+                </c:pt>
+                <c:pt idx="3">
                   <c:v>9.25</c:v>
                 </c:pt>
-                <c:pt idx="3">
-                  <c:v>9.21</c:v>
-                </c:pt>
                 <c:pt idx="4">
-                  <c:v>9.19</c:v>
+                  <c:v>9.22</c:v>
                 </c:pt>
                 <c:pt idx="5">
-                  <c:v>8.85</c:v>
+                  <c:v>8.76</c:v>
                 </c:pt>
               </c:numCache>
             </c:numRef>
@@ -606,13 +606,13 @@
                   <c:v>16</c:v>
                 </c:pt>
                 <c:pt idx="2">
-                  <c:v>40</c:v>
+                  <c:v>38</c:v>
                 </c:pt>
                 <c:pt idx="3">
-                  <c:v>2</c:v>
+                  <c:v>3</c:v>
                 </c:pt>
                 <c:pt idx="4">
-                  <c:v>1</c:v>
+                  <c:v>2</c:v>
                 </c:pt>
                 <c:pt idx="5">
                   <c:v>1</c:v>
@@ -2783,7 +2783,7 @@
                 <a:ea typeface="Arial" pitchFamily="34" charset="-122"/>
                 <a:cs typeface="Arial" pitchFamily="34" charset="-120"/>
               </a:rPr>
-              <a:t>コンフォートスイーツ東京ベイは全体平均9.22点（10pt換算）、高評価率97.2%を達成しています。本レポートで示した改善施策を段階的に実施することで、さらなる顧客満足度向上が期待できます。</a:t>
+              <a:t>コンフォートスイーツ東京ベイは全体平均9.20点（10pt換算）、高評価率95.8%を達成しています。本レポートで示した改善施策を段階的に実施することで、さらなる顧客満足度向上が期待できます。</a:t>
             </a:r>
             <a:endParaRPr lang="en-US" sz="1200" dirty="0"/>
           </a:p>
@@ -3220,7 +3220,7 @@
                 <a:ea typeface="Arial" pitchFamily="34" charset="-122"/>
                 <a:cs typeface="Arial" pitchFamily="34" charset="-120"/>
               </a:rPr>
-              <a:t>9.22</a:t>
+              <a:t>9.20</a:t>
             </a:r>
             <a:endParaRPr lang="en-US" sz="2800" dirty="0"/>
           </a:p>
@@ -3338,7 +3338,7 @@
                 <a:ea typeface="Arial" pitchFamily="34" charset="-122"/>
                 <a:cs typeface="Arial" pitchFamily="34" charset="-120"/>
               </a:rPr>
-              <a:t>97.2%</a:t>
+              <a:t>95.8%</a:t>
             </a:r>
             <a:endParaRPr lang="en-US" sz="2800" dirty="0"/>
           </a:p>
@@ -4245,7 +4245,7 @@
                           <a:ea typeface="Arial" pitchFamily="34" charset="-122"/>
                           <a:cs typeface="Arial" pitchFamily="34" charset="-120"/>
                         </a:rPr>
-                        <a:t>Trip.com</a:t>
+                        <a:t>Agoda</a:t>
                       </a:r>
                       <a:endParaRPr lang="en-US" sz="800" dirty="0">
                         <a:latin typeface="Arial" charset="0"/>
@@ -4313,7 +4313,7 @@
                           <a:ea typeface="Arial" pitchFamily="34" charset="-122"/>
                           <a:cs typeface="Arial" pitchFamily="34" charset="-120"/>
                         </a:rPr>
-                        <a:t>15</a:t>
+                        <a:t>17</a:t>
                       </a:r>
                       <a:endParaRPr lang="en-US" sz="800" dirty="0">
                         <a:latin typeface="Arial" charset="0"/>
@@ -4381,7 +4381,7 @@
                           <a:ea typeface="Arial" pitchFamily="34" charset="-122"/>
                           <a:cs typeface="Arial" pitchFamily="34" charset="-120"/>
                         </a:rPr>
-                        <a:t>9.60/10</a:t>
+                        <a:t>9.47/10</a:t>
                       </a:r>
                       <a:endParaRPr lang="en-US" sz="800" dirty="0">
                         <a:latin typeface="Arial" charset="0"/>
@@ -4449,7 +4449,7 @@
                           <a:ea typeface="Arial" pitchFamily="34" charset="-122"/>
                           <a:cs typeface="Arial" pitchFamily="34" charset="-120"/>
                         </a:rPr>
-                        <a:t>9.60</a:t>
+                        <a:t>9.47</a:t>
                       </a:r>
                       <a:endParaRPr lang="en-US" sz="800" dirty="0">
                         <a:latin typeface="Arial" charset="0"/>
@@ -4587,7 +4587,7 @@
                           <a:ea typeface="Arial" pitchFamily="34" charset="-122"/>
                           <a:cs typeface="Arial" pitchFamily="34" charset="-120"/>
                         </a:rPr>
-                        <a:t>Agoda</a:t>
+                        <a:t>Trip.com</a:t>
                       </a:r>
                       <a:endParaRPr lang="en-US" sz="800" dirty="0">
                         <a:latin typeface="Arial" charset="0"/>
@@ -4655,7 +4655,7 @@
                           <a:ea typeface="Arial" pitchFamily="34" charset="-122"/>
                           <a:cs typeface="Arial" pitchFamily="34" charset="-120"/>
                         </a:rPr>
-                        <a:t>18</a:t>
+                        <a:t>17</a:t>
                       </a:r>
                       <a:endParaRPr lang="en-US" sz="800" dirty="0">
                         <a:latin typeface="Arial" charset="0"/>
@@ -4723,7 +4723,7 @@
                           <a:ea typeface="Arial" pitchFamily="34" charset="-122"/>
                           <a:cs typeface="Arial" pitchFamily="34" charset="-120"/>
                         </a:rPr>
-                        <a:t>9.50/10</a:t>
+                        <a:t>9.41/10</a:t>
                       </a:r>
                       <a:endParaRPr lang="en-US" sz="800" dirty="0">
                         <a:latin typeface="Arial" charset="0"/>
@@ -4791,7 +4791,7 @@
                           <a:ea typeface="Arial" pitchFamily="34" charset="-122"/>
                           <a:cs typeface="Arial" pitchFamily="34" charset="-120"/>
                         </a:rPr>
-                        <a:t>9.50</a:t>
+                        <a:t>9.41</a:t>
                       </a:r>
                       <a:endParaRPr lang="en-US" sz="800" dirty="0">
                         <a:latin typeface="Arial" charset="0"/>
@@ -4997,7 +4997,7 @@
                           <a:ea typeface="Arial" pitchFamily="34" charset="-122"/>
                           <a:cs typeface="Arial" pitchFamily="34" charset="-120"/>
                         </a:rPr>
-                        <a:t>8</a:t>
+                        <a:t>10</a:t>
                       </a:r>
                       <a:endParaRPr lang="en-US" sz="800" dirty="0">
                         <a:latin typeface="Arial" charset="0"/>
@@ -5065,7 +5065,7 @@
                           <a:ea typeface="Arial" pitchFamily="34" charset="-122"/>
                           <a:cs typeface="Arial" pitchFamily="34" charset="-120"/>
                         </a:rPr>
-                        <a:t>4.62/5</a:t>
+                        <a:t>4.70/5</a:t>
                       </a:r>
                       <a:endParaRPr lang="en-US" sz="800" dirty="0">
                         <a:latin typeface="Arial" charset="0"/>
@@ -5133,7 +5133,7 @@
                           <a:ea typeface="Arial" pitchFamily="34" charset="-122"/>
                           <a:cs typeface="Arial" pitchFamily="34" charset="-120"/>
                         </a:rPr>
-                        <a:t>9.25</a:t>
+                        <a:t>9.40</a:t>
                       </a:r>
                       <a:endParaRPr lang="en-US" sz="800" dirty="0">
                         <a:latin typeface="Arial" charset="0"/>
@@ -5339,7 +5339,7 @@
                           <a:ea typeface="Arial" pitchFamily="34" charset="-122"/>
                           <a:cs typeface="Arial" pitchFamily="34" charset="-120"/>
                         </a:rPr>
-                        <a:t>28</a:t>
+                        <a:t>24</a:t>
                       </a:r>
                       <a:endParaRPr lang="en-US" sz="800" dirty="0">
                         <a:latin typeface="Arial" charset="0"/>
@@ -5407,7 +5407,7 @@
                           <a:ea typeface="Arial" pitchFamily="34" charset="-122"/>
                           <a:cs typeface="Arial" pitchFamily="34" charset="-120"/>
                         </a:rPr>
-                        <a:t>4.61/5</a:t>
+                        <a:t>4.62/5</a:t>
                       </a:r>
                       <a:endParaRPr lang="en-US" sz="800" dirty="0">
                         <a:latin typeface="Arial" charset="0"/>
@@ -5475,7 +5475,7 @@
                           <a:ea typeface="Arial" pitchFamily="34" charset="-122"/>
                           <a:cs typeface="Arial" pitchFamily="34" charset="-120"/>
                         </a:rPr>
-                        <a:t>9.21</a:t>
+                        <a:t>9.25</a:t>
                       </a:r>
                       <a:endParaRPr lang="en-US" sz="800" dirty="0">
                         <a:latin typeface="Arial" charset="0"/>
@@ -5681,7 +5681,7 @@
                           <a:ea typeface="Arial" pitchFamily="34" charset="-122"/>
                           <a:cs typeface="Arial" pitchFamily="34" charset="-120"/>
                         </a:rPr>
-                        <a:t>47</a:t>
+                        <a:t>46</a:t>
                       </a:r>
                       <a:endParaRPr lang="en-US" sz="800" dirty="0">
                         <a:latin typeface="Arial" charset="0"/>
@@ -5749,7 +5749,7 @@
                           <a:ea typeface="Arial" pitchFamily="34" charset="-122"/>
                           <a:cs typeface="Arial" pitchFamily="34" charset="-120"/>
                         </a:rPr>
-                        <a:t>4.60/5</a:t>
+                        <a:t>4.61/5</a:t>
                       </a:r>
                       <a:endParaRPr lang="en-US" sz="800" dirty="0">
                         <a:latin typeface="Arial" charset="0"/>
@@ -5817,7 +5817,7 @@
                           <a:ea typeface="Arial" pitchFamily="34" charset="-122"/>
                           <a:cs typeface="Arial" pitchFamily="34" charset="-120"/>
                         </a:rPr>
-                        <a:t>9.19</a:t>
+                        <a:t>9.22</a:t>
                       </a:r>
                       <a:endParaRPr lang="en-US" sz="800" dirty="0">
                         <a:latin typeface="Arial" charset="0"/>
@@ -6023,7 +6023,7 @@
                           <a:ea typeface="Arial" pitchFamily="34" charset="-122"/>
                           <a:cs typeface="Arial" pitchFamily="34" charset="-120"/>
                         </a:rPr>
-                        <a:t>27</a:t>
+                        <a:t>29</a:t>
                       </a:r>
                       <a:endParaRPr lang="en-US" sz="800" dirty="0">
                         <a:latin typeface="Arial" charset="0"/>
@@ -6091,7 +6091,7 @@
                           <a:ea typeface="Arial" pitchFamily="34" charset="-122"/>
                           <a:cs typeface="Arial" pitchFamily="34" charset="-120"/>
                         </a:rPr>
-                        <a:t>8.85/10</a:t>
+                        <a:t>8.76/10</a:t>
                       </a:r>
                       <a:endParaRPr lang="en-US" sz="800" dirty="0">
                         <a:latin typeface="Arial" charset="0"/>
@@ -6159,7 +6159,7 @@
                           <a:ea typeface="Arial" pitchFamily="34" charset="-122"/>
                           <a:cs typeface="Arial" pitchFamily="34" charset="-120"/>
                         </a:rPr>
-                        <a:t>8.85</a:t>
+                        <a:t>8.76</a:t>
                       </a:r>
                       <a:endParaRPr lang="en-US" sz="800" dirty="0">
                         <a:latin typeface="Arial" charset="0"/>
@@ -6612,7 +6612,7 @@
                 <a:ea typeface="Arial" pitchFamily="34" charset="-122"/>
                 <a:cs typeface="Arial" pitchFamily="34" charset="-120"/>
               </a:rPr>
-              <a:t>139件（97.2%）</a:t>
+              <a:t>137件（95.8%）</a:t>
             </a:r>
             <a:endParaRPr lang="en-US" sz="1600" dirty="0"/>
           </a:p>
@@ -6710,7 +6710,7 @@
                 <a:ea typeface="Arial" pitchFamily="34" charset="-122"/>
                 <a:cs typeface="Arial" pitchFamily="34" charset="-120"/>
               </a:rPr>
-              <a:t>3件（2.1%）</a:t>
+              <a:t>5件（3.5%）</a:t>
             </a:r>
             <a:endParaRPr lang="en-US" sz="1600" dirty="0"/>
           </a:p>
@@ -6970,7 +6970,7 @@
                 <a:ea typeface="Arial" pitchFamily="34" charset="-122"/>
                 <a:cs typeface="Arial" pitchFamily="34" charset="-120"/>
               </a:rPr>
-              <a:t>高評価レビュー（8-10点: 139件）の分析から、主要な強みテーマを抽出しています。立地・アクセス、客室清潔感、スタッフ対応が高評価の中心的テーマです。</a:t>
+              <a:t>高評価レビュー（8-10点: 137件）の分析から、主要な強みテーマを抽出しています。立地・アクセス、客室清潔感、スタッフ対応が高評価の中心的テーマです。</a:t>
             </a:r>
             <a:endParaRPr lang="en-US" sz="1200" dirty="0"/>
           </a:p>
@@ -7230,7 +7230,7 @@
                 <a:ea typeface="Arial" pitchFamily="34" charset="-122"/>
                 <a:cs typeface="Arial" pitchFamily="34" charset="-120"/>
               </a:rPr>
-              <a:t>低評価・中評価レビュー（4件）から改善課題を優先度別に整理しています。S/A/B/Cの4段階で優先度を設定し、計画的な改善を推進します。</a:t>
+              <a:t>低評価・中評価レビュー（6件）から改善課題を優先度別に整理しています。S/A/B/Cの4段階で優先度を設定し、計画的な改善を推進します。</a:t>
             </a:r>
             <a:endParaRPr lang="en-US" sz="1200" dirty="0"/>
           </a:p>
@@ -8010,7 +8010,7 @@
                 <a:ea typeface="Arial" pitchFamily="34" charset="-122"/>
                 <a:cs typeface="Arial" pitchFamily="34" charset="-120"/>
               </a:rPr>
-              <a:t>全体平均 9.22点 → 目標 9.72点</a:t>
+              <a:t>全体平均 9.20点 → 目標 9.70点</a:t>
             </a:r>
             <a:endParaRPr lang="en-US" sz="1200" dirty="0"/>
           </a:p>
@@ -8027,7 +8027,7 @@
                 <a:ea typeface="Arial" pitchFamily="34" charset="-122"/>
                 <a:cs typeface="Arial" pitchFamily="34" charset="-120"/>
               </a:rPr>
-              <a:t>高評価率 97.2% → 目標 100.0%</a:t>
+              <a:t>高評価率 95.8% → 目標 100.0%</a:t>
             </a:r>
             <a:endParaRPr lang="en-US" sz="1200" dirty="0"/>
           </a:p>

--- a/納品レポート/ホテル別レポート/comfort_suites_tokyobay_口コミ分析レポート.pptx
+++ b/納品レポート/ホテル別レポート/comfort_suites_tokyobay_口コミ分析レポート.pptx
@@ -249,10 +249,10 @@
                     <c:v>Agoda</c:v>
                   </c:pt>
                   <c:pt idx="1">
-                    <c:v>Trip.com</c:v>
+                    <c:v>Google</c:v>
                   </c:pt>
                   <c:pt idx="2">
-                    <c:v>Google</c:v>
+                    <c:v>Trip.com</c:v>
                   </c:pt>
                   <c:pt idx="3">
                     <c:v>じゃらん</c:v>
@@ -277,16 +277,16 @@
                   <c:v>9.47</c:v>
                 </c:pt>
                 <c:pt idx="1">
-                  <c:v>9.41</c:v>
+                  <c:v>9.4</c:v>
                 </c:pt>
                 <c:pt idx="2">
-                  <c:v>9.4</c:v>
+                  <c:v>9.38</c:v>
                 </c:pt>
                 <c:pt idx="3">
-                  <c:v>9.25</c:v>
+                  <c:v>9.28</c:v>
                 </c:pt>
                 <c:pt idx="4">
-                  <c:v>9.22</c:v>
+                  <c:v>9.17</c:v>
                 </c:pt>
                 <c:pt idx="5">
                   <c:v>8.76</c:v>
@@ -600,13 +600,13 @@
                 <c:formatCode>General</c:formatCode>
                 <c:ptCount val="6"/>
                 <c:pt idx="0">
-                  <c:v>83</c:v>
+                  <c:v>82</c:v>
                 </c:pt>
                 <c:pt idx="1">
                   <c:v>16</c:v>
                 </c:pt>
                 <c:pt idx="2">
-                  <c:v>38</c:v>
+                  <c:v>39</c:v>
                 </c:pt>
                 <c:pt idx="3">
                   <c:v>3</c:v>
@@ -2783,7 +2783,7 @@
                 <a:ea typeface="Arial" pitchFamily="34" charset="-122"/>
                 <a:cs typeface="Arial" pitchFamily="34" charset="-120"/>
               </a:rPr>
-              <a:t>コンフォートスイーツ東京ベイは全体平均9.20点（10pt換算）、高評価率95.8%を達成しています。本レポートで示した改善施策を段階的に実施することで、さらなる顧客満足度向上が期待できます。</a:t>
+              <a:t>コンフォートスイーツ東京ベイは全体平均9.18点（10pt換算）、高評価率95.8%を達成しています。本レポートで示した改善施策を段階的に実施することで、さらなる顧客満足度向上が期待できます。</a:t>
             </a:r>
             <a:endParaRPr lang="en-US" sz="1200" dirty="0"/>
           </a:p>
@@ -3220,7 +3220,7 @@
                 <a:ea typeface="Arial" pitchFamily="34" charset="-122"/>
                 <a:cs typeface="Arial" pitchFamily="34" charset="-120"/>
               </a:rPr>
-              <a:t>9.20</a:t>
+              <a:t>9.18</a:t>
             </a:r>
             <a:endParaRPr lang="en-US" sz="2800" dirty="0"/>
           </a:p>
@@ -4587,7 +4587,7 @@
                           <a:ea typeface="Arial" pitchFamily="34" charset="-122"/>
                           <a:cs typeface="Arial" pitchFamily="34" charset="-120"/>
                         </a:rPr>
-                        <a:t>Trip.com</a:t>
+                        <a:t>Google</a:t>
                       </a:r>
                       <a:endParaRPr lang="en-US" sz="800" dirty="0">
                         <a:latin typeface="Arial" charset="0"/>
@@ -4655,7 +4655,7 @@
                           <a:ea typeface="Arial" pitchFamily="34" charset="-122"/>
                           <a:cs typeface="Arial" pitchFamily="34" charset="-120"/>
                         </a:rPr>
-                        <a:t>17</a:t>
+                        <a:t>10</a:t>
                       </a:r>
                       <a:endParaRPr lang="en-US" sz="800" dirty="0">
                         <a:latin typeface="Arial" charset="0"/>
@@ -4723,7 +4723,7 @@
                           <a:ea typeface="Arial" pitchFamily="34" charset="-122"/>
                           <a:cs typeface="Arial" pitchFamily="34" charset="-120"/>
                         </a:rPr>
-                        <a:t>9.41/10</a:t>
+                        <a:t>4.70/5</a:t>
                       </a:r>
                       <a:endParaRPr lang="en-US" sz="800" dirty="0">
                         <a:latin typeface="Arial" charset="0"/>
@@ -4791,7 +4791,7 @@
                           <a:ea typeface="Arial" pitchFamily="34" charset="-122"/>
                           <a:cs typeface="Arial" pitchFamily="34" charset="-120"/>
                         </a:rPr>
-                        <a:t>9.41</a:t>
+                        <a:t>9.40</a:t>
                       </a:r>
                       <a:endParaRPr lang="en-US" sz="800" dirty="0">
                         <a:latin typeface="Arial" charset="0"/>
@@ -4929,7 +4929,7 @@
                           <a:ea typeface="Arial" pitchFamily="34" charset="-122"/>
                           <a:cs typeface="Arial" pitchFamily="34" charset="-120"/>
                         </a:rPr>
-                        <a:t>Google</a:t>
+                        <a:t>Trip.com</a:t>
                       </a:r>
                       <a:endParaRPr lang="en-US" sz="800" dirty="0">
                         <a:latin typeface="Arial" charset="0"/>
@@ -4997,7 +4997,7 @@
                           <a:ea typeface="Arial" pitchFamily="34" charset="-122"/>
                           <a:cs typeface="Arial" pitchFamily="34" charset="-120"/>
                         </a:rPr>
-                        <a:t>10</a:t>
+                        <a:t>16</a:t>
                       </a:r>
                       <a:endParaRPr lang="en-US" sz="800" dirty="0">
                         <a:latin typeface="Arial" charset="0"/>
@@ -5065,7 +5065,7 @@
                           <a:ea typeface="Arial" pitchFamily="34" charset="-122"/>
                           <a:cs typeface="Arial" pitchFamily="34" charset="-120"/>
                         </a:rPr>
-                        <a:t>4.70/5</a:t>
+                        <a:t>9.38/10</a:t>
                       </a:r>
                       <a:endParaRPr lang="en-US" sz="800" dirty="0">
                         <a:latin typeface="Arial" charset="0"/>
@@ -5133,7 +5133,7 @@
                           <a:ea typeface="Arial" pitchFamily="34" charset="-122"/>
                           <a:cs typeface="Arial" pitchFamily="34" charset="-120"/>
                         </a:rPr>
-                        <a:t>9.40</a:t>
+                        <a:t>9.38</a:t>
                       </a:r>
                       <a:endParaRPr lang="en-US" sz="800" dirty="0">
                         <a:latin typeface="Arial" charset="0"/>
@@ -5339,7 +5339,7 @@
                           <a:ea typeface="Arial" pitchFamily="34" charset="-122"/>
                           <a:cs typeface="Arial" pitchFamily="34" charset="-120"/>
                         </a:rPr>
-                        <a:t>24</a:t>
+                        <a:t>25</a:t>
                       </a:r>
                       <a:endParaRPr lang="en-US" sz="800" dirty="0">
                         <a:latin typeface="Arial" charset="0"/>
@@ -5407,7 +5407,7 @@
                           <a:ea typeface="Arial" pitchFamily="34" charset="-122"/>
                           <a:cs typeface="Arial" pitchFamily="34" charset="-120"/>
                         </a:rPr>
-                        <a:t>4.62/5</a:t>
+                        <a:t>4.64/5</a:t>
                       </a:r>
                       <a:endParaRPr lang="en-US" sz="800" dirty="0">
                         <a:latin typeface="Arial" charset="0"/>
@@ -5475,7 +5475,7 @@
                           <a:ea typeface="Arial" pitchFamily="34" charset="-122"/>
                           <a:cs typeface="Arial" pitchFamily="34" charset="-120"/>
                         </a:rPr>
-                        <a:t>9.25</a:t>
+                        <a:t>9.28</a:t>
                       </a:r>
                       <a:endParaRPr lang="en-US" sz="800" dirty="0">
                         <a:latin typeface="Arial" charset="0"/>
@@ -5749,7 +5749,7 @@
                           <a:ea typeface="Arial" pitchFamily="34" charset="-122"/>
                           <a:cs typeface="Arial" pitchFamily="34" charset="-120"/>
                         </a:rPr>
-                        <a:t>4.61/5</a:t>
+                        <a:t>4.59/5</a:t>
                       </a:r>
                       <a:endParaRPr lang="en-US" sz="800" dirty="0">
                         <a:latin typeface="Arial" charset="0"/>
@@ -5817,7 +5817,7 @@
                           <a:ea typeface="Arial" pitchFamily="34" charset="-122"/>
                           <a:cs typeface="Arial" pitchFamily="34" charset="-120"/>
                         </a:rPr>
-                        <a:t>9.22</a:t>
+                        <a:t>9.17</a:t>
                       </a:r>
                       <a:endParaRPr lang="en-US" sz="800" dirty="0">
                         <a:latin typeface="Arial" charset="0"/>
@@ -8010,7 +8010,7 @@
                 <a:ea typeface="Arial" pitchFamily="34" charset="-122"/>
                 <a:cs typeface="Arial" pitchFamily="34" charset="-120"/>
               </a:rPr>
-              <a:t>全体平均 9.20点 → 目標 9.70点</a:t>
+              <a:t>全体平均 9.18点 → 目標 9.68点</a:t>
             </a:r>
             <a:endParaRPr lang="en-US" sz="1200" dirty="0"/>
           </a:p>

--- a/納品レポート/ホテル別レポート/comfort_suites_tokyobay_口コミ分析レポート.pptx
+++ b/納品レポート/ホテル別レポート/comfort_suites_tokyobay_口コミ分析レポート.pptx
@@ -246,13 +246,13 @@
                 <c:ptCount val="6"/>
                 <c:lvl>
                   <c:pt idx="0">
-                    <c:v>Agoda</c:v>
+                    <c:v>Trip.com</c:v>
                   </c:pt>
                   <c:pt idx="1">
                     <c:v>Google</c:v>
                   </c:pt>
                   <c:pt idx="2">
-                    <c:v>Trip.com</c:v>
+                    <c:v>Agoda</c:v>
                   </c:pt>
                   <c:pt idx="3">
                     <c:v>じゃらん</c:v>
@@ -274,22 +274,22 @@
                 <c:formatCode>General</c:formatCode>
                 <c:ptCount val="6"/>
                 <c:pt idx="0">
-                  <c:v>9.47</c:v>
+                  <c:v>9.41</c:v>
                 </c:pt>
                 <c:pt idx="1">
                   <c:v>9.4</c:v>
                 </c:pt>
                 <c:pt idx="2">
-                  <c:v>9.38</c:v>
+                  <c:v>9.39</c:v>
                 </c:pt>
                 <c:pt idx="3">
-                  <c:v>9.28</c:v>
+                  <c:v>9.27</c:v>
                 </c:pt>
                 <c:pt idx="4">
-                  <c:v>9.17</c:v>
+                  <c:v>9.22</c:v>
                 </c:pt>
                 <c:pt idx="5">
-                  <c:v>8.76</c:v>
+                  <c:v>8.73</c:v>
                 </c:pt>
               </c:numCache>
             </c:numRef>
@@ -4245,7 +4245,7 @@
                           <a:ea typeface="Arial" pitchFamily="34" charset="-122"/>
                           <a:cs typeface="Arial" pitchFamily="34" charset="-120"/>
                         </a:rPr>
-                        <a:t>Agoda</a:t>
+                        <a:t>Trip.com</a:t>
                       </a:r>
                       <a:endParaRPr lang="en-US" sz="800" dirty="0">
                         <a:latin typeface="Arial" charset="0"/>
@@ -4381,7 +4381,7 @@
                           <a:ea typeface="Arial" pitchFamily="34" charset="-122"/>
                           <a:cs typeface="Arial" pitchFamily="34" charset="-120"/>
                         </a:rPr>
-                        <a:t>9.47/10</a:t>
+                        <a:t>9.41/10</a:t>
                       </a:r>
                       <a:endParaRPr lang="en-US" sz="800" dirty="0">
                         <a:latin typeface="Arial" charset="0"/>
@@ -4449,7 +4449,7 @@
                           <a:ea typeface="Arial" pitchFamily="34" charset="-122"/>
                           <a:cs typeface="Arial" pitchFamily="34" charset="-120"/>
                         </a:rPr>
-                        <a:t>9.47</a:t>
+                        <a:t>9.41</a:t>
                       </a:r>
                       <a:endParaRPr lang="en-US" sz="800" dirty="0">
                         <a:latin typeface="Arial" charset="0"/>
@@ -4929,7 +4929,7 @@
                           <a:ea typeface="Arial" pitchFamily="34" charset="-122"/>
                           <a:cs typeface="Arial" pitchFamily="34" charset="-120"/>
                         </a:rPr>
-                        <a:t>Trip.com</a:t>
+                        <a:t>Agoda</a:t>
                       </a:r>
                       <a:endParaRPr lang="en-US" sz="800" dirty="0">
                         <a:latin typeface="Arial" charset="0"/>
@@ -4997,7 +4997,7 @@
                           <a:ea typeface="Arial" pitchFamily="34" charset="-122"/>
                           <a:cs typeface="Arial" pitchFamily="34" charset="-120"/>
                         </a:rPr>
-                        <a:t>16</a:t>
+                        <a:t>18</a:t>
                       </a:r>
                       <a:endParaRPr lang="en-US" sz="800" dirty="0">
                         <a:latin typeface="Arial" charset="0"/>
@@ -5065,7 +5065,7 @@
                           <a:ea typeface="Arial" pitchFamily="34" charset="-122"/>
                           <a:cs typeface="Arial" pitchFamily="34" charset="-120"/>
                         </a:rPr>
-                        <a:t>9.38/10</a:t>
+                        <a:t>9.39/10</a:t>
                       </a:r>
                       <a:endParaRPr lang="en-US" sz="800" dirty="0">
                         <a:latin typeface="Arial" charset="0"/>
@@ -5133,7 +5133,7 @@
                           <a:ea typeface="Arial" pitchFamily="34" charset="-122"/>
                           <a:cs typeface="Arial" pitchFamily="34" charset="-120"/>
                         </a:rPr>
-                        <a:t>9.38</a:t>
+                        <a:t>9.39</a:t>
                       </a:r>
                       <a:endParaRPr lang="en-US" sz="800" dirty="0">
                         <a:latin typeface="Arial" charset="0"/>
@@ -5339,7 +5339,7 @@
                           <a:ea typeface="Arial" pitchFamily="34" charset="-122"/>
                           <a:cs typeface="Arial" pitchFamily="34" charset="-120"/>
                         </a:rPr>
-                        <a:t>25</a:t>
+                        <a:t>22</a:t>
                       </a:r>
                       <a:endParaRPr lang="en-US" sz="800" dirty="0">
                         <a:latin typeface="Arial" charset="0"/>
@@ -5475,7 +5475,7 @@
                           <a:ea typeface="Arial" pitchFamily="34" charset="-122"/>
                           <a:cs typeface="Arial" pitchFamily="34" charset="-120"/>
                         </a:rPr>
-                        <a:t>9.28</a:t>
+                        <a:t>9.27</a:t>
                       </a:r>
                       <a:endParaRPr lang="en-US" sz="800" dirty="0">
                         <a:latin typeface="Arial" charset="0"/>
@@ -5749,7 +5749,7 @@
                           <a:ea typeface="Arial" pitchFamily="34" charset="-122"/>
                           <a:cs typeface="Arial" pitchFamily="34" charset="-120"/>
                         </a:rPr>
-                        <a:t>4.59/5</a:t>
+                        <a:t>4.61/5</a:t>
                       </a:r>
                       <a:endParaRPr lang="en-US" sz="800" dirty="0">
                         <a:latin typeface="Arial" charset="0"/>
@@ -5817,7 +5817,7 @@
                           <a:ea typeface="Arial" pitchFamily="34" charset="-122"/>
                           <a:cs typeface="Arial" pitchFamily="34" charset="-120"/>
                         </a:rPr>
-                        <a:t>9.17</a:t>
+                        <a:t>9.22</a:t>
                       </a:r>
                       <a:endParaRPr lang="en-US" sz="800" dirty="0">
                         <a:latin typeface="Arial" charset="0"/>
@@ -6023,7 +6023,7 @@
                           <a:ea typeface="Arial" pitchFamily="34" charset="-122"/>
                           <a:cs typeface="Arial" pitchFamily="34" charset="-120"/>
                         </a:rPr>
-                        <a:t>29</a:t>
+                        <a:t>30</a:t>
                       </a:r>
                       <a:endParaRPr lang="en-US" sz="800" dirty="0">
                         <a:latin typeface="Arial" charset="0"/>
@@ -6091,7 +6091,7 @@
                           <a:ea typeface="Arial" pitchFamily="34" charset="-122"/>
                           <a:cs typeface="Arial" pitchFamily="34" charset="-120"/>
                         </a:rPr>
-                        <a:t>8.76/10</a:t>
+                        <a:t>8.73/10</a:t>
                       </a:r>
                       <a:endParaRPr lang="en-US" sz="800" dirty="0">
                         <a:latin typeface="Arial" charset="0"/>
@@ -6159,7 +6159,7 @@
                           <a:ea typeface="Arial" pitchFamily="34" charset="-122"/>
                           <a:cs typeface="Arial" pitchFamily="34" charset="-120"/>
                         </a:rPr>
-                        <a:t>8.76</a:t>
+                        <a:t>8.73</a:t>
                       </a:r>
                       <a:endParaRPr lang="en-US" sz="800" dirty="0">
                         <a:latin typeface="Arial" charset="0"/>

--- a/納品レポート/ホテル別レポート/comfort_suites_tokyobay_口コミ分析レポート.pptx
+++ b/納品レポート/ホテル別レポート/comfort_suites_tokyobay_口コミ分析レポート.pptx
@@ -246,22 +246,22 @@
                 <c:ptCount val="6"/>
                 <c:lvl>
                   <c:pt idx="0">
+                    <c:v>Google</c:v>
+                  </c:pt>
+                  <c:pt idx="1">
                     <c:v>Trip.com</c:v>
                   </c:pt>
-                  <c:pt idx="1">
-                    <c:v>Google</c:v>
+                  <c:pt idx="2">
+                    <c:v>楽天トラベル</c:v>
                   </c:pt>
-                  <c:pt idx="2">
+                  <c:pt idx="3">
                     <c:v>Agoda</c:v>
                   </c:pt>
-                  <c:pt idx="3">
-                    <c:v>楽天トラベル</c:v>
-                  </c:pt>
                   <c:pt idx="4">
-                    <c:v>じゃらん</c:v>
+                    <c:v>Booking.com</c:v>
                   </c:pt>
                   <c:pt idx="5">
-                    <c:v>Booking.com</c:v>
+                    <c:v>じゃらん</c:v>
                   </c:pt>
                 </c:lvl>
               </c:multiLvlStrCache>
@@ -274,22 +274,22 @@
                 <c:formatCode>General</c:formatCode>
                 <c:ptCount val="6"/>
                 <c:pt idx="0">
-                  <c:v>9.41</c:v>
+                  <c:v>9.43</c:v>
                 </c:pt>
                 <c:pt idx="1">
-                  <c:v>9.4</c:v>
+                  <c:v>9.36</c:v>
                 </c:pt>
                 <c:pt idx="2">
-                  <c:v>9.39</c:v>
+                  <c:v>9.27</c:v>
                 </c:pt>
                 <c:pt idx="3">
-                  <c:v>9.2</c:v>
+                  <c:v>9.25</c:v>
                 </c:pt>
                 <c:pt idx="4">
-                  <c:v>9.04</c:v>
+                  <c:v>8.57</c:v>
                 </c:pt>
                 <c:pt idx="5">
-                  <c:v>8.73</c:v>
+                  <c:v>8.55</c:v>
                 </c:pt>
               </c:numCache>
             </c:numRef>
@@ -600,19 +600,19 @@
                 <c:formatCode>General</c:formatCode>
                 <c:ptCount val="6"/>
                 <c:pt idx="0">
-                  <c:v>81</c:v>
+                  <c:v>40</c:v>
                 </c:pt>
                 <c:pt idx="1">
-                  <c:v>16</c:v>
+                  <c:v>8</c:v>
                 </c:pt>
                 <c:pt idx="2">
-                  <c:v>39</c:v>
+                  <c:v>21</c:v>
                 </c:pt>
                 <c:pt idx="3">
-                  <c:v>3</c:v>
+                  <c:v>1</c:v>
                 </c:pt>
                 <c:pt idx="4">
-                  <c:v>2</c:v>
+                  <c:v>1</c:v>
                 </c:pt>
                 <c:pt idx="5">
                   <c:v>2</c:v>
@@ -2503,7 +2503,7 @@
                 <a:ea typeface="Arial" pitchFamily="34" charset="-122"/>
                 <a:cs typeface="Arial" pitchFamily="34" charset="-120"/>
               </a:rPr>
-              <a:t>レビュー総数：143件</a:t>
+              <a:t>レビュー総数：73件</a:t>
             </a:r>
             <a:endParaRPr lang="en-US" sz="1000" dirty="0"/>
           </a:p>
@@ -2783,7 +2783,7 @@
                 <a:ea typeface="Arial" pitchFamily="34" charset="-122"/>
                 <a:cs typeface="Arial" pitchFamily="34" charset="-120"/>
               </a:rPr>
-              <a:t>コンフォートスイーツ東京ベイは全体平均9.14点（10pt換算）、高評価率95.1%を達成しています。本レポートで示した改善施策を段階的に実施することで、さらなる顧客満足度向上が期待できます。</a:t>
+              <a:t>コンフォートスイーツ東京ベイは全体平均9.05点（10pt換算）、高評価率94.5%を達成しています。本レポートで示した改善施策を段階的に実施することで、さらなる顧客満足度向上が期待できます。</a:t>
             </a:r>
             <a:endParaRPr lang="en-US" sz="1200" dirty="0"/>
           </a:p>
@@ -3220,7 +3220,7 @@
                 <a:ea typeface="Arial" pitchFamily="34" charset="-122"/>
                 <a:cs typeface="Arial" pitchFamily="34" charset="-120"/>
               </a:rPr>
-              <a:t>9.14</a:t>
+              <a:t>9.05</a:t>
             </a:r>
             <a:endParaRPr lang="en-US" sz="2800" dirty="0"/>
           </a:p>
@@ -3338,7 +3338,7 @@
                 <a:ea typeface="Arial" pitchFamily="34" charset="-122"/>
                 <a:cs typeface="Arial" pitchFamily="34" charset="-120"/>
               </a:rPr>
-              <a:t>95.1%</a:t>
+              <a:t>94.5%</a:t>
             </a:r>
             <a:endParaRPr lang="en-US" sz="2800" dirty="0"/>
           </a:p>
@@ -3456,7 +3456,7 @@
                 <a:ea typeface="Arial" pitchFamily="34" charset="-122"/>
                 <a:cs typeface="Arial" pitchFamily="34" charset="-120"/>
               </a:rPr>
-              <a:t>1.4%</a:t>
+              <a:t>2.7%</a:t>
             </a:r>
             <a:endParaRPr lang="en-US" sz="2800" dirty="0"/>
           </a:p>
@@ -3574,7 +3574,7 @@
                 <a:ea typeface="Arial" pitchFamily="34" charset="-122"/>
                 <a:cs typeface="Arial" pitchFamily="34" charset="-120"/>
               </a:rPr>
-              <a:t>143件</a:t>
+              <a:t>73件</a:t>
             </a:r>
             <a:endParaRPr lang="en-US" sz="2800" dirty="0"/>
           </a:p>
@@ -4245,7 +4245,7 @@
                           <a:ea typeface="Arial" pitchFamily="34" charset="-122"/>
                           <a:cs typeface="Arial" pitchFamily="34" charset="-120"/>
                         </a:rPr>
-                        <a:t>Trip.com</a:t>
+                        <a:t>Google</a:t>
                       </a:r>
                       <a:endParaRPr lang="en-US" sz="800" dirty="0">
                         <a:latin typeface="Arial" charset="0"/>
@@ -4313,7 +4313,7 @@
                           <a:ea typeface="Arial" pitchFamily="34" charset="-122"/>
                           <a:cs typeface="Arial" pitchFamily="34" charset="-120"/>
                         </a:rPr>
-                        <a:t>17</a:t>
+                        <a:t>7</a:t>
                       </a:r>
                       <a:endParaRPr lang="en-US" sz="800" dirty="0">
                         <a:latin typeface="Arial" charset="0"/>
@@ -4381,7 +4381,7 @@
                           <a:ea typeface="Arial" pitchFamily="34" charset="-122"/>
                           <a:cs typeface="Arial" pitchFamily="34" charset="-120"/>
                         </a:rPr>
-                        <a:t>9.41/10</a:t>
+                        <a:t>4.71/5</a:t>
                       </a:r>
                       <a:endParaRPr lang="en-US" sz="800" dirty="0">
                         <a:latin typeface="Arial" charset="0"/>
@@ -4449,7 +4449,7 @@
                           <a:ea typeface="Arial" pitchFamily="34" charset="-122"/>
                           <a:cs typeface="Arial" pitchFamily="34" charset="-120"/>
                         </a:rPr>
-                        <a:t>9.41</a:t>
+                        <a:t>9.43</a:t>
                       </a:r>
                       <a:endParaRPr lang="en-US" sz="800" dirty="0">
                         <a:latin typeface="Arial" charset="0"/>
@@ -4587,7 +4587,7 @@
                           <a:ea typeface="Arial" pitchFamily="34" charset="-122"/>
                           <a:cs typeface="Arial" pitchFamily="34" charset="-120"/>
                         </a:rPr>
-                        <a:t>Google</a:t>
+                        <a:t>Trip.com</a:t>
                       </a:r>
                       <a:endParaRPr lang="en-US" sz="800" dirty="0">
                         <a:latin typeface="Arial" charset="0"/>
@@ -4655,7 +4655,7 @@
                           <a:ea typeface="Arial" pitchFamily="34" charset="-122"/>
                           <a:cs typeface="Arial" pitchFamily="34" charset="-120"/>
                         </a:rPr>
-                        <a:t>10</a:t>
+                        <a:t>11</a:t>
                       </a:r>
                       <a:endParaRPr lang="en-US" sz="800" dirty="0">
                         <a:latin typeface="Arial" charset="0"/>
@@ -4723,7 +4723,7 @@
                           <a:ea typeface="Arial" pitchFamily="34" charset="-122"/>
                           <a:cs typeface="Arial" pitchFamily="34" charset="-120"/>
                         </a:rPr>
-                        <a:t>4.70/5</a:t>
+                        <a:t>9.36/10</a:t>
                       </a:r>
                       <a:endParaRPr lang="en-US" sz="800" dirty="0">
                         <a:latin typeface="Arial" charset="0"/>
@@ -4791,7 +4791,349 @@
                           <a:ea typeface="Arial" pitchFamily="34" charset="-122"/>
                           <a:cs typeface="Arial" pitchFamily="34" charset="-120"/>
                         </a:rPr>
-                        <a:t>9.40</a:t>
+                        <a:t>9.36</a:t>
+                      </a:r>
+                      <a:endParaRPr lang="en-US" sz="800" dirty="0">
+                        <a:latin typeface="Arial" charset="0"/>
+                        <a:ea typeface="Arial" charset="0"/>
+                        <a:cs typeface="Arial" charset="0"/>
+                      </a:endParaRPr>
+                    </a:p>
+                  </a:txBody>
+                  <a:tcPr marL="91440" marR="91440" marT="45720" marB="45720">
+                    <a:lnL w="6350" cap="flat" cmpd="sng" algn="ctr">
+                      <a:solidFill>
+                        <a:srgbClr val="CCCCCC"/>
+                      </a:solidFill>
+                      <a:prstDash val="solid"/>
+                      <a:round/>
+                      <a:headEnd type="none" w="med" len="med"/>
+                      <a:tailEnd type="none" w="med" len="med"/>
+                    </a:lnL>
+                    <a:lnR w="6350" cap="flat" cmpd="sng" algn="ctr">
+                      <a:solidFill>
+                        <a:srgbClr val="CCCCCC"/>
+                      </a:solidFill>
+                      <a:prstDash val="solid"/>
+                      <a:round/>
+                      <a:headEnd type="none" w="med" len="med"/>
+                      <a:tailEnd type="none" w="med" len="med"/>
+                    </a:lnR>
+                    <a:lnT w="6350" cap="flat" cmpd="sng" algn="ctr">
+                      <a:solidFill>
+                        <a:srgbClr val="CCCCCC"/>
+                      </a:solidFill>
+                      <a:prstDash val="solid"/>
+                      <a:round/>
+                      <a:headEnd type="none" w="med" len="med"/>
+                      <a:tailEnd type="none" w="med" len="med"/>
+                    </a:lnT>
+                    <a:lnB w="6350" cap="flat" cmpd="sng" algn="ctr">
+                      <a:solidFill>
+                        <a:srgbClr val="CCCCCC"/>
+                      </a:solidFill>
+                      <a:prstDash val="solid"/>
+                      <a:round/>
+                      <a:headEnd type="none" w="med" len="med"/>
+                      <a:tailEnd type="none" w="med" len="med"/>
+                    </a:lnB>
+                    <a:solidFill>
+                      <a:srgbClr val="FFFFFF"/>
+                    </a:solidFill>
+                  </a:tcPr>
+                </a:tc>
+                <a:tc>
+                  <a:txBody>
+                    <a:bodyPr/>
+                    <a:lstStyle/>
+                    <a:p>
+                      <a:pPr algn="ctr" indent="0" marL="0">
+                        <a:buNone/>
+                      </a:pPr>
+                      <a:r>
+                        <a:rPr lang="en-US" sz="800" dirty="0">
+                          <a:solidFill>
+                            <a:srgbClr val="000000"/>
+                          </a:solidFill>
+                          <a:latin typeface="Arial" pitchFamily="34" charset="0"/>
+                          <a:ea typeface="Arial" pitchFamily="34" charset="-122"/>
+                          <a:cs typeface="Arial" pitchFamily="34" charset="-120"/>
+                        </a:rPr>
+                        <a:t>優秀</a:t>
+                      </a:r>
+                      <a:endParaRPr lang="en-US" sz="800" dirty="0">
+                        <a:latin typeface="Arial" charset="0"/>
+                        <a:ea typeface="Arial" charset="0"/>
+                        <a:cs typeface="Arial" charset="0"/>
+                      </a:endParaRPr>
+                    </a:p>
+                  </a:txBody>
+                  <a:tcPr marL="91440" marR="91440" marT="45720" marB="45720">
+                    <a:lnL w="6350" cap="flat" cmpd="sng" algn="ctr">
+                      <a:solidFill>
+                        <a:srgbClr val="CCCCCC"/>
+                      </a:solidFill>
+                      <a:prstDash val="solid"/>
+                      <a:round/>
+                      <a:headEnd type="none" w="med" len="med"/>
+                      <a:tailEnd type="none" w="med" len="med"/>
+                    </a:lnL>
+                    <a:lnR w="6350" cap="flat" cmpd="sng" algn="ctr">
+                      <a:solidFill>
+                        <a:srgbClr val="CCCCCC"/>
+                      </a:solidFill>
+                      <a:prstDash val="solid"/>
+                      <a:round/>
+                      <a:headEnd type="none" w="med" len="med"/>
+                      <a:tailEnd type="none" w="med" len="med"/>
+                    </a:lnR>
+                    <a:lnT w="6350" cap="flat" cmpd="sng" algn="ctr">
+                      <a:solidFill>
+                        <a:srgbClr val="CCCCCC"/>
+                      </a:solidFill>
+                      <a:prstDash val="solid"/>
+                      <a:round/>
+                      <a:headEnd type="none" w="med" len="med"/>
+                      <a:tailEnd type="none" w="med" len="med"/>
+                    </a:lnT>
+                    <a:lnB w="6350" cap="flat" cmpd="sng" algn="ctr">
+                      <a:solidFill>
+                        <a:srgbClr val="CCCCCC"/>
+                      </a:solidFill>
+                      <a:prstDash val="solid"/>
+                      <a:round/>
+                      <a:headEnd type="none" w="med" len="med"/>
+                      <a:tailEnd type="none" w="med" len="med"/>
+                    </a:lnB>
+                    <a:solidFill>
+                      <a:srgbClr val="FFFFFF"/>
+                    </a:solidFill>
+                  </a:tcPr>
+                </a:tc>
+              </a:tr>
+              <a:tr h="0">
+                <a:tc>
+                  <a:txBody>
+                    <a:bodyPr/>
+                    <a:lstStyle/>
+                    <a:p>
+                      <a:pPr algn="ctr" indent="0" marL="0">
+                        <a:buNone/>
+                      </a:pPr>
+                      <a:r>
+                        <a:rPr lang="en-US" sz="800" dirty="0">
+                          <a:solidFill>
+                            <a:srgbClr val="000000"/>
+                          </a:solidFill>
+                          <a:latin typeface="Arial" pitchFamily="34" charset="0"/>
+                          <a:ea typeface="Arial" pitchFamily="34" charset="-122"/>
+                          <a:cs typeface="Arial" pitchFamily="34" charset="-120"/>
+                        </a:rPr>
+                        <a:t>楽天トラベル</a:t>
+                      </a:r>
+                      <a:endParaRPr lang="en-US" sz="800" dirty="0">
+                        <a:latin typeface="Arial" charset="0"/>
+                        <a:ea typeface="Arial" charset="0"/>
+                        <a:cs typeface="Arial" charset="0"/>
+                      </a:endParaRPr>
+                    </a:p>
+                  </a:txBody>
+                  <a:tcPr marL="91440" marR="91440" marT="45720" marB="45720">
+                    <a:lnL w="6350" cap="flat" cmpd="sng" algn="ctr">
+                      <a:solidFill>
+                        <a:srgbClr val="CCCCCC"/>
+                      </a:solidFill>
+                      <a:prstDash val="solid"/>
+                      <a:round/>
+                      <a:headEnd type="none" w="med" len="med"/>
+                      <a:tailEnd type="none" w="med" len="med"/>
+                    </a:lnL>
+                    <a:lnR w="6350" cap="flat" cmpd="sng" algn="ctr">
+                      <a:solidFill>
+                        <a:srgbClr val="CCCCCC"/>
+                      </a:solidFill>
+                      <a:prstDash val="solid"/>
+                      <a:round/>
+                      <a:headEnd type="none" w="med" len="med"/>
+                      <a:tailEnd type="none" w="med" len="med"/>
+                    </a:lnR>
+                    <a:lnT w="6350" cap="flat" cmpd="sng" algn="ctr">
+                      <a:solidFill>
+                        <a:srgbClr val="CCCCCC"/>
+                      </a:solidFill>
+                      <a:prstDash val="solid"/>
+                      <a:round/>
+                      <a:headEnd type="none" w="med" len="med"/>
+                      <a:tailEnd type="none" w="med" len="med"/>
+                    </a:lnT>
+                    <a:lnB w="6350" cap="flat" cmpd="sng" algn="ctr">
+                      <a:solidFill>
+                        <a:srgbClr val="CCCCCC"/>
+                      </a:solidFill>
+                      <a:prstDash val="solid"/>
+                      <a:round/>
+                      <a:headEnd type="none" w="med" len="med"/>
+                      <a:tailEnd type="none" w="med" len="med"/>
+                    </a:lnB>
+                    <a:solidFill>
+                      <a:srgbClr val="FFFFFF"/>
+                    </a:solidFill>
+                  </a:tcPr>
+                </a:tc>
+                <a:tc>
+                  <a:txBody>
+                    <a:bodyPr/>
+                    <a:lstStyle/>
+                    <a:p>
+                      <a:pPr algn="ctr" indent="0" marL="0">
+                        <a:buNone/>
+                      </a:pPr>
+                      <a:r>
+                        <a:rPr lang="en-US" sz="800" dirty="0">
+                          <a:solidFill>
+                            <a:srgbClr val="000000"/>
+                          </a:solidFill>
+                          <a:latin typeface="Arial" pitchFamily="34" charset="0"/>
+                          <a:ea typeface="Arial" pitchFamily="34" charset="-122"/>
+                          <a:cs typeface="Arial" pitchFamily="34" charset="-120"/>
+                        </a:rPr>
+                        <a:t>22</a:t>
+                      </a:r>
+                      <a:endParaRPr lang="en-US" sz="800" dirty="0">
+                        <a:latin typeface="Arial" charset="0"/>
+                        <a:ea typeface="Arial" charset="0"/>
+                        <a:cs typeface="Arial" charset="0"/>
+                      </a:endParaRPr>
+                    </a:p>
+                  </a:txBody>
+                  <a:tcPr marL="91440" marR="91440" marT="45720" marB="45720">
+                    <a:lnL w="6350" cap="flat" cmpd="sng" algn="ctr">
+                      <a:solidFill>
+                        <a:srgbClr val="CCCCCC"/>
+                      </a:solidFill>
+                      <a:prstDash val="solid"/>
+                      <a:round/>
+                      <a:headEnd type="none" w="med" len="med"/>
+                      <a:tailEnd type="none" w="med" len="med"/>
+                    </a:lnL>
+                    <a:lnR w="6350" cap="flat" cmpd="sng" algn="ctr">
+                      <a:solidFill>
+                        <a:srgbClr val="CCCCCC"/>
+                      </a:solidFill>
+                      <a:prstDash val="solid"/>
+                      <a:round/>
+                      <a:headEnd type="none" w="med" len="med"/>
+                      <a:tailEnd type="none" w="med" len="med"/>
+                    </a:lnR>
+                    <a:lnT w="6350" cap="flat" cmpd="sng" algn="ctr">
+                      <a:solidFill>
+                        <a:srgbClr val="CCCCCC"/>
+                      </a:solidFill>
+                      <a:prstDash val="solid"/>
+                      <a:round/>
+                      <a:headEnd type="none" w="med" len="med"/>
+                      <a:tailEnd type="none" w="med" len="med"/>
+                    </a:lnT>
+                    <a:lnB w="6350" cap="flat" cmpd="sng" algn="ctr">
+                      <a:solidFill>
+                        <a:srgbClr val="CCCCCC"/>
+                      </a:solidFill>
+                      <a:prstDash val="solid"/>
+                      <a:round/>
+                      <a:headEnd type="none" w="med" len="med"/>
+                      <a:tailEnd type="none" w="med" len="med"/>
+                    </a:lnB>
+                    <a:solidFill>
+                      <a:srgbClr val="FFFFFF"/>
+                    </a:solidFill>
+                  </a:tcPr>
+                </a:tc>
+                <a:tc>
+                  <a:txBody>
+                    <a:bodyPr/>
+                    <a:lstStyle/>
+                    <a:p>
+                      <a:pPr algn="ctr" indent="0" marL="0">
+                        <a:buNone/>
+                      </a:pPr>
+                      <a:r>
+                        <a:rPr lang="en-US" sz="800" dirty="0">
+                          <a:solidFill>
+                            <a:srgbClr val="000000"/>
+                          </a:solidFill>
+                          <a:latin typeface="Arial" pitchFamily="34" charset="0"/>
+                          <a:ea typeface="Arial" pitchFamily="34" charset="-122"/>
+                          <a:cs typeface="Arial" pitchFamily="34" charset="-120"/>
+                        </a:rPr>
+                        <a:t>4.64/5</a:t>
+                      </a:r>
+                      <a:endParaRPr lang="en-US" sz="800" dirty="0">
+                        <a:latin typeface="Arial" charset="0"/>
+                        <a:ea typeface="Arial" charset="0"/>
+                        <a:cs typeface="Arial" charset="0"/>
+                      </a:endParaRPr>
+                    </a:p>
+                  </a:txBody>
+                  <a:tcPr marL="91440" marR="91440" marT="45720" marB="45720">
+                    <a:lnL w="6350" cap="flat" cmpd="sng" algn="ctr">
+                      <a:solidFill>
+                        <a:srgbClr val="CCCCCC"/>
+                      </a:solidFill>
+                      <a:prstDash val="solid"/>
+                      <a:round/>
+                      <a:headEnd type="none" w="med" len="med"/>
+                      <a:tailEnd type="none" w="med" len="med"/>
+                    </a:lnL>
+                    <a:lnR w="6350" cap="flat" cmpd="sng" algn="ctr">
+                      <a:solidFill>
+                        <a:srgbClr val="CCCCCC"/>
+                      </a:solidFill>
+                      <a:prstDash val="solid"/>
+                      <a:round/>
+                      <a:headEnd type="none" w="med" len="med"/>
+                      <a:tailEnd type="none" w="med" len="med"/>
+                    </a:lnR>
+                    <a:lnT w="6350" cap="flat" cmpd="sng" algn="ctr">
+                      <a:solidFill>
+                        <a:srgbClr val="CCCCCC"/>
+                      </a:solidFill>
+                      <a:prstDash val="solid"/>
+                      <a:round/>
+                      <a:headEnd type="none" w="med" len="med"/>
+                      <a:tailEnd type="none" w="med" len="med"/>
+                    </a:lnT>
+                    <a:lnB w="6350" cap="flat" cmpd="sng" algn="ctr">
+                      <a:solidFill>
+                        <a:srgbClr val="CCCCCC"/>
+                      </a:solidFill>
+                      <a:prstDash val="solid"/>
+                      <a:round/>
+                      <a:headEnd type="none" w="med" len="med"/>
+                      <a:tailEnd type="none" w="med" len="med"/>
+                    </a:lnB>
+                    <a:solidFill>
+                      <a:srgbClr val="FFFFFF"/>
+                    </a:solidFill>
+                  </a:tcPr>
+                </a:tc>
+                <a:tc>
+                  <a:txBody>
+                    <a:bodyPr/>
+                    <a:lstStyle/>
+                    <a:p>
+                      <a:pPr algn="ctr" indent="0" marL="0">
+                        <a:buNone/>
+                      </a:pPr>
+                      <a:r>
+                        <a:rPr lang="en-US" sz="800" dirty="0">
+                          <a:solidFill>
+                            <a:srgbClr val="000000"/>
+                          </a:solidFill>
+                          <a:latin typeface="Arial" pitchFamily="34" charset="0"/>
+                          <a:ea typeface="Arial" pitchFamily="34" charset="-122"/>
+                          <a:cs typeface="Arial" pitchFamily="34" charset="-120"/>
+                        </a:rPr>
+                        <a:t>9.27</a:t>
                       </a:r>
                       <a:endParaRPr lang="en-US" sz="800" dirty="0">
                         <a:latin typeface="Arial" charset="0"/>
@@ -4997,7 +5339,7 @@
                           <a:ea typeface="Arial" pitchFamily="34" charset="-122"/>
                           <a:cs typeface="Arial" pitchFamily="34" charset="-120"/>
                         </a:rPr>
-                        <a:t>18</a:t>
+                        <a:t>8</a:t>
                       </a:r>
                       <a:endParaRPr lang="en-US" sz="800" dirty="0">
                         <a:latin typeface="Arial" charset="0"/>
@@ -5065,7 +5407,7 @@
                           <a:ea typeface="Arial" pitchFamily="34" charset="-122"/>
                           <a:cs typeface="Arial" pitchFamily="34" charset="-120"/>
                         </a:rPr>
-                        <a:t>9.39/10</a:t>
+                        <a:t>9.25/10</a:t>
                       </a:r>
                       <a:endParaRPr lang="en-US" sz="800" dirty="0">
                         <a:latin typeface="Arial" charset="0"/>
@@ -5133,7 +5475,7 @@
                           <a:ea typeface="Arial" pitchFamily="34" charset="-122"/>
                           <a:cs typeface="Arial" pitchFamily="34" charset="-120"/>
                         </a:rPr>
-                        <a:t>9.39</a:t>
+                        <a:t>9.25</a:t>
                       </a:r>
                       <a:endParaRPr lang="en-US" sz="800" dirty="0">
                         <a:latin typeface="Arial" charset="0"/>
@@ -5271,7 +5613,7 @@
                           <a:ea typeface="Arial" pitchFamily="34" charset="-122"/>
                           <a:cs typeface="Arial" pitchFamily="34" charset="-120"/>
                         </a:rPr>
-                        <a:t>楽天トラベル</a:t>
+                        <a:t>Booking.com</a:t>
                       </a:r>
                       <a:endParaRPr lang="en-US" sz="800" dirty="0">
                         <a:latin typeface="Arial" charset="0"/>
@@ -5339,7 +5681,7 @@
                           <a:ea typeface="Arial" pitchFamily="34" charset="-122"/>
                           <a:cs typeface="Arial" pitchFamily="34" charset="-120"/>
                         </a:rPr>
-                        <a:t>45</a:t>
+                        <a:t>14</a:t>
                       </a:r>
                       <a:endParaRPr lang="en-US" sz="800" dirty="0">
                         <a:latin typeface="Arial" charset="0"/>
@@ -5407,7 +5749,7 @@
                           <a:ea typeface="Arial" pitchFamily="34" charset="-122"/>
                           <a:cs typeface="Arial" pitchFamily="34" charset="-120"/>
                         </a:rPr>
-                        <a:t>4.60/5</a:t>
+                        <a:t>8.57/10</a:t>
                       </a:r>
                       <a:endParaRPr lang="en-US" sz="800" dirty="0">
                         <a:latin typeface="Arial" charset="0"/>
@@ -5475,7 +5817,7 @@
                           <a:ea typeface="Arial" pitchFamily="34" charset="-122"/>
                           <a:cs typeface="Arial" pitchFamily="34" charset="-120"/>
                         </a:rPr>
-                        <a:t>9.20</a:t>
+                        <a:t>8.57</a:t>
                       </a:r>
                       <a:endParaRPr lang="en-US" sz="800" dirty="0">
                         <a:latin typeface="Arial" charset="0"/>
@@ -5543,7 +5885,7 @@
                           <a:ea typeface="Arial" pitchFamily="34" charset="-122"/>
                           <a:cs typeface="Arial" pitchFamily="34" charset="-120"/>
                         </a:rPr>
-                        <a:t>優秀</a:t>
+                        <a:t>良好</a:t>
                       </a:r>
                       <a:endParaRPr lang="en-US" sz="800" dirty="0">
                         <a:latin typeface="Arial" charset="0"/>
@@ -5681,7 +6023,7 @@
                           <a:ea typeface="Arial" pitchFamily="34" charset="-122"/>
                           <a:cs typeface="Arial" pitchFamily="34" charset="-120"/>
                         </a:rPr>
-                        <a:t>23</a:t>
+                        <a:t>11</a:t>
                       </a:r>
                       <a:endParaRPr lang="en-US" sz="800" dirty="0">
                         <a:latin typeface="Arial" charset="0"/>
@@ -5749,7 +6091,7 @@
                           <a:ea typeface="Arial" pitchFamily="34" charset="-122"/>
                           <a:cs typeface="Arial" pitchFamily="34" charset="-120"/>
                         </a:rPr>
-                        <a:t>4.52/5</a:t>
+                        <a:t>4.27/5</a:t>
                       </a:r>
                       <a:endParaRPr lang="en-US" sz="800" dirty="0">
                         <a:latin typeface="Arial" charset="0"/>
@@ -5817,349 +6159,7 @@
                           <a:ea typeface="Arial" pitchFamily="34" charset="-122"/>
                           <a:cs typeface="Arial" pitchFamily="34" charset="-120"/>
                         </a:rPr>
-                        <a:t>9.04</a:t>
-                      </a:r>
-                      <a:endParaRPr lang="en-US" sz="800" dirty="0">
-                        <a:latin typeface="Arial" charset="0"/>
-                        <a:ea typeface="Arial" charset="0"/>
-                        <a:cs typeface="Arial" charset="0"/>
-                      </a:endParaRPr>
-                    </a:p>
-                  </a:txBody>
-                  <a:tcPr marL="91440" marR="91440" marT="45720" marB="45720">
-                    <a:lnL w="6350" cap="flat" cmpd="sng" algn="ctr">
-                      <a:solidFill>
-                        <a:srgbClr val="CCCCCC"/>
-                      </a:solidFill>
-                      <a:prstDash val="solid"/>
-                      <a:round/>
-                      <a:headEnd type="none" w="med" len="med"/>
-                      <a:tailEnd type="none" w="med" len="med"/>
-                    </a:lnL>
-                    <a:lnR w="6350" cap="flat" cmpd="sng" algn="ctr">
-                      <a:solidFill>
-                        <a:srgbClr val="CCCCCC"/>
-                      </a:solidFill>
-                      <a:prstDash val="solid"/>
-                      <a:round/>
-                      <a:headEnd type="none" w="med" len="med"/>
-                      <a:tailEnd type="none" w="med" len="med"/>
-                    </a:lnR>
-                    <a:lnT w="6350" cap="flat" cmpd="sng" algn="ctr">
-                      <a:solidFill>
-                        <a:srgbClr val="CCCCCC"/>
-                      </a:solidFill>
-                      <a:prstDash val="solid"/>
-                      <a:round/>
-                      <a:headEnd type="none" w="med" len="med"/>
-                      <a:tailEnd type="none" w="med" len="med"/>
-                    </a:lnT>
-                    <a:lnB w="6350" cap="flat" cmpd="sng" algn="ctr">
-                      <a:solidFill>
-                        <a:srgbClr val="CCCCCC"/>
-                      </a:solidFill>
-                      <a:prstDash val="solid"/>
-                      <a:round/>
-                      <a:headEnd type="none" w="med" len="med"/>
-                      <a:tailEnd type="none" w="med" len="med"/>
-                    </a:lnB>
-                    <a:solidFill>
-                      <a:srgbClr val="FFFFFF"/>
-                    </a:solidFill>
-                  </a:tcPr>
-                </a:tc>
-                <a:tc>
-                  <a:txBody>
-                    <a:bodyPr/>
-                    <a:lstStyle/>
-                    <a:p>
-                      <a:pPr algn="ctr" indent="0" marL="0">
-                        <a:buNone/>
-                      </a:pPr>
-                      <a:r>
-                        <a:rPr lang="en-US" sz="800" dirty="0">
-                          <a:solidFill>
-                            <a:srgbClr val="000000"/>
-                          </a:solidFill>
-                          <a:latin typeface="Arial" pitchFamily="34" charset="0"/>
-                          <a:ea typeface="Arial" pitchFamily="34" charset="-122"/>
-                          <a:cs typeface="Arial" pitchFamily="34" charset="-120"/>
-                        </a:rPr>
-                        <a:t>優秀</a:t>
-                      </a:r>
-                      <a:endParaRPr lang="en-US" sz="800" dirty="0">
-                        <a:latin typeface="Arial" charset="0"/>
-                        <a:ea typeface="Arial" charset="0"/>
-                        <a:cs typeface="Arial" charset="0"/>
-                      </a:endParaRPr>
-                    </a:p>
-                  </a:txBody>
-                  <a:tcPr marL="91440" marR="91440" marT="45720" marB="45720">
-                    <a:lnL w="6350" cap="flat" cmpd="sng" algn="ctr">
-                      <a:solidFill>
-                        <a:srgbClr val="CCCCCC"/>
-                      </a:solidFill>
-                      <a:prstDash val="solid"/>
-                      <a:round/>
-                      <a:headEnd type="none" w="med" len="med"/>
-                      <a:tailEnd type="none" w="med" len="med"/>
-                    </a:lnL>
-                    <a:lnR w="6350" cap="flat" cmpd="sng" algn="ctr">
-                      <a:solidFill>
-                        <a:srgbClr val="CCCCCC"/>
-                      </a:solidFill>
-                      <a:prstDash val="solid"/>
-                      <a:round/>
-                      <a:headEnd type="none" w="med" len="med"/>
-                      <a:tailEnd type="none" w="med" len="med"/>
-                    </a:lnR>
-                    <a:lnT w="6350" cap="flat" cmpd="sng" algn="ctr">
-                      <a:solidFill>
-                        <a:srgbClr val="CCCCCC"/>
-                      </a:solidFill>
-                      <a:prstDash val="solid"/>
-                      <a:round/>
-                      <a:headEnd type="none" w="med" len="med"/>
-                      <a:tailEnd type="none" w="med" len="med"/>
-                    </a:lnT>
-                    <a:lnB w="6350" cap="flat" cmpd="sng" algn="ctr">
-                      <a:solidFill>
-                        <a:srgbClr val="CCCCCC"/>
-                      </a:solidFill>
-                      <a:prstDash val="solid"/>
-                      <a:round/>
-                      <a:headEnd type="none" w="med" len="med"/>
-                      <a:tailEnd type="none" w="med" len="med"/>
-                    </a:lnB>
-                    <a:solidFill>
-                      <a:srgbClr val="FFFFFF"/>
-                    </a:solidFill>
-                  </a:tcPr>
-                </a:tc>
-              </a:tr>
-              <a:tr h="0">
-                <a:tc>
-                  <a:txBody>
-                    <a:bodyPr/>
-                    <a:lstStyle/>
-                    <a:p>
-                      <a:pPr algn="ctr" indent="0" marL="0">
-                        <a:buNone/>
-                      </a:pPr>
-                      <a:r>
-                        <a:rPr lang="en-US" sz="800" dirty="0">
-                          <a:solidFill>
-                            <a:srgbClr val="000000"/>
-                          </a:solidFill>
-                          <a:latin typeface="Arial" pitchFamily="34" charset="0"/>
-                          <a:ea typeface="Arial" pitchFamily="34" charset="-122"/>
-                          <a:cs typeface="Arial" pitchFamily="34" charset="-120"/>
-                        </a:rPr>
-                        <a:t>Booking.com</a:t>
-                      </a:r>
-                      <a:endParaRPr lang="en-US" sz="800" dirty="0">
-                        <a:latin typeface="Arial" charset="0"/>
-                        <a:ea typeface="Arial" charset="0"/>
-                        <a:cs typeface="Arial" charset="0"/>
-                      </a:endParaRPr>
-                    </a:p>
-                  </a:txBody>
-                  <a:tcPr marL="91440" marR="91440" marT="45720" marB="45720">
-                    <a:lnL w="6350" cap="flat" cmpd="sng" algn="ctr">
-                      <a:solidFill>
-                        <a:srgbClr val="CCCCCC"/>
-                      </a:solidFill>
-                      <a:prstDash val="solid"/>
-                      <a:round/>
-                      <a:headEnd type="none" w="med" len="med"/>
-                      <a:tailEnd type="none" w="med" len="med"/>
-                    </a:lnL>
-                    <a:lnR w="6350" cap="flat" cmpd="sng" algn="ctr">
-                      <a:solidFill>
-                        <a:srgbClr val="CCCCCC"/>
-                      </a:solidFill>
-                      <a:prstDash val="solid"/>
-                      <a:round/>
-                      <a:headEnd type="none" w="med" len="med"/>
-                      <a:tailEnd type="none" w="med" len="med"/>
-                    </a:lnR>
-                    <a:lnT w="6350" cap="flat" cmpd="sng" algn="ctr">
-                      <a:solidFill>
-                        <a:srgbClr val="CCCCCC"/>
-                      </a:solidFill>
-                      <a:prstDash val="solid"/>
-                      <a:round/>
-                      <a:headEnd type="none" w="med" len="med"/>
-                      <a:tailEnd type="none" w="med" len="med"/>
-                    </a:lnT>
-                    <a:lnB w="6350" cap="flat" cmpd="sng" algn="ctr">
-                      <a:solidFill>
-                        <a:srgbClr val="CCCCCC"/>
-                      </a:solidFill>
-                      <a:prstDash val="solid"/>
-                      <a:round/>
-                      <a:headEnd type="none" w="med" len="med"/>
-                      <a:tailEnd type="none" w="med" len="med"/>
-                    </a:lnB>
-                    <a:solidFill>
-                      <a:srgbClr val="FFFFFF"/>
-                    </a:solidFill>
-                  </a:tcPr>
-                </a:tc>
-                <a:tc>
-                  <a:txBody>
-                    <a:bodyPr/>
-                    <a:lstStyle/>
-                    <a:p>
-                      <a:pPr algn="ctr" indent="0" marL="0">
-                        <a:buNone/>
-                      </a:pPr>
-                      <a:r>
-                        <a:rPr lang="en-US" sz="800" dirty="0">
-                          <a:solidFill>
-                            <a:srgbClr val="000000"/>
-                          </a:solidFill>
-                          <a:latin typeface="Arial" pitchFamily="34" charset="0"/>
-                          <a:ea typeface="Arial" pitchFamily="34" charset="-122"/>
-                          <a:cs typeface="Arial" pitchFamily="34" charset="-120"/>
-                        </a:rPr>
-                        <a:t>30</a:t>
-                      </a:r>
-                      <a:endParaRPr lang="en-US" sz="800" dirty="0">
-                        <a:latin typeface="Arial" charset="0"/>
-                        <a:ea typeface="Arial" charset="0"/>
-                        <a:cs typeface="Arial" charset="0"/>
-                      </a:endParaRPr>
-                    </a:p>
-                  </a:txBody>
-                  <a:tcPr marL="91440" marR="91440" marT="45720" marB="45720">
-                    <a:lnL w="6350" cap="flat" cmpd="sng" algn="ctr">
-                      <a:solidFill>
-                        <a:srgbClr val="CCCCCC"/>
-                      </a:solidFill>
-                      <a:prstDash val="solid"/>
-                      <a:round/>
-                      <a:headEnd type="none" w="med" len="med"/>
-                      <a:tailEnd type="none" w="med" len="med"/>
-                    </a:lnL>
-                    <a:lnR w="6350" cap="flat" cmpd="sng" algn="ctr">
-                      <a:solidFill>
-                        <a:srgbClr val="CCCCCC"/>
-                      </a:solidFill>
-                      <a:prstDash val="solid"/>
-                      <a:round/>
-                      <a:headEnd type="none" w="med" len="med"/>
-                      <a:tailEnd type="none" w="med" len="med"/>
-                    </a:lnR>
-                    <a:lnT w="6350" cap="flat" cmpd="sng" algn="ctr">
-                      <a:solidFill>
-                        <a:srgbClr val="CCCCCC"/>
-                      </a:solidFill>
-                      <a:prstDash val="solid"/>
-                      <a:round/>
-                      <a:headEnd type="none" w="med" len="med"/>
-                      <a:tailEnd type="none" w="med" len="med"/>
-                    </a:lnT>
-                    <a:lnB w="6350" cap="flat" cmpd="sng" algn="ctr">
-                      <a:solidFill>
-                        <a:srgbClr val="CCCCCC"/>
-                      </a:solidFill>
-                      <a:prstDash val="solid"/>
-                      <a:round/>
-                      <a:headEnd type="none" w="med" len="med"/>
-                      <a:tailEnd type="none" w="med" len="med"/>
-                    </a:lnB>
-                    <a:solidFill>
-                      <a:srgbClr val="FFFFFF"/>
-                    </a:solidFill>
-                  </a:tcPr>
-                </a:tc>
-                <a:tc>
-                  <a:txBody>
-                    <a:bodyPr/>
-                    <a:lstStyle/>
-                    <a:p>
-                      <a:pPr algn="ctr" indent="0" marL="0">
-                        <a:buNone/>
-                      </a:pPr>
-                      <a:r>
-                        <a:rPr lang="en-US" sz="800" dirty="0">
-                          <a:solidFill>
-                            <a:srgbClr val="000000"/>
-                          </a:solidFill>
-                          <a:latin typeface="Arial" pitchFamily="34" charset="0"/>
-                          <a:ea typeface="Arial" pitchFamily="34" charset="-122"/>
-                          <a:cs typeface="Arial" pitchFamily="34" charset="-120"/>
-                        </a:rPr>
-                        <a:t>8.73/10</a:t>
-                      </a:r>
-                      <a:endParaRPr lang="en-US" sz="800" dirty="0">
-                        <a:latin typeface="Arial" charset="0"/>
-                        <a:ea typeface="Arial" charset="0"/>
-                        <a:cs typeface="Arial" charset="0"/>
-                      </a:endParaRPr>
-                    </a:p>
-                  </a:txBody>
-                  <a:tcPr marL="91440" marR="91440" marT="45720" marB="45720">
-                    <a:lnL w="6350" cap="flat" cmpd="sng" algn="ctr">
-                      <a:solidFill>
-                        <a:srgbClr val="CCCCCC"/>
-                      </a:solidFill>
-                      <a:prstDash val="solid"/>
-                      <a:round/>
-                      <a:headEnd type="none" w="med" len="med"/>
-                      <a:tailEnd type="none" w="med" len="med"/>
-                    </a:lnL>
-                    <a:lnR w="6350" cap="flat" cmpd="sng" algn="ctr">
-                      <a:solidFill>
-                        <a:srgbClr val="CCCCCC"/>
-                      </a:solidFill>
-                      <a:prstDash val="solid"/>
-                      <a:round/>
-                      <a:headEnd type="none" w="med" len="med"/>
-                      <a:tailEnd type="none" w="med" len="med"/>
-                    </a:lnR>
-                    <a:lnT w="6350" cap="flat" cmpd="sng" algn="ctr">
-                      <a:solidFill>
-                        <a:srgbClr val="CCCCCC"/>
-                      </a:solidFill>
-                      <a:prstDash val="solid"/>
-                      <a:round/>
-                      <a:headEnd type="none" w="med" len="med"/>
-                      <a:tailEnd type="none" w="med" len="med"/>
-                    </a:lnT>
-                    <a:lnB w="6350" cap="flat" cmpd="sng" algn="ctr">
-                      <a:solidFill>
-                        <a:srgbClr val="CCCCCC"/>
-                      </a:solidFill>
-                      <a:prstDash val="solid"/>
-                      <a:round/>
-                      <a:headEnd type="none" w="med" len="med"/>
-                      <a:tailEnd type="none" w="med" len="med"/>
-                    </a:lnB>
-                    <a:solidFill>
-                      <a:srgbClr val="FFFFFF"/>
-                    </a:solidFill>
-                  </a:tcPr>
-                </a:tc>
-                <a:tc>
-                  <a:txBody>
-                    <a:bodyPr/>
-                    <a:lstStyle/>
-                    <a:p>
-                      <a:pPr algn="ctr" indent="0" marL="0">
-                        <a:buNone/>
-                      </a:pPr>
-                      <a:r>
-                        <a:rPr lang="en-US" sz="800" dirty="0">
-                          <a:solidFill>
-                            <a:srgbClr val="000000"/>
-                          </a:solidFill>
-                          <a:latin typeface="Arial" pitchFamily="34" charset="0"/>
-                          <a:ea typeface="Arial" pitchFamily="34" charset="-122"/>
-                          <a:cs typeface="Arial" pitchFamily="34" charset="-120"/>
-                        </a:rPr>
-                        <a:t>8.73</a:t>
+                        <a:t>8.55</a:t>
                       </a:r>
                       <a:endParaRPr lang="en-US" sz="800" dirty="0">
                         <a:latin typeface="Arial" charset="0"/>
@@ -6612,7 +6612,7 @@
                 <a:ea typeface="Arial" pitchFamily="34" charset="-122"/>
                 <a:cs typeface="Arial" pitchFamily="34" charset="-120"/>
               </a:rPr>
-              <a:t>136件（95.1%）</a:t>
+              <a:t>69件（94.5%）</a:t>
             </a:r>
             <a:endParaRPr lang="en-US" sz="1600" dirty="0"/>
           </a:p>
@@ -6710,7 +6710,7 @@
                 <a:ea typeface="Arial" pitchFamily="34" charset="-122"/>
                 <a:cs typeface="Arial" pitchFamily="34" charset="-120"/>
               </a:rPr>
-              <a:t>5件（3.5%）</a:t>
+              <a:t>2件（2.7%）</a:t>
             </a:r>
             <a:endParaRPr lang="en-US" sz="1600" dirty="0"/>
           </a:p>
@@ -6808,7 +6808,7 @@
                 <a:ea typeface="Arial" pitchFamily="34" charset="-122"/>
                 <a:cs typeface="Arial" pitchFamily="34" charset="-120"/>
               </a:rPr>
-              <a:t>2件（1.4%）</a:t>
+              <a:t>2件（2.7%）</a:t>
             </a:r>
             <a:endParaRPr lang="en-US" sz="1600" dirty="0"/>
           </a:p>
@@ -6970,7 +6970,7 @@
                 <a:ea typeface="Arial" pitchFamily="34" charset="-122"/>
                 <a:cs typeface="Arial" pitchFamily="34" charset="-120"/>
               </a:rPr>
-              <a:t>高評価レビュー（8-10点: 136件）の分析から、主要な強みテーマを抽出しています。立地・アクセス、客室清潔感、スタッフ対応が高評価の中心的テーマです。</a:t>
+              <a:t>高評価レビュー（8-10点: 69件）の分析から、主要な強みテーマを抽出しています。立地・アクセス、客室清潔感、スタッフ対応が高評価の中心的テーマです。</a:t>
             </a:r>
             <a:endParaRPr lang="en-US" sz="1200" dirty="0"/>
           </a:p>
@@ -7230,7 +7230,7 @@
                 <a:ea typeface="Arial" pitchFamily="34" charset="-122"/>
                 <a:cs typeface="Arial" pitchFamily="34" charset="-120"/>
               </a:rPr>
-              <a:t>低評価・中評価レビュー（7件）から改善課題を優先度別に整理しています。S/A/B/Cの4段階で優先度を設定し、計画的な改善を推進します。</a:t>
+              <a:t>低評価・中評価レビュー（4件）から改善課題を優先度別に整理しています。S/A/B/Cの4段階で優先度を設定し、計画的な改善を推進します。</a:t>
             </a:r>
             <a:endParaRPr lang="en-US" sz="1200" dirty="0"/>
           </a:p>
@@ -8010,7 +8010,7 @@
                 <a:ea typeface="Arial" pitchFamily="34" charset="-122"/>
                 <a:cs typeface="Arial" pitchFamily="34" charset="-120"/>
               </a:rPr>
-              <a:t>全体平均 9.14点 → 目標 9.64点</a:t>
+              <a:t>全体平均 9.05点 → 目標 9.55点</a:t>
             </a:r>
             <a:endParaRPr lang="en-US" sz="1200" dirty="0"/>
           </a:p>
@@ -8027,7 +8027,7 @@
                 <a:ea typeface="Arial" pitchFamily="34" charset="-122"/>
                 <a:cs typeface="Arial" pitchFamily="34" charset="-120"/>
               </a:rPr>
-              <a:t>高評価率 95.1% → 目標 100.0%</a:t>
+              <a:t>高評価率 94.5% → 目標 99.5%</a:t>
             </a:r>
             <a:endParaRPr lang="en-US" sz="1200" dirty="0"/>
           </a:p>
@@ -8044,7 +8044,7 @@
                 <a:ea typeface="Arial" pitchFamily="34" charset="-122"/>
                 <a:cs typeface="Arial" pitchFamily="34" charset="-120"/>
               </a:rPr>
-              <a:t>低評価率 1.4% → 目標 0.0%</a:t>
+              <a:t>低評価率 2.7% → 目標 0.7%</a:t>
             </a:r>
             <a:endParaRPr lang="en-US" sz="1200" dirty="0"/>
           </a:p>

--- a/納品レポート/ホテル別レポート/comfort_suites_tokyobay_口コミ分析レポート.pptx
+++ b/納品レポート/ホテル別レポート/comfort_suites_tokyobay_口コミ分析レポート.pptx
@@ -183,19 +183,19 @@
                     <c:v>Trip.com</c:v>
                   </c:pt>
                   <c:pt idx="1">
-                    <c:v>Google</c:v>
+                    <c:v>楽天トラベル</c:v>
                   </c:pt>
                   <c:pt idx="2">
                     <c:v>Agoda</c:v>
                   </c:pt>
                   <c:pt idx="3">
-                    <c:v>楽天トラベル</c:v>
+                    <c:v>Google</c:v>
                   </c:pt>
                   <c:pt idx="4">
-                    <c:v>じゃらん</c:v>
+                    <c:v>Booking.com</c:v>
                   </c:pt>
                   <c:pt idx="5">
-                    <c:v>Booking.com</c:v>
+                    <c:v>じゃらん</c:v>
                   </c:pt>
                 </c:lvl>
               </c:multiLvlStrCache>
@@ -208,22 +208,22 @@
                 <c:formatCode>General</c:formatCode>
                 <c:ptCount val="6"/>
                 <c:pt idx="0">
-                  <c:v>9.41</c:v>
+                  <c:v>9.42</c:v>
                 </c:pt>
                 <c:pt idx="1">
-                  <c:v>9.4</c:v>
+                  <c:v>9.29</c:v>
                 </c:pt>
                 <c:pt idx="2">
-                  <c:v>9.39</c:v>
+                  <c:v>9.25</c:v>
                 </c:pt>
                 <c:pt idx="3">
-                  <c:v>9.2</c:v>
+                  <c:v>9.25</c:v>
                 </c:pt>
                 <c:pt idx="4">
-                  <c:v>9.04</c:v>
+                  <c:v>8.65</c:v>
                 </c:pt>
                 <c:pt idx="5">
-                  <c:v>8.73</c:v>
+                  <c:v>8.5</c:v>
                 </c:pt>
               </c:numCache>
             </c:numRef>
@@ -566,10 +566,10 @@
               <c:numCache>
                 <c:ptCount val="3"/>
                 <c:pt idx="0">
-                  <c:v>136</c:v>
+                  <c:v>81</c:v>
                 </c:pt>
                 <c:pt idx="1">
-                  <c:v>5</c:v>
+                  <c:v>2</c:v>
                 </c:pt>
                 <c:pt idx="2">
                   <c:v>2</c:v>
@@ -781,19 +781,19 @@
                 <c:formatCode>General</c:formatCode>
                 <c:ptCount val="6"/>
                 <c:pt idx="0">
-                  <c:v>81</c:v>
+                  <c:v>46</c:v>
                 </c:pt>
                 <c:pt idx="1">
-                  <c:v>16</c:v>
+                  <c:v>9</c:v>
                 </c:pt>
                 <c:pt idx="2">
-                  <c:v>39</c:v>
+                  <c:v>26</c:v>
                 </c:pt>
                 <c:pt idx="3">
-                  <c:v>3</c:v>
+                  <c:v>1</c:v>
                 </c:pt>
                 <c:pt idx="4">
-                  <c:v>2</c:v>
+                  <c:v>1</c:v>
                 </c:pt>
                 <c:pt idx="5">
                   <c:v>2</c:v>
@@ -2727,7 +2727,7 @@
                 <a:ea typeface="Arial" pitchFamily="34" charset="-122"/>
                 <a:cs typeface="Arial" pitchFamily="34" charset="-120"/>
               </a:rPr>
-              <a:t>分析対象期間：2026年2月〜3月</a:t>
+              <a:t>分析対象期間：2026年3月〜4月</a:t>
             </a:r>
             <a:endParaRPr lang="en-US" sz="1000" dirty="0"/>
           </a:p>
@@ -2747,7 +2747,7 @@
                 <a:ea typeface="Arial" pitchFamily="34" charset="-122"/>
                 <a:cs typeface="Arial" pitchFamily="34" charset="-120"/>
               </a:rPr>
-              <a:t>レビュー総数：143件（6サイト）</a:t>
+              <a:t>レビュー総数：85件（6サイト）</a:t>
             </a:r>
             <a:endParaRPr lang="en-US" sz="1000" dirty="0"/>
           </a:p>
@@ -2767,7 +2767,7 @@
                 <a:ea typeface="Arial" pitchFamily="34" charset="-122"/>
                 <a:cs typeface="Arial" pitchFamily="34" charset="-120"/>
               </a:rPr>
-              <a:t>作成日：2026年4月2日</a:t>
+              <a:t>作成日：2026年4月5日</a:t>
             </a:r>
             <a:endParaRPr lang="en-US" sz="1000" dirty="0"/>
           </a:p>
@@ -3313,7 +3313,7 @@
                           <a:ea typeface="Arial" pitchFamily="34" charset="-122"/>
                           <a:cs typeface="Arial" pitchFamily="34" charset="-120"/>
                         </a:rPr>
-                        <a:t>9.14点</a:t>
+                        <a:t>9.06点</a:t>
                       </a:r>
                       <a:endParaRPr lang="en-US" sz="1000" dirty="0">
                         <a:latin typeface="Arial" charset="0"/>
@@ -3587,7 +3587,7 @@
                           <a:ea typeface="Arial" pitchFamily="34" charset="-122"/>
                           <a:cs typeface="Arial" pitchFamily="34" charset="-120"/>
                         </a:rPr>
-                        <a:t>95.1%</a:t>
+                        <a:t>95.3%</a:t>
                       </a:r>
                       <a:endParaRPr lang="en-US" sz="1000" dirty="0">
                         <a:latin typeface="Arial" charset="0"/>
@@ -3861,7 +3861,7 @@
                           <a:ea typeface="Arial" pitchFamily="34" charset="-122"/>
                           <a:cs typeface="Arial" pitchFamily="34" charset="-120"/>
                         </a:rPr>
-                        <a:t>1.4%</a:t>
+                        <a:t>2.4%</a:t>
                       </a:r>
                       <a:endParaRPr lang="en-US" sz="1000" dirty="0">
                         <a:latin typeface="Arial" charset="0"/>
@@ -3929,7 +3929,7 @@
                           <a:ea typeface="Arial" pitchFamily="34" charset="-122"/>
                           <a:cs typeface="Arial" pitchFamily="34" charset="-120"/>
                         </a:rPr>
-                        <a:t>0%維持</a:t>
+                        <a:t>0%以下</a:t>
                       </a:r>
                       <a:endParaRPr lang="en-US" sz="1000" dirty="0">
                         <a:latin typeface="Arial" charset="0"/>
@@ -4067,6 +4067,280 @@
                           <a:ea typeface="Arial" pitchFamily="34" charset="-122"/>
                           <a:cs typeface="Arial" pitchFamily="34" charset="-120"/>
                         </a:rPr>
+                        <a:t>じゃらん平均評価</a:t>
+                      </a:r>
+                      <a:endParaRPr lang="en-US" sz="1000" dirty="0">
+                        <a:latin typeface="Arial" charset="0"/>
+                        <a:ea typeface="Arial" charset="0"/>
+                        <a:cs typeface="Arial" charset="0"/>
+                      </a:endParaRPr>
+                    </a:p>
+                  </a:txBody>
+                  <a:tcPr marL="91440" marR="91440" marT="45720" marB="45720">
+                    <a:lnL w="6350" cap="flat" cmpd="sng" algn="ctr">
+                      <a:solidFill>
+                        <a:srgbClr val="CBD5E1"/>
+                      </a:solidFill>
+                      <a:prstDash val="solid"/>
+                      <a:round/>
+                      <a:headEnd type="none" w="med" len="med"/>
+                      <a:tailEnd type="none" w="med" len="med"/>
+                    </a:lnL>
+                    <a:lnR w="6350" cap="flat" cmpd="sng" algn="ctr">
+                      <a:solidFill>
+                        <a:srgbClr val="CBD5E1"/>
+                      </a:solidFill>
+                      <a:prstDash val="solid"/>
+                      <a:round/>
+                      <a:headEnd type="none" w="med" len="med"/>
+                      <a:tailEnd type="none" w="med" len="med"/>
+                    </a:lnR>
+                    <a:lnT w="6350" cap="flat" cmpd="sng" algn="ctr">
+                      <a:solidFill>
+                        <a:srgbClr val="CBD5E1"/>
+                      </a:solidFill>
+                      <a:prstDash val="solid"/>
+                      <a:round/>
+                      <a:headEnd type="none" w="med" len="med"/>
+                      <a:tailEnd type="none" w="med" len="med"/>
+                    </a:lnT>
+                    <a:lnB w="6350" cap="flat" cmpd="sng" algn="ctr">
+                      <a:solidFill>
+                        <a:srgbClr val="CBD5E1"/>
+                      </a:solidFill>
+                      <a:prstDash val="solid"/>
+                      <a:round/>
+                      <a:headEnd type="none" w="med" len="med"/>
+                      <a:tailEnd type="none" w="med" len="med"/>
+                    </a:lnB>
+                    <a:solidFill>
+                      <a:srgbClr val="FFFFFF"/>
+                    </a:solidFill>
+                  </a:tcPr>
+                </a:tc>
+                <a:tc>
+                  <a:txBody>
+                    <a:bodyPr/>
+                    <a:lstStyle/>
+                    <a:p>
+                      <a:pPr algn="ctr" indent="0" marL="0">
+                        <a:buNone/>
+                      </a:pPr>
+                      <a:r>
+                        <a:rPr lang="en-US" sz="1000" dirty="0">
+                          <a:solidFill>
+                            <a:srgbClr val="64748B"/>
+                          </a:solidFill>
+                          <a:latin typeface="Arial" pitchFamily="34" charset="0"/>
+                          <a:ea typeface="Arial" pitchFamily="34" charset="-122"/>
+                          <a:cs typeface="Arial" pitchFamily="34" charset="-120"/>
+                        </a:rPr>
+                        <a:t>8.5点</a:t>
+                      </a:r>
+                      <a:endParaRPr lang="en-US" sz="1000" dirty="0">
+                        <a:latin typeface="Arial" charset="0"/>
+                        <a:ea typeface="Arial" charset="0"/>
+                        <a:cs typeface="Arial" charset="0"/>
+                      </a:endParaRPr>
+                    </a:p>
+                  </a:txBody>
+                  <a:tcPr marL="91440" marR="91440" marT="45720" marB="45720">
+                    <a:lnL w="6350" cap="flat" cmpd="sng" algn="ctr">
+                      <a:solidFill>
+                        <a:srgbClr val="CBD5E1"/>
+                      </a:solidFill>
+                      <a:prstDash val="solid"/>
+                      <a:round/>
+                      <a:headEnd type="none" w="med" len="med"/>
+                      <a:tailEnd type="none" w="med" len="med"/>
+                    </a:lnL>
+                    <a:lnR w="6350" cap="flat" cmpd="sng" algn="ctr">
+                      <a:solidFill>
+                        <a:srgbClr val="CBD5E1"/>
+                      </a:solidFill>
+                      <a:prstDash val="solid"/>
+                      <a:round/>
+                      <a:headEnd type="none" w="med" len="med"/>
+                      <a:tailEnd type="none" w="med" len="med"/>
+                    </a:lnR>
+                    <a:lnT w="6350" cap="flat" cmpd="sng" algn="ctr">
+                      <a:solidFill>
+                        <a:srgbClr val="CBD5E1"/>
+                      </a:solidFill>
+                      <a:prstDash val="solid"/>
+                      <a:round/>
+                      <a:headEnd type="none" w="med" len="med"/>
+                      <a:tailEnd type="none" w="med" len="med"/>
+                    </a:lnT>
+                    <a:lnB w="6350" cap="flat" cmpd="sng" algn="ctr">
+                      <a:solidFill>
+                        <a:srgbClr val="CBD5E1"/>
+                      </a:solidFill>
+                      <a:prstDash val="solid"/>
+                      <a:round/>
+                      <a:headEnd type="none" w="med" len="med"/>
+                      <a:tailEnd type="none" w="med" len="med"/>
+                    </a:lnB>
+                    <a:solidFill>
+                      <a:srgbClr val="FFFFFF"/>
+                    </a:solidFill>
+                  </a:tcPr>
+                </a:tc>
+                <a:tc>
+                  <a:txBody>
+                    <a:bodyPr/>
+                    <a:lstStyle/>
+                    <a:p>
+                      <a:pPr algn="ctr" indent="0" marL="0">
+                        <a:buNone/>
+                      </a:pPr>
+                      <a:r>
+                        <a:rPr lang="en-US" sz="1000" b="1" dirty="0">
+                          <a:solidFill>
+                            <a:srgbClr val="16A34A"/>
+                          </a:solidFill>
+                          <a:latin typeface="Arial" pitchFamily="34" charset="0"/>
+                          <a:ea typeface="Arial" pitchFamily="34" charset="-122"/>
+                          <a:cs typeface="Arial" pitchFamily="34" charset="-120"/>
+                        </a:rPr>
+                        <a:t>9.5点以上</a:t>
+                      </a:r>
+                      <a:endParaRPr lang="en-US" sz="1000" dirty="0">
+                        <a:latin typeface="Arial" charset="0"/>
+                        <a:ea typeface="Arial" charset="0"/>
+                        <a:cs typeface="Arial" charset="0"/>
+                      </a:endParaRPr>
+                    </a:p>
+                  </a:txBody>
+                  <a:tcPr marL="91440" marR="91440" marT="45720" marB="45720">
+                    <a:lnL w="6350" cap="flat" cmpd="sng" algn="ctr">
+                      <a:solidFill>
+                        <a:srgbClr val="CBD5E1"/>
+                      </a:solidFill>
+                      <a:prstDash val="solid"/>
+                      <a:round/>
+                      <a:headEnd type="none" w="med" len="med"/>
+                      <a:tailEnd type="none" w="med" len="med"/>
+                    </a:lnL>
+                    <a:lnR w="6350" cap="flat" cmpd="sng" algn="ctr">
+                      <a:solidFill>
+                        <a:srgbClr val="CBD5E1"/>
+                      </a:solidFill>
+                      <a:prstDash val="solid"/>
+                      <a:round/>
+                      <a:headEnd type="none" w="med" len="med"/>
+                      <a:tailEnd type="none" w="med" len="med"/>
+                    </a:lnR>
+                    <a:lnT w="6350" cap="flat" cmpd="sng" algn="ctr">
+                      <a:solidFill>
+                        <a:srgbClr val="CBD5E1"/>
+                      </a:solidFill>
+                      <a:prstDash val="solid"/>
+                      <a:round/>
+                      <a:headEnd type="none" w="med" len="med"/>
+                      <a:tailEnd type="none" w="med" len="med"/>
+                    </a:lnT>
+                    <a:lnB w="6350" cap="flat" cmpd="sng" algn="ctr">
+                      <a:solidFill>
+                        <a:srgbClr val="CBD5E1"/>
+                      </a:solidFill>
+                      <a:prstDash val="solid"/>
+                      <a:round/>
+                      <a:headEnd type="none" w="med" len="med"/>
+                      <a:tailEnd type="none" w="med" len="med"/>
+                    </a:lnB>
+                    <a:solidFill>
+                      <a:srgbClr val="FFFFFF"/>
+                    </a:solidFill>
+                  </a:tcPr>
+                </a:tc>
+                <a:tc>
+                  <a:txBody>
+                    <a:bodyPr/>
+                    <a:lstStyle/>
+                    <a:p>
+                      <a:pPr algn="ctr" indent="0" marL="0">
+                        <a:buNone/>
+                      </a:pPr>
+                      <a:r>
+                        <a:rPr lang="en-US" sz="1000" dirty="0">
+                          <a:solidFill>
+                            <a:srgbClr val="64748B"/>
+                          </a:solidFill>
+                          <a:latin typeface="Arial" pitchFamily="34" charset="0"/>
+                          <a:ea typeface="Arial" pitchFamily="34" charset="-122"/>
+                          <a:cs typeface="Arial" pitchFamily="34" charset="-120"/>
+                        </a:rPr>
+                        <a:t>2026年9月</a:t>
+                      </a:r>
+                      <a:endParaRPr lang="en-US" sz="1000" dirty="0">
+                        <a:latin typeface="Arial" charset="0"/>
+                        <a:ea typeface="Arial" charset="0"/>
+                        <a:cs typeface="Arial" charset="0"/>
+                      </a:endParaRPr>
+                    </a:p>
+                  </a:txBody>
+                  <a:tcPr marL="91440" marR="91440" marT="45720" marB="45720">
+                    <a:lnL w="6350" cap="flat" cmpd="sng" algn="ctr">
+                      <a:solidFill>
+                        <a:srgbClr val="CBD5E1"/>
+                      </a:solidFill>
+                      <a:prstDash val="solid"/>
+                      <a:round/>
+                      <a:headEnd type="none" w="med" len="med"/>
+                      <a:tailEnd type="none" w="med" len="med"/>
+                    </a:lnL>
+                    <a:lnR w="6350" cap="flat" cmpd="sng" algn="ctr">
+                      <a:solidFill>
+                        <a:srgbClr val="CBD5E1"/>
+                      </a:solidFill>
+                      <a:prstDash val="solid"/>
+                      <a:round/>
+                      <a:headEnd type="none" w="med" len="med"/>
+                      <a:tailEnd type="none" w="med" len="med"/>
+                    </a:lnR>
+                    <a:lnT w="6350" cap="flat" cmpd="sng" algn="ctr">
+                      <a:solidFill>
+                        <a:srgbClr val="CBD5E1"/>
+                      </a:solidFill>
+                      <a:prstDash val="solid"/>
+                      <a:round/>
+                      <a:headEnd type="none" w="med" len="med"/>
+                      <a:tailEnd type="none" w="med" len="med"/>
+                    </a:lnT>
+                    <a:lnB w="6350" cap="flat" cmpd="sng" algn="ctr">
+                      <a:solidFill>
+                        <a:srgbClr val="CBD5E1"/>
+                      </a:solidFill>
+                      <a:prstDash val="solid"/>
+                      <a:round/>
+                      <a:headEnd type="none" w="med" len="med"/>
+                      <a:tailEnd type="none" w="med" len="med"/>
+                    </a:lnB>
+                    <a:solidFill>
+                      <a:srgbClr val="FFFFFF"/>
+                    </a:solidFill>
+                  </a:tcPr>
+                </a:tc>
+              </a:tr>
+              <a:tr h="320040">
+                <a:tc>
+                  <a:txBody>
+                    <a:bodyPr/>
+                    <a:lstStyle/>
+                    <a:p>
+                      <a:pPr indent="0" marL="0">
+                        <a:buNone/>
+                      </a:pPr>
+                      <a:r>
+                        <a:rPr lang="en-US" sz="1000" b="1" dirty="0">
+                          <a:solidFill>
+                            <a:srgbClr val="334155"/>
+                          </a:solidFill>
+                          <a:latin typeface="Arial" pitchFamily="34" charset="0"/>
+                          <a:ea typeface="Arial" pitchFamily="34" charset="-122"/>
+                          <a:cs typeface="Arial" pitchFamily="34" charset="-120"/>
+                        </a:rPr>
                         <a:t>口コミ返信率</a:t>
                       </a:r>
                       <a:endParaRPr lang="en-US" sz="1000" dirty="0">
@@ -4114,7 +4388,7 @@
                       <a:tailEnd type="none" w="med" len="med"/>
                     </a:lnB>
                     <a:solidFill>
-                      <a:srgbClr val="FFFFFF"/>
+                      <a:srgbClr val="E8EFF8"/>
                     </a:solidFill>
                   </a:tcPr>
                 </a:tc>
@@ -4182,7 +4456,7 @@
                       <a:tailEnd type="none" w="med" len="med"/>
                     </a:lnB>
                     <a:solidFill>
-                      <a:srgbClr val="FFFFFF"/>
+                      <a:srgbClr val="E8EFF8"/>
                     </a:solidFill>
                   </a:tcPr>
                 </a:tc>
@@ -4250,7 +4524,7 @@
                       <a:tailEnd type="none" w="med" len="med"/>
                     </a:lnB>
                     <a:solidFill>
-                      <a:srgbClr val="FFFFFF"/>
+                      <a:srgbClr val="E8EFF8"/>
                     </a:solidFill>
                   </a:tcPr>
                 </a:tc>
@@ -4318,7 +4592,7 @@
                       <a:tailEnd type="none" w="med" len="med"/>
                     </a:lnB>
                     <a:solidFill>
-                      <a:srgbClr val="FFFFFF"/>
+                      <a:srgbClr val="E8EFF8"/>
                     </a:solidFill>
                   </a:tcPr>
                 </a:tc>
@@ -4388,7 +4662,7 @@
                       <a:tailEnd type="none" w="med" len="med"/>
                     </a:lnB>
                     <a:solidFill>
-                      <a:srgbClr val="E8EFF8"/>
+                      <a:srgbClr val="FFFFFF"/>
                     </a:solidFill>
                   </a:tcPr>
                 </a:tc>
@@ -4409,7 +4683,7 @@
                           <a:ea typeface="Arial" pitchFamily="34" charset="-122"/>
                           <a:cs typeface="Arial" pitchFamily="34" charset="-120"/>
                         </a:rPr>
-                        <a:t>約47件/期間</a:t>
+                        <a:t>約31件/期間</a:t>
                       </a:r>
                       <a:endParaRPr lang="en-US" sz="1000" dirty="0">
                         <a:latin typeface="Arial" charset="0"/>
@@ -4456,7 +4730,7 @@
                       <a:tailEnd type="none" w="med" len="med"/>
                     </a:lnB>
                     <a:solidFill>
-                      <a:srgbClr val="E8EFF8"/>
+                      <a:srgbClr val="FFFFFF"/>
                     </a:solidFill>
                   </a:tcPr>
                 </a:tc>
@@ -4477,7 +4751,7 @@
                           <a:ea typeface="Arial" pitchFamily="34" charset="-122"/>
                           <a:cs typeface="Arial" pitchFamily="34" charset="-120"/>
                         </a:rPr>
-                        <a:t>23件以下</a:t>
+                        <a:t>15件以下</a:t>
                       </a:r>
                       <a:endParaRPr lang="en-US" sz="1000" dirty="0">
                         <a:latin typeface="Arial" charset="0"/>
@@ -4524,7 +4798,7 @@
                       <a:tailEnd type="none" w="med" len="med"/>
                     </a:lnB>
                     <a:solidFill>
-                      <a:srgbClr val="E8EFF8"/>
+                      <a:srgbClr val="FFFFFF"/>
                     </a:solidFill>
                   </a:tcPr>
                 </a:tc>
@@ -4592,7 +4866,7 @@
                       <a:tailEnd type="none" w="med" len="med"/>
                     </a:lnB>
                     <a:solidFill>
-                      <a:srgbClr val="E8EFF8"/>
+                      <a:srgbClr val="FFFFFF"/>
                     </a:solidFill>
                   </a:tcPr>
                 </a:tc>
@@ -4609,7 +4883,7 @@
         </p:nvSpPr>
         <p:spPr>
           <a:xfrm>
-            <a:off x="457200" y="3108960"/>
+            <a:off x="457200" y="3429000"/>
             <a:ext cx="8229600" cy="640080"/>
           </a:xfrm>
           <a:prstGeom prst="rect">
@@ -4636,7 +4910,7 @@
         </p:nvSpPr>
         <p:spPr>
           <a:xfrm>
-            <a:off x="457200" y="3108960"/>
+            <a:off x="457200" y="3429000"/>
             <a:ext cx="54864" cy="640080"/>
           </a:xfrm>
           <a:prstGeom prst="rect">
@@ -4656,7 +4930,7 @@
         </p:nvSpPr>
         <p:spPr>
           <a:xfrm>
-            <a:off x="640080" y="3108960"/>
+            <a:off x="640080" y="3429000"/>
             <a:ext cx="7863840" cy="640080"/>
           </a:xfrm>
           <a:prstGeom prst="rect">
@@ -5048,7 +5322,7 @@
                 <a:ea typeface="Arial" pitchFamily="34" charset="-122"/>
                 <a:cs typeface="Arial" pitchFamily="34" charset="-120"/>
               </a:rPr>
-              <a:t>9.14</a:t>
+              <a:t>9.06</a:t>
             </a:r>
             <a:endParaRPr lang="en-US" sz="3200" dirty="0"/>
           </a:p>
@@ -5173,7 +5447,7 @@
                 <a:ea typeface="Arial" pitchFamily="34" charset="-122"/>
                 <a:cs typeface="Arial" pitchFamily="34" charset="-120"/>
               </a:rPr>
-              <a:t>95.1%</a:t>
+              <a:t>95.3%</a:t>
             </a:r>
             <a:endParaRPr lang="en-US" sz="3200" dirty="0"/>
           </a:p>
@@ -5298,7 +5572,7 @@
                 <a:ea typeface="Arial" pitchFamily="34" charset="-122"/>
                 <a:cs typeface="Arial" pitchFamily="34" charset="-120"/>
               </a:rPr>
-              <a:t>1.4%</a:t>
+              <a:t>2.4%</a:t>
             </a:r>
             <a:endParaRPr lang="en-US" sz="3200" dirty="0"/>
           </a:p>
@@ -5423,7 +5697,7 @@
                 <a:ea typeface="Arial" pitchFamily="34" charset="-122"/>
                 <a:cs typeface="Arial" pitchFamily="34" charset="-120"/>
               </a:rPr>
-              <a:t>143件</a:t>
+              <a:t>85件</a:t>
             </a:r>
             <a:endParaRPr lang="en-US" sz="3200" dirty="0"/>
           </a:p>
@@ -5571,47 +5845,7 @@
                 <a:ea typeface="Arial" pitchFamily="34" charset="-122"/>
                 <a:cs typeface="Arial" pitchFamily="34" charset="-120"/>
               </a:rPr>
-              <a:t>  朝食もプリンセスエリアにはケーキありませんでした</a:t>
-            </a:r>
-            <a:endParaRPr lang="en-US" sz="1100" dirty="0"/>
-          </a:p>
-          <a:p>
-            <a:pPr indent="0" marL="0">
-              <a:spcAft>
-                <a:spcPts val="200"/>
-              </a:spcAft>
-              <a:buNone/>
-            </a:pPr>
-            <a:r>
-              <a:rPr lang="en-US" sz="1100" b="1" dirty="0">
-                <a:solidFill>
-                  <a:srgbClr val="334155"/>
-                </a:solidFill>
-                <a:latin typeface="Arial" pitchFamily="34" charset="0"/>
-                <a:ea typeface="Arial" pitchFamily="34" charset="-122"/>
-                <a:cs typeface="Arial" pitchFamily="34" charset="-120"/>
-              </a:rPr>
-              <a:t>快適さ・設備 </a:t>
-            </a:r>
-            <a:endParaRPr lang="en-US" sz="1100" dirty="0"/>
-          </a:p>
-          <a:p>
-            <a:pPr indent="0" marL="0">
-              <a:spcAft>
-                <a:spcPts val="200"/>
-              </a:spcAft>
-              <a:buNone/>
-            </a:pPr>
-            <a:r>
-              <a:rPr lang="en-US" sz="900" dirty="0">
-                <a:solidFill>
-                  <a:srgbClr val="64748B"/>
-                </a:solidFill>
-                <a:latin typeface="Arial" pitchFamily="34" charset="0"/>
-                <a:ea typeface="Arial" pitchFamily="34" charset="-122"/>
-                <a:cs typeface="Arial" pitchFamily="34" charset="-120"/>
-              </a:rPr>
-              <a:t>  色々なアメニティグッズがあって少ない荷物で宿泊することができました</a:t>
+              <a:t>  朝食ビュッフェも種類は物凄い多いわけではないですが、大人も子供も満足です</a:t>
             </a:r>
             <a:endParaRPr lang="en-US" sz="1100" dirty="0"/>
           </a:p>
@@ -5651,7 +5885,47 @@
                 <a:ea typeface="Arial" pitchFamily="34" charset="-122"/>
                 <a:cs typeface="Arial" pitchFamily="34" charset="-120"/>
               </a:rPr>
-              <a:t>  今回初めて自動チェックインを利用しましたが、便利ですし早いと思いますがフロントの方とお話せずだったのでわからないこ...</a:t>
+              <a:t>  立地的にも車で２０分も掛からない場所にあり、スタッフの方々対応も良く、気持ち良く利用させていただく事が出来ました</a:t>
+            </a:r>
+            <a:endParaRPr lang="en-US" sz="1100" dirty="0"/>
+          </a:p>
+          <a:p>
+            <a:pPr indent="0" marL="0">
+              <a:spcAft>
+                <a:spcPts val="200"/>
+              </a:spcAft>
+              <a:buNone/>
+            </a:pPr>
+            <a:r>
+              <a:rPr lang="en-US" sz="1100" b="1" dirty="0">
+                <a:solidFill>
+                  <a:srgbClr val="334155"/>
+                </a:solidFill>
+                <a:latin typeface="Arial" pitchFamily="34" charset="0"/>
+                <a:ea typeface="Arial" pitchFamily="34" charset="-122"/>
+                <a:cs typeface="Arial" pitchFamily="34" charset="-120"/>
+              </a:rPr>
+              <a:t>立地・アクセス </a:t>
+            </a:r>
+            <a:endParaRPr lang="en-US" sz="1100" dirty="0"/>
+          </a:p>
+          <a:p>
+            <a:pPr indent="0" marL="0">
+              <a:spcAft>
+                <a:spcPts val="200"/>
+              </a:spcAft>
+              <a:buNone/>
+            </a:pPr>
+            <a:r>
+              <a:rPr lang="en-US" sz="900" dirty="0">
+                <a:solidFill>
+                  <a:srgbClr val="64748B"/>
+                </a:solidFill>
+                <a:latin typeface="Arial" pitchFamily="34" charset="0"/>
+                <a:ea typeface="Arial" pitchFamily="34" charset="-122"/>
+                <a:cs typeface="Arial" pitchFamily="34" charset="-120"/>
+              </a:rPr>
+              <a:t>  立地的にも車で２０分も掛からない場所にあり、スタッフの方々対応も良く、気持ち良く利用させていただく事が出来ました</a:t>
             </a:r>
             <a:endParaRPr lang="en-US" sz="1100" dirty="0"/>
           </a:p>
@@ -5799,7 +6073,47 @@
                 <a:ea typeface="Arial" pitchFamily="34" charset="-122"/>
                 <a:cs typeface="Arial" pitchFamily="34" charset="-120"/>
               </a:rPr>
-              <a:t>  コンビニがホテル内にあることとディズニーリゾートへの無料シャトルバスがあってとても便利でした</a:t>
+              <a:t>  お風呂とシャワーの水栓が別なので、家族で順番に入浴する際もシャワーを使いながらお風呂の水を溜めることができます</a:t>
+            </a:r>
+            <a:endParaRPr lang="en-US" sz="1100" dirty="0"/>
+          </a:p>
+          <a:p>
+            <a:pPr indent="0" marL="0">
+              <a:spcAft>
+                <a:spcPts val="200"/>
+              </a:spcAft>
+              <a:buNone/>
+            </a:pPr>
+            <a:r>
+              <a:rPr lang="en-US" sz="1100" b="1" dirty="0">
+                <a:solidFill>
+                  <a:srgbClr val="334155"/>
+                </a:solidFill>
+                <a:latin typeface="Arial" pitchFamily="34" charset="0"/>
+                <a:ea typeface="Arial" pitchFamily="34" charset="-122"/>
+                <a:cs typeface="Arial" pitchFamily="34" charset="-120"/>
+              </a:rPr>
+              <a:t>エアコン・空調 </a:t>
+            </a:r>
+            <a:endParaRPr lang="en-US" sz="1100" dirty="0"/>
+          </a:p>
+          <a:p>
+            <a:pPr indent="0" marL="0">
+              <a:spcAft>
+                <a:spcPts val="200"/>
+              </a:spcAft>
+              <a:buNone/>
+            </a:pPr>
+            <a:r>
+              <a:rPr lang="en-US" sz="900" dirty="0">
+                <a:solidFill>
+                  <a:srgbClr val="64748B"/>
+                </a:solidFill>
+                <a:latin typeface="Arial" pitchFamily="34" charset="0"/>
+                <a:ea typeface="Arial" pitchFamily="34" charset="-122"/>
+                <a:cs typeface="Arial" pitchFamily="34" charset="-120"/>
+              </a:rPr>
+              <a:t>  Lawsons onsite - great for after Disney snack 😝 Easy to ...</a:t>
             </a:r>
             <a:endParaRPr lang="en-US" sz="1100" dirty="0"/>
           </a:p>
@@ -5840,46 +6154,6 @@
                 <a:cs typeface="Arial" pitchFamily="34" charset="-120"/>
               </a:rPr>
               <a:t>  部屋も上のフロアの足音が気になったり窓からの眺めは病院だったのは夢の国帰りにはちょっと残念なものがありました</a:t>
-            </a:r>
-            <a:endParaRPr lang="en-US" sz="1100" dirty="0"/>
-          </a:p>
-          <a:p>
-            <a:pPr indent="0" marL="0">
-              <a:spcAft>
-                <a:spcPts val="200"/>
-              </a:spcAft>
-              <a:buNone/>
-            </a:pPr>
-            <a:r>
-              <a:rPr lang="en-US" sz="1100" b="1" dirty="0">
-                <a:solidFill>
-                  <a:srgbClr val="334155"/>
-                </a:solidFill>
-                <a:latin typeface="Arial" pitchFamily="34" charset="0"/>
-                <a:ea typeface="Arial" pitchFamily="34" charset="-122"/>
-                <a:cs typeface="Arial" pitchFamily="34" charset="-120"/>
-              </a:rPr>
-              <a:t>エアコン・空調 </a:t>
-            </a:r>
-            <a:endParaRPr lang="en-US" sz="1100" dirty="0"/>
-          </a:p>
-          <a:p>
-            <a:pPr indent="0" marL="0">
-              <a:spcAft>
-                <a:spcPts val="200"/>
-              </a:spcAft>
-              <a:buNone/>
-            </a:pPr>
-            <a:r>
-              <a:rPr lang="en-US" sz="900" dirty="0">
-                <a:solidFill>
-                  <a:srgbClr val="64748B"/>
-                </a:solidFill>
-                <a:latin typeface="Arial" pitchFamily="34" charset="0"/>
-                <a:ea typeface="Arial" pitchFamily="34" charset="-122"/>
-                <a:cs typeface="Arial" pitchFamily="34" charset="-120"/>
-              </a:rPr>
-              <a:t>  Nothing near by hotel but they have bus to drop and pick ...</a:t>
             </a:r>
             <a:endParaRPr lang="en-US" sz="1100" dirty="0"/>
           </a:p>
@@ -6232,7 +6506,7 @@
                 <a:ea typeface="Arial" pitchFamily="34" charset="-122"/>
                 <a:cs typeface="Arial" pitchFamily="34" charset="-120"/>
               </a:rPr>
-              <a:t>9.14</a:t>
+              <a:t>9.06</a:t>
             </a:r>
             <a:endParaRPr lang="en-US" sz="3200" dirty="0"/>
           </a:p>
@@ -6357,7 +6631,7 @@
                 <a:ea typeface="Arial" pitchFamily="34" charset="-122"/>
                 <a:cs typeface="Arial" pitchFamily="34" charset="-120"/>
               </a:rPr>
-              <a:t>95.1%</a:t>
+              <a:t>95.3%</a:t>
             </a:r>
             <a:endParaRPr lang="en-US" sz="3200" dirty="0"/>
           </a:p>
@@ -6482,7 +6756,7 @@
                 <a:ea typeface="Arial" pitchFamily="34" charset="-122"/>
                 <a:cs typeface="Arial" pitchFamily="34" charset="-120"/>
               </a:rPr>
-              <a:t>1.4%</a:t>
+              <a:t>2.4%</a:t>
             </a:r>
             <a:endParaRPr lang="en-US" sz="3200" dirty="0"/>
           </a:p>
@@ -6607,7 +6881,7 @@
                 <a:ea typeface="Arial" pitchFamily="34" charset="-122"/>
                 <a:cs typeface="Arial" pitchFamily="34" charset="-120"/>
               </a:rPr>
-              <a:t>143件</a:t>
+              <a:t>85件</a:t>
             </a:r>
             <a:endParaRPr lang="en-US" sz="3200" dirty="0"/>
           </a:p>
@@ -7028,7 +7302,56 @@
                 <a:ea typeface="Arial" pitchFamily="34" charset="-122"/>
                 <a:cs typeface="Arial" pitchFamily="34" charset="-120"/>
               </a:rPr>
-              <a:t>Trip.com(9.41)が最高スコア。</a:t>
+              <a:t>Trip.com(9.42)が最高スコア。</a:t>
+            </a:r>
+            <a:endParaRPr lang="en-US" sz="1100" dirty="0"/>
+          </a:p>
+          <a:p>
+            <a:pPr indent="0" marL="0">
+              <a:spcAft>
+                <a:spcPts val="200"/>
+              </a:spcAft>
+              <a:buNone/>
+            </a:pPr>
+            <a:endParaRPr lang="en-US" sz="1100" dirty="0"/>
+          </a:p>
+          <a:p>
+            <a:pPr indent="0" marL="0">
+              <a:spcAft>
+                <a:spcPts val="200"/>
+              </a:spcAft>
+              <a:buNone/>
+            </a:pPr>
+            <a:r>
+              <a:rPr lang="en-US" sz="1100" b="1" dirty="0">
+                <a:solidFill>
+                  <a:srgbClr val="DC2626"/>
+                </a:solidFill>
+                <a:latin typeface="Arial" pitchFamily="34" charset="0"/>
+                <a:ea typeface="Arial" pitchFamily="34" charset="-122"/>
+                <a:cs typeface="Arial" pitchFamily="34" charset="-120"/>
+              </a:rPr>
+              <a:t>改善対象サイト</a:t>
+            </a:r>
+            <a:endParaRPr lang="en-US" sz="1100" dirty="0"/>
+          </a:p>
+          <a:p>
+            <a:pPr indent="0" marL="0">
+              <a:spcAft>
+                <a:spcPts val="200"/>
+              </a:spcAft>
+              <a:buNone/>
+            </a:pPr>
+            <a:r>
+              <a:rPr lang="en-US" sz="900" dirty="0">
+                <a:solidFill>
+                  <a:srgbClr val="64748B"/>
+                </a:solidFill>
+                <a:latin typeface="Arial" pitchFamily="34" charset="0"/>
+                <a:ea typeface="Arial" pitchFamily="34" charset="-122"/>
+                <a:cs typeface="Arial" pitchFamily="34" charset="-120"/>
+              </a:rPr>
+              <a:t>じゃらん(8.5)が相対的に低い。口コミ返信の強化が急務</a:t>
             </a:r>
             <a:endParaRPr lang="en-US" sz="1100" dirty="0"/>
           </a:p>
@@ -7537,7 +7860,7 @@
                           <a:ea typeface="Arial" pitchFamily="34" charset="-122"/>
                           <a:cs typeface="Arial" pitchFamily="34" charset="-120"/>
                         </a:rPr>
-                        <a:t>17</a:t>
+                        <a:t>12</a:t>
                       </a:r>
                       <a:endParaRPr lang="en-US" sz="900" dirty="0">
                         <a:latin typeface="Arial" charset="0"/>
@@ -7605,7 +7928,7 @@
                           <a:ea typeface="Arial" pitchFamily="34" charset="-122"/>
                           <a:cs typeface="Arial" pitchFamily="34" charset="-120"/>
                         </a:rPr>
-                        <a:t>9.41</a:t>
+                        <a:t>9.42</a:t>
                       </a:r>
                       <a:endParaRPr lang="en-US" sz="900" dirty="0">
                         <a:latin typeface="Arial" charset="0"/>
@@ -7741,7 +8064,691 @@
                           <a:ea typeface="Arial" pitchFamily="34" charset="-122"/>
                           <a:cs typeface="Arial" pitchFamily="34" charset="-120"/>
                         </a:rPr>
-                        <a:t>9.41</a:t>
+                        <a:t>9.42</a:t>
+                      </a:r>
+                      <a:endParaRPr lang="en-US" sz="900" dirty="0">
+                        <a:latin typeface="Arial" charset="0"/>
+                        <a:ea typeface="Arial" charset="0"/>
+                        <a:cs typeface="Arial" charset="0"/>
+                      </a:endParaRPr>
+                    </a:p>
+                  </a:txBody>
+                  <a:tcPr marL="91440" marR="91440" marT="45720" marB="45720">
+                    <a:lnL w="6350" cap="flat" cmpd="sng" algn="ctr">
+                      <a:solidFill>
+                        <a:srgbClr val="CBD5E1"/>
+                      </a:solidFill>
+                      <a:prstDash val="solid"/>
+                      <a:round/>
+                      <a:headEnd type="none" w="med" len="med"/>
+                      <a:tailEnd type="none" w="med" len="med"/>
+                    </a:lnL>
+                    <a:lnR w="6350" cap="flat" cmpd="sng" algn="ctr">
+                      <a:solidFill>
+                        <a:srgbClr val="CBD5E1"/>
+                      </a:solidFill>
+                      <a:prstDash val="solid"/>
+                      <a:round/>
+                      <a:headEnd type="none" w="med" len="med"/>
+                      <a:tailEnd type="none" w="med" len="med"/>
+                    </a:lnR>
+                    <a:lnT w="6350" cap="flat" cmpd="sng" algn="ctr">
+                      <a:solidFill>
+                        <a:srgbClr val="CBD5E1"/>
+                      </a:solidFill>
+                      <a:prstDash val="solid"/>
+                      <a:round/>
+                      <a:headEnd type="none" w="med" len="med"/>
+                      <a:tailEnd type="none" w="med" len="med"/>
+                    </a:lnT>
+                    <a:lnB w="6350" cap="flat" cmpd="sng" algn="ctr">
+                      <a:solidFill>
+                        <a:srgbClr val="CBD5E1"/>
+                      </a:solidFill>
+                      <a:prstDash val="solid"/>
+                      <a:round/>
+                      <a:headEnd type="none" w="med" len="med"/>
+                      <a:tailEnd type="none" w="med" len="med"/>
+                    </a:lnB>
+                    <a:solidFill>
+                      <a:srgbClr val="E8EFF8"/>
+                    </a:solidFill>
+                  </a:tcPr>
+                </a:tc>
+              </a:tr>
+              <a:tr h="201168">
+                <a:tc>
+                  <a:txBody>
+                    <a:bodyPr/>
+                    <a:lstStyle/>
+                    <a:p>
+                      <a:pPr algn="ctr" indent="0" marL="0">
+                        <a:buNone/>
+                      </a:pPr>
+                      <a:r>
+                        <a:rPr lang="en-US" sz="900" dirty="0">
+                          <a:solidFill>
+                            <a:srgbClr val="000000"/>
+                          </a:solidFill>
+                          <a:latin typeface="Arial" pitchFamily="34" charset="0"/>
+                          <a:ea typeface="Arial" pitchFamily="34" charset="-122"/>
+                          <a:cs typeface="Arial" pitchFamily="34" charset="-120"/>
+                        </a:rPr>
+                        <a:t>楽天トラベル</a:t>
+                      </a:r>
+                      <a:endParaRPr lang="en-US" sz="900" dirty="0">
+                        <a:latin typeface="Arial" charset="0"/>
+                        <a:ea typeface="Arial" charset="0"/>
+                        <a:cs typeface="Arial" charset="0"/>
+                      </a:endParaRPr>
+                    </a:p>
+                  </a:txBody>
+                  <a:tcPr marL="91440" marR="91440" marT="45720" marB="45720">
+                    <a:lnL w="6350" cap="flat" cmpd="sng" algn="ctr">
+                      <a:solidFill>
+                        <a:srgbClr val="CBD5E1"/>
+                      </a:solidFill>
+                      <a:prstDash val="solid"/>
+                      <a:round/>
+                      <a:headEnd type="none" w="med" len="med"/>
+                      <a:tailEnd type="none" w="med" len="med"/>
+                    </a:lnL>
+                    <a:lnR w="6350" cap="flat" cmpd="sng" algn="ctr">
+                      <a:solidFill>
+                        <a:srgbClr val="CBD5E1"/>
+                      </a:solidFill>
+                      <a:prstDash val="solid"/>
+                      <a:round/>
+                      <a:headEnd type="none" w="med" len="med"/>
+                      <a:tailEnd type="none" w="med" len="med"/>
+                    </a:lnR>
+                    <a:lnT w="6350" cap="flat" cmpd="sng" algn="ctr">
+                      <a:solidFill>
+                        <a:srgbClr val="CBD5E1"/>
+                      </a:solidFill>
+                      <a:prstDash val="solid"/>
+                      <a:round/>
+                      <a:headEnd type="none" w="med" len="med"/>
+                      <a:tailEnd type="none" w="med" len="med"/>
+                    </a:lnT>
+                    <a:lnB w="6350" cap="flat" cmpd="sng" algn="ctr">
+                      <a:solidFill>
+                        <a:srgbClr val="CBD5E1"/>
+                      </a:solidFill>
+                      <a:prstDash val="solid"/>
+                      <a:round/>
+                      <a:headEnd type="none" w="med" len="med"/>
+                      <a:tailEnd type="none" w="med" len="med"/>
+                    </a:lnB>
+                    <a:solidFill>
+                      <a:srgbClr val="FFFFFF"/>
+                    </a:solidFill>
+                  </a:tcPr>
+                </a:tc>
+                <a:tc>
+                  <a:txBody>
+                    <a:bodyPr/>
+                    <a:lstStyle/>
+                    <a:p>
+                      <a:pPr algn="ctr" indent="0" marL="0">
+                        <a:buNone/>
+                      </a:pPr>
+                      <a:r>
+                        <a:rPr lang="en-US" sz="900" dirty="0">
+                          <a:solidFill>
+                            <a:srgbClr val="000000"/>
+                          </a:solidFill>
+                          <a:latin typeface="Arial" pitchFamily="34" charset="0"/>
+                          <a:ea typeface="Arial" pitchFamily="34" charset="-122"/>
+                          <a:cs typeface="Arial" pitchFamily="34" charset="-120"/>
+                        </a:rPr>
+                        <a:t>28</a:t>
+                      </a:r>
+                      <a:endParaRPr lang="en-US" sz="900" dirty="0">
+                        <a:latin typeface="Arial" charset="0"/>
+                        <a:ea typeface="Arial" charset="0"/>
+                        <a:cs typeface="Arial" charset="0"/>
+                      </a:endParaRPr>
+                    </a:p>
+                  </a:txBody>
+                  <a:tcPr marL="91440" marR="91440" marT="45720" marB="45720">
+                    <a:lnL w="6350" cap="flat" cmpd="sng" algn="ctr">
+                      <a:solidFill>
+                        <a:srgbClr val="CBD5E1"/>
+                      </a:solidFill>
+                      <a:prstDash val="solid"/>
+                      <a:round/>
+                      <a:headEnd type="none" w="med" len="med"/>
+                      <a:tailEnd type="none" w="med" len="med"/>
+                    </a:lnL>
+                    <a:lnR w="6350" cap="flat" cmpd="sng" algn="ctr">
+                      <a:solidFill>
+                        <a:srgbClr val="CBD5E1"/>
+                      </a:solidFill>
+                      <a:prstDash val="solid"/>
+                      <a:round/>
+                      <a:headEnd type="none" w="med" len="med"/>
+                      <a:tailEnd type="none" w="med" len="med"/>
+                    </a:lnR>
+                    <a:lnT w="6350" cap="flat" cmpd="sng" algn="ctr">
+                      <a:solidFill>
+                        <a:srgbClr val="CBD5E1"/>
+                      </a:solidFill>
+                      <a:prstDash val="solid"/>
+                      <a:round/>
+                      <a:headEnd type="none" w="med" len="med"/>
+                      <a:tailEnd type="none" w="med" len="med"/>
+                    </a:lnT>
+                    <a:lnB w="6350" cap="flat" cmpd="sng" algn="ctr">
+                      <a:solidFill>
+                        <a:srgbClr val="CBD5E1"/>
+                      </a:solidFill>
+                      <a:prstDash val="solid"/>
+                      <a:round/>
+                      <a:headEnd type="none" w="med" len="med"/>
+                      <a:tailEnd type="none" w="med" len="med"/>
+                    </a:lnB>
+                    <a:solidFill>
+                      <a:srgbClr val="FFFFFF"/>
+                    </a:solidFill>
+                  </a:tcPr>
+                </a:tc>
+                <a:tc>
+                  <a:txBody>
+                    <a:bodyPr/>
+                    <a:lstStyle/>
+                    <a:p>
+                      <a:pPr algn="ctr" indent="0" marL="0">
+                        <a:buNone/>
+                      </a:pPr>
+                      <a:r>
+                        <a:rPr lang="en-US" sz="900" dirty="0">
+                          <a:solidFill>
+                            <a:srgbClr val="000000"/>
+                          </a:solidFill>
+                          <a:latin typeface="Arial" pitchFamily="34" charset="0"/>
+                          <a:ea typeface="Arial" pitchFamily="34" charset="-122"/>
+                          <a:cs typeface="Arial" pitchFamily="34" charset="-120"/>
+                        </a:rPr>
+                        <a:t>4.64</a:t>
+                      </a:r>
+                      <a:endParaRPr lang="en-US" sz="900" dirty="0">
+                        <a:latin typeface="Arial" charset="0"/>
+                        <a:ea typeface="Arial" charset="0"/>
+                        <a:cs typeface="Arial" charset="0"/>
+                      </a:endParaRPr>
+                    </a:p>
+                  </a:txBody>
+                  <a:tcPr marL="91440" marR="91440" marT="45720" marB="45720">
+                    <a:lnL w="6350" cap="flat" cmpd="sng" algn="ctr">
+                      <a:solidFill>
+                        <a:srgbClr val="CBD5E1"/>
+                      </a:solidFill>
+                      <a:prstDash val="solid"/>
+                      <a:round/>
+                      <a:headEnd type="none" w="med" len="med"/>
+                      <a:tailEnd type="none" w="med" len="med"/>
+                    </a:lnL>
+                    <a:lnR w="6350" cap="flat" cmpd="sng" algn="ctr">
+                      <a:solidFill>
+                        <a:srgbClr val="CBD5E1"/>
+                      </a:solidFill>
+                      <a:prstDash val="solid"/>
+                      <a:round/>
+                      <a:headEnd type="none" w="med" len="med"/>
+                      <a:tailEnd type="none" w="med" len="med"/>
+                    </a:lnR>
+                    <a:lnT w="6350" cap="flat" cmpd="sng" algn="ctr">
+                      <a:solidFill>
+                        <a:srgbClr val="CBD5E1"/>
+                      </a:solidFill>
+                      <a:prstDash val="solid"/>
+                      <a:round/>
+                      <a:headEnd type="none" w="med" len="med"/>
+                      <a:tailEnd type="none" w="med" len="med"/>
+                    </a:lnT>
+                    <a:lnB w="6350" cap="flat" cmpd="sng" algn="ctr">
+                      <a:solidFill>
+                        <a:srgbClr val="CBD5E1"/>
+                      </a:solidFill>
+                      <a:prstDash val="solid"/>
+                      <a:round/>
+                      <a:headEnd type="none" w="med" len="med"/>
+                      <a:tailEnd type="none" w="med" len="med"/>
+                    </a:lnB>
+                    <a:solidFill>
+                      <a:srgbClr val="FFFFFF"/>
+                    </a:solidFill>
+                  </a:tcPr>
+                </a:tc>
+                <a:tc>
+                  <a:txBody>
+                    <a:bodyPr/>
+                    <a:lstStyle/>
+                    <a:p>
+                      <a:pPr algn="ctr" indent="0" marL="0">
+                        <a:buNone/>
+                      </a:pPr>
+                      <a:r>
+                        <a:rPr lang="en-US" sz="900" dirty="0">
+                          <a:solidFill>
+                            <a:srgbClr val="000000"/>
+                          </a:solidFill>
+                          <a:latin typeface="Arial" pitchFamily="34" charset="0"/>
+                          <a:ea typeface="Arial" pitchFamily="34" charset="-122"/>
+                          <a:cs typeface="Arial" pitchFamily="34" charset="-120"/>
+                        </a:rPr>
+                        <a:t>/5 (×2)</a:t>
+                      </a:r>
+                      <a:endParaRPr lang="en-US" sz="900" dirty="0">
+                        <a:latin typeface="Arial" charset="0"/>
+                        <a:ea typeface="Arial" charset="0"/>
+                        <a:cs typeface="Arial" charset="0"/>
+                      </a:endParaRPr>
+                    </a:p>
+                  </a:txBody>
+                  <a:tcPr marL="91440" marR="91440" marT="45720" marB="45720">
+                    <a:lnL w="6350" cap="flat" cmpd="sng" algn="ctr">
+                      <a:solidFill>
+                        <a:srgbClr val="CBD5E1"/>
+                      </a:solidFill>
+                      <a:prstDash val="solid"/>
+                      <a:round/>
+                      <a:headEnd type="none" w="med" len="med"/>
+                      <a:tailEnd type="none" w="med" len="med"/>
+                    </a:lnL>
+                    <a:lnR w="6350" cap="flat" cmpd="sng" algn="ctr">
+                      <a:solidFill>
+                        <a:srgbClr val="CBD5E1"/>
+                      </a:solidFill>
+                      <a:prstDash val="solid"/>
+                      <a:round/>
+                      <a:headEnd type="none" w="med" len="med"/>
+                      <a:tailEnd type="none" w="med" len="med"/>
+                    </a:lnR>
+                    <a:lnT w="6350" cap="flat" cmpd="sng" algn="ctr">
+                      <a:solidFill>
+                        <a:srgbClr val="CBD5E1"/>
+                      </a:solidFill>
+                      <a:prstDash val="solid"/>
+                      <a:round/>
+                      <a:headEnd type="none" w="med" len="med"/>
+                      <a:tailEnd type="none" w="med" len="med"/>
+                    </a:lnT>
+                    <a:lnB w="6350" cap="flat" cmpd="sng" algn="ctr">
+                      <a:solidFill>
+                        <a:srgbClr val="CBD5E1"/>
+                      </a:solidFill>
+                      <a:prstDash val="solid"/>
+                      <a:round/>
+                      <a:headEnd type="none" w="med" len="med"/>
+                      <a:tailEnd type="none" w="med" len="med"/>
+                    </a:lnB>
+                    <a:solidFill>
+                      <a:srgbClr val="FFFFFF"/>
+                    </a:solidFill>
+                  </a:tcPr>
+                </a:tc>
+                <a:tc>
+                  <a:txBody>
+                    <a:bodyPr/>
+                    <a:lstStyle/>
+                    <a:p>
+                      <a:pPr algn="ctr" indent="0" marL="0">
+                        <a:buNone/>
+                      </a:pPr>
+                      <a:r>
+                        <a:rPr lang="en-US" sz="900" dirty="0">
+                          <a:solidFill>
+                            <a:srgbClr val="000000"/>
+                          </a:solidFill>
+                          <a:latin typeface="Arial" pitchFamily="34" charset="0"/>
+                          <a:ea typeface="Arial" pitchFamily="34" charset="-122"/>
+                          <a:cs typeface="Arial" pitchFamily="34" charset="-120"/>
+                        </a:rPr>
+                        <a:t>9.29</a:t>
+                      </a:r>
+                      <a:endParaRPr lang="en-US" sz="900" dirty="0">
+                        <a:latin typeface="Arial" charset="0"/>
+                        <a:ea typeface="Arial" charset="0"/>
+                        <a:cs typeface="Arial" charset="0"/>
+                      </a:endParaRPr>
+                    </a:p>
+                  </a:txBody>
+                  <a:tcPr marL="91440" marR="91440" marT="45720" marB="45720">
+                    <a:lnL w="6350" cap="flat" cmpd="sng" algn="ctr">
+                      <a:solidFill>
+                        <a:srgbClr val="CBD5E1"/>
+                      </a:solidFill>
+                      <a:prstDash val="solid"/>
+                      <a:round/>
+                      <a:headEnd type="none" w="med" len="med"/>
+                      <a:tailEnd type="none" w="med" len="med"/>
+                    </a:lnL>
+                    <a:lnR w="6350" cap="flat" cmpd="sng" algn="ctr">
+                      <a:solidFill>
+                        <a:srgbClr val="CBD5E1"/>
+                      </a:solidFill>
+                      <a:prstDash val="solid"/>
+                      <a:round/>
+                      <a:headEnd type="none" w="med" len="med"/>
+                      <a:tailEnd type="none" w="med" len="med"/>
+                    </a:lnR>
+                    <a:lnT w="6350" cap="flat" cmpd="sng" algn="ctr">
+                      <a:solidFill>
+                        <a:srgbClr val="CBD5E1"/>
+                      </a:solidFill>
+                      <a:prstDash val="solid"/>
+                      <a:round/>
+                      <a:headEnd type="none" w="med" len="med"/>
+                      <a:tailEnd type="none" w="med" len="med"/>
+                    </a:lnT>
+                    <a:lnB w="6350" cap="flat" cmpd="sng" algn="ctr">
+                      <a:solidFill>
+                        <a:srgbClr val="CBD5E1"/>
+                      </a:solidFill>
+                      <a:prstDash val="solid"/>
+                      <a:round/>
+                      <a:headEnd type="none" w="med" len="med"/>
+                      <a:tailEnd type="none" w="med" len="med"/>
+                    </a:lnB>
+                    <a:solidFill>
+                      <a:srgbClr val="FFFFFF"/>
+                    </a:solidFill>
+                  </a:tcPr>
+                </a:tc>
+              </a:tr>
+              <a:tr h="201168">
+                <a:tc>
+                  <a:txBody>
+                    <a:bodyPr/>
+                    <a:lstStyle/>
+                    <a:p>
+                      <a:pPr algn="ctr" indent="0" marL="0">
+                        <a:buNone/>
+                      </a:pPr>
+                      <a:r>
+                        <a:rPr lang="en-US" sz="900" dirty="0">
+                          <a:solidFill>
+                            <a:srgbClr val="000000"/>
+                          </a:solidFill>
+                          <a:latin typeface="Arial" pitchFamily="34" charset="0"/>
+                          <a:ea typeface="Arial" pitchFamily="34" charset="-122"/>
+                          <a:cs typeface="Arial" pitchFamily="34" charset="-120"/>
+                        </a:rPr>
+                        <a:t>Agoda</a:t>
+                      </a:r>
+                      <a:endParaRPr lang="en-US" sz="900" dirty="0">
+                        <a:latin typeface="Arial" charset="0"/>
+                        <a:ea typeface="Arial" charset="0"/>
+                        <a:cs typeface="Arial" charset="0"/>
+                      </a:endParaRPr>
+                    </a:p>
+                  </a:txBody>
+                  <a:tcPr marL="91440" marR="91440" marT="45720" marB="45720">
+                    <a:lnL w="6350" cap="flat" cmpd="sng" algn="ctr">
+                      <a:solidFill>
+                        <a:srgbClr val="CBD5E1"/>
+                      </a:solidFill>
+                      <a:prstDash val="solid"/>
+                      <a:round/>
+                      <a:headEnd type="none" w="med" len="med"/>
+                      <a:tailEnd type="none" w="med" len="med"/>
+                    </a:lnL>
+                    <a:lnR w="6350" cap="flat" cmpd="sng" algn="ctr">
+                      <a:solidFill>
+                        <a:srgbClr val="CBD5E1"/>
+                      </a:solidFill>
+                      <a:prstDash val="solid"/>
+                      <a:round/>
+                      <a:headEnd type="none" w="med" len="med"/>
+                      <a:tailEnd type="none" w="med" len="med"/>
+                    </a:lnR>
+                    <a:lnT w="6350" cap="flat" cmpd="sng" algn="ctr">
+                      <a:solidFill>
+                        <a:srgbClr val="CBD5E1"/>
+                      </a:solidFill>
+                      <a:prstDash val="solid"/>
+                      <a:round/>
+                      <a:headEnd type="none" w="med" len="med"/>
+                      <a:tailEnd type="none" w="med" len="med"/>
+                    </a:lnT>
+                    <a:lnB w="6350" cap="flat" cmpd="sng" algn="ctr">
+                      <a:solidFill>
+                        <a:srgbClr val="CBD5E1"/>
+                      </a:solidFill>
+                      <a:prstDash val="solid"/>
+                      <a:round/>
+                      <a:headEnd type="none" w="med" len="med"/>
+                      <a:tailEnd type="none" w="med" len="med"/>
+                    </a:lnB>
+                    <a:solidFill>
+                      <a:srgbClr val="E8EFF8"/>
+                    </a:solidFill>
+                  </a:tcPr>
+                </a:tc>
+                <a:tc>
+                  <a:txBody>
+                    <a:bodyPr/>
+                    <a:lstStyle/>
+                    <a:p>
+                      <a:pPr algn="ctr" indent="0" marL="0">
+                        <a:buNone/>
+                      </a:pPr>
+                      <a:r>
+                        <a:rPr lang="en-US" sz="900" dirty="0">
+                          <a:solidFill>
+                            <a:srgbClr val="000000"/>
+                          </a:solidFill>
+                          <a:latin typeface="Arial" pitchFamily="34" charset="0"/>
+                          <a:ea typeface="Arial" pitchFamily="34" charset="-122"/>
+                          <a:cs typeface="Arial" pitchFamily="34" charset="-120"/>
+                        </a:rPr>
+                        <a:t>8</a:t>
+                      </a:r>
+                      <a:endParaRPr lang="en-US" sz="900" dirty="0">
+                        <a:latin typeface="Arial" charset="0"/>
+                        <a:ea typeface="Arial" charset="0"/>
+                        <a:cs typeface="Arial" charset="0"/>
+                      </a:endParaRPr>
+                    </a:p>
+                  </a:txBody>
+                  <a:tcPr marL="91440" marR="91440" marT="45720" marB="45720">
+                    <a:lnL w="6350" cap="flat" cmpd="sng" algn="ctr">
+                      <a:solidFill>
+                        <a:srgbClr val="CBD5E1"/>
+                      </a:solidFill>
+                      <a:prstDash val="solid"/>
+                      <a:round/>
+                      <a:headEnd type="none" w="med" len="med"/>
+                      <a:tailEnd type="none" w="med" len="med"/>
+                    </a:lnL>
+                    <a:lnR w="6350" cap="flat" cmpd="sng" algn="ctr">
+                      <a:solidFill>
+                        <a:srgbClr val="CBD5E1"/>
+                      </a:solidFill>
+                      <a:prstDash val="solid"/>
+                      <a:round/>
+                      <a:headEnd type="none" w="med" len="med"/>
+                      <a:tailEnd type="none" w="med" len="med"/>
+                    </a:lnR>
+                    <a:lnT w="6350" cap="flat" cmpd="sng" algn="ctr">
+                      <a:solidFill>
+                        <a:srgbClr val="CBD5E1"/>
+                      </a:solidFill>
+                      <a:prstDash val="solid"/>
+                      <a:round/>
+                      <a:headEnd type="none" w="med" len="med"/>
+                      <a:tailEnd type="none" w="med" len="med"/>
+                    </a:lnT>
+                    <a:lnB w="6350" cap="flat" cmpd="sng" algn="ctr">
+                      <a:solidFill>
+                        <a:srgbClr val="CBD5E1"/>
+                      </a:solidFill>
+                      <a:prstDash val="solid"/>
+                      <a:round/>
+                      <a:headEnd type="none" w="med" len="med"/>
+                      <a:tailEnd type="none" w="med" len="med"/>
+                    </a:lnB>
+                    <a:solidFill>
+                      <a:srgbClr val="E8EFF8"/>
+                    </a:solidFill>
+                  </a:tcPr>
+                </a:tc>
+                <a:tc>
+                  <a:txBody>
+                    <a:bodyPr/>
+                    <a:lstStyle/>
+                    <a:p>
+                      <a:pPr algn="ctr" indent="0" marL="0">
+                        <a:buNone/>
+                      </a:pPr>
+                      <a:r>
+                        <a:rPr lang="en-US" sz="900" dirty="0">
+                          <a:solidFill>
+                            <a:srgbClr val="000000"/>
+                          </a:solidFill>
+                          <a:latin typeface="Arial" pitchFamily="34" charset="0"/>
+                          <a:ea typeface="Arial" pitchFamily="34" charset="-122"/>
+                          <a:cs typeface="Arial" pitchFamily="34" charset="-120"/>
+                        </a:rPr>
+                        <a:t>9.25</a:t>
+                      </a:r>
+                      <a:endParaRPr lang="en-US" sz="900" dirty="0">
+                        <a:latin typeface="Arial" charset="0"/>
+                        <a:ea typeface="Arial" charset="0"/>
+                        <a:cs typeface="Arial" charset="0"/>
+                      </a:endParaRPr>
+                    </a:p>
+                  </a:txBody>
+                  <a:tcPr marL="91440" marR="91440" marT="45720" marB="45720">
+                    <a:lnL w="6350" cap="flat" cmpd="sng" algn="ctr">
+                      <a:solidFill>
+                        <a:srgbClr val="CBD5E1"/>
+                      </a:solidFill>
+                      <a:prstDash val="solid"/>
+                      <a:round/>
+                      <a:headEnd type="none" w="med" len="med"/>
+                      <a:tailEnd type="none" w="med" len="med"/>
+                    </a:lnL>
+                    <a:lnR w="6350" cap="flat" cmpd="sng" algn="ctr">
+                      <a:solidFill>
+                        <a:srgbClr val="CBD5E1"/>
+                      </a:solidFill>
+                      <a:prstDash val="solid"/>
+                      <a:round/>
+                      <a:headEnd type="none" w="med" len="med"/>
+                      <a:tailEnd type="none" w="med" len="med"/>
+                    </a:lnR>
+                    <a:lnT w="6350" cap="flat" cmpd="sng" algn="ctr">
+                      <a:solidFill>
+                        <a:srgbClr val="CBD5E1"/>
+                      </a:solidFill>
+                      <a:prstDash val="solid"/>
+                      <a:round/>
+                      <a:headEnd type="none" w="med" len="med"/>
+                      <a:tailEnd type="none" w="med" len="med"/>
+                    </a:lnT>
+                    <a:lnB w="6350" cap="flat" cmpd="sng" algn="ctr">
+                      <a:solidFill>
+                        <a:srgbClr val="CBD5E1"/>
+                      </a:solidFill>
+                      <a:prstDash val="solid"/>
+                      <a:round/>
+                      <a:headEnd type="none" w="med" len="med"/>
+                      <a:tailEnd type="none" w="med" len="med"/>
+                    </a:lnB>
+                    <a:solidFill>
+                      <a:srgbClr val="E8EFF8"/>
+                    </a:solidFill>
+                  </a:tcPr>
+                </a:tc>
+                <a:tc>
+                  <a:txBody>
+                    <a:bodyPr/>
+                    <a:lstStyle/>
+                    <a:p>
+                      <a:pPr algn="ctr" indent="0" marL="0">
+                        <a:buNone/>
+                      </a:pPr>
+                      <a:r>
+                        <a:rPr lang="en-US" sz="900" dirty="0">
+                          <a:solidFill>
+                            <a:srgbClr val="000000"/>
+                          </a:solidFill>
+                          <a:latin typeface="Arial" pitchFamily="34" charset="0"/>
+                          <a:ea typeface="Arial" pitchFamily="34" charset="-122"/>
+                          <a:cs typeface="Arial" pitchFamily="34" charset="-120"/>
+                        </a:rPr>
+                        <a:t>/10</a:t>
+                      </a:r>
+                      <a:endParaRPr lang="en-US" sz="900" dirty="0">
+                        <a:latin typeface="Arial" charset="0"/>
+                        <a:ea typeface="Arial" charset="0"/>
+                        <a:cs typeface="Arial" charset="0"/>
+                      </a:endParaRPr>
+                    </a:p>
+                  </a:txBody>
+                  <a:tcPr marL="91440" marR="91440" marT="45720" marB="45720">
+                    <a:lnL w="6350" cap="flat" cmpd="sng" algn="ctr">
+                      <a:solidFill>
+                        <a:srgbClr val="CBD5E1"/>
+                      </a:solidFill>
+                      <a:prstDash val="solid"/>
+                      <a:round/>
+                      <a:headEnd type="none" w="med" len="med"/>
+                      <a:tailEnd type="none" w="med" len="med"/>
+                    </a:lnL>
+                    <a:lnR w="6350" cap="flat" cmpd="sng" algn="ctr">
+                      <a:solidFill>
+                        <a:srgbClr val="CBD5E1"/>
+                      </a:solidFill>
+                      <a:prstDash val="solid"/>
+                      <a:round/>
+                      <a:headEnd type="none" w="med" len="med"/>
+                      <a:tailEnd type="none" w="med" len="med"/>
+                    </a:lnR>
+                    <a:lnT w="6350" cap="flat" cmpd="sng" algn="ctr">
+                      <a:solidFill>
+                        <a:srgbClr val="CBD5E1"/>
+                      </a:solidFill>
+                      <a:prstDash val="solid"/>
+                      <a:round/>
+                      <a:headEnd type="none" w="med" len="med"/>
+                      <a:tailEnd type="none" w="med" len="med"/>
+                    </a:lnT>
+                    <a:lnB w="6350" cap="flat" cmpd="sng" algn="ctr">
+                      <a:solidFill>
+                        <a:srgbClr val="CBD5E1"/>
+                      </a:solidFill>
+                      <a:prstDash val="solid"/>
+                      <a:round/>
+                      <a:headEnd type="none" w="med" len="med"/>
+                      <a:tailEnd type="none" w="med" len="med"/>
+                    </a:lnB>
+                    <a:solidFill>
+                      <a:srgbClr val="E8EFF8"/>
+                    </a:solidFill>
+                  </a:tcPr>
+                </a:tc>
+                <a:tc>
+                  <a:txBody>
+                    <a:bodyPr/>
+                    <a:lstStyle/>
+                    <a:p>
+                      <a:pPr algn="ctr" indent="0" marL="0">
+                        <a:buNone/>
+                      </a:pPr>
+                      <a:r>
+                        <a:rPr lang="en-US" sz="900" dirty="0">
+                          <a:solidFill>
+                            <a:srgbClr val="000000"/>
+                          </a:solidFill>
+                          <a:latin typeface="Arial" pitchFamily="34" charset="0"/>
+                          <a:ea typeface="Arial" pitchFamily="34" charset="-122"/>
+                          <a:cs typeface="Arial" pitchFamily="34" charset="-120"/>
+                        </a:rPr>
+                        <a:t>9.25</a:t>
                       </a:r>
                       <a:endParaRPr lang="en-US" sz="900" dirty="0">
                         <a:latin typeface="Arial" charset="0"/>
@@ -7879,7 +8886,7 @@
                           <a:ea typeface="Arial" pitchFamily="34" charset="-122"/>
                           <a:cs typeface="Arial" pitchFamily="34" charset="-120"/>
                         </a:rPr>
-                        <a:t>10</a:t>
+                        <a:t>8</a:t>
                       </a:r>
                       <a:endParaRPr lang="en-US" sz="900" dirty="0">
                         <a:latin typeface="Arial" charset="0"/>
@@ -7947,7 +8954,7 @@
                           <a:ea typeface="Arial" pitchFamily="34" charset="-122"/>
                           <a:cs typeface="Arial" pitchFamily="34" charset="-120"/>
                         </a:rPr>
-                        <a:t>4.7</a:t>
+                        <a:t>4.62</a:t>
                       </a:r>
                       <a:endParaRPr lang="en-US" sz="900" dirty="0">
                         <a:latin typeface="Arial" charset="0"/>
@@ -8083,7 +9090,7 @@
                           <a:ea typeface="Arial" pitchFamily="34" charset="-122"/>
                           <a:cs typeface="Arial" pitchFamily="34" charset="-120"/>
                         </a:rPr>
-                        <a:t>9.4</a:t>
+                        <a:t>9.25</a:t>
                       </a:r>
                       <a:endParaRPr lang="en-US" sz="900" dirty="0">
                         <a:latin typeface="Arial" charset="0"/>
@@ -8153,7 +9160,7 @@
                           <a:ea typeface="Arial" pitchFamily="34" charset="-122"/>
                           <a:cs typeface="Arial" pitchFamily="34" charset="-120"/>
                         </a:rPr>
-                        <a:t>Agoda</a:t>
+                        <a:t>Booking.com</a:t>
                       </a:r>
                       <a:endParaRPr lang="en-US" sz="900" dirty="0">
                         <a:latin typeface="Arial" charset="0"/>
@@ -8221,7 +9228,7 @@
                           <a:ea typeface="Arial" pitchFamily="34" charset="-122"/>
                           <a:cs typeface="Arial" pitchFamily="34" charset="-120"/>
                         </a:rPr>
-                        <a:t>18</a:t>
+                        <a:t>17</a:t>
                       </a:r>
                       <a:endParaRPr lang="en-US" sz="900" dirty="0">
                         <a:latin typeface="Arial" charset="0"/>
@@ -8289,7 +9296,7 @@
                           <a:ea typeface="Arial" pitchFamily="34" charset="-122"/>
                           <a:cs typeface="Arial" pitchFamily="34" charset="-120"/>
                         </a:rPr>
-                        <a:t>9.39</a:t>
+                        <a:t>8.65</a:t>
                       </a:r>
                       <a:endParaRPr lang="en-US" sz="900" dirty="0">
                         <a:latin typeface="Arial" charset="0"/>
@@ -8425,7 +9432,7 @@
                           <a:ea typeface="Arial" pitchFamily="34" charset="-122"/>
                           <a:cs typeface="Arial" pitchFamily="34" charset="-120"/>
                         </a:rPr>
-                        <a:t>9.39</a:t>
+                        <a:t>8.65</a:t>
                       </a:r>
                       <a:endParaRPr lang="en-US" sz="900" dirty="0">
                         <a:latin typeface="Arial" charset="0"/>
@@ -8495,7 +9502,7 @@
                           <a:ea typeface="Arial" pitchFamily="34" charset="-122"/>
                           <a:cs typeface="Arial" pitchFamily="34" charset="-120"/>
                         </a:rPr>
-                        <a:t>楽天トラベル</a:t>
+                        <a:t>じゃらん</a:t>
                       </a:r>
                       <a:endParaRPr lang="en-US" sz="900" dirty="0">
                         <a:latin typeface="Arial" charset="0"/>
@@ -8563,7 +9570,7 @@
                           <a:ea typeface="Arial" pitchFamily="34" charset="-122"/>
                           <a:cs typeface="Arial" pitchFamily="34" charset="-120"/>
                         </a:rPr>
-                        <a:t>45</a:t>
+                        <a:t>12</a:t>
                       </a:r>
                       <a:endParaRPr lang="en-US" sz="900" dirty="0">
                         <a:latin typeface="Arial" charset="0"/>
@@ -8631,7 +9638,7 @@
                           <a:ea typeface="Arial" pitchFamily="34" charset="-122"/>
                           <a:cs typeface="Arial" pitchFamily="34" charset="-120"/>
                         </a:rPr>
-                        <a:t>4.6</a:t>
+                        <a:t>4.25</a:t>
                       </a:r>
                       <a:endParaRPr lang="en-US" sz="900" dirty="0">
                         <a:latin typeface="Arial" charset="0"/>
@@ -8767,691 +9774,7 @@
                           <a:ea typeface="Arial" pitchFamily="34" charset="-122"/>
                           <a:cs typeface="Arial" pitchFamily="34" charset="-120"/>
                         </a:rPr>
-                        <a:t>9.2</a:t>
-                      </a:r>
-                      <a:endParaRPr lang="en-US" sz="900" dirty="0">
-                        <a:latin typeface="Arial" charset="0"/>
-                        <a:ea typeface="Arial" charset="0"/>
-                        <a:cs typeface="Arial" charset="0"/>
-                      </a:endParaRPr>
-                    </a:p>
-                  </a:txBody>
-                  <a:tcPr marL="91440" marR="91440" marT="45720" marB="45720">
-                    <a:lnL w="6350" cap="flat" cmpd="sng" algn="ctr">
-                      <a:solidFill>
-                        <a:srgbClr val="CBD5E1"/>
-                      </a:solidFill>
-                      <a:prstDash val="solid"/>
-                      <a:round/>
-                      <a:headEnd type="none" w="med" len="med"/>
-                      <a:tailEnd type="none" w="med" len="med"/>
-                    </a:lnL>
-                    <a:lnR w="6350" cap="flat" cmpd="sng" algn="ctr">
-                      <a:solidFill>
-                        <a:srgbClr val="CBD5E1"/>
-                      </a:solidFill>
-                      <a:prstDash val="solid"/>
-                      <a:round/>
-                      <a:headEnd type="none" w="med" len="med"/>
-                      <a:tailEnd type="none" w="med" len="med"/>
-                    </a:lnR>
-                    <a:lnT w="6350" cap="flat" cmpd="sng" algn="ctr">
-                      <a:solidFill>
-                        <a:srgbClr val="CBD5E1"/>
-                      </a:solidFill>
-                      <a:prstDash val="solid"/>
-                      <a:round/>
-                      <a:headEnd type="none" w="med" len="med"/>
-                      <a:tailEnd type="none" w="med" len="med"/>
-                    </a:lnT>
-                    <a:lnB w="6350" cap="flat" cmpd="sng" algn="ctr">
-                      <a:solidFill>
-                        <a:srgbClr val="CBD5E1"/>
-                      </a:solidFill>
-                      <a:prstDash val="solid"/>
-                      <a:round/>
-                      <a:headEnd type="none" w="med" len="med"/>
-                      <a:tailEnd type="none" w="med" len="med"/>
-                    </a:lnB>
-                    <a:solidFill>
-                      <a:srgbClr val="FFFFFF"/>
-                    </a:solidFill>
-                  </a:tcPr>
-                </a:tc>
-              </a:tr>
-              <a:tr h="201168">
-                <a:tc>
-                  <a:txBody>
-                    <a:bodyPr/>
-                    <a:lstStyle/>
-                    <a:p>
-                      <a:pPr algn="ctr" indent="0" marL="0">
-                        <a:buNone/>
-                      </a:pPr>
-                      <a:r>
-                        <a:rPr lang="en-US" sz="900" dirty="0">
-                          <a:solidFill>
-                            <a:srgbClr val="000000"/>
-                          </a:solidFill>
-                          <a:latin typeface="Arial" pitchFamily="34" charset="0"/>
-                          <a:ea typeface="Arial" pitchFamily="34" charset="-122"/>
-                          <a:cs typeface="Arial" pitchFamily="34" charset="-120"/>
-                        </a:rPr>
-                        <a:t>じゃらん</a:t>
-                      </a:r>
-                      <a:endParaRPr lang="en-US" sz="900" dirty="0">
-                        <a:latin typeface="Arial" charset="0"/>
-                        <a:ea typeface="Arial" charset="0"/>
-                        <a:cs typeface="Arial" charset="0"/>
-                      </a:endParaRPr>
-                    </a:p>
-                  </a:txBody>
-                  <a:tcPr marL="91440" marR="91440" marT="45720" marB="45720">
-                    <a:lnL w="6350" cap="flat" cmpd="sng" algn="ctr">
-                      <a:solidFill>
-                        <a:srgbClr val="CBD5E1"/>
-                      </a:solidFill>
-                      <a:prstDash val="solid"/>
-                      <a:round/>
-                      <a:headEnd type="none" w="med" len="med"/>
-                      <a:tailEnd type="none" w="med" len="med"/>
-                    </a:lnL>
-                    <a:lnR w="6350" cap="flat" cmpd="sng" algn="ctr">
-                      <a:solidFill>
-                        <a:srgbClr val="CBD5E1"/>
-                      </a:solidFill>
-                      <a:prstDash val="solid"/>
-                      <a:round/>
-                      <a:headEnd type="none" w="med" len="med"/>
-                      <a:tailEnd type="none" w="med" len="med"/>
-                    </a:lnR>
-                    <a:lnT w="6350" cap="flat" cmpd="sng" algn="ctr">
-                      <a:solidFill>
-                        <a:srgbClr val="CBD5E1"/>
-                      </a:solidFill>
-                      <a:prstDash val="solid"/>
-                      <a:round/>
-                      <a:headEnd type="none" w="med" len="med"/>
-                      <a:tailEnd type="none" w="med" len="med"/>
-                    </a:lnT>
-                    <a:lnB w="6350" cap="flat" cmpd="sng" algn="ctr">
-                      <a:solidFill>
-                        <a:srgbClr val="CBD5E1"/>
-                      </a:solidFill>
-                      <a:prstDash val="solid"/>
-                      <a:round/>
-                      <a:headEnd type="none" w="med" len="med"/>
-                      <a:tailEnd type="none" w="med" len="med"/>
-                    </a:lnB>
-                    <a:solidFill>
-                      <a:srgbClr val="E8EFF8"/>
-                    </a:solidFill>
-                  </a:tcPr>
-                </a:tc>
-                <a:tc>
-                  <a:txBody>
-                    <a:bodyPr/>
-                    <a:lstStyle/>
-                    <a:p>
-                      <a:pPr algn="ctr" indent="0" marL="0">
-                        <a:buNone/>
-                      </a:pPr>
-                      <a:r>
-                        <a:rPr lang="en-US" sz="900" dirty="0">
-                          <a:solidFill>
-                            <a:srgbClr val="000000"/>
-                          </a:solidFill>
-                          <a:latin typeface="Arial" pitchFamily="34" charset="0"/>
-                          <a:ea typeface="Arial" pitchFamily="34" charset="-122"/>
-                          <a:cs typeface="Arial" pitchFamily="34" charset="-120"/>
-                        </a:rPr>
-                        <a:t>23</a:t>
-                      </a:r>
-                      <a:endParaRPr lang="en-US" sz="900" dirty="0">
-                        <a:latin typeface="Arial" charset="0"/>
-                        <a:ea typeface="Arial" charset="0"/>
-                        <a:cs typeface="Arial" charset="0"/>
-                      </a:endParaRPr>
-                    </a:p>
-                  </a:txBody>
-                  <a:tcPr marL="91440" marR="91440" marT="45720" marB="45720">
-                    <a:lnL w="6350" cap="flat" cmpd="sng" algn="ctr">
-                      <a:solidFill>
-                        <a:srgbClr val="CBD5E1"/>
-                      </a:solidFill>
-                      <a:prstDash val="solid"/>
-                      <a:round/>
-                      <a:headEnd type="none" w="med" len="med"/>
-                      <a:tailEnd type="none" w="med" len="med"/>
-                    </a:lnL>
-                    <a:lnR w="6350" cap="flat" cmpd="sng" algn="ctr">
-                      <a:solidFill>
-                        <a:srgbClr val="CBD5E1"/>
-                      </a:solidFill>
-                      <a:prstDash val="solid"/>
-                      <a:round/>
-                      <a:headEnd type="none" w="med" len="med"/>
-                      <a:tailEnd type="none" w="med" len="med"/>
-                    </a:lnR>
-                    <a:lnT w="6350" cap="flat" cmpd="sng" algn="ctr">
-                      <a:solidFill>
-                        <a:srgbClr val="CBD5E1"/>
-                      </a:solidFill>
-                      <a:prstDash val="solid"/>
-                      <a:round/>
-                      <a:headEnd type="none" w="med" len="med"/>
-                      <a:tailEnd type="none" w="med" len="med"/>
-                    </a:lnT>
-                    <a:lnB w="6350" cap="flat" cmpd="sng" algn="ctr">
-                      <a:solidFill>
-                        <a:srgbClr val="CBD5E1"/>
-                      </a:solidFill>
-                      <a:prstDash val="solid"/>
-                      <a:round/>
-                      <a:headEnd type="none" w="med" len="med"/>
-                      <a:tailEnd type="none" w="med" len="med"/>
-                    </a:lnB>
-                    <a:solidFill>
-                      <a:srgbClr val="E8EFF8"/>
-                    </a:solidFill>
-                  </a:tcPr>
-                </a:tc>
-                <a:tc>
-                  <a:txBody>
-                    <a:bodyPr/>
-                    <a:lstStyle/>
-                    <a:p>
-                      <a:pPr algn="ctr" indent="0" marL="0">
-                        <a:buNone/>
-                      </a:pPr>
-                      <a:r>
-                        <a:rPr lang="en-US" sz="900" dirty="0">
-                          <a:solidFill>
-                            <a:srgbClr val="000000"/>
-                          </a:solidFill>
-                          <a:latin typeface="Arial" pitchFamily="34" charset="0"/>
-                          <a:ea typeface="Arial" pitchFamily="34" charset="-122"/>
-                          <a:cs typeface="Arial" pitchFamily="34" charset="-120"/>
-                        </a:rPr>
-                        <a:t>4.52</a:t>
-                      </a:r>
-                      <a:endParaRPr lang="en-US" sz="900" dirty="0">
-                        <a:latin typeface="Arial" charset="0"/>
-                        <a:ea typeface="Arial" charset="0"/>
-                        <a:cs typeface="Arial" charset="0"/>
-                      </a:endParaRPr>
-                    </a:p>
-                  </a:txBody>
-                  <a:tcPr marL="91440" marR="91440" marT="45720" marB="45720">
-                    <a:lnL w="6350" cap="flat" cmpd="sng" algn="ctr">
-                      <a:solidFill>
-                        <a:srgbClr val="CBD5E1"/>
-                      </a:solidFill>
-                      <a:prstDash val="solid"/>
-                      <a:round/>
-                      <a:headEnd type="none" w="med" len="med"/>
-                      <a:tailEnd type="none" w="med" len="med"/>
-                    </a:lnL>
-                    <a:lnR w="6350" cap="flat" cmpd="sng" algn="ctr">
-                      <a:solidFill>
-                        <a:srgbClr val="CBD5E1"/>
-                      </a:solidFill>
-                      <a:prstDash val="solid"/>
-                      <a:round/>
-                      <a:headEnd type="none" w="med" len="med"/>
-                      <a:tailEnd type="none" w="med" len="med"/>
-                    </a:lnR>
-                    <a:lnT w="6350" cap="flat" cmpd="sng" algn="ctr">
-                      <a:solidFill>
-                        <a:srgbClr val="CBD5E1"/>
-                      </a:solidFill>
-                      <a:prstDash val="solid"/>
-                      <a:round/>
-                      <a:headEnd type="none" w="med" len="med"/>
-                      <a:tailEnd type="none" w="med" len="med"/>
-                    </a:lnT>
-                    <a:lnB w="6350" cap="flat" cmpd="sng" algn="ctr">
-                      <a:solidFill>
-                        <a:srgbClr val="CBD5E1"/>
-                      </a:solidFill>
-                      <a:prstDash val="solid"/>
-                      <a:round/>
-                      <a:headEnd type="none" w="med" len="med"/>
-                      <a:tailEnd type="none" w="med" len="med"/>
-                    </a:lnB>
-                    <a:solidFill>
-                      <a:srgbClr val="E8EFF8"/>
-                    </a:solidFill>
-                  </a:tcPr>
-                </a:tc>
-                <a:tc>
-                  <a:txBody>
-                    <a:bodyPr/>
-                    <a:lstStyle/>
-                    <a:p>
-                      <a:pPr algn="ctr" indent="0" marL="0">
-                        <a:buNone/>
-                      </a:pPr>
-                      <a:r>
-                        <a:rPr lang="en-US" sz="900" dirty="0">
-                          <a:solidFill>
-                            <a:srgbClr val="000000"/>
-                          </a:solidFill>
-                          <a:latin typeface="Arial" pitchFamily="34" charset="0"/>
-                          <a:ea typeface="Arial" pitchFamily="34" charset="-122"/>
-                          <a:cs typeface="Arial" pitchFamily="34" charset="-120"/>
-                        </a:rPr>
-                        <a:t>/5 (×2)</a:t>
-                      </a:r>
-                      <a:endParaRPr lang="en-US" sz="900" dirty="0">
-                        <a:latin typeface="Arial" charset="0"/>
-                        <a:ea typeface="Arial" charset="0"/>
-                        <a:cs typeface="Arial" charset="0"/>
-                      </a:endParaRPr>
-                    </a:p>
-                  </a:txBody>
-                  <a:tcPr marL="91440" marR="91440" marT="45720" marB="45720">
-                    <a:lnL w="6350" cap="flat" cmpd="sng" algn="ctr">
-                      <a:solidFill>
-                        <a:srgbClr val="CBD5E1"/>
-                      </a:solidFill>
-                      <a:prstDash val="solid"/>
-                      <a:round/>
-                      <a:headEnd type="none" w="med" len="med"/>
-                      <a:tailEnd type="none" w="med" len="med"/>
-                    </a:lnL>
-                    <a:lnR w="6350" cap="flat" cmpd="sng" algn="ctr">
-                      <a:solidFill>
-                        <a:srgbClr val="CBD5E1"/>
-                      </a:solidFill>
-                      <a:prstDash val="solid"/>
-                      <a:round/>
-                      <a:headEnd type="none" w="med" len="med"/>
-                      <a:tailEnd type="none" w="med" len="med"/>
-                    </a:lnR>
-                    <a:lnT w="6350" cap="flat" cmpd="sng" algn="ctr">
-                      <a:solidFill>
-                        <a:srgbClr val="CBD5E1"/>
-                      </a:solidFill>
-                      <a:prstDash val="solid"/>
-                      <a:round/>
-                      <a:headEnd type="none" w="med" len="med"/>
-                      <a:tailEnd type="none" w="med" len="med"/>
-                    </a:lnT>
-                    <a:lnB w="6350" cap="flat" cmpd="sng" algn="ctr">
-                      <a:solidFill>
-                        <a:srgbClr val="CBD5E1"/>
-                      </a:solidFill>
-                      <a:prstDash val="solid"/>
-                      <a:round/>
-                      <a:headEnd type="none" w="med" len="med"/>
-                      <a:tailEnd type="none" w="med" len="med"/>
-                    </a:lnB>
-                    <a:solidFill>
-                      <a:srgbClr val="E8EFF8"/>
-                    </a:solidFill>
-                  </a:tcPr>
-                </a:tc>
-                <a:tc>
-                  <a:txBody>
-                    <a:bodyPr/>
-                    <a:lstStyle/>
-                    <a:p>
-                      <a:pPr algn="ctr" indent="0" marL="0">
-                        <a:buNone/>
-                      </a:pPr>
-                      <a:r>
-                        <a:rPr lang="en-US" sz="900" dirty="0">
-                          <a:solidFill>
-                            <a:srgbClr val="000000"/>
-                          </a:solidFill>
-                          <a:latin typeface="Arial" pitchFamily="34" charset="0"/>
-                          <a:ea typeface="Arial" pitchFamily="34" charset="-122"/>
-                          <a:cs typeface="Arial" pitchFamily="34" charset="-120"/>
-                        </a:rPr>
-                        <a:t>9.04</a:t>
-                      </a:r>
-                      <a:endParaRPr lang="en-US" sz="900" dirty="0">
-                        <a:latin typeface="Arial" charset="0"/>
-                        <a:ea typeface="Arial" charset="0"/>
-                        <a:cs typeface="Arial" charset="0"/>
-                      </a:endParaRPr>
-                    </a:p>
-                  </a:txBody>
-                  <a:tcPr marL="91440" marR="91440" marT="45720" marB="45720">
-                    <a:lnL w="6350" cap="flat" cmpd="sng" algn="ctr">
-                      <a:solidFill>
-                        <a:srgbClr val="CBD5E1"/>
-                      </a:solidFill>
-                      <a:prstDash val="solid"/>
-                      <a:round/>
-                      <a:headEnd type="none" w="med" len="med"/>
-                      <a:tailEnd type="none" w="med" len="med"/>
-                    </a:lnL>
-                    <a:lnR w="6350" cap="flat" cmpd="sng" algn="ctr">
-                      <a:solidFill>
-                        <a:srgbClr val="CBD5E1"/>
-                      </a:solidFill>
-                      <a:prstDash val="solid"/>
-                      <a:round/>
-                      <a:headEnd type="none" w="med" len="med"/>
-                      <a:tailEnd type="none" w="med" len="med"/>
-                    </a:lnR>
-                    <a:lnT w="6350" cap="flat" cmpd="sng" algn="ctr">
-                      <a:solidFill>
-                        <a:srgbClr val="CBD5E1"/>
-                      </a:solidFill>
-                      <a:prstDash val="solid"/>
-                      <a:round/>
-                      <a:headEnd type="none" w="med" len="med"/>
-                      <a:tailEnd type="none" w="med" len="med"/>
-                    </a:lnT>
-                    <a:lnB w="6350" cap="flat" cmpd="sng" algn="ctr">
-                      <a:solidFill>
-                        <a:srgbClr val="CBD5E1"/>
-                      </a:solidFill>
-                      <a:prstDash val="solid"/>
-                      <a:round/>
-                      <a:headEnd type="none" w="med" len="med"/>
-                      <a:tailEnd type="none" w="med" len="med"/>
-                    </a:lnB>
-                    <a:solidFill>
-                      <a:srgbClr val="E8EFF8"/>
-                    </a:solidFill>
-                  </a:tcPr>
-                </a:tc>
-              </a:tr>
-              <a:tr h="201168">
-                <a:tc>
-                  <a:txBody>
-                    <a:bodyPr/>
-                    <a:lstStyle/>
-                    <a:p>
-                      <a:pPr algn="ctr" indent="0" marL="0">
-                        <a:buNone/>
-                      </a:pPr>
-                      <a:r>
-                        <a:rPr lang="en-US" sz="900" dirty="0">
-                          <a:solidFill>
-                            <a:srgbClr val="000000"/>
-                          </a:solidFill>
-                          <a:latin typeface="Arial" pitchFamily="34" charset="0"/>
-                          <a:ea typeface="Arial" pitchFamily="34" charset="-122"/>
-                          <a:cs typeface="Arial" pitchFamily="34" charset="-120"/>
-                        </a:rPr>
-                        <a:t>Booking.com</a:t>
-                      </a:r>
-                      <a:endParaRPr lang="en-US" sz="900" dirty="0">
-                        <a:latin typeface="Arial" charset="0"/>
-                        <a:ea typeface="Arial" charset="0"/>
-                        <a:cs typeface="Arial" charset="0"/>
-                      </a:endParaRPr>
-                    </a:p>
-                  </a:txBody>
-                  <a:tcPr marL="91440" marR="91440" marT="45720" marB="45720">
-                    <a:lnL w="6350" cap="flat" cmpd="sng" algn="ctr">
-                      <a:solidFill>
-                        <a:srgbClr val="CBD5E1"/>
-                      </a:solidFill>
-                      <a:prstDash val="solid"/>
-                      <a:round/>
-                      <a:headEnd type="none" w="med" len="med"/>
-                      <a:tailEnd type="none" w="med" len="med"/>
-                    </a:lnL>
-                    <a:lnR w="6350" cap="flat" cmpd="sng" algn="ctr">
-                      <a:solidFill>
-                        <a:srgbClr val="CBD5E1"/>
-                      </a:solidFill>
-                      <a:prstDash val="solid"/>
-                      <a:round/>
-                      <a:headEnd type="none" w="med" len="med"/>
-                      <a:tailEnd type="none" w="med" len="med"/>
-                    </a:lnR>
-                    <a:lnT w="6350" cap="flat" cmpd="sng" algn="ctr">
-                      <a:solidFill>
-                        <a:srgbClr val="CBD5E1"/>
-                      </a:solidFill>
-                      <a:prstDash val="solid"/>
-                      <a:round/>
-                      <a:headEnd type="none" w="med" len="med"/>
-                      <a:tailEnd type="none" w="med" len="med"/>
-                    </a:lnT>
-                    <a:lnB w="6350" cap="flat" cmpd="sng" algn="ctr">
-                      <a:solidFill>
-                        <a:srgbClr val="CBD5E1"/>
-                      </a:solidFill>
-                      <a:prstDash val="solid"/>
-                      <a:round/>
-                      <a:headEnd type="none" w="med" len="med"/>
-                      <a:tailEnd type="none" w="med" len="med"/>
-                    </a:lnB>
-                    <a:solidFill>
-                      <a:srgbClr val="FFFFFF"/>
-                    </a:solidFill>
-                  </a:tcPr>
-                </a:tc>
-                <a:tc>
-                  <a:txBody>
-                    <a:bodyPr/>
-                    <a:lstStyle/>
-                    <a:p>
-                      <a:pPr algn="ctr" indent="0" marL="0">
-                        <a:buNone/>
-                      </a:pPr>
-                      <a:r>
-                        <a:rPr lang="en-US" sz="900" dirty="0">
-                          <a:solidFill>
-                            <a:srgbClr val="000000"/>
-                          </a:solidFill>
-                          <a:latin typeface="Arial" pitchFamily="34" charset="0"/>
-                          <a:ea typeface="Arial" pitchFamily="34" charset="-122"/>
-                          <a:cs typeface="Arial" pitchFamily="34" charset="-120"/>
-                        </a:rPr>
-                        <a:t>30</a:t>
-                      </a:r>
-                      <a:endParaRPr lang="en-US" sz="900" dirty="0">
-                        <a:latin typeface="Arial" charset="0"/>
-                        <a:ea typeface="Arial" charset="0"/>
-                        <a:cs typeface="Arial" charset="0"/>
-                      </a:endParaRPr>
-                    </a:p>
-                  </a:txBody>
-                  <a:tcPr marL="91440" marR="91440" marT="45720" marB="45720">
-                    <a:lnL w="6350" cap="flat" cmpd="sng" algn="ctr">
-                      <a:solidFill>
-                        <a:srgbClr val="CBD5E1"/>
-                      </a:solidFill>
-                      <a:prstDash val="solid"/>
-                      <a:round/>
-                      <a:headEnd type="none" w="med" len="med"/>
-                      <a:tailEnd type="none" w="med" len="med"/>
-                    </a:lnL>
-                    <a:lnR w="6350" cap="flat" cmpd="sng" algn="ctr">
-                      <a:solidFill>
-                        <a:srgbClr val="CBD5E1"/>
-                      </a:solidFill>
-                      <a:prstDash val="solid"/>
-                      <a:round/>
-                      <a:headEnd type="none" w="med" len="med"/>
-                      <a:tailEnd type="none" w="med" len="med"/>
-                    </a:lnR>
-                    <a:lnT w="6350" cap="flat" cmpd="sng" algn="ctr">
-                      <a:solidFill>
-                        <a:srgbClr val="CBD5E1"/>
-                      </a:solidFill>
-                      <a:prstDash val="solid"/>
-                      <a:round/>
-                      <a:headEnd type="none" w="med" len="med"/>
-                      <a:tailEnd type="none" w="med" len="med"/>
-                    </a:lnT>
-                    <a:lnB w="6350" cap="flat" cmpd="sng" algn="ctr">
-                      <a:solidFill>
-                        <a:srgbClr val="CBD5E1"/>
-                      </a:solidFill>
-                      <a:prstDash val="solid"/>
-                      <a:round/>
-                      <a:headEnd type="none" w="med" len="med"/>
-                      <a:tailEnd type="none" w="med" len="med"/>
-                    </a:lnB>
-                    <a:solidFill>
-                      <a:srgbClr val="FFFFFF"/>
-                    </a:solidFill>
-                  </a:tcPr>
-                </a:tc>
-                <a:tc>
-                  <a:txBody>
-                    <a:bodyPr/>
-                    <a:lstStyle/>
-                    <a:p>
-                      <a:pPr algn="ctr" indent="0" marL="0">
-                        <a:buNone/>
-                      </a:pPr>
-                      <a:r>
-                        <a:rPr lang="en-US" sz="900" dirty="0">
-                          <a:solidFill>
-                            <a:srgbClr val="000000"/>
-                          </a:solidFill>
-                          <a:latin typeface="Arial" pitchFamily="34" charset="0"/>
-                          <a:ea typeface="Arial" pitchFamily="34" charset="-122"/>
-                          <a:cs typeface="Arial" pitchFamily="34" charset="-120"/>
-                        </a:rPr>
-                        <a:t>8.73</a:t>
-                      </a:r>
-                      <a:endParaRPr lang="en-US" sz="900" dirty="0">
-                        <a:latin typeface="Arial" charset="0"/>
-                        <a:ea typeface="Arial" charset="0"/>
-                        <a:cs typeface="Arial" charset="0"/>
-                      </a:endParaRPr>
-                    </a:p>
-                  </a:txBody>
-                  <a:tcPr marL="91440" marR="91440" marT="45720" marB="45720">
-                    <a:lnL w="6350" cap="flat" cmpd="sng" algn="ctr">
-                      <a:solidFill>
-                        <a:srgbClr val="CBD5E1"/>
-                      </a:solidFill>
-                      <a:prstDash val="solid"/>
-                      <a:round/>
-                      <a:headEnd type="none" w="med" len="med"/>
-                      <a:tailEnd type="none" w="med" len="med"/>
-                    </a:lnL>
-                    <a:lnR w="6350" cap="flat" cmpd="sng" algn="ctr">
-                      <a:solidFill>
-                        <a:srgbClr val="CBD5E1"/>
-                      </a:solidFill>
-                      <a:prstDash val="solid"/>
-                      <a:round/>
-                      <a:headEnd type="none" w="med" len="med"/>
-                      <a:tailEnd type="none" w="med" len="med"/>
-                    </a:lnR>
-                    <a:lnT w="6350" cap="flat" cmpd="sng" algn="ctr">
-                      <a:solidFill>
-                        <a:srgbClr val="CBD5E1"/>
-                      </a:solidFill>
-                      <a:prstDash val="solid"/>
-                      <a:round/>
-                      <a:headEnd type="none" w="med" len="med"/>
-                      <a:tailEnd type="none" w="med" len="med"/>
-                    </a:lnT>
-                    <a:lnB w="6350" cap="flat" cmpd="sng" algn="ctr">
-                      <a:solidFill>
-                        <a:srgbClr val="CBD5E1"/>
-                      </a:solidFill>
-                      <a:prstDash val="solid"/>
-                      <a:round/>
-                      <a:headEnd type="none" w="med" len="med"/>
-                      <a:tailEnd type="none" w="med" len="med"/>
-                    </a:lnB>
-                    <a:solidFill>
-                      <a:srgbClr val="FFFFFF"/>
-                    </a:solidFill>
-                  </a:tcPr>
-                </a:tc>
-                <a:tc>
-                  <a:txBody>
-                    <a:bodyPr/>
-                    <a:lstStyle/>
-                    <a:p>
-                      <a:pPr algn="ctr" indent="0" marL="0">
-                        <a:buNone/>
-                      </a:pPr>
-                      <a:r>
-                        <a:rPr lang="en-US" sz="900" dirty="0">
-                          <a:solidFill>
-                            <a:srgbClr val="000000"/>
-                          </a:solidFill>
-                          <a:latin typeface="Arial" pitchFamily="34" charset="0"/>
-                          <a:ea typeface="Arial" pitchFamily="34" charset="-122"/>
-                          <a:cs typeface="Arial" pitchFamily="34" charset="-120"/>
-                        </a:rPr>
-                        <a:t>/10</a:t>
-                      </a:r>
-                      <a:endParaRPr lang="en-US" sz="900" dirty="0">
-                        <a:latin typeface="Arial" charset="0"/>
-                        <a:ea typeface="Arial" charset="0"/>
-                        <a:cs typeface="Arial" charset="0"/>
-                      </a:endParaRPr>
-                    </a:p>
-                  </a:txBody>
-                  <a:tcPr marL="91440" marR="91440" marT="45720" marB="45720">
-                    <a:lnL w="6350" cap="flat" cmpd="sng" algn="ctr">
-                      <a:solidFill>
-                        <a:srgbClr val="CBD5E1"/>
-                      </a:solidFill>
-                      <a:prstDash val="solid"/>
-                      <a:round/>
-                      <a:headEnd type="none" w="med" len="med"/>
-                      <a:tailEnd type="none" w="med" len="med"/>
-                    </a:lnL>
-                    <a:lnR w="6350" cap="flat" cmpd="sng" algn="ctr">
-                      <a:solidFill>
-                        <a:srgbClr val="CBD5E1"/>
-                      </a:solidFill>
-                      <a:prstDash val="solid"/>
-                      <a:round/>
-                      <a:headEnd type="none" w="med" len="med"/>
-                      <a:tailEnd type="none" w="med" len="med"/>
-                    </a:lnR>
-                    <a:lnT w="6350" cap="flat" cmpd="sng" algn="ctr">
-                      <a:solidFill>
-                        <a:srgbClr val="CBD5E1"/>
-                      </a:solidFill>
-                      <a:prstDash val="solid"/>
-                      <a:round/>
-                      <a:headEnd type="none" w="med" len="med"/>
-                      <a:tailEnd type="none" w="med" len="med"/>
-                    </a:lnT>
-                    <a:lnB w="6350" cap="flat" cmpd="sng" algn="ctr">
-                      <a:solidFill>
-                        <a:srgbClr val="CBD5E1"/>
-                      </a:solidFill>
-                      <a:prstDash val="solid"/>
-                      <a:round/>
-                      <a:headEnd type="none" w="med" len="med"/>
-                      <a:tailEnd type="none" w="med" len="med"/>
-                    </a:lnB>
-                    <a:solidFill>
-                      <a:srgbClr val="FFFFFF"/>
-                    </a:solidFill>
-                  </a:tcPr>
-                </a:tc>
-                <a:tc>
-                  <a:txBody>
-                    <a:bodyPr/>
-                    <a:lstStyle/>
-                    <a:p>
-                      <a:pPr algn="ctr" indent="0" marL="0">
-                        <a:buNone/>
-                      </a:pPr>
-                      <a:r>
-                        <a:rPr lang="en-US" sz="900" dirty="0">
-                          <a:solidFill>
-                            <a:srgbClr val="000000"/>
-                          </a:solidFill>
-                          <a:latin typeface="Arial" pitchFamily="34" charset="0"/>
-                          <a:ea typeface="Arial" pitchFamily="34" charset="-122"/>
-                          <a:cs typeface="Arial" pitchFamily="34" charset="-120"/>
-                        </a:rPr>
-                        <a:t>8.73</a:t>
+                        <a:t>8.5</a:t>
                       </a:r>
                       <a:endParaRPr lang="en-US" sz="900" dirty="0">
                         <a:latin typeface="Arial" charset="0"/>
@@ -9859,7 +10182,7 @@
                 <a:ea typeface="Arial" pitchFamily="34" charset="-122"/>
                 <a:cs typeface="Arial" pitchFamily="34" charset="-120"/>
               </a:rPr>
-              <a:t>136件（95.1%）</a:t>
+              <a:t>81件（95.3%）</a:t>
             </a:r>
             <a:endParaRPr lang="en-US" sz="1100" dirty="0"/>
           </a:p>
@@ -9957,7 +10280,7 @@
                 <a:ea typeface="Arial" pitchFamily="34" charset="-122"/>
                 <a:cs typeface="Arial" pitchFamily="34" charset="-120"/>
               </a:rPr>
-              <a:t>5件（3.5%）</a:t>
+              <a:t>2件（2.4%）</a:t>
             </a:r>
             <a:endParaRPr lang="en-US" sz="1100" dirty="0"/>
           </a:p>
@@ -10055,7 +10378,7 @@
                 <a:ea typeface="Arial" pitchFamily="34" charset="-122"/>
                 <a:cs typeface="Arial" pitchFamily="34" charset="-120"/>
               </a:rPr>
-              <a:t>2件（1.4%）</a:t>
+              <a:t>2件（2.4%）</a:t>
             </a:r>
             <a:endParaRPr lang="en-US" sz="1100" dirty="0"/>
           </a:p>
@@ -10467,7 +10790,7 @@
                 <a:ea typeface="Arial" pitchFamily="34" charset="-122"/>
                 <a:cs typeface="Arial" pitchFamily="34" charset="-120"/>
               </a:rPr>
-              <a:t>朝食もプリンセスエリアにはケーキありませんでした</a:t>
+              <a:t>朝食ビュッフェも種類は物凄い多いわけではないですが、大人も子供も満足です</a:t>
             </a:r>
             <a:endParaRPr lang="en-US" sz="900" dirty="0"/>
           </a:p>
@@ -10506,7 +10829,7 @@
                 <a:ea typeface="Arial" pitchFamily="34" charset="-122"/>
                 <a:cs typeface="Arial" pitchFamily="34" charset="-120"/>
               </a:rPr>
-              <a:t>「ディズニーシャトル良い 朝食安い（子供メニュー中心運営） 周辺食堂はいくつもありません（ホテル1階ローソンあり） ...」</a:t>
+              <a:t>「朝食もバイキング形式になっており、子供たちも好きなものを食べて嬉しそうでした」</a:t>
             </a:r>
             <a:endParaRPr lang="en-US" sz="900" dirty="0"/>
           </a:p>
@@ -10651,6 +10974,452 @@
                 <a:ea typeface="Arial" pitchFamily="34" charset="-122"/>
                 <a:cs typeface="Arial" pitchFamily="34" charset="-120"/>
               </a:rPr>
+              <a:t>スタッフの対応</a:t>
+            </a:r>
+            <a:endParaRPr lang="en-US" sz="1300" dirty="0"/>
+          </a:p>
+        </p:txBody>
+      </p:sp>
+      <p:sp>
+        <p:nvSpPr>
+          <p:cNvPr id="17" name="Text 15"/>
+          <p:cNvSpPr/>
+          <p:nvPr/>
+        </p:nvSpPr>
+        <p:spPr>
+          <a:xfrm>
+            <a:off x="3429000" y="1417320"/>
+            <a:ext cx="2377440" cy="365760"/>
+          </a:xfrm>
+          <a:prstGeom prst="rect">
+            <a:avLst/>
+          </a:prstGeom>
+          <a:noFill/>
+          <a:ln/>
+        </p:spPr>
+        <p:txBody>
+          <a:bodyPr wrap="square" lIns="0" tIns="0" rIns="0" bIns="0" rtlCol="0" anchor="ctr"/>
+          <a:lstStyle/>
+          <a:p>
+            <a:pPr indent="0" marL="0">
+              <a:buNone/>
+            </a:pPr>
+            <a:r>
+              <a:rPr lang="en-US" sz="900" dirty="0">
+                <a:solidFill>
+                  <a:srgbClr val="64748B"/>
+                </a:solidFill>
+                <a:latin typeface="Arial" pitchFamily="34" charset="0"/>
+                <a:ea typeface="Arial" pitchFamily="34" charset="-122"/>
+                <a:cs typeface="Arial" pitchFamily="34" charset="-120"/>
+              </a:rPr>
+              <a:t>立地的にも車で２０分も掛からない場所にあり、スタッフの方々対応も良く、気持ち良く利用させていただく事が出来ました</a:t>
+            </a:r>
+            <a:endParaRPr lang="en-US" sz="900" dirty="0"/>
+          </a:p>
+        </p:txBody>
+      </p:sp>
+      <p:sp>
+        <p:nvSpPr>
+          <p:cNvPr id="18" name="Text 16"/>
+          <p:cNvSpPr/>
+          <p:nvPr/>
+        </p:nvSpPr>
+        <p:spPr>
+          <a:xfrm>
+            <a:off x="3429000" y="1828800"/>
+            <a:ext cx="2377440" cy="640080"/>
+          </a:xfrm>
+          <a:prstGeom prst="rect">
+            <a:avLst/>
+          </a:prstGeom>
+          <a:noFill/>
+          <a:ln/>
+        </p:spPr>
+        <p:txBody>
+          <a:bodyPr wrap="square" lIns="0" tIns="0" rIns="0" bIns="0" rtlCol="0" anchor="ctr"/>
+          <a:lstStyle/>
+          <a:p>
+            <a:pPr indent="0" marL="0">
+              <a:buNone/>
+            </a:pPr>
+            <a:r>
+              <a:rPr lang="en-US" sz="900" i="1" dirty="0">
+                <a:solidFill>
+                  <a:srgbClr val="3B7DD8"/>
+                </a:solidFill>
+                <a:latin typeface="Arial" pitchFamily="34" charset="0"/>
+                <a:ea typeface="Arial" pitchFamily="34" charset="-122"/>
+                <a:cs typeface="Arial" pitchFamily="34" charset="-120"/>
+              </a:rPr>
+              <a:t>「無料送迎バス1本でディズニーに行けるので、とても便利でした♡ お部屋の壁のパズルのところに、隠されたカードがあって...」</a:t>
+            </a:r>
+            <a:endParaRPr lang="en-US" sz="900" dirty="0"/>
+          </a:p>
+        </p:txBody>
+      </p:sp>
+      <p:sp>
+        <p:nvSpPr>
+          <p:cNvPr id="19" name="Shape 17"/>
+          <p:cNvSpPr/>
+          <p:nvPr/>
+        </p:nvSpPr>
+        <p:spPr>
+          <a:xfrm>
+            <a:off x="6126480" y="1051560"/>
+            <a:ext cx="2651760" cy="1600200"/>
+          </a:xfrm>
+          <a:prstGeom prst="rect">
+            <a:avLst/>
+          </a:prstGeom>
+          <a:solidFill>
+            <a:srgbClr val="FFFFFF"/>
+          </a:solidFill>
+          <a:ln/>
+          <a:effectLst>
+            <a:outerShdw sx="100000" sy="100000" kx="0" ky="0" algn="bl" rotWithShape="0" blurRad="50800" dist="25400" dir="8100000">
+              <a:srgbClr val="000000">
+                <a:alpha val="10000"/>
+              </a:srgbClr>
+            </a:outerShdw>
+          </a:effectLst>
+        </p:spPr>
+      </p:sp>
+      <p:sp>
+        <p:nvSpPr>
+          <p:cNvPr id="20" name="Shape 18"/>
+          <p:cNvSpPr/>
+          <p:nvPr/>
+        </p:nvSpPr>
+        <p:spPr>
+          <a:xfrm>
+            <a:off x="6126480" y="1051560"/>
+            <a:ext cx="54864" cy="1600200"/>
+          </a:xfrm>
+          <a:prstGeom prst="rect">
+            <a:avLst/>
+          </a:prstGeom>
+          <a:solidFill>
+            <a:srgbClr val="16A34A"/>
+          </a:solidFill>
+          <a:ln/>
+        </p:spPr>
+      </p:sp>
+      <p:sp>
+        <p:nvSpPr>
+          <p:cNvPr id="21" name="Shape 19"/>
+          <p:cNvSpPr/>
+          <p:nvPr/>
+        </p:nvSpPr>
+        <p:spPr>
+          <a:xfrm>
+            <a:off x="7955280" y="1124712"/>
+            <a:ext cx="658368" cy="228600"/>
+          </a:xfrm>
+          <a:prstGeom prst="rect">
+            <a:avLst/>
+          </a:prstGeom>
+          <a:solidFill>
+            <a:srgbClr val="DCFCE7"/>
+          </a:solidFill>
+          <a:ln/>
+        </p:spPr>
+      </p:sp>
+      <p:sp>
+        <p:nvSpPr>
+          <p:cNvPr id="22" name="Text 20"/>
+          <p:cNvSpPr/>
+          <p:nvPr/>
+        </p:nvSpPr>
+        <p:spPr>
+          <a:xfrm>
+            <a:off x="7955280" y="1124712"/>
+            <a:ext cx="658368" cy="228600"/>
+          </a:xfrm>
+          <a:prstGeom prst="rect">
+            <a:avLst/>
+          </a:prstGeom>
+          <a:noFill/>
+          <a:ln/>
+        </p:spPr>
+        <p:txBody>
+          <a:bodyPr wrap="square" lIns="0" tIns="0" rIns="0" bIns="0" rtlCol="0" anchor="ctr"/>
+          <a:lstStyle/>
+          <a:p>
+            <a:pPr algn="ctr" indent="0" marL="0">
+              <a:buNone/>
+            </a:pPr>
+            <a:r>
+              <a:rPr lang="en-US" sz="900" b="1" dirty="0">
+                <a:solidFill>
+                  <a:srgbClr val="16A34A"/>
+                </a:solidFill>
+                <a:latin typeface="Arial" pitchFamily="34" charset="0"/>
+                <a:ea typeface="Arial" pitchFamily="34" charset="-122"/>
+                <a:cs typeface="Arial" pitchFamily="34" charset="-120"/>
+              </a:rPr>
+              <a:t>20件+</a:t>
+            </a:r>
+            <a:endParaRPr lang="en-US" sz="900" dirty="0"/>
+          </a:p>
+        </p:txBody>
+      </p:sp>
+      <p:sp>
+        <p:nvSpPr>
+          <p:cNvPr id="23" name="Text 21"/>
+          <p:cNvSpPr/>
+          <p:nvPr/>
+        </p:nvSpPr>
+        <p:spPr>
+          <a:xfrm>
+            <a:off x="6263640" y="1124712"/>
+            <a:ext cx="1645920" cy="274320"/>
+          </a:xfrm>
+          <a:prstGeom prst="rect">
+            <a:avLst/>
+          </a:prstGeom>
+          <a:noFill/>
+          <a:ln/>
+        </p:spPr>
+        <p:txBody>
+          <a:bodyPr wrap="square" lIns="0" tIns="0" rIns="0" bIns="0" rtlCol="0" anchor="ctr"/>
+          <a:lstStyle/>
+          <a:p>
+            <a:pPr indent="0" marL="0">
+              <a:buNone/>
+            </a:pPr>
+            <a:r>
+              <a:rPr lang="en-US" sz="1300" b="1" dirty="0">
+                <a:solidFill>
+                  <a:srgbClr val="1A2744"/>
+                </a:solidFill>
+                <a:latin typeface="Arial" pitchFamily="34" charset="0"/>
+                <a:ea typeface="Arial" pitchFamily="34" charset="-122"/>
+                <a:cs typeface="Arial" pitchFamily="34" charset="-120"/>
+              </a:rPr>
+              <a:t>立地・アクセス</a:t>
+            </a:r>
+            <a:endParaRPr lang="en-US" sz="1300" dirty="0"/>
+          </a:p>
+        </p:txBody>
+      </p:sp>
+      <p:sp>
+        <p:nvSpPr>
+          <p:cNvPr id="24" name="Text 22"/>
+          <p:cNvSpPr/>
+          <p:nvPr/>
+        </p:nvSpPr>
+        <p:spPr>
+          <a:xfrm>
+            <a:off x="6263640" y="1417320"/>
+            <a:ext cx="2377440" cy="365760"/>
+          </a:xfrm>
+          <a:prstGeom prst="rect">
+            <a:avLst/>
+          </a:prstGeom>
+          <a:noFill/>
+          <a:ln/>
+        </p:spPr>
+        <p:txBody>
+          <a:bodyPr wrap="square" lIns="0" tIns="0" rIns="0" bIns="0" rtlCol="0" anchor="ctr"/>
+          <a:lstStyle/>
+          <a:p>
+            <a:pPr indent="0" marL="0">
+              <a:buNone/>
+            </a:pPr>
+            <a:r>
+              <a:rPr lang="en-US" sz="900" dirty="0">
+                <a:solidFill>
+                  <a:srgbClr val="64748B"/>
+                </a:solidFill>
+                <a:latin typeface="Arial" pitchFamily="34" charset="0"/>
+                <a:ea typeface="Arial" pitchFamily="34" charset="-122"/>
+                <a:cs typeface="Arial" pitchFamily="34" charset="-120"/>
+              </a:rPr>
+              <a:t>立地的にも車で２０分も掛からない場所にあり、スタッフの方々対応も良く、気持ち良く利用させていただく事が出来ました</a:t>
+            </a:r>
+            <a:endParaRPr lang="en-US" sz="900" dirty="0"/>
+          </a:p>
+        </p:txBody>
+      </p:sp>
+      <p:sp>
+        <p:nvSpPr>
+          <p:cNvPr id="25" name="Text 23"/>
+          <p:cNvSpPr/>
+          <p:nvPr/>
+        </p:nvSpPr>
+        <p:spPr>
+          <a:xfrm>
+            <a:off x="6263640" y="1828800"/>
+            <a:ext cx="2377440" cy="640080"/>
+          </a:xfrm>
+          <a:prstGeom prst="rect">
+            <a:avLst/>
+          </a:prstGeom>
+          <a:noFill/>
+          <a:ln/>
+        </p:spPr>
+        <p:txBody>
+          <a:bodyPr wrap="square" lIns="0" tIns="0" rIns="0" bIns="0" rtlCol="0" anchor="ctr"/>
+          <a:lstStyle/>
+          <a:p>
+            <a:pPr indent="0" marL="0">
+              <a:buNone/>
+            </a:pPr>
+            <a:r>
+              <a:rPr lang="en-US" sz="900" i="1" dirty="0">
+                <a:solidFill>
+                  <a:srgbClr val="3B7DD8"/>
+                </a:solidFill>
+                <a:latin typeface="Arial" pitchFamily="34" charset="0"/>
+                <a:ea typeface="Arial" pitchFamily="34" charset="-122"/>
+                <a:cs typeface="Arial" pitchFamily="34" charset="-120"/>
+              </a:rPr>
+              <a:t>「ディズニーランドからも近く、お部屋も広くてとても満足できました」</a:t>
+            </a:r>
+            <a:endParaRPr lang="en-US" sz="900" dirty="0"/>
+          </a:p>
+        </p:txBody>
+      </p:sp>
+      <p:sp>
+        <p:nvSpPr>
+          <p:cNvPr id="26" name="Shape 24"/>
+          <p:cNvSpPr/>
+          <p:nvPr/>
+        </p:nvSpPr>
+        <p:spPr>
+          <a:xfrm>
+            <a:off x="457200" y="2880360"/>
+            <a:ext cx="2651760" cy="1600200"/>
+          </a:xfrm>
+          <a:prstGeom prst="rect">
+            <a:avLst/>
+          </a:prstGeom>
+          <a:solidFill>
+            <a:srgbClr val="FFFFFF"/>
+          </a:solidFill>
+          <a:ln/>
+          <a:effectLst>
+            <a:outerShdw sx="100000" sy="100000" kx="0" ky="0" algn="bl" rotWithShape="0" blurRad="50800" dist="25400" dir="8100000">
+              <a:srgbClr val="000000">
+                <a:alpha val="10000"/>
+              </a:srgbClr>
+            </a:outerShdw>
+          </a:effectLst>
+        </p:spPr>
+      </p:sp>
+      <p:sp>
+        <p:nvSpPr>
+          <p:cNvPr id="27" name="Shape 25"/>
+          <p:cNvSpPr/>
+          <p:nvPr/>
+        </p:nvSpPr>
+        <p:spPr>
+          <a:xfrm>
+            <a:off x="457200" y="2880360"/>
+            <a:ext cx="54864" cy="1600200"/>
+          </a:xfrm>
+          <a:prstGeom prst="rect">
+            <a:avLst/>
+          </a:prstGeom>
+          <a:solidFill>
+            <a:srgbClr val="16A34A"/>
+          </a:solidFill>
+          <a:ln/>
+        </p:spPr>
+      </p:sp>
+      <p:sp>
+        <p:nvSpPr>
+          <p:cNvPr id="28" name="Shape 26"/>
+          <p:cNvSpPr/>
+          <p:nvPr/>
+        </p:nvSpPr>
+        <p:spPr>
+          <a:xfrm>
+            <a:off x="2286000" y="2953512"/>
+            <a:ext cx="658368" cy="228600"/>
+          </a:xfrm>
+          <a:prstGeom prst="rect">
+            <a:avLst/>
+          </a:prstGeom>
+          <a:solidFill>
+            <a:srgbClr val="DCFCE7"/>
+          </a:solidFill>
+          <a:ln/>
+        </p:spPr>
+      </p:sp>
+      <p:sp>
+        <p:nvSpPr>
+          <p:cNvPr id="29" name="Text 27"/>
+          <p:cNvSpPr/>
+          <p:nvPr/>
+        </p:nvSpPr>
+        <p:spPr>
+          <a:xfrm>
+            <a:off x="2286000" y="2953512"/>
+            <a:ext cx="658368" cy="228600"/>
+          </a:xfrm>
+          <a:prstGeom prst="rect">
+            <a:avLst/>
+          </a:prstGeom>
+          <a:noFill/>
+          <a:ln/>
+        </p:spPr>
+        <p:txBody>
+          <a:bodyPr wrap="square" lIns="0" tIns="0" rIns="0" bIns="0" rtlCol="0" anchor="ctr"/>
+          <a:lstStyle/>
+          <a:p>
+            <a:pPr algn="ctr" indent="0" marL="0">
+              <a:buNone/>
+            </a:pPr>
+            <a:r>
+              <a:rPr lang="en-US" sz="900" b="1" dirty="0">
+                <a:solidFill>
+                  <a:srgbClr val="16A34A"/>
+                </a:solidFill>
+                <a:latin typeface="Arial" pitchFamily="34" charset="0"/>
+                <a:ea typeface="Arial" pitchFamily="34" charset="-122"/>
+                <a:cs typeface="Arial" pitchFamily="34" charset="-120"/>
+              </a:rPr>
+              <a:t>20件+</a:t>
+            </a:r>
+            <a:endParaRPr lang="en-US" sz="900" dirty="0"/>
+          </a:p>
+        </p:txBody>
+      </p:sp>
+      <p:sp>
+        <p:nvSpPr>
+          <p:cNvPr id="30" name="Text 28"/>
+          <p:cNvSpPr/>
+          <p:nvPr/>
+        </p:nvSpPr>
+        <p:spPr>
+          <a:xfrm>
+            <a:off x="594360" y="2953512"/>
+            <a:ext cx="1645920" cy="274320"/>
+          </a:xfrm>
+          <a:prstGeom prst="rect">
+            <a:avLst/>
+          </a:prstGeom>
+          <a:noFill/>
+          <a:ln/>
+        </p:spPr>
+        <p:txBody>
+          <a:bodyPr wrap="square" lIns="0" tIns="0" rIns="0" bIns="0" rtlCol="0" anchor="ctr"/>
+          <a:lstStyle/>
+          <a:p>
+            <a:pPr indent="0" marL="0">
+              <a:buNone/>
+            </a:pPr>
+            <a:r>
+              <a:rPr lang="en-US" sz="1300" b="1" dirty="0">
+                <a:solidFill>
+                  <a:srgbClr val="1A2744"/>
+                </a:solidFill>
+                <a:latin typeface="Arial" pitchFamily="34" charset="0"/>
+                <a:ea typeface="Arial" pitchFamily="34" charset="-122"/>
+                <a:cs typeface="Arial" pitchFamily="34" charset="-120"/>
+              </a:rPr>
               <a:t>快適さ・設備</a:t>
             </a:r>
             <a:endParaRPr lang="en-US" sz="1300" dirty="0"/>
@@ -10659,13 +11428,13 @@
       </p:sp>
       <p:sp>
         <p:nvSpPr>
-          <p:cNvPr id="17" name="Text 15"/>
-          <p:cNvSpPr/>
-          <p:nvPr/>
-        </p:nvSpPr>
-        <p:spPr>
-          <a:xfrm>
-            <a:off x="3429000" y="1417320"/>
+          <p:cNvPr id="31" name="Text 29"/>
+          <p:cNvSpPr/>
+          <p:nvPr/>
+        </p:nvSpPr>
+        <p:spPr>
+          <a:xfrm>
+            <a:off x="594360" y="3246120"/>
             <a:ext cx="2377440" cy="365760"/>
           </a:xfrm>
           <a:prstGeom prst="rect">
@@ -10698,13 +11467,13 @@
       </p:sp>
       <p:sp>
         <p:nvSpPr>
-          <p:cNvPr id="18" name="Text 16"/>
-          <p:cNvSpPr/>
-          <p:nvPr/>
-        </p:nvSpPr>
-        <p:spPr>
-          <a:xfrm>
-            <a:off x="3429000" y="1828800"/>
+          <p:cNvPr id="32" name="Text 30"/>
+          <p:cNvSpPr/>
+          <p:nvPr/>
+        </p:nvSpPr>
+        <p:spPr>
+          <a:xfrm>
+            <a:off x="594360" y="3657600"/>
             <a:ext cx="2377440" cy="640080"/>
           </a:xfrm>
           <a:prstGeom prst="rect">
@@ -10737,13 +11506,13 @@
       </p:sp>
       <p:sp>
         <p:nvSpPr>
-          <p:cNvPr id="19" name="Shape 17"/>
-          <p:cNvSpPr/>
-          <p:nvPr/>
-        </p:nvSpPr>
-        <p:spPr>
-          <a:xfrm>
-            <a:off x="6126480" y="1051560"/>
+          <p:cNvPr id="33" name="Shape 31"/>
+          <p:cNvSpPr/>
+          <p:nvPr/>
+        </p:nvSpPr>
+        <p:spPr>
+          <a:xfrm>
+            <a:off x="3291840" y="2880360"/>
             <a:ext cx="2651760" cy="1600200"/>
           </a:xfrm>
           <a:prstGeom prst="rect">
@@ -10764,13 +11533,13 @@
       </p:sp>
       <p:sp>
         <p:nvSpPr>
-          <p:cNvPr id="20" name="Shape 18"/>
-          <p:cNvSpPr/>
-          <p:nvPr/>
-        </p:nvSpPr>
-        <p:spPr>
-          <a:xfrm>
-            <a:off x="6126480" y="1051560"/>
+          <p:cNvPr id="34" name="Shape 32"/>
+          <p:cNvSpPr/>
+          <p:nvPr/>
+        </p:nvSpPr>
+        <p:spPr>
+          <a:xfrm>
+            <a:off x="3291840" y="2880360"/>
             <a:ext cx="54864" cy="1600200"/>
           </a:xfrm>
           <a:prstGeom prst="rect">
@@ -10784,13 +11553,13 @@
       </p:sp>
       <p:sp>
         <p:nvSpPr>
-          <p:cNvPr id="21" name="Shape 19"/>
-          <p:cNvSpPr/>
-          <p:nvPr/>
-        </p:nvSpPr>
-        <p:spPr>
-          <a:xfrm>
-            <a:off x="7955280" y="1124712"/>
+          <p:cNvPr id="35" name="Shape 33"/>
+          <p:cNvSpPr/>
+          <p:nvPr/>
+        </p:nvSpPr>
+        <p:spPr>
+          <a:xfrm>
+            <a:off x="5120640" y="2953512"/>
             <a:ext cx="658368" cy="228600"/>
           </a:xfrm>
           <a:prstGeom prst="rect">
@@ -10804,13 +11573,13 @@
       </p:sp>
       <p:sp>
         <p:nvSpPr>
-          <p:cNvPr id="22" name="Text 20"/>
-          <p:cNvSpPr/>
-          <p:nvPr/>
-        </p:nvSpPr>
-        <p:spPr>
-          <a:xfrm>
-            <a:off x="7955280" y="1124712"/>
+          <p:cNvPr id="36" name="Text 34"/>
+          <p:cNvSpPr/>
+          <p:nvPr/>
+        </p:nvSpPr>
+        <p:spPr>
+          <a:xfrm>
+            <a:off x="5120640" y="2953512"/>
             <a:ext cx="658368" cy="228600"/>
           </a:xfrm>
           <a:prstGeom prst="rect">
@@ -10835,453 +11604,7 @@
                 <a:ea typeface="Arial" pitchFamily="34" charset="-122"/>
                 <a:cs typeface="Arial" pitchFamily="34" charset="-120"/>
               </a:rPr>
-              <a:t>20件+</a:t>
-            </a:r>
-            <a:endParaRPr lang="en-US" sz="900" dirty="0"/>
-          </a:p>
-        </p:txBody>
-      </p:sp>
-      <p:sp>
-        <p:nvSpPr>
-          <p:cNvPr id="23" name="Text 21"/>
-          <p:cNvSpPr/>
-          <p:nvPr/>
-        </p:nvSpPr>
-        <p:spPr>
-          <a:xfrm>
-            <a:off x="6263640" y="1124712"/>
-            <a:ext cx="1645920" cy="274320"/>
-          </a:xfrm>
-          <a:prstGeom prst="rect">
-            <a:avLst/>
-          </a:prstGeom>
-          <a:noFill/>
-          <a:ln/>
-        </p:spPr>
-        <p:txBody>
-          <a:bodyPr wrap="square" lIns="0" tIns="0" rIns="0" bIns="0" rtlCol="0" anchor="ctr"/>
-          <a:lstStyle/>
-          <a:p>
-            <a:pPr indent="0" marL="0">
-              <a:buNone/>
-            </a:pPr>
-            <a:r>
-              <a:rPr lang="en-US" sz="1300" b="1" dirty="0">
-                <a:solidFill>
-                  <a:srgbClr val="1A2744"/>
-                </a:solidFill>
-                <a:latin typeface="Arial" pitchFamily="34" charset="0"/>
-                <a:ea typeface="Arial" pitchFamily="34" charset="-122"/>
-                <a:cs typeface="Arial" pitchFamily="34" charset="-120"/>
-              </a:rPr>
-              <a:t>スタッフの対応</a:t>
-            </a:r>
-            <a:endParaRPr lang="en-US" sz="1300" dirty="0"/>
-          </a:p>
-        </p:txBody>
-      </p:sp>
-      <p:sp>
-        <p:nvSpPr>
-          <p:cNvPr id="24" name="Text 22"/>
-          <p:cNvSpPr/>
-          <p:nvPr/>
-        </p:nvSpPr>
-        <p:spPr>
-          <a:xfrm>
-            <a:off x="6263640" y="1417320"/>
-            <a:ext cx="2377440" cy="365760"/>
-          </a:xfrm>
-          <a:prstGeom prst="rect">
-            <a:avLst/>
-          </a:prstGeom>
-          <a:noFill/>
-          <a:ln/>
-        </p:spPr>
-        <p:txBody>
-          <a:bodyPr wrap="square" lIns="0" tIns="0" rIns="0" bIns="0" rtlCol="0" anchor="ctr"/>
-          <a:lstStyle/>
-          <a:p>
-            <a:pPr indent="0" marL="0">
-              <a:buNone/>
-            </a:pPr>
-            <a:r>
-              <a:rPr lang="en-US" sz="900" dirty="0">
-                <a:solidFill>
-                  <a:srgbClr val="64748B"/>
-                </a:solidFill>
-                <a:latin typeface="Arial" pitchFamily="34" charset="0"/>
-                <a:ea typeface="Arial" pitchFamily="34" charset="-122"/>
-                <a:cs typeface="Arial" pitchFamily="34" charset="-120"/>
-              </a:rPr>
-              <a:t>今回初めて自動チェックインを利用しましたが、便利ですし早いと思いますがフロントの方とお話せずだったのでわからないこ...</a:t>
-            </a:r>
-            <a:endParaRPr lang="en-US" sz="900" dirty="0"/>
-          </a:p>
-        </p:txBody>
-      </p:sp>
-      <p:sp>
-        <p:nvSpPr>
-          <p:cNvPr id="25" name="Text 23"/>
-          <p:cNvSpPr/>
-          <p:nvPr/>
-        </p:nvSpPr>
-        <p:spPr>
-          <a:xfrm>
-            <a:off x="6263640" y="1828800"/>
-            <a:ext cx="2377440" cy="640080"/>
-          </a:xfrm>
-          <a:prstGeom prst="rect">
-            <a:avLst/>
-          </a:prstGeom>
-          <a:noFill/>
-          <a:ln/>
-        </p:spPr>
-        <p:txBody>
-          <a:bodyPr wrap="square" lIns="0" tIns="0" rIns="0" bIns="0" rtlCol="0" anchor="ctr"/>
-          <a:lstStyle/>
-          <a:p>
-            <a:pPr indent="0" marL="0">
-              <a:buNone/>
-            </a:pPr>
-            <a:r>
-              <a:rPr lang="en-US" sz="900" i="1" dirty="0">
-                <a:solidFill>
-                  <a:srgbClr val="3B7DD8"/>
-                </a:solidFill>
-                <a:latin typeface="Arial" pitchFamily="34" charset="0"/>
-                <a:ea typeface="Arial" pitchFamily="34" charset="-122"/>
-                <a:cs typeface="Arial" pitchFamily="34" charset="-120"/>
-              </a:rPr>
-              <a:t>「staff e servizio impeccabili stanza troppo stretta 部屋が狭すぎる」</a:t>
-            </a:r>
-            <a:endParaRPr lang="en-US" sz="900" dirty="0"/>
-          </a:p>
-        </p:txBody>
-      </p:sp>
-      <p:sp>
-        <p:nvSpPr>
-          <p:cNvPr id="26" name="Shape 24"/>
-          <p:cNvSpPr/>
-          <p:nvPr/>
-        </p:nvSpPr>
-        <p:spPr>
-          <a:xfrm>
-            <a:off x="457200" y="2880360"/>
-            <a:ext cx="2651760" cy="1600200"/>
-          </a:xfrm>
-          <a:prstGeom prst="rect">
-            <a:avLst/>
-          </a:prstGeom>
-          <a:solidFill>
-            <a:srgbClr val="FFFFFF"/>
-          </a:solidFill>
-          <a:ln/>
-          <a:effectLst>
-            <a:outerShdw sx="100000" sy="100000" kx="0" ky="0" algn="bl" rotWithShape="0" blurRad="50800" dist="25400" dir="8100000">
-              <a:srgbClr val="000000">
-                <a:alpha val="10000"/>
-              </a:srgbClr>
-            </a:outerShdw>
-          </a:effectLst>
-        </p:spPr>
-      </p:sp>
-      <p:sp>
-        <p:nvSpPr>
-          <p:cNvPr id="27" name="Shape 25"/>
-          <p:cNvSpPr/>
-          <p:nvPr/>
-        </p:nvSpPr>
-        <p:spPr>
-          <a:xfrm>
-            <a:off x="457200" y="2880360"/>
-            <a:ext cx="54864" cy="1600200"/>
-          </a:xfrm>
-          <a:prstGeom prst="rect">
-            <a:avLst/>
-          </a:prstGeom>
-          <a:solidFill>
-            <a:srgbClr val="16A34A"/>
-          </a:solidFill>
-          <a:ln/>
-        </p:spPr>
-      </p:sp>
-      <p:sp>
-        <p:nvSpPr>
-          <p:cNvPr id="28" name="Shape 26"/>
-          <p:cNvSpPr/>
-          <p:nvPr/>
-        </p:nvSpPr>
-        <p:spPr>
-          <a:xfrm>
-            <a:off x="2286000" y="2953512"/>
-            <a:ext cx="658368" cy="228600"/>
-          </a:xfrm>
-          <a:prstGeom prst="rect">
-            <a:avLst/>
-          </a:prstGeom>
-          <a:solidFill>
-            <a:srgbClr val="DCFCE7"/>
-          </a:solidFill>
-          <a:ln/>
-        </p:spPr>
-      </p:sp>
-      <p:sp>
-        <p:nvSpPr>
-          <p:cNvPr id="29" name="Text 27"/>
-          <p:cNvSpPr/>
-          <p:nvPr/>
-        </p:nvSpPr>
-        <p:spPr>
-          <a:xfrm>
-            <a:off x="2286000" y="2953512"/>
-            <a:ext cx="658368" cy="228600"/>
-          </a:xfrm>
-          <a:prstGeom prst="rect">
-            <a:avLst/>
-          </a:prstGeom>
-          <a:noFill/>
-          <a:ln/>
-        </p:spPr>
-        <p:txBody>
-          <a:bodyPr wrap="square" lIns="0" tIns="0" rIns="0" bIns="0" rtlCol="0" anchor="ctr"/>
-          <a:lstStyle/>
-          <a:p>
-            <a:pPr algn="ctr" indent="0" marL="0">
-              <a:buNone/>
-            </a:pPr>
-            <a:r>
-              <a:rPr lang="en-US" sz="900" b="1" dirty="0">
-                <a:solidFill>
-                  <a:srgbClr val="16A34A"/>
-                </a:solidFill>
-                <a:latin typeface="Arial" pitchFamily="34" charset="0"/>
-                <a:ea typeface="Arial" pitchFamily="34" charset="-122"/>
-                <a:cs typeface="Arial" pitchFamily="34" charset="-120"/>
-              </a:rPr>
-              <a:t>20件+</a:t>
-            </a:r>
-            <a:endParaRPr lang="en-US" sz="900" dirty="0"/>
-          </a:p>
-        </p:txBody>
-      </p:sp>
-      <p:sp>
-        <p:nvSpPr>
-          <p:cNvPr id="30" name="Text 28"/>
-          <p:cNvSpPr/>
-          <p:nvPr/>
-        </p:nvSpPr>
-        <p:spPr>
-          <a:xfrm>
-            <a:off x="594360" y="2953512"/>
-            <a:ext cx="1645920" cy="274320"/>
-          </a:xfrm>
-          <a:prstGeom prst="rect">
-            <a:avLst/>
-          </a:prstGeom>
-          <a:noFill/>
-          <a:ln/>
-        </p:spPr>
-        <p:txBody>
-          <a:bodyPr wrap="square" lIns="0" tIns="0" rIns="0" bIns="0" rtlCol="0" anchor="ctr"/>
-          <a:lstStyle/>
-          <a:p>
-            <a:pPr indent="0" marL="0">
-              <a:buNone/>
-            </a:pPr>
-            <a:r>
-              <a:rPr lang="en-US" sz="1300" b="1" dirty="0">
-                <a:solidFill>
-                  <a:srgbClr val="1A2744"/>
-                </a:solidFill>
-                <a:latin typeface="Arial" pitchFamily="34" charset="0"/>
-                <a:ea typeface="Arial" pitchFamily="34" charset="-122"/>
-                <a:cs typeface="Arial" pitchFamily="34" charset="-120"/>
-              </a:rPr>
-              <a:t>立地・アクセス</a:t>
-            </a:r>
-            <a:endParaRPr lang="en-US" sz="1300" dirty="0"/>
-          </a:p>
-        </p:txBody>
-      </p:sp>
-      <p:sp>
-        <p:nvSpPr>
-          <p:cNvPr id="31" name="Text 29"/>
-          <p:cNvSpPr/>
-          <p:nvPr/>
-        </p:nvSpPr>
-        <p:spPr>
-          <a:xfrm>
-            <a:off x="594360" y="3246120"/>
-            <a:ext cx="2377440" cy="365760"/>
-          </a:xfrm>
-          <a:prstGeom prst="rect">
-            <a:avLst/>
-          </a:prstGeom>
-          <a:noFill/>
-          <a:ln/>
-        </p:spPr>
-        <p:txBody>
-          <a:bodyPr wrap="square" lIns="0" tIns="0" rIns="0" bIns="0" rtlCol="0" anchor="ctr"/>
-          <a:lstStyle/>
-          <a:p>
-            <a:pPr indent="0" marL="0">
-              <a:buNone/>
-            </a:pPr>
-            <a:r>
-              <a:rPr lang="en-US" sz="900" dirty="0">
-                <a:solidFill>
-                  <a:srgbClr val="64748B"/>
-                </a:solidFill>
-                <a:latin typeface="Arial" pitchFamily="34" charset="0"/>
-                <a:ea typeface="Arial" pitchFamily="34" charset="-122"/>
-                <a:cs typeface="Arial" pitchFamily="34" charset="-120"/>
-              </a:rPr>
-              <a:t>コンビニがホテル内にあることとディズニーリゾートへの無料シャトルバスがあってとても便利でした</a:t>
-            </a:r>
-            <a:endParaRPr lang="en-US" sz="900" dirty="0"/>
-          </a:p>
-        </p:txBody>
-      </p:sp>
-      <p:sp>
-        <p:nvSpPr>
-          <p:cNvPr id="32" name="Text 30"/>
-          <p:cNvSpPr/>
-          <p:nvPr/>
-        </p:nvSpPr>
-        <p:spPr>
-          <a:xfrm>
-            <a:off x="594360" y="3657600"/>
-            <a:ext cx="2377440" cy="640080"/>
-          </a:xfrm>
-          <a:prstGeom prst="rect">
-            <a:avLst/>
-          </a:prstGeom>
-          <a:noFill/>
-          <a:ln/>
-        </p:spPr>
-        <p:txBody>
-          <a:bodyPr wrap="square" lIns="0" tIns="0" rIns="0" bIns="0" rtlCol="0" anchor="ctr"/>
-          <a:lstStyle/>
-          <a:p>
-            <a:pPr indent="0" marL="0">
-              <a:buNone/>
-            </a:pPr>
-            <a:r>
-              <a:rPr lang="en-US" sz="900" i="1" dirty="0">
-                <a:solidFill>
-                  <a:srgbClr val="3B7DD8"/>
-                </a:solidFill>
-                <a:latin typeface="Arial" pitchFamily="34" charset="0"/>
-                <a:ea typeface="Arial" pitchFamily="34" charset="-122"/>
-                <a:cs typeface="Arial" pitchFamily="34" charset="-120"/>
-              </a:rPr>
-              <a:t>「今回初めて自動チェックインを利用しましたが、便利ですし早いと思いますがフロントの方とお話せずだったのでわからないこ...」</a:t>
-            </a:r>
-            <a:endParaRPr lang="en-US" sz="900" dirty="0"/>
-          </a:p>
-        </p:txBody>
-      </p:sp>
-      <p:sp>
-        <p:nvSpPr>
-          <p:cNvPr id="33" name="Shape 31"/>
-          <p:cNvSpPr/>
-          <p:nvPr/>
-        </p:nvSpPr>
-        <p:spPr>
-          <a:xfrm>
-            <a:off x="3291840" y="2880360"/>
-            <a:ext cx="2651760" cy="1600200"/>
-          </a:xfrm>
-          <a:prstGeom prst="rect">
-            <a:avLst/>
-          </a:prstGeom>
-          <a:solidFill>
-            <a:srgbClr val="FFFFFF"/>
-          </a:solidFill>
-          <a:ln/>
-          <a:effectLst>
-            <a:outerShdw sx="100000" sy="100000" kx="0" ky="0" algn="bl" rotWithShape="0" blurRad="50800" dist="25400" dir="8100000">
-              <a:srgbClr val="000000">
-                <a:alpha val="10000"/>
-              </a:srgbClr>
-            </a:outerShdw>
-          </a:effectLst>
-        </p:spPr>
-      </p:sp>
-      <p:sp>
-        <p:nvSpPr>
-          <p:cNvPr id="34" name="Shape 32"/>
-          <p:cNvSpPr/>
-          <p:nvPr/>
-        </p:nvSpPr>
-        <p:spPr>
-          <a:xfrm>
-            <a:off x="3291840" y="2880360"/>
-            <a:ext cx="54864" cy="1600200"/>
-          </a:xfrm>
-          <a:prstGeom prst="rect">
-            <a:avLst/>
-          </a:prstGeom>
-          <a:solidFill>
-            <a:srgbClr val="16A34A"/>
-          </a:solidFill>
-          <a:ln/>
-        </p:spPr>
-      </p:sp>
-      <p:sp>
-        <p:nvSpPr>
-          <p:cNvPr id="35" name="Shape 33"/>
-          <p:cNvSpPr/>
-          <p:nvPr/>
-        </p:nvSpPr>
-        <p:spPr>
-          <a:xfrm>
-            <a:off x="5120640" y="2953512"/>
-            <a:ext cx="658368" cy="228600"/>
-          </a:xfrm>
-          <a:prstGeom prst="rect">
-            <a:avLst/>
-          </a:prstGeom>
-          <a:solidFill>
-            <a:srgbClr val="DCFCE7"/>
-          </a:solidFill>
-          <a:ln/>
-        </p:spPr>
-      </p:sp>
-      <p:sp>
-        <p:nvSpPr>
-          <p:cNvPr id="36" name="Text 34"/>
-          <p:cNvSpPr/>
-          <p:nvPr/>
-        </p:nvSpPr>
-        <p:spPr>
-          <a:xfrm>
-            <a:off x="5120640" y="2953512"/>
-            <a:ext cx="658368" cy="228600"/>
-          </a:xfrm>
-          <a:prstGeom prst="rect">
-            <a:avLst/>
-          </a:prstGeom>
-          <a:noFill/>
-          <a:ln/>
-        </p:spPr>
-        <p:txBody>
-          <a:bodyPr wrap="square" lIns="0" tIns="0" rIns="0" bIns="0" rtlCol="0" anchor="ctr"/>
-          <a:lstStyle/>
-          <a:p>
-            <a:pPr algn="ctr" indent="0" marL="0">
-              <a:buNone/>
-            </a:pPr>
-            <a:r>
-              <a:rPr lang="en-US" sz="900" b="1" dirty="0">
-                <a:solidFill>
-                  <a:srgbClr val="16A34A"/>
-                </a:solidFill>
-                <a:latin typeface="Arial" pitchFamily="34" charset="0"/>
-                <a:ea typeface="Arial" pitchFamily="34" charset="-122"/>
-                <a:cs typeface="Arial" pitchFamily="34" charset="-120"/>
-              </a:rPr>
-              <a:t>20件+</a:t>
+              <a:t>10件+</a:t>
             </a:r>
             <a:endParaRPr lang="en-US" sz="900" dirty="0"/>
           </a:p>
@@ -11359,7 +11682,7 @@
                 <a:ea typeface="Arial" pitchFamily="34" charset="-122"/>
                 <a:cs typeface="Arial" pitchFamily="34" charset="-120"/>
               </a:rPr>
-              <a:t>ホテルは綺麗でローソンが入っているのでとても便利でした</a:t>
+              <a:t>ディズニーリゾートを満喫するために利用させて頂きました☺️ 清潔感があり、パズル調のかわいいお部屋で大満足です</a:t>
             </a:r>
             <a:endParaRPr lang="en-US" sz="900" dirty="0"/>
           </a:p>
@@ -11398,7 +11721,7 @@
                 <a:ea typeface="Arial" pitchFamily="34" charset="-122"/>
                 <a:cs typeface="Arial" pitchFamily="34" charset="-120"/>
               </a:rPr>
-              <a:t>「以前も泊まったことがあり部屋のパズルの中に何かあるサプライズ、部屋の綺麗さやベッドの寝心地の良さ、朝食も種類が豊富...」</a:t>
+              <a:t>「ホテルは綺麗でローソンが入っているのでとても便利でした」</a:t>
             </a:r>
             <a:endParaRPr lang="en-US" sz="900" dirty="0"/>
           </a:p>
@@ -11504,7 +11827,7 @@
                 <a:ea typeface="Arial" pitchFamily="34" charset="-122"/>
                 <a:cs typeface="Arial" pitchFamily="34" charset="-120"/>
               </a:rPr>
-              <a:t>20件+</a:t>
+              <a:t>10件+</a:t>
             </a:r>
             <a:endParaRPr lang="en-US" sz="900" dirty="0"/>
           </a:p>
@@ -11582,7 +11905,7 @@
                 <a:ea typeface="Arial" pitchFamily="34" charset="-122"/>
                 <a:cs typeface="Arial" pitchFamily="34" charset="-120"/>
               </a:rPr>
-              <a:t>コンビニがホテル内にあることとディズニーリゾートへの無料シャトルバスがあってとても便利でした</a:t>
+              <a:t>ローソンもついているので、ありがたかったです</a:t>
             </a:r>
             <a:endParaRPr lang="en-US" sz="900" dirty="0"/>
           </a:p>
@@ -11621,7 +11944,7 @@
                 <a:ea typeface="Arial" pitchFamily="34" charset="-122"/>
                 <a:cs typeface="Arial" pitchFamily="34" charset="-120"/>
               </a:rPr>
-              <a:t>「コンビニが一階に入ってて便利でした」</a:t>
+              <a:t>「コンビニがホテル内にあることとディズニーリゾートへの無料シャトルバスがあってとても便利でした」</a:t>
             </a:r>
             <a:endParaRPr lang="en-US" sz="900" dirty="0"/>
           </a:p>
@@ -12311,7 +12634,7 @@
                           <a:ea typeface="Arial" pitchFamily="34" charset="-122"/>
                           <a:cs typeface="Arial" pitchFamily="34" charset="-120"/>
                         </a:rPr>
-                        <a:t>コンビニがホテル内にあることとディズニーリゾートへの無料シャトルバスがあってとても便利でした</a:t>
+                        <a:t>お風呂とシャワーの水栓が別なので、家族で順番に入浴する際もシャワーを使いながらお風呂の水を溜めることができます</a:t>
                       </a:r>
                       <a:endParaRPr lang="en-US" sz="900" dirty="0">
                         <a:latin typeface="Arial" charset="0"/>
@@ -12379,7 +12702,7 @@
                           <a:ea typeface="Arial" pitchFamily="34" charset="-122"/>
                           <a:cs typeface="Arial" pitchFamily="34" charset="-120"/>
                         </a:rPr>
-                        <a:t>47件</a:t>
+                        <a:t>31件</a:t>
                       </a:r>
                       <a:endParaRPr lang="en-US" sz="900" dirty="0">
                         <a:latin typeface="Arial" charset="0"/>
@@ -12517,7 +12840,7 @@
                           <a:ea typeface="Arial" pitchFamily="34" charset="-122"/>
                           <a:cs typeface="Arial" pitchFamily="34" charset="-120"/>
                         </a:rPr>
-                        <a:t>対応・サービスの不満</a:t>
+                        <a:t>エアコン・空調</a:t>
                       </a:r>
                       <a:endParaRPr lang="en-US" sz="900" dirty="0">
                         <a:latin typeface="Arial" charset="0"/>
@@ -12585,7 +12908,7 @@
                           <a:ea typeface="Arial" pitchFamily="34" charset="-122"/>
                           <a:cs typeface="Arial" pitchFamily="34" charset="-120"/>
                         </a:rPr>
-                        <a:t>部屋も上のフロアの足音が気になったり窓からの眺めは病院だったのは夢の国帰りにはちょっと残念なものがありました</a:t>
+                        <a:t>Lawsons onsite - great for after Disney snack 😝 Easy to ...</a:t>
                       </a:r>
                       <a:endParaRPr lang="en-US" sz="900" dirty="0">
                         <a:latin typeface="Arial" charset="0"/>
@@ -12653,7 +12976,7 @@
                           <a:ea typeface="Arial" pitchFamily="34" charset="-122"/>
                           <a:cs typeface="Arial" pitchFamily="34" charset="-120"/>
                         </a:rPr>
-                        <a:t>11件</a:t>
+                        <a:t>6件</a:t>
                       </a:r>
                       <a:endParaRPr lang="en-US" sz="900" dirty="0">
                         <a:latin typeface="Arial" charset="0"/>
@@ -12791,7 +13114,7 @@
                           <a:ea typeface="Arial" pitchFamily="34" charset="-122"/>
                           <a:cs typeface="Arial" pitchFamily="34" charset="-120"/>
                         </a:rPr>
-                        <a:t>エアコン・空調</a:t>
+                        <a:t>対応・サービスの不満</a:t>
                       </a:r>
                       <a:endParaRPr lang="en-US" sz="900" dirty="0">
                         <a:latin typeface="Arial" charset="0"/>
@@ -12859,7 +13182,7 @@
                           <a:ea typeface="Arial" pitchFamily="34" charset="-122"/>
                           <a:cs typeface="Arial" pitchFamily="34" charset="-120"/>
                         </a:rPr>
-                        <a:t>Nothing near by hotel but they have bus to drop and pick ...</a:t>
+                        <a:t>部屋も上のフロアの足音が気になったり窓からの眺めは病院だったのは夢の国帰りにはちょっと残念なものがありました</a:t>
                       </a:r>
                       <a:endParaRPr lang="en-US" sz="900" dirty="0">
                         <a:latin typeface="Arial" charset="0"/>
@@ -13201,7 +13524,7 @@
                           <a:ea typeface="Arial" pitchFamily="34" charset="-122"/>
                           <a:cs typeface="Arial" pitchFamily="34" charset="-120"/>
                         </a:rPr>
-                        <a:t>5件</a:t>
+                        <a:t>3件</a:t>
                       </a:r>
                       <a:endParaRPr lang="en-US" sz="900" dirty="0">
                         <a:latin typeface="Arial" charset="0"/>
@@ -13475,7 +13798,7 @@
                           <a:ea typeface="Arial" pitchFamily="34" charset="-122"/>
                           <a:cs typeface="Arial" pitchFamily="34" charset="-120"/>
                         </a:rPr>
-                        <a:t>3件</a:t>
+                        <a:t>2件</a:t>
                       </a:r>
                       <a:endParaRPr lang="en-US" sz="900" dirty="0">
                         <a:latin typeface="Arial" charset="0"/>
@@ -13613,7 +13936,7 @@
                           <a:ea typeface="Arial" pitchFamily="34" charset="-122"/>
                           <a:cs typeface="Arial" pitchFamily="34" charset="-120"/>
                         </a:rPr>
-                        <a:t>部屋の狭さ</a:t>
+                        <a:t>窓・採光</a:t>
                       </a:r>
                       <a:endParaRPr lang="en-US" sz="900" dirty="0">
                         <a:latin typeface="Arial" charset="0"/>
@@ -13681,7 +14004,7 @@
                           <a:ea typeface="Arial" pitchFamily="34" charset="-122"/>
                           <a:cs typeface="Arial" pitchFamily="34" charset="-120"/>
                         </a:rPr>
-                        <a:t>Small specific thin though</a:t>
+                        <a:t>部屋も上のフロアの足音が気になったり窓からの眺めは病院だったのは夢の国帰りにはちょっと残念なものがありました</a:t>
                       </a:r>
                       <a:endParaRPr lang="en-US" sz="900" dirty="0">
                         <a:latin typeface="Arial" charset="0"/>
@@ -13887,7 +14210,7 @@
                           <a:ea typeface="Arial" pitchFamily="34" charset="-122"/>
                           <a:cs typeface="Arial" pitchFamily="34" charset="-120"/>
                         </a:rPr>
-                        <a:t>窓・採光</a:t>
+                        <a:t>部屋の狭さ</a:t>
                       </a:r>
                       <a:endParaRPr lang="en-US" sz="900" dirty="0">
                         <a:latin typeface="Arial" charset="0"/>
@@ -13955,7 +14278,7 @@
                           <a:ea typeface="Arial" pitchFamily="34" charset="-122"/>
                           <a:cs typeface="Arial" pitchFamily="34" charset="-120"/>
                         </a:rPr>
-                        <a:t>部屋も上のフロアの足音が気になったり窓からの眺めは病院だったのは夢の国帰りにはちょっと残念なものがありました</a:t>
+                        <a:t>Small specific thin though</a:t>
                       </a:r>
                       <a:endParaRPr lang="en-US" sz="900" dirty="0">
                         <a:latin typeface="Arial" charset="0"/>
@@ -14023,7 +14346,7 @@
                           <a:ea typeface="Arial" pitchFamily="34" charset="-122"/>
                           <a:cs typeface="Arial" pitchFamily="34" charset="-120"/>
                         </a:rPr>
-                        <a:t>2件</a:t>
+                        <a:t>1件</a:t>
                       </a:r>
                       <a:endParaRPr lang="en-US" sz="900" dirty="0">
                         <a:latin typeface="Arial" charset="0"/>

--- a/納品レポート/ホテル別レポート/comfort_suites_tokyobay_口コミ分析レポート.pptx
+++ b/納品レポート/ホテル別レポート/comfort_suites_tokyobay_口コミ分析レポート.pptx
@@ -183,13 +183,13 @@
                     <c:v>Trip.com</c:v>
                   </c:pt>
                   <c:pt idx="1">
+                    <c:v>Google</c:v>
+                  </c:pt>
+                  <c:pt idx="2">
                     <c:v>楽天トラベル</c:v>
                   </c:pt>
-                  <c:pt idx="2">
+                  <c:pt idx="3">
                     <c:v>Agoda</c:v>
-                  </c:pt>
-                  <c:pt idx="3">
-                    <c:v>Google</c:v>
                   </c:pt>
                   <c:pt idx="4">
                     <c:v>Booking.com</c:v>
@@ -211,10 +211,10 @@
                   <c:v>9.42</c:v>
                 </c:pt>
                 <c:pt idx="1">
-                  <c:v>9.29</c:v>
+                  <c:v>9.33</c:v>
                 </c:pt>
                 <c:pt idx="2">
-                  <c:v>9.25</c:v>
+                  <c:v>9.29</c:v>
                 </c:pt>
                 <c:pt idx="3">
                   <c:v>9.25</c:v>
@@ -566,7 +566,7 @@
               <c:numCache>
                 <c:ptCount val="3"/>
                 <c:pt idx="0">
-                  <c:v>81</c:v>
+                  <c:v>82</c:v>
                 </c:pt>
                 <c:pt idx="1">
                   <c:v>2</c:v>
@@ -781,7 +781,7 @@
                 <c:formatCode>General</c:formatCode>
                 <c:ptCount val="6"/>
                 <c:pt idx="0">
-                  <c:v>46</c:v>
+                  <c:v>47</c:v>
                 </c:pt>
                 <c:pt idx="1">
                   <c:v>9</c:v>
@@ -2747,7 +2747,7 @@
                 <a:ea typeface="Arial" pitchFamily="34" charset="-122"/>
                 <a:cs typeface="Arial" pitchFamily="34" charset="-120"/>
               </a:rPr>
-              <a:t>レビュー総数：85件（6サイト）</a:t>
+              <a:t>レビュー総数：86件（6サイト）</a:t>
             </a:r>
             <a:endParaRPr lang="en-US" sz="1000" dirty="0"/>
           </a:p>
@@ -3313,7 +3313,7 @@
                           <a:ea typeface="Arial" pitchFamily="34" charset="-122"/>
                           <a:cs typeface="Arial" pitchFamily="34" charset="-120"/>
                         </a:rPr>
-                        <a:t>9.06点</a:t>
+                        <a:t>9.07点</a:t>
                       </a:r>
                       <a:endParaRPr lang="en-US" sz="1000" dirty="0">
                         <a:latin typeface="Arial" charset="0"/>
@@ -3861,7 +3861,7 @@
                           <a:ea typeface="Arial" pitchFamily="34" charset="-122"/>
                           <a:cs typeface="Arial" pitchFamily="34" charset="-120"/>
                         </a:rPr>
-                        <a:t>2.4%</a:t>
+                        <a:t>2.3%</a:t>
                       </a:r>
                       <a:endParaRPr lang="en-US" sz="1000" dirty="0">
                         <a:latin typeface="Arial" charset="0"/>
@@ -4683,7 +4683,7 @@
                           <a:ea typeface="Arial" pitchFamily="34" charset="-122"/>
                           <a:cs typeface="Arial" pitchFamily="34" charset="-120"/>
                         </a:rPr>
-                        <a:t>約31件/期間</a:t>
+                        <a:t>約32件/期間</a:t>
                       </a:r>
                       <a:endParaRPr lang="en-US" sz="1000" dirty="0">
                         <a:latin typeface="Arial" charset="0"/>
@@ -4751,7 +4751,7 @@
                           <a:ea typeface="Arial" pitchFamily="34" charset="-122"/>
                           <a:cs typeface="Arial" pitchFamily="34" charset="-120"/>
                         </a:rPr>
-                        <a:t>15件以下</a:t>
+                        <a:t>16件以下</a:t>
                       </a:r>
                       <a:endParaRPr lang="en-US" sz="1000" dirty="0">
                         <a:latin typeface="Arial" charset="0"/>
@@ -5322,7 +5322,7 @@
                 <a:ea typeface="Arial" pitchFamily="34" charset="-122"/>
                 <a:cs typeface="Arial" pitchFamily="34" charset="-120"/>
               </a:rPr>
-              <a:t>9.06</a:t>
+              <a:t>9.07</a:t>
             </a:r>
             <a:endParaRPr lang="en-US" sz="3200" dirty="0"/>
           </a:p>
@@ -5572,7 +5572,7 @@
                 <a:ea typeface="Arial" pitchFamily="34" charset="-122"/>
                 <a:cs typeface="Arial" pitchFamily="34" charset="-120"/>
               </a:rPr>
-              <a:t>2.4%</a:t>
+              <a:t>2.3%</a:t>
             </a:r>
             <a:endParaRPr lang="en-US" sz="3200" dirty="0"/>
           </a:p>
@@ -5697,7 +5697,7 @@
                 <a:ea typeface="Arial" pitchFamily="34" charset="-122"/>
                 <a:cs typeface="Arial" pitchFamily="34" charset="-120"/>
               </a:rPr>
-              <a:t>85件</a:t>
+              <a:t>86件</a:t>
             </a:r>
             <a:endParaRPr lang="en-US" sz="3200" dirty="0"/>
           </a:p>
@@ -5865,6 +5865,46 @@
                 <a:ea typeface="Arial" pitchFamily="34" charset="-122"/>
                 <a:cs typeface="Arial" pitchFamily="34" charset="-120"/>
               </a:rPr>
+              <a:t>立地・アクセス </a:t>
+            </a:r>
+            <a:endParaRPr lang="en-US" sz="1100" dirty="0"/>
+          </a:p>
+          <a:p>
+            <a:pPr indent="0" marL="0">
+              <a:spcAft>
+                <a:spcPts val="200"/>
+              </a:spcAft>
+              <a:buNone/>
+            </a:pPr>
+            <a:r>
+              <a:rPr lang="en-US" sz="900" dirty="0">
+                <a:solidFill>
+                  <a:srgbClr val="64748B"/>
+                </a:solidFill>
+                <a:latin typeface="Arial" pitchFamily="34" charset="0"/>
+                <a:ea typeface="Arial" pitchFamily="34" charset="-122"/>
+                <a:cs typeface="Arial" pitchFamily="34" charset="-120"/>
+              </a:rPr>
+              <a:t>  無料の送迎バスがあって便利でした</a:t>
+            </a:r>
+            <a:endParaRPr lang="en-US" sz="1100" dirty="0"/>
+          </a:p>
+          <a:p>
+            <a:pPr indent="0" marL="0">
+              <a:spcAft>
+                <a:spcPts val="200"/>
+              </a:spcAft>
+              <a:buNone/>
+            </a:pPr>
+            <a:r>
+              <a:rPr lang="en-US" sz="1100" b="1" dirty="0">
+                <a:solidFill>
+                  <a:srgbClr val="334155"/>
+                </a:solidFill>
+                <a:latin typeface="Arial" pitchFamily="34" charset="0"/>
+                <a:ea typeface="Arial" pitchFamily="34" charset="-122"/>
+                <a:cs typeface="Arial" pitchFamily="34" charset="-120"/>
+              </a:rPr>
               <a:t>スタッフの対応 </a:t>
             </a:r>
             <a:endParaRPr lang="en-US" sz="1100" dirty="0"/>
@@ -5889,46 +5929,6 @@
             </a:r>
             <a:endParaRPr lang="en-US" sz="1100" dirty="0"/>
           </a:p>
-          <a:p>
-            <a:pPr indent="0" marL="0">
-              <a:spcAft>
-                <a:spcPts val="200"/>
-              </a:spcAft>
-              <a:buNone/>
-            </a:pPr>
-            <a:r>
-              <a:rPr lang="en-US" sz="1100" b="1" dirty="0">
-                <a:solidFill>
-                  <a:srgbClr val="334155"/>
-                </a:solidFill>
-                <a:latin typeface="Arial" pitchFamily="34" charset="0"/>
-                <a:ea typeface="Arial" pitchFamily="34" charset="-122"/>
-                <a:cs typeface="Arial" pitchFamily="34" charset="-120"/>
-              </a:rPr>
-              <a:t>立地・アクセス </a:t>
-            </a:r>
-            <a:endParaRPr lang="en-US" sz="1100" dirty="0"/>
-          </a:p>
-          <a:p>
-            <a:pPr indent="0" marL="0">
-              <a:spcAft>
-                <a:spcPts val="200"/>
-              </a:spcAft>
-              <a:buNone/>
-            </a:pPr>
-            <a:r>
-              <a:rPr lang="en-US" sz="900" dirty="0">
-                <a:solidFill>
-                  <a:srgbClr val="64748B"/>
-                </a:solidFill>
-                <a:latin typeface="Arial" pitchFamily="34" charset="0"/>
-                <a:ea typeface="Arial" pitchFamily="34" charset="-122"/>
-                <a:cs typeface="Arial" pitchFamily="34" charset="-120"/>
-              </a:rPr>
-              <a:t>  立地的にも車で２０分も掛からない場所にあり、スタッフの方々対応も良く、気持ち良く利用させていただく事が出来ました</a:t>
-            </a:r>
-            <a:endParaRPr lang="en-US" sz="1100" dirty="0"/>
-          </a:p>
         </p:txBody>
       </p:sp>
       <p:sp>
@@ -6073,7 +6073,7 @@
                 <a:ea typeface="Arial" pitchFamily="34" charset="-122"/>
                 <a:cs typeface="Arial" pitchFamily="34" charset="-120"/>
               </a:rPr>
-              <a:t>  お風呂とシャワーの水栓が別なので、家族で順番に入浴する際もシャワーを使いながらお風呂の水を溜めることができます</a:t>
+              <a:t>  無料の送迎バスがあって便利でした</a:t>
             </a:r>
             <a:endParaRPr lang="en-US" sz="1100" dirty="0"/>
           </a:p>
@@ -6506,7 +6506,7 @@
                 <a:ea typeface="Arial" pitchFamily="34" charset="-122"/>
                 <a:cs typeface="Arial" pitchFamily="34" charset="-120"/>
               </a:rPr>
-              <a:t>9.06</a:t>
+              <a:t>9.07</a:t>
             </a:r>
             <a:endParaRPr lang="en-US" sz="3200" dirty="0"/>
           </a:p>
@@ -6756,7 +6756,7 @@
                 <a:ea typeface="Arial" pitchFamily="34" charset="-122"/>
                 <a:cs typeface="Arial" pitchFamily="34" charset="-120"/>
               </a:rPr>
-              <a:t>2.4%</a:t>
+              <a:t>2.3%</a:t>
             </a:r>
             <a:endParaRPr lang="en-US" sz="3200" dirty="0"/>
           </a:p>
@@ -6881,7 +6881,7 @@
                 <a:ea typeface="Arial" pitchFamily="34" charset="-122"/>
                 <a:cs typeface="Arial" pitchFamily="34" charset="-120"/>
               </a:rPr>
-              <a:t>85件</a:t>
+              <a:t>86件</a:t>
             </a:r>
             <a:endParaRPr lang="en-US" sz="3200" dirty="0"/>
           </a:p>
@@ -8134,7 +8134,7 @@
                           <a:ea typeface="Arial" pitchFamily="34" charset="-122"/>
                           <a:cs typeface="Arial" pitchFamily="34" charset="-120"/>
                         </a:rPr>
-                        <a:t>楽天トラベル</a:t>
+                        <a:t>Google</a:t>
                       </a:r>
                       <a:endParaRPr lang="en-US" sz="900" dirty="0">
                         <a:latin typeface="Arial" charset="0"/>
@@ -8202,7 +8202,7 @@
                           <a:ea typeface="Arial" pitchFamily="34" charset="-122"/>
                           <a:cs typeface="Arial" pitchFamily="34" charset="-120"/>
                         </a:rPr>
-                        <a:t>28</a:t>
+                        <a:t>9</a:t>
                       </a:r>
                       <a:endParaRPr lang="en-US" sz="900" dirty="0">
                         <a:latin typeface="Arial" charset="0"/>
@@ -8270,7 +8270,7 @@
                           <a:ea typeface="Arial" pitchFamily="34" charset="-122"/>
                           <a:cs typeface="Arial" pitchFamily="34" charset="-120"/>
                         </a:rPr>
-                        <a:t>4.64</a:t>
+                        <a:t>4.67</a:t>
                       </a:r>
                       <a:endParaRPr lang="en-US" sz="900" dirty="0">
                         <a:latin typeface="Arial" charset="0"/>
@@ -8406,7 +8406,7 @@
                           <a:ea typeface="Arial" pitchFamily="34" charset="-122"/>
                           <a:cs typeface="Arial" pitchFamily="34" charset="-120"/>
                         </a:rPr>
-                        <a:t>9.29</a:t>
+                        <a:t>9.33</a:t>
                       </a:r>
                       <a:endParaRPr lang="en-US" sz="900" dirty="0">
                         <a:latin typeface="Arial" charset="0"/>
@@ -8476,7 +8476,7 @@
                           <a:ea typeface="Arial" pitchFamily="34" charset="-122"/>
                           <a:cs typeface="Arial" pitchFamily="34" charset="-120"/>
                         </a:rPr>
-                        <a:t>Agoda</a:t>
+                        <a:t>楽天トラベル</a:t>
                       </a:r>
                       <a:endParaRPr lang="en-US" sz="900" dirty="0">
                         <a:latin typeface="Arial" charset="0"/>
@@ -8544,7 +8544,7 @@
                           <a:ea typeface="Arial" pitchFamily="34" charset="-122"/>
                           <a:cs typeface="Arial" pitchFamily="34" charset="-120"/>
                         </a:rPr>
-                        <a:t>8</a:t>
+                        <a:t>28</a:t>
                       </a:r>
                       <a:endParaRPr lang="en-US" sz="900" dirty="0">
                         <a:latin typeface="Arial" charset="0"/>
@@ -8612,7 +8612,7 @@
                           <a:ea typeface="Arial" pitchFamily="34" charset="-122"/>
                           <a:cs typeface="Arial" pitchFamily="34" charset="-120"/>
                         </a:rPr>
-                        <a:t>9.25</a:t>
+                        <a:t>4.64</a:t>
                       </a:r>
                       <a:endParaRPr lang="en-US" sz="900" dirty="0">
                         <a:latin typeface="Arial" charset="0"/>
@@ -8680,7 +8680,7 @@
                           <a:ea typeface="Arial" pitchFamily="34" charset="-122"/>
                           <a:cs typeface="Arial" pitchFamily="34" charset="-120"/>
                         </a:rPr>
-                        <a:t>/10</a:t>
+                        <a:t>/5 (×2)</a:t>
                       </a:r>
                       <a:endParaRPr lang="en-US" sz="900" dirty="0">
                         <a:latin typeface="Arial" charset="0"/>
@@ -8748,7 +8748,7 @@
                           <a:ea typeface="Arial" pitchFamily="34" charset="-122"/>
                           <a:cs typeface="Arial" pitchFamily="34" charset="-120"/>
                         </a:rPr>
-                        <a:t>9.25</a:t>
+                        <a:t>9.29</a:t>
                       </a:r>
                       <a:endParaRPr lang="en-US" sz="900" dirty="0">
                         <a:latin typeface="Arial" charset="0"/>
@@ -8818,7 +8818,7 @@
                           <a:ea typeface="Arial" pitchFamily="34" charset="-122"/>
                           <a:cs typeface="Arial" pitchFamily="34" charset="-120"/>
                         </a:rPr>
-                        <a:t>Google</a:t>
+                        <a:t>Agoda</a:t>
                       </a:r>
                       <a:endParaRPr lang="en-US" sz="900" dirty="0">
                         <a:latin typeface="Arial" charset="0"/>
@@ -8954,7 +8954,7 @@
                           <a:ea typeface="Arial" pitchFamily="34" charset="-122"/>
                           <a:cs typeface="Arial" pitchFamily="34" charset="-120"/>
                         </a:rPr>
-                        <a:t>4.62</a:t>
+                        <a:t>9.25</a:t>
                       </a:r>
                       <a:endParaRPr lang="en-US" sz="900" dirty="0">
                         <a:latin typeface="Arial" charset="0"/>
@@ -9022,7 +9022,7 @@
                           <a:ea typeface="Arial" pitchFamily="34" charset="-122"/>
                           <a:cs typeface="Arial" pitchFamily="34" charset="-120"/>
                         </a:rPr>
-                        <a:t>/5 (×2)</a:t>
+                        <a:t>/10</a:t>
                       </a:r>
                       <a:endParaRPr lang="en-US" sz="900" dirty="0">
                         <a:latin typeface="Arial" charset="0"/>
@@ -10182,7 +10182,7 @@
                 <a:ea typeface="Arial" pitchFamily="34" charset="-122"/>
                 <a:cs typeface="Arial" pitchFamily="34" charset="-120"/>
               </a:rPr>
-              <a:t>81件（95.3%）</a:t>
+              <a:t>82件（95.3%）</a:t>
             </a:r>
             <a:endParaRPr lang="en-US" sz="1100" dirty="0"/>
           </a:p>
@@ -10280,7 +10280,7 @@
                 <a:ea typeface="Arial" pitchFamily="34" charset="-122"/>
                 <a:cs typeface="Arial" pitchFamily="34" charset="-120"/>
               </a:rPr>
-              <a:t>2件（2.4%）</a:t>
+              <a:t>2件（2.3%）</a:t>
             </a:r>
             <a:endParaRPr lang="en-US" sz="1100" dirty="0"/>
           </a:p>
@@ -10378,7 +10378,7 @@
                 <a:ea typeface="Arial" pitchFamily="34" charset="-122"/>
                 <a:cs typeface="Arial" pitchFamily="34" charset="-120"/>
               </a:rPr>
-              <a:t>2件（2.4%）</a:t>
+              <a:t>2件（2.3%）</a:t>
             </a:r>
             <a:endParaRPr lang="en-US" sz="1100" dirty="0"/>
           </a:p>
@@ -10974,6 +10974,229 @@
                 <a:ea typeface="Arial" pitchFamily="34" charset="-122"/>
                 <a:cs typeface="Arial" pitchFamily="34" charset="-120"/>
               </a:rPr>
+              <a:t>立地・アクセス</a:t>
+            </a:r>
+            <a:endParaRPr lang="en-US" sz="1300" dirty="0"/>
+          </a:p>
+        </p:txBody>
+      </p:sp>
+      <p:sp>
+        <p:nvSpPr>
+          <p:cNvPr id="17" name="Text 15"/>
+          <p:cNvSpPr/>
+          <p:nvPr/>
+        </p:nvSpPr>
+        <p:spPr>
+          <a:xfrm>
+            <a:off x="3429000" y="1417320"/>
+            <a:ext cx="2377440" cy="365760"/>
+          </a:xfrm>
+          <a:prstGeom prst="rect">
+            <a:avLst/>
+          </a:prstGeom>
+          <a:noFill/>
+          <a:ln/>
+        </p:spPr>
+        <p:txBody>
+          <a:bodyPr wrap="square" lIns="0" tIns="0" rIns="0" bIns="0" rtlCol="0" anchor="ctr"/>
+          <a:lstStyle/>
+          <a:p>
+            <a:pPr indent="0" marL="0">
+              <a:buNone/>
+            </a:pPr>
+            <a:r>
+              <a:rPr lang="en-US" sz="900" dirty="0">
+                <a:solidFill>
+                  <a:srgbClr val="64748B"/>
+                </a:solidFill>
+                <a:latin typeface="Arial" pitchFamily="34" charset="0"/>
+                <a:ea typeface="Arial" pitchFamily="34" charset="-122"/>
+                <a:cs typeface="Arial" pitchFamily="34" charset="-120"/>
+              </a:rPr>
+              <a:t>無料の送迎バスがあって便利でした</a:t>
+            </a:r>
+            <a:endParaRPr lang="en-US" sz="900" dirty="0"/>
+          </a:p>
+        </p:txBody>
+      </p:sp>
+      <p:sp>
+        <p:nvSpPr>
+          <p:cNvPr id="18" name="Text 16"/>
+          <p:cNvSpPr/>
+          <p:nvPr/>
+        </p:nvSpPr>
+        <p:spPr>
+          <a:xfrm>
+            <a:off x="3429000" y="1828800"/>
+            <a:ext cx="2377440" cy="640080"/>
+          </a:xfrm>
+          <a:prstGeom prst="rect">
+            <a:avLst/>
+          </a:prstGeom>
+          <a:noFill/>
+          <a:ln/>
+        </p:spPr>
+        <p:txBody>
+          <a:bodyPr wrap="square" lIns="0" tIns="0" rIns="0" bIns="0" rtlCol="0" anchor="ctr"/>
+          <a:lstStyle/>
+          <a:p>
+            <a:pPr indent="0" marL="0">
+              <a:buNone/>
+            </a:pPr>
+            <a:r>
+              <a:rPr lang="en-US" sz="900" i="1" dirty="0">
+                <a:solidFill>
+                  <a:srgbClr val="3B7DD8"/>
+                </a:solidFill>
+                <a:latin typeface="Arial" pitchFamily="34" charset="0"/>
+                <a:ea typeface="Arial" pitchFamily="34" charset="-122"/>
+                <a:cs typeface="Arial" pitchFamily="34" charset="-120"/>
+              </a:rPr>
+              <a:t>「立地的にも車で２０分も掛からない場所にあり、スタッフの方々対応も良く、気持ち良く利用させていただく事が出来ました」</a:t>
+            </a:r>
+            <a:endParaRPr lang="en-US" sz="900" dirty="0"/>
+          </a:p>
+        </p:txBody>
+      </p:sp>
+      <p:sp>
+        <p:nvSpPr>
+          <p:cNvPr id="19" name="Shape 17"/>
+          <p:cNvSpPr/>
+          <p:nvPr/>
+        </p:nvSpPr>
+        <p:spPr>
+          <a:xfrm>
+            <a:off x="6126480" y="1051560"/>
+            <a:ext cx="2651760" cy="1600200"/>
+          </a:xfrm>
+          <a:prstGeom prst="rect">
+            <a:avLst/>
+          </a:prstGeom>
+          <a:solidFill>
+            <a:srgbClr val="FFFFFF"/>
+          </a:solidFill>
+          <a:ln/>
+          <a:effectLst>
+            <a:outerShdw sx="100000" sy="100000" kx="0" ky="0" algn="bl" rotWithShape="0" blurRad="50800" dist="25400" dir="8100000">
+              <a:srgbClr val="000000">
+                <a:alpha val="10000"/>
+              </a:srgbClr>
+            </a:outerShdw>
+          </a:effectLst>
+        </p:spPr>
+      </p:sp>
+      <p:sp>
+        <p:nvSpPr>
+          <p:cNvPr id="20" name="Shape 18"/>
+          <p:cNvSpPr/>
+          <p:nvPr/>
+        </p:nvSpPr>
+        <p:spPr>
+          <a:xfrm>
+            <a:off x="6126480" y="1051560"/>
+            <a:ext cx="54864" cy="1600200"/>
+          </a:xfrm>
+          <a:prstGeom prst="rect">
+            <a:avLst/>
+          </a:prstGeom>
+          <a:solidFill>
+            <a:srgbClr val="16A34A"/>
+          </a:solidFill>
+          <a:ln/>
+        </p:spPr>
+      </p:sp>
+      <p:sp>
+        <p:nvSpPr>
+          <p:cNvPr id="21" name="Shape 19"/>
+          <p:cNvSpPr/>
+          <p:nvPr/>
+        </p:nvSpPr>
+        <p:spPr>
+          <a:xfrm>
+            <a:off x="7955280" y="1124712"/>
+            <a:ext cx="658368" cy="228600"/>
+          </a:xfrm>
+          <a:prstGeom prst="rect">
+            <a:avLst/>
+          </a:prstGeom>
+          <a:solidFill>
+            <a:srgbClr val="DCFCE7"/>
+          </a:solidFill>
+          <a:ln/>
+        </p:spPr>
+      </p:sp>
+      <p:sp>
+        <p:nvSpPr>
+          <p:cNvPr id="22" name="Text 20"/>
+          <p:cNvSpPr/>
+          <p:nvPr/>
+        </p:nvSpPr>
+        <p:spPr>
+          <a:xfrm>
+            <a:off x="7955280" y="1124712"/>
+            <a:ext cx="658368" cy="228600"/>
+          </a:xfrm>
+          <a:prstGeom prst="rect">
+            <a:avLst/>
+          </a:prstGeom>
+          <a:noFill/>
+          <a:ln/>
+        </p:spPr>
+        <p:txBody>
+          <a:bodyPr wrap="square" lIns="0" tIns="0" rIns="0" bIns="0" rtlCol="0" anchor="ctr"/>
+          <a:lstStyle/>
+          <a:p>
+            <a:pPr algn="ctr" indent="0" marL="0">
+              <a:buNone/>
+            </a:pPr>
+            <a:r>
+              <a:rPr lang="en-US" sz="900" b="1" dirty="0">
+                <a:solidFill>
+                  <a:srgbClr val="16A34A"/>
+                </a:solidFill>
+                <a:latin typeface="Arial" pitchFamily="34" charset="0"/>
+                <a:ea typeface="Arial" pitchFamily="34" charset="-122"/>
+                <a:cs typeface="Arial" pitchFamily="34" charset="-120"/>
+              </a:rPr>
+              <a:t>20件+</a:t>
+            </a:r>
+            <a:endParaRPr lang="en-US" sz="900" dirty="0"/>
+          </a:p>
+        </p:txBody>
+      </p:sp>
+      <p:sp>
+        <p:nvSpPr>
+          <p:cNvPr id="23" name="Text 21"/>
+          <p:cNvSpPr/>
+          <p:nvPr/>
+        </p:nvSpPr>
+        <p:spPr>
+          <a:xfrm>
+            <a:off x="6263640" y="1124712"/>
+            <a:ext cx="1645920" cy="274320"/>
+          </a:xfrm>
+          <a:prstGeom prst="rect">
+            <a:avLst/>
+          </a:prstGeom>
+          <a:noFill/>
+          <a:ln/>
+        </p:spPr>
+        <p:txBody>
+          <a:bodyPr wrap="square" lIns="0" tIns="0" rIns="0" bIns="0" rtlCol="0" anchor="ctr"/>
+          <a:lstStyle/>
+          <a:p>
+            <a:pPr indent="0" marL="0">
+              <a:buNone/>
+            </a:pPr>
+            <a:r>
+              <a:rPr lang="en-US" sz="1300" b="1" dirty="0">
+                <a:solidFill>
+                  <a:srgbClr val="1A2744"/>
+                </a:solidFill>
+                <a:latin typeface="Arial" pitchFamily="34" charset="0"/>
+                <a:ea typeface="Arial" pitchFamily="34" charset="-122"/>
+                <a:cs typeface="Arial" pitchFamily="34" charset="-120"/>
+              </a:rPr>
               <a:t>スタッフの対応</a:t>
             </a:r>
             <a:endParaRPr lang="en-US" sz="1300" dirty="0"/>
@@ -10982,13 +11205,13 @@
       </p:sp>
       <p:sp>
         <p:nvSpPr>
-          <p:cNvPr id="17" name="Text 15"/>
-          <p:cNvSpPr/>
-          <p:nvPr/>
-        </p:nvSpPr>
-        <p:spPr>
-          <a:xfrm>
-            <a:off x="3429000" y="1417320"/>
+          <p:cNvPr id="24" name="Text 22"/>
+          <p:cNvSpPr/>
+          <p:nvPr/>
+        </p:nvSpPr>
+        <p:spPr>
+          <a:xfrm>
+            <a:off x="6263640" y="1417320"/>
             <a:ext cx="2377440" cy="365760"/>
           </a:xfrm>
           <a:prstGeom prst="rect">
@@ -11021,13 +11244,13 @@
       </p:sp>
       <p:sp>
         <p:nvSpPr>
-          <p:cNvPr id="18" name="Text 16"/>
-          <p:cNvSpPr/>
-          <p:nvPr/>
-        </p:nvSpPr>
-        <p:spPr>
-          <a:xfrm>
-            <a:off x="3429000" y="1828800"/>
+          <p:cNvPr id="25" name="Text 23"/>
+          <p:cNvSpPr/>
+          <p:nvPr/>
+        </p:nvSpPr>
+        <p:spPr>
+          <a:xfrm>
+            <a:off x="6263640" y="1828800"/>
             <a:ext cx="2377440" cy="640080"/>
           </a:xfrm>
           <a:prstGeom prst="rect">
@@ -11053,229 +11276,6 @@
                 <a:cs typeface="Arial" pitchFamily="34" charset="-120"/>
               </a:rPr>
               <a:t>「無料送迎バス1本でディズニーに行けるので、とても便利でした♡ お部屋の壁のパズルのところに、隠されたカードがあって...」</a:t>
-            </a:r>
-            <a:endParaRPr lang="en-US" sz="900" dirty="0"/>
-          </a:p>
-        </p:txBody>
-      </p:sp>
-      <p:sp>
-        <p:nvSpPr>
-          <p:cNvPr id="19" name="Shape 17"/>
-          <p:cNvSpPr/>
-          <p:nvPr/>
-        </p:nvSpPr>
-        <p:spPr>
-          <a:xfrm>
-            <a:off x="6126480" y="1051560"/>
-            <a:ext cx="2651760" cy="1600200"/>
-          </a:xfrm>
-          <a:prstGeom prst="rect">
-            <a:avLst/>
-          </a:prstGeom>
-          <a:solidFill>
-            <a:srgbClr val="FFFFFF"/>
-          </a:solidFill>
-          <a:ln/>
-          <a:effectLst>
-            <a:outerShdw sx="100000" sy="100000" kx="0" ky="0" algn="bl" rotWithShape="0" blurRad="50800" dist="25400" dir="8100000">
-              <a:srgbClr val="000000">
-                <a:alpha val="10000"/>
-              </a:srgbClr>
-            </a:outerShdw>
-          </a:effectLst>
-        </p:spPr>
-      </p:sp>
-      <p:sp>
-        <p:nvSpPr>
-          <p:cNvPr id="20" name="Shape 18"/>
-          <p:cNvSpPr/>
-          <p:nvPr/>
-        </p:nvSpPr>
-        <p:spPr>
-          <a:xfrm>
-            <a:off x="6126480" y="1051560"/>
-            <a:ext cx="54864" cy="1600200"/>
-          </a:xfrm>
-          <a:prstGeom prst="rect">
-            <a:avLst/>
-          </a:prstGeom>
-          <a:solidFill>
-            <a:srgbClr val="16A34A"/>
-          </a:solidFill>
-          <a:ln/>
-        </p:spPr>
-      </p:sp>
-      <p:sp>
-        <p:nvSpPr>
-          <p:cNvPr id="21" name="Shape 19"/>
-          <p:cNvSpPr/>
-          <p:nvPr/>
-        </p:nvSpPr>
-        <p:spPr>
-          <a:xfrm>
-            <a:off x="7955280" y="1124712"/>
-            <a:ext cx="658368" cy="228600"/>
-          </a:xfrm>
-          <a:prstGeom prst="rect">
-            <a:avLst/>
-          </a:prstGeom>
-          <a:solidFill>
-            <a:srgbClr val="DCFCE7"/>
-          </a:solidFill>
-          <a:ln/>
-        </p:spPr>
-      </p:sp>
-      <p:sp>
-        <p:nvSpPr>
-          <p:cNvPr id="22" name="Text 20"/>
-          <p:cNvSpPr/>
-          <p:nvPr/>
-        </p:nvSpPr>
-        <p:spPr>
-          <a:xfrm>
-            <a:off x="7955280" y="1124712"/>
-            <a:ext cx="658368" cy="228600"/>
-          </a:xfrm>
-          <a:prstGeom prst="rect">
-            <a:avLst/>
-          </a:prstGeom>
-          <a:noFill/>
-          <a:ln/>
-        </p:spPr>
-        <p:txBody>
-          <a:bodyPr wrap="square" lIns="0" tIns="0" rIns="0" bIns="0" rtlCol="0" anchor="ctr"/>
-          <a:lstStyle/>
-          <a:p>
-            <a:pPr algn="ctr" indent="0" marL="0">
-              <a:buNone/>
-            </a:pPr>
-            <a:r>
-              <a:rPr lang="en-US" sz="900" b="1" dirty="0">
-                <a:solidFill>
-                  <a:srgbClr val="16A34A"/>
-                </a:solidFill>
-                <a:latin typeface="Arial" pitchFamily="34" charset="0"/>
-                <a:ea typeface="Arial" pitchFamily="34" charset="-122"/>
-                <a:cs typeface="Arial" pitchFamily="34" charset="-120"/>
-              </a:rPr>
-              <a:t>20件+</a:t>
-            </a:r>
-            <a:endParaRPr lang="en-US" sz="900" dirty="0"/>
-          </a:p>
-        </p:txBody>
-      </p:sp>
-      <p:sp>
-        <p:nvSpPr>
-          <p:cNvPr id="23" name="Text 21"/>
-          <p:cNvSpPr/>
-          <p:nvPr/>
-        </p:nvSpPr>
-        <p:spPr>
-          <a:xfrm>
-            <a:off x="6263640" y="1124712"/>
-            <a:ext cx="1645920" cy="274320"/>
-          </a:xfrm>
-          <a:prstGeom prst="rect">
-            <a:avLst/>
-          </a:prstGeom>
-          <a:noFill/>
-          <a:ln/>
-        </p:spPr>
-        <p:txBody>
-          <a:bodyPr wrap="square" lIns="0" tIns="0" rIns="0" bIns="0" rtlCol="0" anchor="ctr"/>
-          <a:lstStyle/>
-          <a:p>
-            <a:pPr indent="0" marL="0">
-              <a:buNone/>
-            </a:pPr>
-            <a:r>
-              <a:rPr lang="en-US" sz="1300" b="1" dirty="0">
-                <a:solidFill>
-                  <a:srgbClr val="1A2744"/>
-                </a:solidFill>
-                <a:latin typeface="Arial" pitchFamily="34" charset="0"/>
-                <a:ea typeface="Arial" pitchFamily="34" charset="-122"/>
-                <a:cs typeface="Arial" pitchFamily="34" charset="-120"/>
-              </a:rPr>
-              <a:t>立地・アクセス</a:t>
-            </a:r>
-            <a:endParaRPr lang="en-US" sz="1300" dirty="0"/>
-          </a:p>
-        </p:txBody>
-      </p:sp>
-      <p:sp>
-        <p:nvSpPr>
-          <p:cNvPr id="24" name="Text 22"/>
-          <p:cNvSpPr/>
-          <p:nvPr/>
-        </p:nvSpPr>
-        <p:spPr>
-          <a:xfrm>
-            <a:off x="6263640" y="1417320"/>
-            <a:ext cx="2377440" cy="365760"/>
-          </a:xfrm>
-          <a:prstGeom prst="rect">
-            <a:avLst/>
-          </a:prstGeom>
-          <a:noFill/>
-          <a:ln/>
-        </p:spPr>
-        <p:txBody>
-          <a:bodyPr wrap="square" lIns="0" tIns="0" rIns="0" bIns="0" rtlCol="0" anchor="ctr"/>
-          <a:lstStyle/>
-          <a:p>
-            <a:pPr indent="0" marL="0">
-              <a:buNone/>
-            </a:pPr>
-            <a:r>
-              <a:rPr lang="en-US" sz="900" dirty="0">
-                <a:solidFill>
-                  <a:srgbClr val="64748B"/>
-                </a:solidFill>
-                <a:latin typeface="Arial" pitchFamily="34" charset="0"/>
-                <a:ea typeface="Arial" pitchFamily="34" charset="-122"/>
-                <a:cs typeface="Arial" pitchFamily="34" charset="-120"/>
-              </a:rPr>
-              <a:t>立地的にも車で２０分も掛からない場所にあり、スタッフの方々対応も良く、気持ち良く利用させていただく事が出来ました</a:t>
-            </a:r>
-            <a:endParaRPr lang="en-US" sz="900" dirty="0"/>
-          </a:p>
-        </p:txBody>
-      </p:sp>
-      <p:sp>
-        <p:nvSpPr>
-          <p:cNvPr id="25" name="Text 23"/>
-          <p:cNvSpPr/>
-          <p:nvPr/>
-        </p:nvSpPr>
-        <p:spPr>
-          <a:xfrm>
-            <a:off x="6263640" y="1828800"/>
-            <a:ext cx="2377440" cy="640080"/>
-          </a:xfrm>
-          <a:prstGeom prst="rect">
-            <a:avLst/>
-          </a:prstGeom>
-          <a:noFill/>
-          <a:ln/>
-        </p:spPr>
-        <p:txBody>
-          <a:bodyPr wrap="square" lIns="0" tIns="0" rIns="0" bIns="0" rtlCol="0" anchor="ctr"/>
-          <a:lstStyle/>
-          <a:p>
-            <a:pPr indent="0" marL="0">
-              <a:buNone/>
-            </a:pPr>
-            <a:r>
-              <a:rPr lang="en-US" sz="900" i="1" dirty="0">
-                <a:solidFill>
-                  <a:srgbClr val="3B7DD8"/>
-                </a:solidFill>
-                <a:latin typeface="Arial" pitchFamily="34" charset="0"/>
-                <a:ea typeface="Arial" pitchFamily="34" charset="-122"/>
-                <a:cs typeface="Arial" pitchFamily="34" charset="-120"/>
-              </a:rPr>
-              <a:t>「ディズニーランドからも近く、お部屋も広くてとても満足できました」</a:t>
             </a:r>
             <a:endParaRPr lang="en-US" sz="900" dirty="0"/>
           </a:p>
@@ -12634,7 +12634,7 @@
                           <a:ea typeface="Arial" pitchFamily="34" charset="-122"/>
                           <a:cs typeface="Arial" pitchFamily="34" charset="-120"/>
                         </a:rPr>
-                        <a:t>お風呂とシャワーの水栓が別なので、家族で順番に入浴する際もシャワーを使いながらお風呂の水を溜めることができます</a:t>
+                        <a:t>無料の送迎バスがあって便利でした</a:t>
                       </a:r>
                       <a:endParaRPr lang="en-US" sz="900" dirty="0">
                         <a:latin typeface="Arial" charset="0"/>
@@ -12702,7 +12702,7 @@
                           <a:ea typeface="Arial" pitchFamily="34" charset="-122"/>
                           <a:cs typeface="Arial" pitchFamily="34" charset="-120"/>
                         </a:rPr>
-                        <a:t>31件</a:t>
+                        <a:t>32件</a:t>
                       </a:r>
                       <a:endParaRPr lang="en-US" sz="900" dirty="0">
                         <a:latin typeface="Arial" charset="0"/>

--- a/納品レポート/ホテル別レポート/comfort_suites_tokyobay_口コミ分析レポート.pptx
+++ b/納品レポート/ホテル別レポート/comfort_suites_tokyobay_口コミ分析レポート.pptx
@@ -180,10 +180,10 @@
                 <c:ptCount val="6"/>
                 <c:lvl>
                   <c:pt idx="0">
-                    <c:v>Google</c:v>
+                    <c:v>楽天トラベル</c:v>
                   </c:pt>
                   <c:pt idx="1">
-                    <c:v>楽天トラベル</c:v>
+                    <c:v>Google</c:v>
                   </c:pt>
                   <c:pt idx="2">
                     <c:v>Agoda</c:v>
@@ -208,13 +208,13 @@
                 <c:formatCode>General</c:formatCode>
                 <c:ptCount val="6"/>
                 <c:pt idx="0">
-                  <c:v>9.33</c:v>
+                  <c:v>9.35</c:v>
                 </c:pt>
                 <c:pt idx="1">
                   <c:v>9.33</c:v>
                 </c:pt>
                 <c:pt idx="2">
-                  <c:v>9.25</c:v>
+                  <c:v>9.22</c:v>
                 </c:pt>
                 <c:pt idx="3">
                   <c:v>9.21</c:v>
@@ -223,7 +223,7 @@
                   <c:v>8.65</c:v>
                 </c:pt>
                 <c:pt idx="5">
-                  <c:v>8.5</c:v>
+                  <c:v>8.46</c:v>
                 </c:pt>
               </c:numCache>
             </c:numRef>
@@ -566,7 +566,7 @@
               <c:numCache>
                 <c:ptCount val="3"/>
                 <c:pt idx="0">
-                  <c:v>85</c:v>
+                  <c:v>88</c:v>
                 </c:pt>
                 <c:pt idx="1">
                   <c:v>3</c:v>
@@ -781,13 +781,13 @@
                 <c:formatCode>General</c:formatCode>
                 <c:ptCount val="6"/>
                 <c:pt idx="0">
-                  <c:v>49</c:v>
+                  <c:v>50</c:v>
                 </c:pt>
                 <c:pt idx="1">
-                  <c:v>10</c:v>
+                  <c:v>11</c:v>
                 </c:pt>
                 <c:pt idx="2">
-                  <c:v>26</c:v>
+                  <c:v>27</c:v>
                 </c:pt>
                 <c:pt idx="3">
                   <c:v>2</c:v>
@@ -2747,7 +2747,7 @@
                 <a:ea typeface="Arial" pitchFamily="34" charset="-122"/>
                 <a:cs typeface="Arial" pitchFamily="34" charset="-120"/>
               </a:rPr>
-              <a:t>レビュー総数：90件（6サイト）</a:t>
+              <a:t>レビュー総数：93件（6サイト）</a:t>
             </a:r>
             <a:endParaRPr lang="en-US" sz="1000" dirty="0"/>
           </a:p>
@@ -2767,7 +2767,7 @@
                 <a:ea typeface="Arial" pitchFamily="34" charset="-122"/>
                 <a:cs typeface="Arial" pitchFamily="34" charset="-120"/>
               </a:rPr>
-              <a:t>作成日：2026年4月6日</a:t>
+              <a:t>作成日：2026年4月7日</a:t>
             </a:r>
             <a:endParaRPr lang="en-US" sz="1000" dirty="0"/>
           </a:p>
@@ -3313,7 +3313,7 @@
                           <a:ea typeface="Arial" pitchFamily="34" charset="-122"/>
                           <a:cs typeface="Arial" pitchFamily="34" charset="-120"/>
                         </a:rPr>
-                        <a:t>9.07点</a:t>
+                        <a:t>9.06点</a:t>
                       </a:r>
                       <a:endParaRPr lang="en-US" sz="1000" dirty="0">
                         <a:latin typeface="Arial" charset="0"/>
@@ -3587,7 +3587,7 @@
                           <a:ea typeface="Arial" pitchFamily="34" charset="-122"/>
                           <a:cs typeface="Arial" pitchFamily="34" charset="-120"/>
                         </a:rPr>
-                        <a:t>94.4%</a:t>
+                        <a:t>94.6%</a:t>
                       </a:r>
                       <a:endParaRPr lang="en-US" sz="1000" dirty="0">
                         <a:latin typeface="Arial" charset="0"/>
@@ -3655,7 +3655,7 @@
                           <a:ea typeface="Arial" pitchFamily="34" charset="-122"/>
                           <a:cs typeface="Arial" pitchFamily="34" charset="-120"/>
                         </a:rPr>
-                        <a:t>96%以上</a:t>
+                        <a:t>97%以上</a:t>
                       </a:r>
                       <a:endParaRPr lang="en-US" sz="1000" dirty="0">
                         <a:latin typeface="Arial" charset="0"/>
@@ -4683,7 +4683,7 @@
                           <a:ea typeface="Arial" pitchFamily="34" charset="-122"/>
                           <a:cs typeface="Arial" pitchFamily="34" charset="-120"/>
                         </a:rPr>
-                        <a:t>約34件/期間</a:t>
+                        <a:t>約36件/期間</a:t>
                       </a:r>
                       <a:endParaRPr lang="en-US" sz="1000" dirty="0">
                         <a:latin typeface="Arial" charset="0"/>
@@ -4751,7 +4751,7 @@
                           <a:ea typeface="Arial" pitchFamily="34" charset="-122"/>
                           <a:cs typeface="Arial" pitchFamily="34" charset="-120"/>
                         </a:rPr>
-                        <a:t>17件以下</a:t>
+                        <a:t>18件以下</a:t>
                       </a:r>
                       <a:endParaRPr lang="en-US" sz="1000" dirty="0">
                         <a:latin typeface="Arial" charset="0"/>
@@ -5322,7 +5322,7 @@
                 <a:ea typeface="Arial" pitchFamily="34" charset="-122"/>
                 <a:cs typeface="Arial" pitchFamily="34" charset="-120"/>
               </a:rPr>
-              <a:t>9.07</a:t>
+              <a:t>9.06</a:t>
             </a:r>
             <a:endParaRPr lang="en-US" sz="3200" dirty="0"/>
           </a:p>
@@ -5447,7 +5447,7 @@
                 <a:ea typeface="Arial" pitchFamily="34" charset="-122"/>
                 <a:cs typeface="Arial" pitchFamily="34" charset="-120"/>
               </a:rPr>
-              <a:t>94.4%</a:t>
+              <a:t>94.6%</a:t>
             </a:r>
             <a:endParaRPr lang="en-US" sz="3200" dirty="0"/>
           </a:p>
@@ -5697,7 +5697,7 @@
                 <a:ea typeface="Arial" pitchFamily="34" charset="-122"/>
                 <a:cs typeface="Arial" pitchFamily="34" charset="-120"/>
               </a:rPr>
-              <a:t>90件</a:t>
+              <a:t>93件</a:t>
             </a:r>
             <a:endParaRPr lang="en-US" sz="3200" dirty="0"/>
           </a:p>
@@ -5845,7 +5845,7 @@
                 <a:ea typeface="Arial" pitchFamily="34" charset="-122"/>
                 <a:cs typeface="Arial" pitchFamily="34" charset="-120"/>
               </a:rPr>
-              <a:t>  朝食が美味しいと口コミにあったので、期待しておりましたが、なんだかイマイチです</a:t>
+              <a:t>  朝食ビュッフェは品数が豊富でどれも美味しく、子ども向けのメニューも充実していて家族全員が大満足でした</a:t>
             </a:r>
             <a:endParaRPr lang="en-US" sz="1100" dirty="0"/>
           </a:p>
@@ -6073,7 +6073,7 @@
                 <a:ea typeface="Arial" pitchFamily="34" charset="-122"/>
                 <a:cs typeface="Arial" pitchFamily="34" charset="-120"/>
               </a:rPr>
-              <a:t>  無料の送迎バスがあって便利でした</a:t>
+              <a:t>  また、トイレとバスが別になっており、お風呂も洗い場とバスタブが分かれているため、子どもと一緒でも入りやすく使い勝手...</a:t>
             </a:r>
             <a:endParaRPr lang="en-US" sz="1100" dirty="0"/>
           </a:p>
@@ -6506,7 +6506,7 @@
                 <a:ea typeface="Arial" pitchFamily="34" charset="-122"/>
                 <a:cs typeface="Arial" pitchFamily="34" charset="-120"/>
               </a:rPr>
-              <a:t>9.07</a:t>
+              <a:t>9.06</a:t>
             </a:r>
             <a:endParaRPr lang="en-US" sz="3200" dirty="0"/>
           </a:p>
@@ -6631,7 +6631,7 @@
                 <a:ea typeface="Arial" pitchFamily="34" charset="-122"/>
                 <a:cs typeface="Arial" pitchFamily="34" charset="-120"/>
               </a:rPr>
-              <a:t>94.4%</a:t>
+              <a:t>94.6%</a:t>
             </a:r>
             <a:endParaRPr lang="en-US" sz="3200" dirty="0"/>
           </a:p>
@@ -6881,7 +6881,7 @@
                 <a:ea typeface="Arial" pitchFamily="34" charset="-122"/>
                 <a:cs typeface="Arial" pitchFamily="34" charset="-120"/>
               </a:rPr>
-              <a:t>90件</a:t>
+              <a:t>93件</a:t>
             </a:r>
             <a:endParaRPr lang="en-US" sz="3200" dirty="0"/>
           </a:p>
@@ -7302,7 +7302,7 @@
                 <a:ea typeface="Arial" pitchFamily="34" charset="-122"/>
                 <a:cs typeface="Arial" pitchFamily="34" charset="-120"/>
               </a:rPr>
-              <a:t>楽天トラベル(9.33)が最高スコア。</a:t>
+              <a:t>楽天トラベル(9.35)が最高スコア。</a:t>
             </a:r>
             <a:endParaRPr lang="en-US" sz="1100" dirty="0"/>
           </a:p>
@@ -7792,7 +7792,7 @@
                           <a:ea typeface="Arial" pitchFamily="34" charset="-122"/>
                           <a:cs typeface="Arial" pitchFamily="34" charset="-120"/>
                         </a:rPr>
-                        <a:t>Google</a:t>
+                        <a:t>楽天トラベル</a:t>
                       </a:r>
                       <a:endParaRPr lang="en-US" sz="900" dirty="0">
                         <a:latin typeface="Arial" charset="0"/>
@@ -7860,7 +7860,7 @@
                           <a:ea typeface="Arial" pitchFamily="34" charset="-122"/>
                           <a:cs typeface="Arial" pitchFamily="34" charset="-120"/>
                         </a:rPr>
-                        <a:t>9</a:t>
+                        <a:t>31</a:t>
                       </a:r>
                       <a:endParaRPr lang="en-US" sz="900" dirty="0">
                         <a:latin typeface="Arial" charset="0"/>
@@ -7928,7 +7928,7 @@
                           <a:ea typeface="Arial" pitchFamily="34" charset="-122"/>
                           <a:cs typeface="Arial" pitchFamily="34" charset="-120"/>
                         </a:rPr>
-                        <a:t>4.67</a:t>
+                        <a:t>4.68</a:t>
                       </a:r>
                       <a:endParaRPr lang="en-US" sz="900" dirty="0">
                         <a:latin typeface="Arial" charset="0"/>
@@ -8064,7 +8064,7 @@
                           <a:ea typeface="Arial" pitchFamily="34" charset="-122"/>
                           <a:cs typeface="Arial" pitchFamily="34" charset="-120"/>
                         </a:rPr>
-                        <a:t>9.33</a:t>
+                        <a:t>9.35</a:t>
                       </a:r>
                       <a:endParaRPr lang="en-US" sz="900" dirty="0">
                         <a:latin typeface="Arial" charset="0"/>
@@ -8134,7 +8134,7 @@
                           <a:ea typeface="Arial" pitchFamily="34" charset="-122"/>
                           <a:cs typeface="Arial" pitchFamily="34" charset="-120"/>
                         </a:rPr>
-                        <a:t>楽天トラベル</a:t>
+                        <a:t>Google</a:t>
                       </a:r>
                       <a:endParaRPr lang="en-US" sz="900" dirty="0">
                         <a:latin typeface="Arial" charset="0"/>
@@ -8202,7 +8202,7 @@
                           <a:ea typeface="Arial" pitchFamily="34" charset="-122"/>
                           <a:cs typeface="Arial" pitchFamily="34" charset="-120"/>
                         </a:rPr>
-                        <a:t>30</a:t>
+                        <a:t>9</a:t>
                       </a:r>
                       <a:endParaRPr lang="en-US" sz="900" dirty="0">
                         <a:latin typeface="Arial" charset="0"/>
@@ -8544,7 +8544,7 @@
                           <a:ea typeface="Arial" pitchFamily="34" charset="-122"/>
                           <a:cs typeface="Arial" pitchFamily="34" charset="-120"/>
                         </a:rPr>
-                        <a:t>8</a:t>
+                        <a:t>9</a:t>
                       </a:r>
                       <a:endParaRPr lang="en-US" sz="900" dirty="0">
                         <a:latin typeface="Arial" charset="0"/>
@@ -8612,7 +8612,7 @@
                           <a:ea typeface="Arial" pitchFamily="34" charset="-122"/>
                           <a:cs typeface="Arial" pitchFamily="34" charset="-120"/>
                         </a:rPr>
-                        <a:t>9.25</a:t>
+                        <a:t>9.22</a:t>
                       </a:r>
                       <a:endParaRPr lang="en-US" sz="900" dirty="0">
                         <a:latin typeface="Arial" charset="0"/>
@@ -8748,7 +8748,7 @@
                           <a:ea typeface="Arial" pitchFamily="34" charset="-122"/>
                           <a:cs typeface="Arial" pitchFamily="34" charset="-120"/>
                         </a:rPr>
-                        <a:t>9.25</a:t>
+                        <a:t>9.22</a:t>
                       </a:r>
                       <a:endParaRPr lang="en-US" sz="900" dirty="0">
                         <a:latin typeface="Arial" charset="0"/>
@@ -9570,7 +9570,7 @@
                           <a:ea typeface="Arial" pitchFamily="34" charset="-122"/>
                           <a:cs typeface="Arial" pitchFamily="34" charset="-120"/>
                         </a:rPr>
-                        <a:t>12</a:t>
+                        <a:t>13</a:t>
                       </a:r>
                       <a:endParaRPr lang="en-US" sz="900" dirty="0">
                         <a:latin typeface="Arial" charset="0"/>
@@ -9638,7 +9638,7 @@
                           <a:ea typeface="Arial" pitchFamily="34" charset="-122"/>
                           <a:cs typeface="Arial" pitchFamily="34" charset="-120"/>
                         </a:rPr>
-                        <a:t>4.25</a:t>
+                        <a:t>4.23</a:t>
                       </a:r>
                       <a:endParaRPr lang="en-US" sz="900" dirty="0">
                         <a:latin typeface="Arial" charset="0"/>
@@ -9774,7 +9774,7 @@
                           <a:ea typeface="Arial" pitchFamily="34" charset="-122"/>
                           <a:cs typeface="Arial" pitchFamily="34" charset="-120"/>
                         </a:rPr>
-                        <a:t>8.5</a:t>
+                        <a:t>8.46</a:t>
                       </a:r>
                       <a:endParaRPr lang="en-US" sz="900" dirty="0">
                         <a:latin typeface="Arial" charset="0"/>
@@ -10182,7 +10182,7 @@
                 <a:ea typeface="Arial" pitchFamily="34" charset="-122"/>
                 <a:cs typeface="Arial" pitchFamily="34" charset="-120"/>
               </a:rPr>
-              <a:t>85件（94.4%）</a:t>
+              <a:t>88件（94.6%）</a:t>
             </a:r>
             <a:endParaRPr lang="en-US" sz="1100" dirty="0"/>
           </a:p>
@@ -10280,7 +10280,7 @@
                 <a:ea typeface="Arial" pitchFamily="34" charset="-122"/>
                 <a:cs typeface="Arial" pitchFamily="34" charset="-120"/>
               </a:rPr>
-              <a:t>3件（3.3%）</a:t>
+              <a:t>3件（3.2%）</a:t>
             </a:r>
             <a:endParaRPr lang="en-US" sz="1100" dirty="0"/>
           </a:p>
@@ -10790,7 +10790,7 @@
                 <a:ea typeface="Arial" pitchFamily="34" charset="-122"/>
                 <a:cs typeface="Arial" pitchFamily="34" charset="-120"/>
               </a:rPr>
-              <a:t>朝食が美味しいと口コミにあったので、期待しておりましたが、なんだかイマイチです</a:t>
+              <a:t>朝食ビュッフェは品数が豊富でどれも美味しく、子ども向けのメニューも充実していて家族全員が大満足でした</a:t>
             </a:r>
             <a:endParaRPr lang="en-US" sz="900" dirty="0"/>
           </a:p>
@@ -10829,7 +10829,7 @@
                 <a:ea typeface="Arial" pitchFamily="34" charset="-122"/>
                 <a:cs typeface="Arial" pitchFamily="34" charset="-120"/>
               </a:rPr>
-              <a:t>「朝食もスイーツバイキングで、品数も多く、子供の喜ぶ物も多くて大変満足でした」</a:t>
+              <a:t>「朝食が美味しいと口コミにあったので、期待しておりましたが、なんだかイマイチです」</a:t>
             </a:r>
             <a:endParaRPr lang="en-US" sz="900" dirty="0"/>
           </a:p>
@@ -11459,7 +11459,7 @@
                 <a:ea typeface="Arial" pitchFamily="34" charset="-122"/>
                 <a:cs typeface="Arial" pitchFamily="34" charset="-120"/>
               </a:rPr>
-              <a:t>フロントのスタッフの方達の接客も明るく親切でとても印象がよかったですし、お部屋もキレイで広くて、快適に過ごせました</a:t>
+              <a:t>5人家族で宿泊しましたが、部屋がとても広く清潔で、ゆったりと快適に過ごすことができました</a:t>
             </a:r>
             <a:endParaRPr lang="en-US" sz="900" dirty="0"/>
           </a:p>
@@ -11498,7 +11498,7 @@
                 <a:ea typeface="Arial" pitchFamily="34" charset="-122"/>
                 <a:cs typeface="Arial" pitchFamily="34" charset="-120"/>
               </a:rPr>
-              <a:t>「色々なアメニティグッズがあって少ない荷物で宿泊することができました」</a:t>
+              <a:t>「フロントのスタッフの方達の接客も明るく親切でとても印象がよかったですし、お部屋もキレイで広くて、快適に過ごせました」</a:t>
             </a:r>
             <a:endParaRPr lang="en-US" sz="900" dirty="0"/>
           </a:p>
@@ -11604,7 +11604,7 @@
                 <a:ea typeface="Arial" pitchFamily="34" charset="-122"/>
                 <a:cs typeface="Arial" pitchFamily="34" charset="-120"/>
               </a:rPr>
-              <a:t>10件+</a:t>
+              <a:t>20件+</a:t>
             </a:r>
             <a:endParaRPr lang="en-US" sz="900" dirty="0"/>
           </a:p>
@@ -11682,7 +11682,7 @@
                 <a:ea typeface="Arial" pitchFamily="34" charset="-122"/>
                 <a:cs typeface="Arial" pitchFamily="34" charset="-120"/>
               </a:rPr>
-              <a:t>フロントのスタッフの方達の接客も明るく親切でとても印象がよかったですし、お部屋もキレイで広くて、快適に過ごせました</a:t>
+              <a:t>5人家族で宿泊しましたが、部屋がとても広く清潔で、ゆったりと快適に過ごすことができました</a:t>
             </a:r>
             <a:endParaRPr lang="en-US" sz="900" dirty="0"/>
           </a:p>
@@ -11721,7 +11721,7 @@
                 <a:ea typeface="Arial" pitchFamily="34" charset="-122"/>
                 <a:cs typeface="Arial" pitchFamily="34" charset="-120"/>
               </a:rPr>
-              <a:t>「ディズニーリゾートを満喫するために利用させて頂きました☺️ 清潔感があり、パズル調のかわいいお部屋で大満足です」</a:t>
+              <a:t>「フロントのスタッフの方達の接客も明るく親切でとても印象がよかったですし、お部屋もキレイで広くて、快適に過ごせました」</a:t>
             </a:r>
             <a:endParaRPr lang="en-US" sz="900" dirty="0"/>
           </a:p>
@@ -12634,7 +12634,7 @@
                           <a:ea typeface="Arial" pitchFamily="34" charset="-122"/>
                           <a:cs typeface="Arial" pitchFamily="34" charset="-120"/>
                         </a:rPr>
-                        <a:t>無料の送迎バスがあって便利でした</a:t>
+                        <a:t>また、トイレとバスが別になっており、お風呂も洗い場とバスタブが分かれているため、子どもと一緒でも入りやすく使い勝手...</a:t>
                       </a:r>
                       <a:endParaRPr lang="en-US" sz="900" dirty="0">
                         <a:latin typeface="Arial" charset="0"/>
@@ -12702,7 +12702,7 @@
                           <a:ea typeface="Arial" pitchFamily="34" charset="-122"/>
                           <a:cs typeface="Arial" pitchFamily="34" charset="-120"/>
                         </a:rPr>
-                        <a:t>34件</a:t>
+                        <a:t>36件</a:t>
                       </a:r>
                       <a:endParaRPr lang="en-US" sz="900" dirty="0">
                         <a:latin typeface="Arial" charset="0"/>
@@ -13456,7 +13456,7 @@
                           <a:ea typeface="Arial" pitchFamily="34" charset="-122"/>
                           <a:cs typeface="Arial" pitchFamily="34" charset="-120"/>
                         </a:rPr>
-                        <a:t>朝食もスイーツバイキングで、品数も多く、子供の喜ぶ物も多くて大変満足でした</a:t>
+                        <a:t>朝食ビュッフェは品数が豊富でどれも美味しく、子ども向けのメニューも充実していて家族全員が大満足でした</a:t>
                       </a:r>
                       <a:endParaRPr lang="en-US" sz="900" dirty="0">
                         <a:latin typeface="Arial" charset="0"/>
@@ -13524,7 +13524,7 @@
                           <a:ea typeface="Arial" pitchFamily="34" charset="-122"/>
                           <a:cs typeface="Arial" pitchFamily="34" charset="-120"/>
                         </a:rPr>
-                        <a:t>4件</a:t>
+                        <a:t>5件</a:t>
                       </a:r>
                       <a:endParaRPr lang="en-US" sz="900" dirty="0">
                         <a:latin typeface="Arial" charset="0"/>

--- a/納品レポート/ホテル別レポート/comfort_suites_tokyobay_口コミ分析レポート.pptx
+++ b/納品レポート/ホテル別レポート/comfort_suites_tokyobay_口コミ分析レポート.pptx
@@ -2767,7 +2767,7 @@
                 <a:ea typeface="Arial" pitchFamily="34" charset="-122"/>
                 <a:cs typeface="Arial" pitchFamily="34" charset="-120"/>
               </a:rPr>
-              <a:t>作成日：2026年4月7日</a:t>
+              <a:t>作成日：2026年4月8日</a:t>
             </a:r>
             <a:endParaRPr lang="en-US" sz="1000" dirty="0"/>
           </a:p>

--- a/納品レポート/ホテル別レポート/comfort_suites_tokyobay_口コミ分析レポート.pptx
+++ b/納品レポート/ホテル別レポート/comfort_suites_tokyobay_口コミ分析レポート.pptx
@@ -2767,7 +2767,7 @@
                 <a:ea typeface="Arial" pitchFamily="34" charset="-122"/>
                 <a:cs typeface="Arial" pitchFamily="34" charset="-120"/>
               </a:rPr>
-              <a:t>作成日：2026年4月10日</a:t>
+              <a:t>作成日：2026年4月11日</a:t>
             </a:r>
             <a:endParaRPr lang="en-US" sz="1000" dirty="0"/>
           </a:p>

--- a/納品レポート/ホテル別レポート/comfort_suites_tokyobay_口コミ分析レポート.pptx
+++ b/納品レポート/ホテル別レポート/comfort_suites_tokyobay_口コミ分析レポート.pptx
@@ -2767,7 +2767,7 @@
                 <a:ea typeface="Arial" pitchFamily="34" charset="-122"/>
                 <a:cs typeface="Arial" pitchFamily="34" charset="-120"/>
               </a:rPr>
-              <a:t>作成日：2026年4月11日</a:t>
+              <a:t>作成日：2026年4月13日</a:t>
             </a:r>
             <a:endParaRPr lang="en-US" sz="1000" dirty="0"/>
           </a:p>

--- a/納品レポート/ホテル別レポート/comfort_suites_tokyobay_口コミ分析レポート.pptx
+++ b/納品レポート/ホテル別レポート/comfort_suites_tokyobay_口コミ分析レポート.pptx
@@ -2767,7 +2767,7 @@
                 <a:ea typeface="Arial" pitchFamily="34" charset="-122"/>
                 <a:cs typeface="Arial" pitchFamily="34" charset="-120"/>
               </a:rPr>
-              <a:t>作成日：2026年4月13日</a:t>
+              <a:t>作成日：2026年4月15日</a:t>
             </a:r>
             <a:endParaRPr lang="en-US" sz="1000" dirty="0"/>
           </a:p>

--- a/納品レポート/ホテル別レポート/comfort_suites_tokyobay_口コミ分析レポート.pptx
+++ b/納品レポート/ホテル別レポート/comfort_suites_tokyobay_口コミ分析レポート.pptx
@@ -2767,7 +2767,7 @@
                 <a:ea typeface="Arial" pitchFamily="34" charset="-122"/>
                 <a:cs typeface="Arial" pitchFamily="34" charset="-120"/>
               </a:rPr>
-              <a:t>作成日：2026年4月16日</a:t>
+              <a:t>作成日：2026年4月20日</a:t>
             </a:r>
             <a:endParaRPr lang="en-US" sz="1000" dirty="0"/>
           </a:p>

--- a/納品レポート/ホテル別レポート/comfort_suites_tokyobay_口コミ分析レポート.pptx
+++ b/納品レポート/ホテル別レポート/comfort_suites_tokyobay_口コミ分析レポート.pptx
@@ -2767,7 +2767,7 @@
                 <a:ea typeface="Arial" pitchFamily="34" charset="-122"/>
                 <a:cs typeface="Arial" pitchFamily="34" charset="-120"/>
               </a:rPr>
-              <a:t>作成日：2026年4月20日</a:t>
+              <a:t>作成日：2026年4月21日</a:t>
             </a:r>
             <a:endParaRPr lang="en-US" sz="1000" dirty="0"/>
           </a:p>

--- a/納品レポート/ホテル別レポート/comfort_suites_tokyobay_口コミ分析レポート.pptx
+++ b/納品レポート/ホテル別レポート/comfort_suites_tokyobay_口コミ分析レポート.pptx
@@ -2767,7 +2767,7 @@
                 <a:ea typeface="Arial" pitchFamily="34" charset="-122"/>
                 <a:cs typeface="Arial" pitchFamily="34" charset="-120"/>
               </a:rPr>
-              <a:t>作成日：2026年4月21日</a:t>
+              <a:t>作成日：2026年4月22日</a:t>
             </a:r>
             <a:endParaRPr lang="en-US" sz="1000" dirty="0"/>
           </a:p>
